--- a/public/investor-pack/Global-Office-Investor-Deck.pptx
+++ b/public/investor-pack/Global-Office-Investor-Deck.pptx
@@ -12,6 +12,11 @@
     <p:sldId id="260" r:id="rId6"/>
     <p:sldId id="261" r:id="rId7"/>
     <p:sldId id="262" r:id="rId8"/>
+    <p:sldId id="278" r:id="rId29"/>
+    <p:sldId id="279" r:id="rId30"/>
+    <p:sldId id="280" r:id="rId31"/>
+    <p:sldId id="281" r:id="rId32"/>
+    <p:sldId id="282" r:id="rId33"/>
     <p:sldId id="263" r:id="rId9"/>
     <p:sldId id="264" r:id="rId10"/>
     <p:sldId id="265" r:id="rId11"/>
@@ -12580,6 +12585,521 @@
 </p:sld>
 </file>
 
+<file path=ppt/slides/slide23.xml><?xml version="1.0" encoding="utf-8"?>
+<p:sld xmlns:a="http://schemas.openxmlformats.org/drawingml/2006/main" xmlns:p="http://schemas.openxmlformats.org/presentationml/2006/main" xmlns:r="http://schemas.openxmlformats.org/officeDocument/2006/relationships">
+  <p:cSld>
+    <p:bg>
+      <p:bgPr>
+        <a:solidFill>
+          <a:srgbClr val="0B1533"/>
+        </a:solidFill>
+        <a:effectLst/>
+      </p:bgPr>
+    </p:bg>
+    <p:spTree>
+      <p:nvGrpSpPr>
+        <p:cNvPr id="1" name=""/>
+        <p:cNvGrpSpPr/>
+        <p:nvPr/>
+      </p:nvGrpSpPr>
+      <p:grpSpPr/>
+      <p:sp>
+        <p:nvSpPr>
+          <p:cNvPr id="2" name="TextBox 1"/>
+          <p:cNvSpPr txBox="1"/>
+          <p:nvPr/>
+        </p:nvSpPr>
+        <p:spPr>
+          <a:xfrm>
+            <a:off x="700000" y="380000"/>
+            <a:ext cx="10792000" cy="900000"/>
+          </a:xfrm>
+          <a:prstGeom prst="rect">
+            <a:avLst/>
+          </a:prstGeom>
+          <a:noFill/>
+        </p:spPr>
+        <p:txBody>
+          <a:bodyPr wrap="square">
+            <a:spAutoFit/>
+          </a:bodyPr>
+          <a:lstStyle/>
+          <a:p>
+            <a:r>
+              <a:rPr sz="1100" b="1">
+                <a:solidFill>
+                  <a:srgbClr val="C9A22E"/>
+                </a:solidFill>
+              </a:rPr>
+              <a:t>PRODUCT</a:t>
+            </a:r>
+          </a:p>
+          <a:p>
+            <a:r>
+              <a:rPr sz="2800">
+                <a:solidFill>
+                  <a:srgbClr val="FFFFFF"/>
+                </a:solidFill>
+              </a:rPr>
+              <a:t>Organization Health Dashboard</a:t>
+            </a:r>
+          </a:p>
+          <a:p>
+            <a:r>
+              <a:rPr sz="1300">
+                <a:solidFill>
+                  <a:srgbClr val="C8CEDC"/>
+                </a:solidFill>
+              </a:rPr>
+              <a:t>Real activity signal — attendance, execution, KPIs and AI insight in one glance.</a:t>
+            </a:r>
+          </a:p>
+        </p:txBody>
+      </p:sp>
+      <p:pic>
+        <p:nvPicPr>
+          <p:cNvPr id="3" name="Picture 2" descr="dashboard.png"/>
+          <p:cNvPicPr>
+            <a:picLocks noChangeAspect="1"/>
+          </p:cNvPicPr>
+          <p:nvPr/>
+        </p:nvPicPr>
+        <p:blipFill>
+          <a:blip r:embed="rId2"/>
+          <a:stretch>
+            <a:fillRect/>
+          </a:stretch>
+        </p:blipFill>
+        <p:spPr>
+          <a:xfrm>
+            <a:off x="2217501" y="2000000"/>
+            <a:ext cx="7756997" cy="4358000"/>
+          </a:xfrm>
+          <a:prstGeom prst="rect">
+            <a:avLst/>
+          </a:prstGeom>
+        </p:spPr>
+      </p:pic>
+    </p:spTree>
+  </p:cSld>
+  <p:clrMapOvr>
+    <a:masterClrMapping/>
+  </p:clrMapOvr>
+</p:sld>
+</file>
+
+<file path=ppt/slides/slide24.xml><?xml version="1.0" encoding="utf-8"?>
+<p:sld xmlns:a="http://schemas.openxmlformats.org/drawingml/2006/main" xmlns:p="http://schemas.openxmlformats.org/presentationml/2006/main" xmlns:r="http://schemas.openxmlformats.org/officeDocument/2006/relationships">
+  <p:cSld>
+    <p:bg>
+      <p:bgPr>
+        <a:solidFill>
+          <a:srgbClr val="0B1533"/>
+        </a:solidFill>
+        <a:effectLst/>
+      </p:bgPr>
+    </p:bg>
+    <p:spTree>
+      <p:nvGrpSpPr>
+        <p:cNvPr id="1" name=""/>
+        <p:cNvGrpSpPr/>
+        <p:nvPr/>
+      </p:nvGrpSpPr>
+      <p:grpSpPr/>
+      <p:sp>
+        <p:nvSpPr>
+          <p:cNvPr id="2" name="TextBox 1"/>
+          <p:cNvSpPr txBox="1"/>
+          <p:nvPr/>
+        </p:nvSpPr>
+        <p:spPr>
+          <a:xfrm>
+            <a:off x="700000" y="380000"/>
+            <a:ext cx="10792000" cy="900000"/>
+          </a:xfrm>
+          <a:prstGeom prst="rect">
+            <a:avLst/>
+          </a:prstGeom>
+          <a:noFill/>
+        </p:spPr>
+        <p:txBody>
+          <a:bodyPr wrap="square">
+            <a:spAutoFit/>
+          </a:bodyPr>
+          <a:lstStyle/>
+          <a:p>
+            <a:r>
+              <a:rPr sz="1100" b="1">
+                <a:solidFill>
+                  <a:srgbClr val="C9A22E"/>
+                </a:solidFill>
+              </a:rPr>
+              <a:t>PRODUCT</a:t>
+            </a:r>
+          </a:p>
+          <a:p>
+            <a:r>
+              <a:rPr sz="2800">
+                <a:solidFill>
+                  <a:srgbClr val="FFFFFF"/>
+                </a:solidFill>
+              </a:rPr>
+              <a:t>AI Executive Control Center</a:t>
+            </a:r>
+          </a:p>
+          <a:p>
+            <a:r>
+              <a:rPr sz="1300">
+                <a:solidFill>
+                  <a:srgbClr val="C8CEDC"/>
+                </a:solidFill>
+              </a:rPr>
+              <a:t>Weighted health score, risk alerts and department performance in a single command surface.</a:t>
+            </a:r>
+          </a:p>
+        </p:txBody>
+      </p:sp>
+      <p:pic>
+        <p:nvPicPr>
+          <p:cNvPr id="3" name="Picture 2" descr="executive.png"/>
+          <p:cNvPicPr>
+            <a:picLocks noChangeAspect="1"/>
+          </p:cNvPicPr>
+          <p:nvPr/>
+        </p:nvPicPr>
+        <p:blipFill>
+          <a:blip r:embed="rId2"/>
+          <a:stretch>
+            <a:fillRect/>
+          </a:stretch>
+        </p:blipFill>
+        <p:spPr>
+          <a:xfrm>
+            <a:off x="2217501" y="2000000"/>
+            <a:ext cx="7756997" cy="4358000"/>
+          </a:xfrm>
+          <a:prstGeom prst="rect">
+            <a:avLst/>
+          </a:prstGeom>
+        </p:spPr>
+      </p:pic>
+    </p:spTree>
+  </p:cSld>
+  <p:clrMapOvr>
+    <a:masterClrMapping/>
+  </p:clrMapOvr>
+</p:sld>
+</file>
+
+<file path=ppt/slides/slide25.xml><?xml version="1.0" encoding="utf-8"?>
+<p:sld xmlns:a="http://schemas.openxmlformats.org/drawingml/2006/main" xmlns:p="http://schemas.openxmlformats.org/presentationml/2006/main" xmlns:r="http://schemas.openxmlformats.org/officeDocument/2006/relationships">
+  <p:cSld>
+    <p:bg>
+      <p:bgPr>
+        <a:solidFill>
+          <a:srgbClr val="0B1533"/>
+        </a:solidFill>
+        <a:effectLst/>
+      </p:bgPr>
+    </p:bg>
+    <p:spTree>
+      <p:nvGrpSpPr>
+        <p:cNvPr id="1" name=""/>
+        <p:cNvGrpSpPr/>
+        <p:nvPr/>
+      </p:nvGrpSpPr>
+      <p:grpSpPr/>
+      <p:sp>
+        <p:nvSpPr>
+          <p:cNvPr id="2" name="TextBox 1"/>
+          <p:cNvSpPr txBox="1"/>
+          <p:nvPr/>
+        </p:nvSpPr>
+        <p:spPr>
+          <a:xfrm>
+            <a:off x="700000" y="380000"/>
+            <a:ext cx="10792000" cy="900000"/>
+          </a:xfrm>
+          <a:prstGeom prst="rect">
+            <a:avLst/>
+          </a:prstGeom>
+          <a:noFill/>
+        </p:spPr>
+        <p:txBody>
+          <a:bodyPr wrap="square">
+            <a:spAutoFit/>
+          </a:bodyPr>
+          <a:lstStyle/>
+          <a:p>
+            <a:r>
+              <a:rPr sz="1100" b="1">
+                <a:solidFill>
+                  <a:srgbClr val="C9A22E"/>
+                </a:solidFill>
+              </a:rPr>
+              <a:t>PRODUCT</a:t>
+            </a:r>
+          </a:p>
+          <a:p>
+            <a:r>
+              <a:rPr sz="2800">
+                <a:solidFill>
+                  <a:srgbClr val="FFFFFF"/>
+                </a:solidFill>
+              </a:rPr>
+              <a:t>Knowledge Graph Explorer</a:t>
+            </a:r>
+          </a:p>
+          <a:p>
+            <a:r>
+              <a:rPr sz="1300">
+                <a:solidFill>
+                  <a:srgbClr val="C8CEDC"/>
+                </a:solidFill>
+              </a:rPr>
+              <a:t>Every person, task, message and decision as a queryable node.</a:t>
+            </a:r>
+          </a:p>
+        </p:txBody>
+      </p:sp>
+      <p:pic>
+        <p:nvPicPr>
+          <p:cNvPr id="3" name="Picture 2" descr="knowledge-graph.png"/>
+          <p:cNvPicPr>
+            <a:picLocks noChangeAspect="1"/>
+          </p:cNvPicPr>
+          <p:nvPr/>
+        </p:nvPicPr>
+        <p:blipFill>
+          <a:blip r:embed="rId2"/>
+          <a:stretch>
+            <a:fillRect/>
+          </a:stretch>
+        </p:blipFill>
+        <p:spPr>
+          <a:xfrm>
+            <a:off x="2217501" y="2000000"/>
+            <a:ext cx="7756997" cy="4358000"/>
+          </a:xfrm>
+          <a:prstGeom prst="rect">
+            <a:avLst/>
+          </a:prstGeom>
+        </p:spPr>
+      </p:pic>
+    </p:spTree>
+  </p:cSld>
+  <p:clrMapOvr>
+    <a:masterClrMapping/>
+  </p:clrMapOvr>
+</p:sld>
+</file>
+
+<file path=ppt/slides/slide26.xml><?xml version="1.0" encoding="utf-8"?>
+<p:sld xmlns:a="http://schemas.openxmlformats.org/drawingml/2006/main" xmlns:p="http://schemas.openxmlformats.org/presentationml/2006/main" xmlns:r="http://schemas.openxmlformats.org/officeDocument/2006/relationships">
+  <p:cSld>
+    <p:bg>
+      <p:bgPr>
+        <a:solidFill>
+          <a:srgbClr val="0B1533"/>
+        </a:solidFill>
+        <a:effectLst/>
+      </p:bgPr>
+    </p:bg>
+    <p:spTree>
+      <p:nvGrpSpPr>
+        <p:cNvPr id="1" name=""/>
+        <p:cNvGrpSpPr/>
+        <p:nvPr/>
+      </p:nvGrpSpPr>
+      <p:grpSpPr/>
+      <p:sp>
+        <p:nvSpPr>
+          <p:cNvPr id="2" name="TextBox 1"/>
+          <p:cNvSpPr txBox="1"/>
+          <p:nvPr/>
+        </p:nvSpPr>
+        <p:spPr>
+          <a:xfrm>
+            <a:off x="700000" y="380000"/>
+            <a:ext cx="10792000" cy="900000"/>
+          </a:xfrm>
+          <a:prstGeom prst="rect">
+            <a:avLst/>
+          </a:prstGeom>
+          <a:noFill/>
+        </p:spPr>
+        <p:txBody>
+          <a:bodyPr wrap="square">
+            <a:spAutoFit/>
+          </a:bodyPr>
+          <a:lstStyle/>
+          <a:p>
+            <a:r>
+              <a:rPr sz="1100" b="1">
+                <a:solidFill>
+                  <a:srgbClr val="C9A22E"/>
+                </a:solidFill>
+              </a:rPr>
+              <a:t>PRODUCT</a:t>
+            </a:r>
+          </a:p>
+          <a:p>
+            <a:r>
+              <a:rPr sz="2800">
+                <a:solidFill>
+                  <a:srgbClr val="FFFFFF"/>
+                </a:solidFill>
+              </a:rPr>
+              <a:t>Workflow Builder</a:t>
+            </a:r>
+          </a:p>
+          <a:p>
+            <a:r>
+              <a:rPr sz="1300">
+                <a:solidFill>
+                  <a:srgbClr val="C8CEDC"/>
+                </a:solidFill>
+              </a:rPr>
+              <a:t>Visual IF/THEN automation across every module — composed by operators.</a:t>
+            </a:r>
+          </a:p>
+        </p:txBody>
+      </p:sp>
+      <p:pic>
+        <p:nvPicPr>
+          <p:cNvPr id="3" name="Picture 2" descr="workflows.png"/>
+          <p:cNvPicPr>
+            <a:picLocks noChangeAspect="1"/>
+          </p:cNvPicPr>
+          <p:nvPr/>
+        </p:nvPicPr>
+        <p:blipFill>
+          <a:blip r:embed="rId2"/>
+          <a:stretch>
+            <a:fillRect/>
+          </a:stretch>
+        </p:blipFill>
+        <p:spPr>
+          <a:xfrm>
+            <a:off x="2217501" y="2000000"/>
+            <a:ext cx="7756997" cy="4358000"/>
+          </a:xfrm>
+          <a:prstGeom prst="rect">
+            <a:avLst/>
+          </a:prstGeom>
+        </p:spPr>
+      </p:pic>
+    </p:spTree>
+  </p:cSld>
+  <p:clrMapOvr>
+    <a:masterClrMapping/>
+  </p:clrMapOvr>
+</p:sld>
+</file>
+
+<file path=ppt/slides/slide27.xml><?xml version="1.0" encoding="utf-8"?>
+<p:sld xmlns:a="http://schemas.openxmlformats.org/drawingml/2006/main" xmlns:p="http://schemas.openxmlformats.org/presentationml/2006/main" xmlns:r="http://schemas.openxmlformats.org/officeDocument/2006/relationships">
+  <p:cSld>
+    <p:bg>
+      <p:bgPr>
+        <a:solidFill>
+          <a:srgbClr val="0B1533"/>
+        </a:solidFill>
+        <a:effectLst/>
+      </p:bgPr>
+    </p:bg>
+    <p:spTree>
+      <p:nvGrpSpPr>
+        <p:cNvPr id="1" name=""/>
+        <p:cNvGrpSpPr/>
+        <p:nvPr/>
+      </p:nvGrpSpPr>
+      <p:grpSpPr/>
+      <p:sp>
+        <p:nvSpPr>
+          <p:cNvPr id="2" name="TextBox 1"/>
+          <p:cNvSpPr txBox="1"/>
+          <p:nvPr/>
+        </p:nvSpPr>
+        <p:spPr>
+          <a:xfrm>
+            <a:off x="700000" y="380000"/>
+            <a:ext cx="10792000" cy="900000"/>
+          </a:xfrm>
+          <a:prstGeom prst="rect">
+            <a:avLst/>
+          </a:prstGeom>
+          <a:noFill/>
+        </p:spPr>
+        <p:txBody>
+          <a:bodyPr wrap="square">
+            <a:spAutoFit/>
+          </a:bodyPr>
+          <a:lstStyle/>
+          <a:p>
+            <a:r>
+              <a:rPr sz="1100" b="1">
+                <a:solidFill>
+                  <a:srgbClr val="C9A22E"/>
+                </a:solidFill>
+              </a:rPr>
+              <a:t>PRODUCT</a:t>
+            </a:r>
+          </a:p>
+          <a:p>
+            <a:r>
+              <a:rPr sz="2800">
+                <a:solidFill>
+                  <a:srgbClr val="FFFFFF"/>
+                </a:solidFill>
+              </a:rPr>
+              <a:t>Meetings Intelligence</a:t>
+            </a:r>
+          </a:p>
+          <a:p>
+            <a:r>
+              <a:rPr sz="1300">
+                <a:solidFill>
+                  <a:srgbClr val="C8CEDC"/>
+                </a:solidFill>
+              </a:rPr>
+              <a:t>Live video with AI transcription, summaries and auto-extracted action points.</a:t>
+            </a:r>
+          </a:p>
+        </p:txBody>
+      </p:sp>
+      <p:pic>
+        <p:nvPicPr>
+          <p:cNvPr id="3" name="Picture 2" descr="meetings.png"/>
+          <p:cNvPicPr>
+            <a:picLocks noChangeAspect="1"/>
+          </p:cNvPicPr>
+          <p:nvPr/>
+        </p:nvPicPr>
+        <p:blipFill>
+          <a:blip r:embed="rId2"/>
+          <a:stretch>
+            <a:fillRect/>
+          </a:stretch>
+        </p:blipFill>
+        <p:spPr>
+          <a:xfrm>
+            <a:off x="2217501" y="2000000"/>
+            <a:ext cx="7756997" cy="4358000"/>
+          </a:xfrm>
+          <a:prstGeom prst="rect">
+            <a:avLst/>
+          </a:prstGeom>
+        </p:spPr>
+      </p:pic>
+    </p:spTree>
+  </p:cSld>
+  <p:clrMapOvr>
+    <a:masterClrMapping/>
+  </p:clrMapOvr>
+</p:sld>
+</file>
+
 <file path=ppt/slides/slide3.xml><?xml version="1.0" encoding="utf-8"?>
 <p:sld xmlns:a="http://schemas.openxmlformats.org/drawingml/2006/main" xmlns:r="http://schemas.openxmlformats.org/officeDocument/2006/relationships" xmlns:p="http://schemas.openxmlformats.org/presentationml/2006/main">
   <p:cSld name="Slide 3">

--- a/public/investor-pack/Global-Office-Investor-Deck.pptx
+++ b/public/investor-pack/Global-Office-Investor-Deck.pptx
@@ -3368,6 +3368,212 @@
 </file>
 
 <file path=ppt/slides/slide13.xml><?xml version="1.0" encoding="utf-8"?>
+<p:sld xmlns:a="http://schemas.openxmlformats.org/drawingml/2006/main" xmlns:p="http://schemas.openxmlformats.org/presentationml/2006/main" xmlns:r="http://schemas.openxmlformats.org/officeDocument/2006/relationships">
+  <p:cSld>
+    <p:bg>
+      <p:bgPr>
+        <a:solidFill>
+          <a:srgbClr val="0B1533"/>
+        </a:solidFill>
+        <a:effectLst/>
+      </p:bgPr>
+    </p:bg>
+    <p:spTree>
+      <p:nvGrpSpPr>
+        <p:cNvPr id="1" name=""/>
+        <p:cNvGrpSpPr/>
+        <p:nvPr/>
+      </p:nvGrpSpPr>
+      <p:grpSpPr/>
+      <p:sp>
+        <p:nvSpPr>
+          <p:cNvPr id="2" name="TextBox 1"/>
+          <p:cNvSpPr txBox="1"/>
+          <p:nvPr/>
+        </p:nvSpPr>
+        <p:spPr>
+          <a:xfrm>
+            <a:off x="700000" y="380000"/>
+            <a:ext cx="10792000" cy="900000"/>
+          </a:xfrm>
+          <a:prstGeom prst="rect">
+            <a:avLst/>
+          </a:prstGeom>
+          <a:noFill/>
+        </p:spPr>
+        <p:txBody>
+          <a:bodyPr wrap="square">
+            <a:spAutoFit/>
+          </a:bodyPr>
+          <a:lstStyle/>
+          <a:p>
+            <a:r>
+              <a:rPr sz="1100" b="1">
+                <a:solidFill>
+                  <a:srgbClr val="C9A22E"/>
+                </a:solidFill>
+              </a:rPr>
+              <a:t>PRODUCT</a:t>
+            </a:r>
+          </a:p>
+          <a:p>
+            <a:r>
+              <a:rPr sz="2800">
+                <a:solidFill>
+                  <a:srgbClr val="FFFFFF"/>
+                </a:solidFill>
+              </a:rPr>
+              <a:t>Execution Engine</a:t>
+            </a:r>
+          </a:p>
+          <a:p>
+            <a:r>
+              <a:rPr sz="1300">
+                <a:solidFill>
+                  <a:srgbClr val="C8CEDC"/>
+                </a:solidFill>
+              </a:rPr>
+              <a:t>Kanban delivery with AI priority scoring, workload balancing and slip prediction.</a:t>
+            </a:r>
+          </a:p>
+        </p:txBody>
+      </p:sp>
+      <p:pic>
+        <p:nvPicPr>
+          <p:cNvPr id="3" name="Picture 2" descr="meetings.png"/>
+          <p:cNvPicPr>
+            <a:picLocks noChangeAspect="1"/>
+          </p:cNvPicPr>
+          <p:nvPr/>
+        </p:nvPicPr>
+        <p:blipFill>
+          <a:blip r:embed="rId2"/>
+          <a:stretch>
+            <a:fillRect/>
+          </a:stretch>
+        </p:blipFill>
+        <p:spPr>
+          <a:xfrm>
+            <a:off x="2217501" y="2000000"/>
+            <a:ext cx="7756997" cy="4358000"/>
+          </a:xfrm>
+          <a:prstGeom prst="rect">
+            <a:avLst/>
+          </a:prstGeom>
+        </p:spPr>
+      </p:pic>
+    </p:spTree>
+  </p:cSld>
+  <p:clrMapOvr>
+    <a:masterClrMapping/>
+  </p:clrMapOvr>
+</p:sld>
+</file>
+
+<file path=ppt/slides/slide14.xml><?xml version="1.0" encoding="utf-8"?>
+<p:sld xmlns:a="http://schemas.openxmlformats.org/drawingml/2006/main" xmlns:p="http://schemas.openxmlformats.org/presentationml/2006/main" xmlns:r="http://schemas.openxmlformats.org/officeDocument/2006/relationships">
+  <p:cSld>
+    <p:bg>
+      <p:bgPr>
+        <a:solidFill>
+          <a:srgbClr val="0B1533"/>
+        </a:solidFill>
+        <a:effectLst/>
+      </p:bgPr>
+    </p:bg>
+    <p:spTree>
+      <p:nvGrpSpPr>
+        <p:cNvPr id="1" name=""/>
+        <p:cNvGrpSpPr/>
+        <p:nvPr/>
+      </p:nvGrpSpPr>
+      <p:grpSpPr/>
+      <p:sp>
+        <p:nvSpPr>
+          <p:cNvPr id="2" name="TextBox 1"/>
+          <p:cNvSpPr txBox="1"/>
+          <p:nvPr/>
+        </p:nvSpPr>
+        <p:spPr>
+          <a:xfrm>
+            <a:off x="700000" y="380000"/>
+            <a:ext cx="10792000" cy="900000"/>
+          </a:xfrm>
+          <a:prstGeom prst="rect">
+            <a:avLst/>
+          </a:prstGeom>
+          <a:noFill/>
+        </p:spPr>
+        <p:txBody>
+          <a:bodyPr wrap="square">
+            <a:spAutoFit/>
+          </a:bodyPr>
+          <a:lstStyle/>
+          <a:p>
+            <a:r>
+              <a:rPr sz="1100" b="1">
+                <a:solidFill>
+                  <a:srgbClr val="C9A22E"/>
+                </a:solidFill>
+              </a:rPr>
+              <a:t>PRODUCT</a:t>
+            </a:r>
+          </a:p>
+          <a:p>
+            <a:r>
+              <a:rPr sz="2800">
+                <a:solidFill>
+                  <a:srgbClr val="FFFFFF"/>
+                </a:solidFill>
+              </a:rPr>
+              <a:t>Predictive AI Insights</a:t>
+            </a:r>
+          </a:p>
+          <a:p>
+            <a:r>
+              <a:rPr sz="1300">
+                <a:solidFill>
+                  <a:srgbClr val="C8CEDC"/>
+                </a:solidFill>
+              </a:rPr>
+              <a:t>Proactive alerts on slipping work, burnout risk and revenue exposure — before they cost money.</a:t>
+            </a:r>
+          </a:p>
+        </p:txBody>
+      </p:sp>
+      <p:pic>
+        <p:nvPicPr>
+          <p:cNvPr id="3" name="Picture 2" descr="meetings.png"/>
+          <p:cNvPicPr>
+            <a:picLocks noChangeAspect="1"/>
+          </p:cNvPicPr>
+          <p:nvPr/>
+        </p:nvPicPr>
+        <p:blipFill>
+          <a:blip r:embed="rId2"/>
+          <a:stretch>
+            <a:fillRect/>
+          </a:stretch>
+        </p:blipFill>
+        <p:spPr>
+          <a:xfrm>
+            <a:off x="2217501" y="2000000"/>
+            <a:ext cx="7756997" cy="4358000"/>
+          </a:xfrm>
+          <a:prstGeom prst="rect">
+            <a:avLst/>
+          </a:prstGeom>
+        </p:spPr>
+      </p:pic>
+    </p:spTree>
+  </p:cSld>
+  <p:clrMapOvr>
+    <a:masterClrMapping/>
+  </p:clrMapOvr>
+</p:sld>
+</file>
+
+<file path=ppt/slides/slide15.xml><?xml version="1.0" encoding="utf-8"?>
 <p:sld xmlns:a="http://schemas.openxmlformats.org/drawingml/2006/main" xmlns:r="http://schemas.openxmlformats.org/officeDocument/2006/relationships" xmlns:p="http://schemas.openxmlformats.org/presentationml/2006/main">
   <p:cSld name="Slide 8">
     <p:bg>
@@ -4235,7 +4441,7 @@
 </p:sld>
 </file>
 
-<file path=ppt/slides/slide14.xml><?xml version="1.0" encoding="utf-8"?>
+<file path=ppt/slides/slide16.xml><?xml version="1.0" encoding="utf-8"?>
 <p:sld xmlns:a="http://schemas.openxmlformats.org/drawingml/2006/main" xmlns:r="http://schemas.openxmlformats.org/officeDocument/2006/relationships" xmlns:p="http://schemas.openxmlformats.org/presentationml/2006/main">
   <p:cSld name="Slide 9">
     <p:bg>
@@ -5082,7 +5288,7 @@
 </p:sld>
 </file>
 
-<file path=ppt/slides/slide15.xml><?xml version="1.0" encoding="utf-8"?>
+<file path=ppt/slides/slide17.xml><?xml version="1.0" encoding="utf-8"?>
 <p:sld xmlns:a="http://schemas.openxmlformats.org/drawingml/2006/main" xmlns:r="http://schemas.openxmlformats.org/officeDocument/2006/relationships" xmlns:p="http://schemas.openxmlformats.org/presentationml/2006/main">
   <p:cSld name="Slide 10">
     <p:bg>
@@ -5914,7 +6120,7 @@
 </p:sld>
 </file>
 
-<file path=ppt/slides/slide16.xml><?xml version="1.0" encoding="utf-8"?>
+<file path=ppt/slides/slide18.xml><?xml version="1.0" encoding="utf-8"?>
 <p:sld xmlns:a="http://schemas.openxmlformats.org/drawingml/2006/main" xmlns:r="http://schemas.openxmlformats.org/officeDocument/2006/relationships" xmlns:p="http://schemas.openxmlformats.org/presentationml/2006/main">
   <p:cSld name="Slide 11">
     <p:bg>
@@ -6545,7 +6751,7 @@
 </p:sld>
 </file>
 
-<file path=ppt/slides/slide17.xml><?xml version="1.0" encoding="utf-8"?>
+<file path=ppt/slides/slide19.xml><?xml version="1.0" encoding="utf-8"?>
 <p:sld xmlns:a="http://schemas.openxmlformats.org/drawingml/2006/main" xmlns:r="http://schemas.openxmlformats.org/officeDocument/2006/relationships" xmlns:p="http://schemas.openxmlformats.org/presentationml/2006/main">
   <p:cSld name="Slide 12">
     <p:bg>
@@ -7093,2068 +7299,6 @@
                 <a:cs typeface="Consolas" pitchFamily="34" charset="-120"/>
               </a:rPr>
               <a:t>12 / 22</a:t>
-            </a:r>
-            <a:endParaRPr lang="en-US" sz="900" dirty="0"/>
-          </a:p>
-        </p:txBody>
-      </p:sp>
-    </p:spTree>
-  </p:cSld>
-  <p:clrMapOvr>
-    <a:masterClrMapping/>
-  </p:clrMapOvr>
-</p:sld>
-</file>
-
-<file path=ppt/slides/slide18.xml><?xml version="1.0" encoding="utf-8"?>
-<p:sld xmlns:a="http://schemas.openxmlformats.org/drawingml/2006/main" xmlns:r="http://schemas.openxmlformats.org/officeDocument/2006/relationships" xmlns:p="http://schemas.openxmlformats.org/presentationml/2006/main">
-  <p:cSld name="Slide 13">
-    <p:bg>
-      <p:bgPr>
-        <a:solidFill>
-          <a:srgbClr val="0B1533"/>
-        </a:solidFill>
-      </p:bgPr>
-    </p:bg>
-    <p:spTree>
-      <p:nvGrpSpPr>
-        <p:cNvPr id="1" name=""/>
-        <p:cNvGrpSpPr/>
-        <p:nvPr/>
-      </p:nvGrpSpPr>
-      <p:grpSpPr>
-        <a:xfrm>
-          <a:off x="0" y="0"/>
-          <a:ext cx="0" cy="0"/>
-          <a:chOff x="0" y="0"/>
-          <a:chExt cx="0" cy="0"/>
-        </a:xfrm>
-      </p:grpSpPr>
-      <p:sp>
-        <p:nvSpPr>
-          <p:cNvPr id="2" name="Text 0"/>
-          <p:cNvSpPr/>
-          <p:nvPr/>
-        </p:nvSpPr>
-        <p:spPr>
-          <a:xfrm>
-            <a:off x="457200" y="502920"/>
-            <a:ext cx="10972800" cy="274320"/>
-          </a:xfrm>
-          <a:prstGeom prst="rect">
-            <a:avLst/>
-          </a:prstGeom>
-          <a:noFill/>
-          <a:ln/>
-        </p:spPr>
-        <p:txBody>
-          <a:bodyPr wrap="square" rtlCol="0" anchor="ctr"/>
-          <a:lstStyle/>
-          <a:p>
-            <a:pPr indent="0" marL="0">
-              <a:buNone/>
-            </a:pPr>
-            <a:r>
-              <a:rPr lang="en-US" sz="1000" b="1" spc="600" kern="0" dirty="0">
-                <a:solidFill>
-                  <a:srgbClr val="C9A24C"/>
-                </a:solidFill>
-                <a:latin typeface="Calibri" pitchFamily="34" charset="0"/>
-                <a:ea typeface="Calibri" pitchFamily="34" charset="-122"/>
-                <a:cs typeface="Calibri" pitchFamily="34" charset="-120"/>
-              </a:rPr>
-              <a:t>DEFENSIBILITY</a:t>
-            </a:r>
-            <a:endParaRPr lang="en-US" sz="1000" dirty="0"/>
-          </a:p>
-        </p:txBody>
-      </p:sp>
-      <p:sp>
-        <p:nvSpPr>
-          <p:cNvPr id="3" name="Text 1"/>
-          <p:cNvSpPr/>
-          <p:nvPr/>
-        </p:nvSpPr>
-        <p:spPr>
-          <a:xfrm>
-            <a:off x="457200" y="868680"/>
-            <a:ext cx="10972800" cy="1005840"/>
-          </a:xfrm>
-          <a:prstGeom prst="rect">
-            <a:avLst/>
-          </a:prstGeom>
-          <a:noFill/>
-          <a:ln/>
-        </p:spPr>
-        <p:txBody>
-          <a:bodyPr wrap="square" rtlCol="0" anchor="t"/>
-          <a:lstStyle/>
-          <a:p>
-            <a:pPr indent="0" marL="0">
-              <a:buNone/>
-            </a:pPr>
-            <a:r>
-              <a:rPr lang="en-US" sz="4000" dirty="0">
-                <a:solidFill>
-                  <a:srgbClr val="F5F1E8"/>
-                </a:solidFill>
-                <a:latin typeface="Georgia" pitchFamily="34" charset="0"/>
-                <a:ea typeface="Georgia" pitchFamily="34" charset="-122"/>
-                <a:cs typeface="Georgia" pitchFamily="34" charset="-120"/>
-              </a:rPr>
-              <a:t>Four moats that compound over time.</a:t>
-            </a:r>
-            <a:endParaRPr lang="en-US" sz="4000" dirty="0"/>
-          </a:p>
-        </p:txBody>
-      </p:sp>
-      <p:sp>
-        <p:nvSpPr>
-          <p:cNvPr id="4" name="Shape 2"/>
-          <p:cNvSpPr/>
-          <p:nvPr/>
-        </p:nvSpPr>
-        <p:spPr>
-          <a:xfrm>
-            <a:off x="457200" y="2194560"/>
-            <a:ext cx="5394960" cy="1691640"/>
-          </a:xfrm>
-          <a:prstGeom prst="rect">
-            <a:avLst/>
-          </a:prstGeom>
-          <a:solidFill>
-            <a:srgbClr val="13204A"/>
-          </a:solidFill>
-          <a:ln w="6350">
-            <a:solidFill>
-              <a:srgbClr val="2A3562"/>
-            </a:solidFill>
-            <a:prstDash val="solid"/>
-          </a:ln>
-        </p:spPr>
-      </p:sp>
-      <p:sp>
-        <p:nvSpPr>
-          <p:cNvPr id="5" name="Text 3"/>
-          <p:cNvSpPr/>
-          <p:nvPr/>
-        </p:nvSpPr>
-        <p:spPr>
-          <a:xfrm>
-            <a:off x="731520" y="2377440"/>
-            <a:ext cx="4937760" cy="274320"/>
-          </a:xfrm>
-          <a:prstGeom prst="rect">
-            <a:avLst/>
-          </a:prstGeom>
-          <a:noFill/>
-          <a:ln/>
-        </p:spPr>
-        <p:txBody>
-          <a:bodyPr wrap="square" rtlCol="0" anchor="ctr"/>
-          <a:lstStyle/>
-          <a:p>
-            <a:pPr indent="0" marL="0">
-              <a:buNone/>
-            </a:pPr>
-            <a:r>
-              <a:rPr lang="en-US" sz="1000" b="1" spc="400" kern="0" dirty="0">
-                <a:solidFill>
-                  <a:srgbClr val="C9A24C"/>
-                </a:solidFill>
-                <a:latin typeface="Calibri" pitchFamily="34" charset="0"/>
-                <a:ea typeface="Calibri" pitchFamily="34" charset="-122"/>
-                <a:cs typeface="Calibri" pitchFamily="34" charset="-120"/>
-              </a:rPr>
-              <a:t>DATA</a:t>
-            </a:r>
-            <a:endParaRPr lang="en-US" sz="1000" dirty="0"/>
-          </a:p>
-        </p:txBody>
-      </p:sp>
-      <p:sp>
-        <p:nvSpPr>
-          <p:cNvPr id="6" name="Text 4"/>
-          <p:cNvSpPr/>
-          <p:nvPr/>
-        </p:nvSpPr>
-        <p:spPr>
-          <a:xfrm>
-            <a:off x="731520" y="2651760"/>
-            <a:ext cx="4937760" cy="411480"/>
-          </a:xfrm>
-          <a:prstGeom prst="rect">
-            <a:avLst/>
-          </a:prstGeom>
-          <a:noFill/>
-          <a:ln/>
-        </p:spPr>
-        <p:txBody>
-          <a:bodyPr wrap="square" rtlCol="0" anchor="ctr"/>
-          <a:lstStyle/>
-          <a:p>
-            <a:pPr indent="0" marL="0">
-              <a:buNone/>
-            </a:pPr>
-            <a:r>
-              <a:rPr lang="en-US" sz="2000" dirty="0">
-                <a:solidFill>
-                  <a:srgbClr val="F5F1E8"/>
-                </a:solidFill>
-                <a:latin typeface="Georgia" pitchFamily="34" charset="0"/>
-                <a:ea typeface="Georgia" pitchFamily="34" charset="-122"/>
-                <a:cs typeface="Georgia" pitchFamily="34" charset="-120"/>
-              </a:rPr>
-              <a:t>Intelligence flywheel</a:t>
-            </a:r>
-            <a:endParaRPr lang="en-US" sz="2000" dirty="0"/>
-          </a:p>
-        </p:txBody>
-      </p:sp>
-      <p:sp>
-        <p:nvSpPr>
-          <p:cNvPr id="7" name="Text 5"/>
-          <p:cNvSpPr/>
-          <p:nvPr/>
-        </p:nvSpPr>
-        <p:spPr>
-          <a:xfrm>
-            <a:off x="731520" y="3108960"/>
-            <a:ext cx="4937760" cy="777240"/>
-          </a:xfrm>
-          <a:prstGeom prst="rect">
-            <a:avLst/>
-          </a:prstGeom>
-          <a:noFill/>
-          <a:ln/>
-        </p:spPr>
-        <p:txBody>
-          <a:bodyPr wrap="square" rtlCol="0" anchor="ctr"/>
-          <a:lstStyle/>
-          <a:p>
-            <a:pPr indent="0" marL="0">
-              <a:buNone/>
-            </a:pPr>
-            <a:r>
-              <a:rPr lang="en-US" sz="1200" dirty="0">
-                <a:solidFill>
-                  <a:srgbClr val="C8CFE0"/>
-                </a:solidFill>
-                <a:latin typeface="Calibri" pitchFamily="34" charset="0"/>
-                <a:ea typeface="Calibri" pitchFamily="34" charset="-122"/>
-                <a:cs typeface="Calibri" pitchFamily="34" charset="-120"/>
-              </a:rPr>
-              <a:t>Every org strengthens the AI layer for every other org (patterns, anomalies, benchmarks) — anonymized and consented.</a:t>
-            </a:r>
-            <a:endParaRPr lang="en-US" sz="1200" dirty="0"/>
-          </a:p>
-        </p:txBody>
-      </p:sp>
-      <p:sp>
-        <p:nvSpPr>
-          <p:cNvPr id="8" name="Shape 6"/>
-          <p:cNvSpPr/>
-          <p:nvPr/>
-        </p:nvSpPr>
-        <p:spPr>
-          <a:xfrm>
-            <a:off x="6172200" y="2194560"/>
-            <a:ext cx="5394960" cy="1691640"/>
-          </a:xfrm>
-          <a:prstGeom prst="rect">
-            <a:avLst/>
-          </a:prstGeom>
-          <a:solidFill>
-            <a:srgbClr val="13204A"/>
-          </a:solidFill>
-          <a:ln w="6350">
-            <a:solidFill>
-              <a:srgbClr val="2A3562"/>
-            </a:solidFill>
-            <a:prstDash val="solid"/>
-          </a:ln>
-        </p:spPr>
-      </p:sp>
-      <p:sp>
-        <p:nvSpPr>
-          <p:cNvPr id="9" name="Text 7"/>
-          <p:cNvSpPr/>
-          <p:nvPr/>
-        </p:nvSpPr>
-        <p:spPr>
-          <a:xfrm>
-            <a:off x="6446520" y="2377440"/>
-            <a:ext cx="4937760" cy="274320"/>
-          </a:xfrm>
-          <a:prstGeom prst="rect">
-            <a:avLst/>
-          </a:prstGeom>
-          <a:noFill/>
-          <a:ln/>
-        </p:spPr>
-        <p:txBody>
-          <a:bodyPr wrap="square" rtlCol="0" anchor="ctr"/>
-          <a:lstStyle/>
-          <a:p>
-            <a:pPr indent="0" marL="0">
-              <a:buNone/>
-            </a:pPr>
-            <a:r>
-              <a:rPr lang="en-US" sz="1000" b="1" spc="400" kern="0" dirty="0">
-                <a:solidFill>
-                  <a:srgbClr val="C9A24C"/>
-                </a:solidFill>
-                <a:latin typeface="Calibri" pitchFamily="34" charset="0"/>
-                <a:ea typeface="Calibri" pitchFamily="34" charset="-122"/>
-                <a:cs typeface="Calibri" pitchFamily="34" charset="-120"/>
-              </a:rPr>
-              <a:t>WORKFLOW</a:t>
-            </a:r>
-            <a:endParaRPr lang="en-US" sz="1000" dirty="0"/>
-          </a:p>
-        </p:txBody>
-      </p:sp>
-      <p:sp>
-        <p:nvSpPr>
-          <p:cNvPr id="10" name="Text 8"/>
-          <p:cNvSpPr/>
-          <p:nvPr/>
-        </p:nvSpPr>
-        <p:spPr>
-          <a:xfrm>
-            <a:off x="6446520" y="2651760"/>
-            <a:ext cx="4937760" cy="411480"/>
-          </a:xfrm>
-          <a:prstGeom prst="rect">
-            <a:avLst/>
-          </a:prstGeom>
-          <a:noFill/>
-          <a:ln/>
-        </p:spPr>
-        <p:txBody>
-          <a:bodyPr wrap="square" rtlCol="0" anchor="ctr"/>
-          <a:lstStyle/>
-          <a:p>
-            <a:pPr indent="0" marL="0">
-              <a:buNone/>
-            </a:pPr>
-            <a:r>
-              <a:rPr lang="en-US" sz="2000" dirty="0">
-                <a:solidFill>
-                  <a:srgbClr val="F5F1E8"/>
-                </a:solidFill>
-                <a:latin typeface="Georgia" pitchFamily="34" charset="0"/>
-                <a:ea typeface="Georgia" pitchFamily="34" charset="-122"/>
-                <a:cs typeface="Georgia" pitchFamily="34" charset="-120"/>
-              </a:rPr>
-              <a:t>Operational lock-in</a:t>
-            </a:r>
-            <a:endParaRPr lang="en-US" sz="2000" dirty="0"/>
-          </a:p>
-        </p:txBody>
-      </p:sp>
-      <p:sp>
-        <p:nvSpPr>
-          <p:cNvPr id="11" name="Text 9"/>
-          <p:cNvSpPr/>
-          <p:nvPr/>
-        </p:nvSpPr>
-        <p:spPr>
-          <a:xfrm>
-            <a:off x="6446520" y="3108960"/>
-            <a:ext cx="4937760" cy="777240"/>
-          </a:xfrm>
-          <a:prstGeom prst="rect">
-            <a:avLst/>
-          </a:prstGeom>
-          <a:noFill/>
-          <a:ln/>
-        </p:spPr>
-        <p:txBody>
-          <a:bodyPr wrap="square" rtlCol="0" anchor="ctr"/>
-          <a:lstStyle/>
-          <a:p>
-            <a:pPr indent="0" marL="0">
-              <a:buNone/>
-            </a:pPr>
-            <a:r>
-              <a:rPr lang="en-US" sz="1200" dirty="0">
-                <a:solidFill>
-                  <a:srgbClr val="C8CFE0"/>
-                </a:solidFill>
-                <a:latin typeface="Calibri" pitchFamily="34" charset="0"/>
-                <a:ea typeface="Calibri" pitchFamily="34" charset="-122"/>
-                <a:cs typeface="Calibri" pitchFamily="34" charset="-120"/>
-              </a:rPr>
-              <a:t>The OS is where the work happens — attendance, tasks, approvals, payroll. Switching cost grows linearly with adoption.</a:t>
-            </a:r>
-            <a:endParaRPr lang="en-US" sz="1200" dirty="0"/>
-          </a:p>
-        </p:txBody>
-      </p:sp>
-      <p:sp>
-        <p:nvSpPr>
-          <p:cNvPr id="12" name="Shape 10"/>
-          <p:cNvSpPr/>
-          <p:nvPr/>
-        </p:nvSpPr>
-        <p:spPr>
-          <a:xfrm>
-            <a:off x="457200" y="4069080"/>
-            <a:ext cx="5394960" cy="1691640"/>
-          </a:xfrm>
-          <a:prstGeom prst="rect">
-            <a:avLst/>
-          </a:prstGeom>
-          <a:solidFill>
-            <a:srgbClr val="13204A"/>
-          </a:solidFill>
-          <a:ln w="6350">
-            <a:solidFill>
-              <a:srgbClr val="2A3562"/>
-            </a:solidFill>
-            <a:prstDash val="solid"/>
-          </a:ln>
-        </p:spPr>
-      </p:sp>
-      <p:sp>
-        <p:nvSpPr>
-          <p:cNvPr id="13" name="Text 11"/>
-          <p:cNvSpPr/>
-          <p:nvPr/>
-        </p:nvSpPr>
-        <p:spPr>
-          <a:xfrm>
-            <a:off x="731520" y="4251960"/>
-            <a:ext cx="4937760" cy="274320"/>
-          </a:xfrm>
-          <a:prstGeom prst="rect">
-            <a:avLst/>
-          </a:prstGeom>
-          <a:noFill/>
-          <a:ln/>
-        </p:spPr>
-        <p:txBody>
-          <a:bodyPr wrap="square" rtlCol="0" anchor="ctr"/>
-          <a:lstStyle/>
-          <a:p>
-            <a:pPr indent="0" marL="0">
-              <a:buNone/>
-            </a:pPr>
-            <a:r>
-              <a:rPr lang="en-US" sz="1000" b="1" spc="400" kern="0" dirty="0">
-                <a:solidFill>
-                  <a:srgbClr val="C9A24C"/>
-                </a:solidFill>
-                <a:latin typeface="Calibri" pitchFamily="34" charset="0"/>
-                <a:ea typeface="Calibri" pitchFamily="34" charset="-122"/>
-                <a:cs typeface="Calibri" pitchFamily="34" charset="-120"/>
-              </a:rPr>
-              <a:t>DISTRIBUTION</a:t>
-            </a:r>
-            <a:endParaRPr lang="en-US" sz="1000" dirty="0"/>
-          </a:p>
-        </p:txBody>
-      </p:sp>
-      <p:sp>
-        <p:nvSpPr>
-          <p:cNvPr id="14" name="Text 12"/>
-          <p:cNvSpPr/>
-          <p:nvPr/>
-        </p:nvSpPr>
-        <p:spPr>
-          <a:xfrm>
-            <a:off x="731520" y="4526280"/>
-            <a:ext cx="4937760" cy="411480"/>
-          </a:xfrm>
-          <a:prstGeom prst="rect">
-            <a:avLst/>
-          </a:prstGeom>
-          <a:noFill/>
-          <a:ln/>
-        </p:spPr>
-        <p:txBody>
-          <a:bodyPr wrap="square" rtlCol="0" anchor="ctr"/>
-          <a:lstStyle/>
-          <a:p>
-            <a:pPr indent="0" marL="0">
-              <a:buNone/>
-            </a:pPr>
-            <a:r>
-              <a:rPr lang="en-US" sz="2000" dirty="0">
-                <a:solidFill>
-                  <a:srgbClr val="F5F1E8"/>
-                </a:solidFill>
-                <a:latin typeface="Georgia" pitchFamily="34" charset="0"/>
-                <a:ea typeface="Georgia" pitchFamily="34" charset="-122"/>
-                <a:cs typeface="Georgia" pitchFamily="34" charset="-120"/>
-              </a:rPr>
-              <a:t>Local partner channel</a:t>
-            </a:r>
-            <a:endParaRPr lang="en-US" sz="2000" dirty="0"/>
-          </a:p>
-        </p:txBody>
-      </p:sp>
-      <p:sp>
-        <p:nvSpPr>
-          <p:cNvPr id="15" name="Text 13"/>
-          <p:cNvSpPr/>
-          <p:nvPr/>
-        </p:nvSpPr>
-        <p:spPr>
-          <a:xfrm>
-            <a:off x="731520" y="4983480"/>
-            <a:ext cx="4937760" cy="777240"/>
-          </a:xfrm>
-          <a:prstGeom prst="rect">
-            <a:avLst/>
-          </a:prstGeom>
-          <a:noFill/>
-          <a:ln/>
-        </p:spPr>
-        <p:txBody>
-          <a:bodyPr wrap="square" rtlCol="0" anchor="ctr"/>
-          <a:lstStyle/>
-          <a:p>
-            <a:pPr indent="0" marL="0">
-              <a:buNone/>
-            </a:pPr>
-            <a:r>
-              <a:rPr lang="en-US" sz="1200" dirty="0">
-                <a:solidFill>
-                  <a:srgbClr val="C8CFE0"/>
-                </a:solidFill>
-                <a:latin typeface="Calibri" pitchFamily="34" charset="0"/>
-                <a:ea typeface="Calibri" pitchFamily="34" charset="-122"/>
-                <a:cs typeface="Calibri" pitchFamily="34" charset="-120"/>
-              </a:rPr>
-              <a:t>Accounting firms, HR consultancies, business associations. A network global incumbents cannot economically replicate.</a:t>
-            </a:r>
-            <a:endParaRPr lang="en-US" sz="1200" dirty="0"/>
-          </a:p>
-        </p:txBody>
-      </p:sp>
-      <p:sp>
-        <p:nvSpPr>
-          <p:cNvPr id="16" name="Shape 14"/>
-          <p:cNvSpPr/>
-          <p:nvPr/>
-        </p:nvSpPr>
-        <p:spPr>
-          <a:xfrm>
-            <a:off x="6172200" y="4069080"/>
-            <a:ext cx="5394960" cy="1691640"/>
-          </a:xfrm>
-          <a:prstGeom prst="rect">
-            <a:avLst/>
-          </a:prstGeom>
-          <a:solidFill>
-            <a:srgbClr val="13204A"/>
-          </a:solidFill>
-          <a:ln w="6350">
-            <a:solidFill>
-              <a:srgbClr val="2A3562"/>
-            </a:solidFill>
-            <a:prstDash val="solid"/>
-          </a:ln>
-        </p:spPr>
-      </p:sp>
-      <p:sp>
-        <p:nvSpPr>
-          <p:cNvPr id="17" name="Text 15"/>
-          <p:cNvSpPr/>
-          <p:nvPr/>
-        </p:nvSpPr>
-        <p:spPr>
-          <a:xfrm>
-            <a:off x="6446520" y="4251960"/>
-            <a:ext cx="4937760" cy="274320"/>
-          </a:xfrm>
-          <a:prstGeom prst="rect">
-            <a:avLst/>
-          </a:prstGeom>
-          <a:noFill/>
-          <a:ln/>
-        </p:spPr>
-        <p:txBody>
-          <a:bodyPr wrap="square" rtlCol="0" anchor="ctr"/>
-          <a:lstStyle/>
-          <a:p>
-            <a:pPr indent="0" marL="0">
-              <a:buNone/>
-            </a:pPr>
-            <a:r>
-              <a:rPr lang="en-US" sz="1000" b="1" spc="400" kern="0" dirty="0">
-                <a:solidFill>
-                  <a:srgbClr val="C9A24C"/>
-                </a:solidFill>
-                <a:latin typeface="Calibri" pitchFamily="34" charset="0"/>
-                <a:ea typeface="Calibri" pitchFamily="34" charset="-122"/>
-                <a:cs typeface="Calibri" pitchFamily="34" charset="-120"/>
-              </a:rPr>
-              <a:t>COMPLIANCE</a:t>
-            </a:r>
-            <a:endParaRPr lang="en-US" sz="1000" dirty="0"/>
-          </a:p>
-        </p:txBody>
-      </p:sp>
-      <p:sp>
-        <p:nvSpPr>
-          <p:cNvPr id="18" name="Text 16"/>
-          <p:cNvSpPr/>
-          <p:nvPr/>
-        </p:nvSpPr>
-        <p:spPr>
-          <a:xfrm>
-            <a:off x="6446520" y="4526280"/>
-            <a:ext cx="4937760" cy="411480"/>
-          </a:xfrm>
-          <a:prstGeom prst="rect">
-            <a:avLst/>
-          </a:prstGeom>
-          <a:noFill/>
-          <a:ln/>
-        </p:spPr>
-        <p:txBody>
-          <a:bodyPr wrap="square" rtlCol="0" anchor="ctr"/>
-          <a:lstStyle/>
-          <a:p>
-            <a:pPr indent="0" marL="0">
-              <a:buNone/>
-            </a:pPr>
-            <a:r>
-              <a:rPr lang="en-US" sz="2000" dirty="0">
-                <a:solidFill>
-                  <a:srgbClr val="F5F1E8"/>
-                </a:solidFill>
-                <a:latin typeface="Georgia" pitchFamily="34" charset="0"/>
-                <a:ea typeface="Georgia" pitchFamily="34" charset="-122"/>
-                <a:cs typeface="Georgia" pitchFamily="34" charset="-120"/>
-              </a:rPr>
-              <a:t>Regulatory capital</a:t>
-            </a:r>
-            <a:endParaRPr lang="en-US" sz="2000" dirty="0"/>
-          </a:p>
-        </p:txBody>
-      </p:sp>
-      <p:sp>
-        <p:nvSpPr>
-          <p:cNvPr id="19" name="Text 17"/>
-          <p:cNvSpPr/>
-          <p:nvPr/>
-        </p:nvSpPr>
-        <p:spPr>
-          <a:xfrm>
-            <a:off x="6446520" y="4983480"/>
-            <a:ext cx="4937760" cy="777240"/>
-          </a:xfrm>
-          <a:prstGeom prst="rect">
-            <a:avLst/>
-          </a:prstGeom>
-          <a:noFill/>
-          <a:ln/>
-        </p:spPr>
-        <p:txBody>
-          <a:bodyPr wrap="square" rtlCol="0" anchor="ctr"/>
-          <a:lstStyle/>
-          <a:p>
-            <a:pPr indent="0" marL="0">
-              <a:buNone/>
-            </a:pPr>
-            <a:r>
-              <a:rPr lang="en-US" sz="1200" dirty="0">
-                <a:solidFill>
-                  <a:srgbClr val="C8CFE0"/>
-                </a:solidFill>
-                <a:latin typeface="Calibri" pitchFamily="34" charset="0"/>
-                <a:ea typeface="Calibri" pitchFamily="34" charset="-122"/>
-                <a:cs typeface="Calibri" pitchFamily="34" charset="-120"/>
-              </a:rPr>
-              <a:t>NDPR/GDPR-ready, MFA, audit trail, encryption. Table-stakes for HR/finance/health — a barrier to latecomers.</a:t>
-            </a:r>
-            <a:endParaRPr lang="en-US" sz="1200" dirty="0"/>
-          </a:p>
-        </p:txBody>
-      </p:sp>
-      <p:sp>
-        <p:nvSpPr>
-          <p:cNvPr id="20" name="Shape 18"/>
-          <p:cNvSpPr/>
-          <p:nvPr/>
-        </p:nvSpPr>
-        <p:spPr>
-          <a:xfrm>
-            <a:off x="457200" y="6446520"/>
-            <a:ext cx="11277295" cy="0"/>
-          </a:xfrm>
-          <a:prstGeom prst="line">
-            <a:avLst/>
-          </a:prstGeom>
-          <a:noFill/>
-          <a:ln w="9525">
-            <a:solidFill>
-              <a:srgbClr val="2A3562"/>
-            </a:solidFill>
-            <a:prstDash val="solid"/>
-          </a:ln>
-        </p:spPr>
-      </p:sp>
-      <p:sp>
-        <p:nvSpPr>
-          <p:cNvPr id="21" name="Text 19"/>
-          <p:cNvSpPr/>
-          <p:nvPr/>
-        </p:nvSpPr>
-        <p:spPr>
-          <a:xfrm>
-            <a:off x="457200" y="6510528"/>
-            <a:ext cx="7315200" cy="274320"/>
-          </a:xfrm>
-          <a:prstGeom prst="rect">
-            <a:avLst/>
-          </a:prstGeom>
-          <a:noFill/>
-          <a:ln/>
-        </p:spPr>
-        <p:txBody>
-          <a:bodyPr wrap="square" rtlCol="0" anchor="ctr"/>
-          <a:lstStyle/>
-          <a:p>
-            <a:pPr indent="0" marL="0">
-              <a:buNone/>
-            </a:pPr>
-            <a:r>
-              <a:rPr lang="en-US" sz="900" spc="300" kern="0" dirty="0">
-                <a:solidFill>
-                  <a:srgbClr val="8892B0"/>
-                </a:solidFill>
-                <a:latin typeface="Calibri" pitchFamily="34" charset="0"/>
-                <a:ea typeface="Calibri" pitchFamily="34" charset="-122"/>
-                <a:cs typeface="Calibri" pitchFamily="34" charset="-120"/>
-              </a:rPr>
-              <a:t>GLOBAL OFFICE  /  CONFIDENTIAL INVESTOR MATERIALS</a:t>
-            </a:r>
-            <a:endParaRPr lang="en-US" sz="900" dirty="0"/>
-          </a:p>
-        </p:txBody>
-      </p:sp>
-      <p:sp>
-        <p:nvSpPr>
-          <p:cNvPr id="22" name="Text 20"/>
-          <p:cNvSpPr/>
-          <p:nvPr/>
-        </p:nvSpPr>
-        <p:spPr>
-          <a:xfrm>
-            <a:off x="9905695" y="6510528"/>
-            <a:ext cx="1828800" cy="274320"/>
-          </a:xfrm>
-          <a:prstGeom prst="rect">
-            <a:avLst/>
-          </a:prstGeom>
-          <a:noFill/>
-          <a:ln/>
-        </p:spPr>
-        <p:txBody>
-          <a:bodyPr wrap="square" rtlCol="0" anchor="ctr"/>
-          <a:lstStyle/>
-          <a:p>
-            <a:pPr algn="r" indent="0" marL="0">
-              <a:buNone/>
-            </a:pPr>
-            <a:r>
-              <a:rPr lang="en-US" sz="900" dirty="0">
-                <a:solidFill>
-                  <a:srgbClr val="C9A24C"/>
-                </a:solidFill>
-                <a:latin typeface="Consolas" pitchFamily="34" charset="0"/>
-                <a:ea typeface="Consolas" pitchFamily="34" charset="-122"/>
-                <a:cs typeface="Consolas" pitchFamily="34" charset="-120"/>
-              </a:rPr>
-              <a:t>13 / 22</a:t>
-            </a:r>
-            <a:endParaRPr lang="en-US" sz="900" dirty="0"/>
-          </a:p>
-        </p:txBody>
-      </p:sp>
-    </p:spTree>
-  </p:cSld>
-  <p:clrMapOvr>
-    <a:masterClrMapping/>
-  </p:clrMapOvr>
-</p:sld>
-</file>
-
-<file path=ppt/slides/slide19.xml><?xml version="1.0" encoding="utf-8"?>
-<p:sld xmlns:a="http://schemas.openxmlformats.org/drawingml/2006/main" xmlns:r="http://schemas.openxmlformats.org/officeDocument/2006/relationships" xmlns:p="http://schemas.openxmlformats.org/presentationml/2006/main">
-  <p:cSld name="Slide 14">
-    <p:bg>
-      <p:bgPr>
-        <a:solidFill>
-          <a:srgbClr val="0B1533"/>
-        </a:solidFill>
-      </p:bgPr>
-    </p:bg>
-    <p:spTree>
-      <p:nvGrpSpPr>
-        <p:cNvPr id="1" name=""/>
-        <p:cNvGrpSpPr/>
-        <p:nvPr/>
-      </p:nvGrpSpPr>
-      <p:grpSpPr>
-        <a:xfrm>
-          <a:off x="0" y="0"/>
-          <a:ext cx="0" cy="0"/>
-          <a:chOff x="0" y="0"/>
-          <a:chExt cx="0" cy="0"/>
-        </a:xfrm>
-      </p:grpSpPr>
-      <p:sp>
-        <p:nvSpPr>
-          <p:cNvPr id="2" name="Text 0"/>
-          <p:cNvSpPr/>
-          <p:nvPr/>
-        </p:nvSpPr>
-        <p:spPr>
-          <a:xfrm>
-            <a:off x="457200" y="502920"/>
-            <a:ext cx="10972800" cy="274320"/>
-          </a:xfrm>
-          <a:prstGeom prst="rect">
-            <a:avLst/>
-          </a:prstGeom>
-          <a:noFill/>
-          <a:ln/>
-        </p:spPr>
-        <p:txBody>
-          <a:bodyPr wrap="square" rtlCol="0" anchor="ctr"/>
-          <a:lstStyle/>
-          <a:p>
-            <a:pPr indent="0" marL="0">
-              <a:buNone/>
-            </a:pPr>
-            <a:r>
-              <a:rPr lang="en-US" sz="1000" b="1" spc="600" kern="0" dirty="0">
-                <a:solidFill>
-                  <a:srgbClr val="C9A24C"/>
-                </a:solidFill>
-                <a:latin typeface="Calibri" pitchFamily="34" charset="0"/>
-                <a:ea typeface="Calibri" pitchFamily="34" charset="-122"/>
-                <a:cs typeface="Calibri" pitchFamily="34" charset="-120"/>
-              </a:rPr>
-              <a:t>FINANCIAL FRAMEWORK</a:t>
-            </a:r>
-            <a:endParaRPr lang="en-US" sz="1000" dirty="0"/>
-          </a:p>
-        </p:txBody>
-      </p:sp>
-      <p:sp>
-        <p:nvSpPr>
-          <p:cNvPr id="3" name="Text 1"/>
-          <p:cNvSpPr/>
-          <p:nvPr/>
-        </p:nvSpPr>
-        <p:spPr>
-          <a:xfrm>
-            <a:off x="457200" y="868680"/>
-            <a:ext cx="10972800" cy="1005840"/>
-          </a:xfrm>
-          <a:prstGeom prst="rect">
-            <a:avLst/>
-          </a:prstGeom>
-          <a:noFill/>
-          <a:ln/>
-        </p:spPr>
-        <p:txBody>
-          <a:bodyPr wrap="square" rtlCol="0" anchor="t"/>
-          <a:lstStyle/>
-          <a:p>
-            <a:pPr indent="0" marL="0">
-              <a:buNone/>
-            </a:pPr>
-            <a:r>
-              <a:rPr lang="en-US" sz="4000" dirty="0">
-                <a:solidFill>
-                  <a:srgbClr val="F5F1E8"/>
-                </a:solidFill>
-                <a:latin typeface="Georgia" pitchFamily="34" charset="0"/>
-                <a:ea typeface="Georgia" pitchFamily="34" charset="-122"/>
-                <a:cs typeface="Georgia" pitchFamily="34" charset="-120"/>
-              </a:rPr>
-              <a:t>Ranges, not fiction. Every assumption will be re-baselined against pilot data.</a:t>
-            </a:r>
-            <a:endParaRPr lang="en-US" sz="4000" dirty="0"/>
-          </a:p>
-        </p:txBody>
-      </p:sp>
-      <p:sp>
-        <p:nvSpPr>
-          <p:cNvPr id="4" name="Shape 2"/>
-          <p:cNvSpPr/>
-          <p:nvPr/>
-        </p:nvSpPr>
-        <p:spPr>
-          <a:xfrm>
-            <a:off x="457200" y="2194560"/>
-            <a:ext cx="2743200" cy="1463040"/>
-          </a:xfrm>
-          <a:prstGeom prst="rect">
-            <a:avLst/>
-          </a:prstGeom>
-          <a:solidFill>
-            <a:srgbClr val="13204A"/>
-          </a:solidFill>
-          <a:ln w="6350">
-            <a:solidFill>
-              <a:srgbClr val="2A3562"/>
-            </a:solidFill>
-            <a:prstDash val="solid"/>
-          </a:ln>
-        </p:spPr>
-      </p:sp>
-      <p:sp>
-        <p:nvSpPr>
-          <p:cNvPr id="5" name="Text 3"/>
-          <p:cNvSpPr/>
-          <p:nvPr/>
-        </p:nvSpPr>
-        <p:spPr>
-          <a:xfrm>
-            <a:off x="640080" y="2331720"/>
-            <a:ext cx="2468880" cy="320040"/>
-          </a:xfrm>
-          <a:prstGeom prst="rect">
-            <a:avLst/>
-          </a:prstGeom>
-          <a:noFill/>
-          <a:ln/>
-        </p:spPr>
-        <p:txBody>
-          <a:bodyPr wrap="square" rtlCol="0" anchor="ctr"/>
-          <a:lstStyle/>
-          <a:p>
-            <a:pPr indent="0" marL="0">
-              <a:buNone/>
-            </a:pPr>
-            <a:r>
-              <a:rPr lang="en-US" sz="1000" b="1" spc="300" kern="0" dirty="0">
-                <a:solidFill>
-                  <a:srgbClr val="C9A24C"/>
-                </a:solidFill>
-                <a:latin typeface="Calibri" pitchFamily="34" charset="0"/>
-                <a:ea typeface="Calibri" pitchFamily="34" charset="-122"/>
-                <a:cs typeface="Calibri" pitchFamily="34" charset="-120"/>
-              </a:rPr>
-              <a:t>Blended ARPO</a:t>
-            </a:r>
-            <a:endParaRPr lang="en-US" sz="1000" dirty="0"/>
-          </a:p>
-        </p:txBody>
-      </p:sp>
-      <p:sp>
-        <p:nvSpPr>
-          <p:cNvPr id="6" name="Text 4"/>
-          <p:cNvSpPr/>
-          <p:nvPr/>
-        </p:nvSpPr>
-        <p:spPr>
-          <a:xfrm>
-            <a:off x="640080" y="2651760"/>
-            <a:ext cx="2468880" cy="548640"/>
-          </a:xfrm>
-          <a:prstGeom prst="rect">
-            <a:avLst/>
-          </a:prstGeom>
-          <a:noFill/>
-          <a:ln/>
-        </p:spPr>
-        <p:txBody>
-          <a:bodyPr wrap="square" rtlCol="0" anchor="ctr"/>
-          <a:lstStyle/>
-          <a:p>
-            <a:pPr indent="0" marL="0">
-              <a:buNone/>
-            </a:pPr>
-            <a:r>
-              <a:rPr lang="en-US" sz="2600" dirty="0">
-                <a:solidFill>
-                  <a:srgbClr val="F5F1E8"/>
-                </a:solidFill>
-                <a:latin typeface="Georgia" pitchFamily="34" charset="0"/>
-                <a:ea typeface="Georgia" pitchFamily="34" charset="-122"/>
-                <a:cs typeface="Georgia" pitchFamily="34" charset="-120"/>
-              </a:rPr>
-              <a:t>$2.4–4.2K</a:t>
-            </a:r>
-            <a:endParaRPr lang="en-US" sz="2600" dirty="0"/>
-          </a:p>
-        </p:txBody>
-      </p:sp>
-      <p:sp>
-        <p:nvSpPr>
-          <p:cNvPr id="7" name="Text 5"/>
-          <p:cNvSpPr/>
-          <p:nvPr/>
-        </p:nvSpPr>
-        <p:spPr>
-          <a:xfrm>
-            <a:off x="640080" y="3246120"/>
-            <a:ext cx="2468880" cy="365760"/>
-          </a:xfrm>
-          <a:prstGeom prst="rect">
-            <a:avLst/>
-          </a:prstGeom>
-          <a:noFill/>
-          <a:ln/>
-        </p:spPr>
-        <p:txBody>
-          <a:bodyPr wrap="square" rtlCol="0" anchor="ctr"/>
-          <a:lstStyle/>
-          <a:p>
-            <a:pPr indent="0" marL="0">
-              <a:buNone/>
-            </a:pPr>
-            <a:r>
-              <a:rPr lang="en-US" sz="1000" dirty="0">
-                <a:solidFill>
-                  <a:srgbClr val="8892B0"/>
-                </a:solidFill>
-                <a:latin typeface="Calibri" pitchFamily="34" charset="0"/>
-                <a:ea typeface="Calibri" pitchFamily="34" charset="-122"/>
-                <a:cs typeface="Calibri" pitchFamily="34" charset="-120"/>
-              </a:rPr>
-              <a:t>per organization per year</a:t>
-            </a:r>
-            <a:endParaRPr lang="en-US" sz="1000" dirty="0"/>
-          </a:p>
-        </p:txBody>
-      </p:sp>
-      <p:sp>
-        <p:nvSpPr>
-          <p:cNvPr id="8" name="Shape 6"/>
-          <p:cNvSpPr/>
-          <p:nvPr/>
-        </p:nvSpPr>
-        <p:spPr>
-          <a:xfrm>
-            <a:off x="3383280" y="2194560"/>
-            <a:ext cx="2743200" cy="1463040"/>
-          </a:xfrm>
-          <a:prstGeom prst="rect">
-            <a:avLst/>
-          </a:prstGeom>
-          <a:solidFill>
-            <a:srgbClr val="13204A"/>
-          </a:solidFill>
-          <a:ln w="6350">
-            <a:solidFill>
-              <a:srgbClr val="2A3562"/>
-            </a:solidFill>
-            <a:prstDash val="solid"/>
-          </a:ln>
-        </p:spPr>
-      </p:sp>
-      <p:sp>
-        <p:nvSpPr>
-          <p:cNvPr id="9" name="Text 7"/>
-          <p:cNvSpPr/>
-          <p:nvPr/>
-        </p:nvSpPr>
-        <p:spPr>
-          <a:xfrm>
-            <a:off x="3566160" y="2331720"/>
-            <a:ext cx="2468880" cy="320040"/>
-          </a:xfrm>
-          <a:prstGeom prst="rect">
-            <a:avLst/>
-          </a:prstGeom>
-          <a:noFill/>
-          <a:ln/>
-        </p:spPr>
-        <p:txBody>
-          <a:bodyPr wrap="square" rtlCol="0" anchor="ctr"/>
-          <a:lstStyle/>
-          <a:p>
-            <a:pPr indent="0" marL="0">
-              <a:buNone/>
-            </a:pPr>
-            <a:r>
-              <a:rPr lang="en-US" sz="1000" b="1" spc="300" kern="0" dirty="0">
-                <a:solidFill>
-                  <a:srgbClr val="C9A24C"/>
-                </a:solidFill>
-                <a:latin typeface="Calibri" pitchFamily="34" charset="0"/>
-                <a:ea typeface="Calibri" pitchFamily="34" charset="-122"/>
-                <a:cs typeface="Calibri" pitchFamily="34" charset="-120"/>
-              </a:rPr>
-              <a:t>Gross Margin</a:t>
-            </a:r>
-            <a:endParaRPr lang="en-US" sz="1000" dirty="0"/>
-          </a:p>
-        </p:txBody>
-      </p:sp>
-      <p:sp>
-        <p:nvSpPr>
-          <p:cNvPr id="10" name="Text 8"/>
-          <p:cNvSpPr/>
-          <p:nvPr/>
-        </p:nvSpPr>
-        <p:spPr>
-          <a:xfrm>
-            <a:off x="3566160" y="2651760"/>
-            <a:ext cx="2468880" cy="548640"/>
-          </a:xfrm>
-          <a:prstGeom prst="rect">
-            <a:avLst/>
-          </a:prstGeom>
-          <a:noFill/>
-          <a:ln/>
-        </p:spPr>
-        <p:txBody>
-          <a:bodyPr wrap="square" rtlCol="0" anchor="ctr"/>
-          <a:lstStyle/>
-          <a:p>
-            <a:pPr indent="0" marL="0">
-              <a:buNone/>
-            </a:pPr>
-            <a:r>
-              <a:rPr lang="en-US" sz="2600" dirty="0">
-                <a:solidFill>
-                  <a:srgbClr val="F5F1E8"/>
-                </a:solidFill>
-                <a:latin typeface="Georgia" pitchFamily="34" charset="0"/>
-                <a:ea typeface="Georgia" pitchFamily="34" charset="-122"/>
-                <a:cs typeface="Georgia" pitchFamily="34" charset="-120"/>
-              </a:rPr>
-              <a:t>75–82%</a:t>
-            </a:r>
-            <a:endParaRPr lang="en-US" sz="2600" dirty="0"/>
-          </a:p>
-        </p:txBody>
-      </p:sp>
-      <p:sp>
-        <p:nvSpPr>
-          <p:cNvPr id="11" name="Text 9"/>
-          <p:cNvSpPr/>
-          <p:nvPr/>
-        </p:nvSpPr>
-        <p:spPr>
-          <a:xfrm>
-            <a:off x="3566160" y="3246120"/>
-            <a:ext cx="2468880" cy="365760"/>
-          </a:xfrm>
-          <a:prstGeom prst="rect">
-            <a:avLst/>
-          </a:prstGeom>
-          <a:noFill/>
-          <a:ln/>
-        </p:spPr>
-        <p:txBody>
-          <a:bodyPr wrap="square" rtlCol="0" anchor="ctr"/>
-          <a:lstStyle/>
-          <a:p>
-            <a:pPr indent="0" marL="0">
-              <a:buNone/>
-            </a:pPr>
-            <a:r>
-              <a:rPr lang="en-US" sz="1000" dirty="0">
-                <a:solidFill>
-                  <a:srgbClr val="8892B0"/>
-                </a:solidFill>
-                <a:latin typeface="Calibri" pitchFamily="34" charset="0"/>
-                <a:ea typeface="Calibri" pitchFamily="34" charset="-122"/>
-                <a:cs typeface="Calibri" pitchFamily="34" charset="-120"/>
-              </a:rPr>
-              <a:t>vertical SaaS benchmark</a:t>
-            </a:r>
-            <a:endParaRPr lang="en-US" sz="1000" dirty="0"/>
-          </a:p>
-        </p:txBody>
-      </p:sp>
-      <p:sp>
-        <p:nvSpPr>
-          <p:cNvPr id="12" name="Shape 10"/>
-          <p:cNvSpPr/>
-          <p:nvPr/>
-        </p:nvSpPr>
-        <p:spPr>
-          <a:xfrm>
-            <a:off x="6309360" y="2194560"/>
-            <a:ext cx="2743200" cy="1463040"/>
-          </a:xfrm>
-          <a:prstGeom prst="rect">
-            <a:avLst/>
-          </a:prstGeom>
-          <a:solidFill>
-            <a:srgbClr val="13204A"/>
-          </a:solidFill>
-          <a:ln w="6350">
-            <a:solidFill>
-              <a:srgbClr val="2A3562"/>
-            </a:solidFill>
-            <a:prstDash val="solid"/>
-          </a:ln>
-        </p:spPr>
-      </p:sp>
-      <p:sp>
-        <p:nvSpPr>
-          <p:cNvPr id="13" name="Text 11"/>
-          <p:cNvSpPr/>
-          <p:nvPr/>
-        </p:nvSpPr>
-        <p:spPr>
-          <a:xfrm>
-            <a:off x="6492240" y="2331720"/>
-            <a:ext cx="2468880" cy="320040"/>
-          </a:xfrm>
-          <a:prstGeom prst="rect">
-            <a:avLst/>
-          </a:prstGeom>
-          <a:noFill/>
-          <a:ln/>
-        </p:spPr>
-        <p:txBody>
-          <a:bodyPr wrap="square" rtlCol="0" anchor="ctr"/>
-          <a:lstStyle/>
-          <a:p>
-            <a:pPr indent="0" marL="0">
-              <a:buNone/>
-            </a:pPr>
-            <a:r>
-              <a:rPr lang="en-US" sz="1000" b="1" spc="300" kern="0" dirty="0">
-                <a:solidFill>
-                  <a:srgbClr val="C9A24C"/>
-                </a:solidFill>
-                <a:latin typeface="Calibri" pitchFamily="34" charset="0"/>
-                <a:ea typeface="Calibri" pitchFamily="34" charset="-122"/>
-                <a:cs typeface="Calibri" pitchFamily="34" charset="-120"/>
-              </a:rPr>
-              <a:t>CAC Payback</a:t>
-            </a:r>
-            <a:endParaRPr lang="en-US" sz="1000" dirty="0"/>
-          </a:p>
-        </p:txBody>
-      </p:sp>
-      <p:sp>
-        <p:nvSpPr>
-          <p:cNvPr id="14" name="Text 12"/>
-          <p:cNvSpPr/>
-          <p:nvPr/>
-        </p:nvSpPr>
-        <p:spPr>
-          <a:xfrm>
-            <a:off x="6492240" y="2651760"/>
-            <a:ext cx="2468880" cy="548640"/>
-          </a:xfrm>
-          <a:prstGeom prst="rect">
-            <a:avLst/>
-          </a:prstGeom>
-          <a:noFill/>
-          <a:ln/>
-        </p:spPr>
-        <p:txBody>
-          <a:bodyPr wrap="square" rtlCol="0" anchor="ctr"/>
-          <a:lstStyle/>
-          <a:p>
-            <a:pPr indent="0" marL="0">
-              <a:buNone/>
-            </a:pPr>
-            <a:r>
-              <a:rPr lang="en-US" sz="2600" dirty="0">
-                <a:solidFill>
-                  <a:srgbClr val="F5F1E8"/>
-                </a:solidFill>
-                <a:latin typeface="Georgia" pitchFamily="34" charset="0"/>
-                <a:ea typeface="Georgia" pitchFamily="34" charset="-122"/>
-                <a:cs typeface="Georgia" pitchFamily="34" charset="-120"/>
-              </a:rPr>
-              <a:t>10–14 mo</a:t>
-            </a:r>
-            <a:endParaRPr lang="en-US" sz="2600" dirty="0"/>
-          </a:p>
-        </p:txBody>
-      </p:sp>
-      <p:sp>
-        <p:nvSpPr>
-          <p:cNvPr id="15" name="Text 13"/>
-          <p:cNvSpPr/>
-          <p:nvPr/>
-        </p:nvSpPr>
-        <p:spPr>
-          <a:xfrm>
-            <a:off x="6492240" y="3246120"/>
-            <a:ext cx="2468880" cy="365760"/>
-          </a:xfrm>
-          <a:prstGeom prst="rect">
-            <a:avLst/>
-          </a:prstGeom>
-          <a:noFill/>
-          <a:ln/>
-        </p:spPr>
-        <p:txBody>
-          <a:bodyPr wrap="square" rtlCol="0" anchor="ctr"/>
-          <a:lstStyle/>
-          <a:p>
-            <a:pPr indent="0" marL="0">
-              <a:buNone/>
-            </a:pPr>
-            <a:r>
-              <a:rPr lang="en-US" sz="1000" dirty="0">
-                <a:solidFill>
-                  <a:srgbClr val="8892B0"/>
-                </a:solidFill>
-                <a:latin typeface="Calibri" pitchFamily="34" charset="0"/>
-                <a:ea typeface="Calibri" pitchFamily="34" charset="-122"/>
-                <a:cs typeface="Calibri" pitchFamily="34" charset="-120"/>
-              </a:rPr>
-              <a:t>Growth-tier assumption</a:t>
-            </a:r>
-            <a:endParaRPr lang="en-US" sz="1000" dirty="0"/>
-          </a:p>
-        </p:txBody>
-      </p:sp>
-      <p:sp>
-        <p:nvSpPr>
-          <p:cNvPr id="16" name="Shape 14"/>
-          <p:cNvSpPr/>
-          <p:nvPr/>
-        </p:nvSpPr>
-        <p:spPr>
-          <a:xfrm>
-            <a:off x="9235440" y="2194560"/>
-            <a:ext cx="2743200" cy="1463040"/>
-          </a:xfrm>
-          <a:prstGeom prst="rect">
-            <a:avLst/>
-          </a:prstGeom>
-          <a:solidFill>
-            <a:srgbClr val="13204A"/>
-          </a:solidFill>
-          <a:ln w="6350">
-            <a:solidFill>
-              <a:srgbClr val="2A3562"/>
-            </a:solidFill>
-            <a:prstDash val="solid"/>
-          </a:ln>
-        </p:spPr>
-      </p:sp>
-      <p:sp>
-        <p:nvSpPr>
-          <p:cNvPr id="17" name="Text 15"/>
-          <p:cNvSpPr/>
-          <p:nvPr/>
-        </p:nvSpPr>
-        <p:spPr>
-          <a:xfrm>
-            <a:off x="9418320" y="2331720"/>
-            <a:ext cx="2468880" cy="320040"/>
-          </a:xfrm>
-          <a:prstGeom prst="rect">
-            <a:avLst/>
-          </a:prstGeom>
-          <a:noFill/>
-          <a:ln/>
-        </p:spPr>
-        <p:txBody>
-          <a:bodyPr wrap="square" rtlCol="0" anchor="ctr"/>
-          <a:lstStyle/>
-          <a:p>
-            <a:pPr indent="0" marL="0">
-              <a:buNone/>
-            </a:pPr>
-            <a:r>
-              <a:rPr lang="en-US" sz="1000" b="1" spc="300" kern="0" dirty="0">
-                <a:solidFill>
-                  <a:srgbClr val="C9A24C"/>
-                </a:solidFill>
-                <a:latin typeface="Calibri" pitchFamily="34" charset="0"/>
-                <a:ea typeface="Calibri" pitchFamily="34" charset="-122"/>
-                <a:cs typeface="Calibri" pitchFamily="34" charset="-120"/>
-              </a:rPr>
-              <a:t>Net Revenue Retention</a:t>
-            </a:r>
-            <a:endParaRPr lang="en-US" sz="1000" dirty="0"/>
-          </a:p>
-        </p:txBody>
-      </p:sp>
-      <p:sp>
-        <p:nvSpPr>
-          <p:cNvPr id="18" name="Text 16"/>
-          <p:cNvSpPr/>
-          <p:nvPr/>
-        </p:nvSpPr>
-        <p:spPr>
-          <a:xfrm>
-            <a:off x="9418320" y="2651760"/>
-            <a:ext cx="2468880" cy="548640"/>
-          </a:xfrm>
-          <a:prstGeom prst="rect">
-            <a:avLst/>
-          </a:prstGeom>
-          <a:noFill/>
-          <a:ln/>
-        </p:spPr>
-        <p:txBody>
-          <a:bodyPr wrap="square" rtlCol="0" anchor="ctr"/>
-          <a:lstStyle/>
-          <a:p>
-            <a:pPr indent="0" marL="0">
-              <a:buNone/>
-            </a:pPr>
-            <a:r>
-              <a:rPr lang="en-US" sz="2600" dirty="0">
-                <a:solidFill>
-                  <a:srgbClr val="F5F1E8"/>
-                </a:solidFill>
-                <a:latin typeface="Georgia" pitchFamily="34" charset="0"/>
-                <a:ea typeface="Georgia" pitchFamily="34" charset="-122"/>
-                <a:cs typeface="Georgia" pitchFamily="34" charset="-120"/>
-              </a:rPr>
-              <a:t>108–120%</a:t>
-            </a:r>
-            <a:endParaRPr lang="en-US" sz="2600" dirty="0"/>
-          </a:p>
-        </p:txBody>
-      </p:sp>
-      <p:sp>
-        <p:nvSpPr>
-          <p:cNvPr id="19" name="Text 17"/>
-          <p:cNvSpPr/>
-          <p:nvPr/>
-        </p:nvSpPr>
-        <p:spPr>
-          <a:xfrm>
-            <a:off x="9418320" y="3246120"/>
-            <a:ext cx="2468880" cy="365760"/>
-          </a:xfrm>
-          <a:prstGeom prst="rect">
-            <a:avLst/>
-          </a:prstGeom>
-          <a:noFill/>
-          <a:ln/>
-        </p:spPr>
-        <p:txBody>
-          <a:bodyPr wrap="square" rtlCol="0" anchor="ctr"/>
-          <a:lstStyle/>
-          <a:p>
-            <a:pPr indent="0" marL="0">
-              <a:buNone/>
-            </a:pPr>
-            <a:r>
-              <a:rPr lang="en-US" sz="1000" dirty="0">
-                <a:solidFill>
-                  <a:srgbClr val="8892B0"/>
-                </a:solidFill>
-                <a:latin typeface="Calibri" pitchFamily="34" charset="0"/>
-                <a:ea typeface="Calibri" pitchFamily="34" charset="-122"/>
-                <a:cs typeface="Calibri" pitchFamily="34" charset="-120"/>
-              </a:rPr>
-              <a:t>target once Scale tier lands</a:t>
-            </a:r>
-            <a:endParaRPr lang="en-US" sz="1000" dirty="0"/>
-          </a:p>
-        </p:txBody>
-      </p:sp>
-      <p:sp>
-        <p:nvSpPr>
-          <p:cNvPr id="20" name="Text 18"/>
-          <p:cNvSpPr/>
-          <p:nvPr/>
-        </p:nvSpPr>
-        <p:spPr>
-          <a:xfrm>
-            <a:off x="457200" y="4023360"/>
-            <a:ext cx="5486400" cy="274320"/>
-          </a:xfrm>
-          <a:prstGeom prst="rect">
-            <a:avLst/>
-          </a:prstGeom>
-          <a:noFill/>
-          <a:ln/>
-        </p:spPr>
-        <p:txBody>
-          <a:bodyPr wrap="square" rtlCol="0" anchor="ctr"/>
-          <a:lstStyle/>
-          <a:p>
-            <a:pPr indent="0" marL="0">
-              <a:buNone/>
-            </a:pPr>
-            <a:r>
-              <a:rPr lang="en-US" sz="1000" b="1" spc="400" kern="0" dirty="0">
-                <a:solidFill>
-                  <a:srgbClr val="C9A24C"/>
-                </a:solidFill>
-                <a:latin typeface="Calibri" pitchFamily="34" charset="0"/>
-                <a:ea typeface="Calibri" pitchFamily="34" charset="-122"/>
-                <a:cs typeface="Calibri" pitchFamily="34" charset="-120"/>
-              </a:rPr>
-              <a:t>YEAR 5 SCENARIO ARR</a:t>
-            </a:r>
-            <a:endParaRPr lang="en-US" sz="1000" dirty="0"/>
-          </a:p>
-        </p:txBody>
-      </p:sp>
-      <p:sp>
-        <p:nvSpPr>
-          <p:cNvPr id="21" name="Shape 19"/>
-          <p:cNvSpPr/>
-          <p:nvPr/>
-        </p:nvSpPr>
-        <p:spPr>
-          <a:xfrm>
-            <a:off x="457200" y="4343400"/>
-            <a:ext cx="3657600" cy="1188720"/>
-          </a:xfrm>
-          <a:prstGeom prst="rect">
-            <a:avLst/>
-          </a:prstGeom>
-          <a:solidFill>
-            <a:srgbClr val="13204A"/>
-          </a:solidFill>
-          <a:ln w="6350">
-            <a:solidFill>
-              <a:srgbClr val="2A3562"/>
-            </a:solidFill>
-            <a:prstDash val="solid"/>
-          </a:ln>
-        </p:spPr>
-      </p:sp>
-      <p:sp>
-        <p:nvSpPr>
-          <p:cNvPr id="22" name="Text 20"/>
-          <p:cNvSpPr/>
-          <p:nvPr/>
-        </p:nvSpPr>
-        <p:spPr>
-          <a:xfrm>
-            <a:off x="685800" y="4434840"/>
-            <a:ext cx="3200400" cy="320040"/>
-          </a:xfrm>
-          <a:prstGeom prst="rect">
-            <a:avLst/>
-          </a:prstGeom>
-          <a:noFill/>
-          <a:ln/>
-        </p:spPr>
-        <p:txBody>
-          <a:bodyPr wrap="square" rtlCol="0" anchor="ctr"/>
-          <a:lstStyle/>
-          <a:p>
-            <a:pPr indent="0" marL="0">
-              <a:buNone/>
-            </a:pPr>
-            <a:r>
-              <a:rPr lang="en-US" sz="1100" b="1" dirty="0">
-                <a:solidFill>
-                  <a:srgbClr val="C9A24C"/>
-                </a:solidFill>
-                <a:latin typeface="Calibri" pitchFamily="34" charset="0"/>
-                <a:ea typeface="Calibri" pitchFamily="34" charset="-122"/>
-                <a:cs typeface="Calibri" pitchFamily="34" charset="-120"/>
-              </a:rPr>
-              <a:t>Conservative</a:t>
-            </a:r>
-            <a:endParaRPr lang="en-US" sz="1100" dirty="0"/>
-          </a:p>
-        </p:txBody>
-      </p:sp>
-      <p:sp>
-        <p:nvSpPr>
-          <p:cNvPr id="23" name="Text 21"/>
-          <p:cNvSpPr/>
-          <p:nvPr/>
-        </p:nvSpPr>
-        <p:spPr>
-          <a:xfrm>
-            <a:off x="685800" y="4754880"/>
-            <a:ext cx="3200400" cy="457200"/>
-          </a:xfrm>
-          <a:prstGeom prst="rect">
-            <a:avLst/>
-          </a:prstGeom>
-          <a:noFill/>
-          <a:ln/>
-        </p:spPr>
-        <p:txBody>
-          <a:bodyPr wrap="square" rtlCol="0" anchor="ctr"/>
-          <a:lstStyle/>
-          <a:p>
-            <a:pPr indent="0" marL="0">
-              <a:buNone/>
-            </a:pPr>
-            <a:r>
-              <a:rPr lang="en-US" sz="2200" dirty="0">
-                <a:solidFill>
-                  <a:srgbClr val="F5F1E8"/>
-                </a:solidFill>
-                <a:latin typeface="Georgia" pitchFamily="34" charset="0"/>
-                <a:ea typeface="Georgia" pitchFamily="34" charset="-122"/>
-                <a:cs typeface="Georgia" pitchFamily="34" charset="-120"/>
-              </a:rPr>
-              <a:t>$18M ARR</a:t>
-            </a:r>
-            <a:endParaRPr lang="en-US" sz="2200" dirty="0"/>
-          </a:p>
-        </p:txBody>
-      </p:sp>
-      <p:sp>
-        <p:nvSpPr>
-          <p:cNvPr id="24" name="Text 22"/>
-          <p:cNvSpPr/>
-          <p:nvPr/>
-        </p:nvSpPr>
-        <p:spPr>
-          <a:xfrm>
-            <a:off x="685800" y="5212080"/>
-            <a:ext cx="3200400" cy="320040"/>
-          </a:xfrm>
-          <a:prstGeom prst="rect">
-            <a:avLst/>
-          </a:prstGeom>
-          <a:noFill/>
-          <a:ln/>
-        </p:spPr>
-        <p:txBody>
-          <a:bodyPr wrap="square" rtlCol="0" anchor="ctr"/>
-          <a:lstStyle/>
-          <a:p>
-            <a:pPr indent="0" marL="0">
-              <a:buNone/>
-            </a:pPr>
-            <a:r>
-              <a:rPr lang="en-US" sz="1100" dirty="0">
-                <a:solidFill>
-                  <a:srgbClr val="C8CFE0"/>
-                </a:solidFill>
-                <a:latin typeface="Calibri" pitchFamily="34" charset="0"/>
-                <a:ea typeface="Calibri" pitchFamily="34" charset="-122"/>
-                <a:cs typeface="Calibri" pitchFamily="34" charset="-120"/>
-              </a:rPr>
-              <a:t>~5,000 orgs</a:t>
-            </a:r>
-            <a:endParaRPr lang="en-US" sz="1100" dirty="0"/>
-          </a:p>
-        </p:txBody>
-      </p:sp>
-      <p:sp>
-        <p:nvSpPr>
-          <p:cNvPr id="25" name="Shape 23"/>
-          <p:cNvSpPr/>
-          <p:nvPr/>
-        </p:nvSpPr>
-        <p:spPr>
-          <a:xfrm>
-            <a:off x="4370832" y="4343400"/>
-            <a:ext cx="3657600" cy="1188720"/>
-          </a:xfrm>
-          <a:prstGeom prst="rect">
-            <a:avLst/>
-          </a:prstGeom>
-          <a:solidFill>
-            <a:srgbClr val="13204A"/>
-          </a:solidFill>
-          <a:ln w="6350">
-            <a:solidFill>
-              <a:srgbClr val="2A3562"/>
-            </a:solidFill>
-            <a:prstDash val="solid"/>
-          </a:ln>
-        </p:spPr>
-      </p:sp>
-      <p:sp>
-        <p:nvSpPr>
-          <p:cNvPr id="26" name="Text 24"/>
-          <p:cNvSpPr/>
-          <p:nvPr/>
-        </p:nvSpPr>
-        <p:spPr>
-          <a:xfrm>
-            <a:off x="4599432" y="4434840"/>
-            <a:ext cx="3200400" cy="320040"/>
-          </a:xfrm>
-          <a:prstGeom prst="rect">
-            <a:avLst/>
-          </a:prstGeom>
-          <a:noFill/>
-          <a:ln/>
-        </p:spPr>
-        <p:txBody>
-          <a:bodyPr wrap="square" rtlCol="0" anchor="ctr"/>
-          <a:lstStyle/>
-          <a:p>
-            <a:pPr indent="0" marL="0">
-              <a:buNone/>
-            </a:pPr>
-            <a:r>
-              <a:rPr lang="en-US" sz="1100" b="1" dirty="0">
-                <a:solidFill>
-                  <a:srgbClr val="C9A24C"/>
-                </a:solidFill>
-                <a:latin typeface="Calibri" pitchFamily="34" charset="0"/>
-                <a:ea typeface="Calibri" pitchFamily="34" charset="-122"/>
-                <a:cs typeface="Calibri" pitchFamily="34" charset="-120"/>
-              </a:rPr>
-              <a:t>Base</a:t>
-            </a:r>
-            <a:endParaRPr lang="en-US" sz="1100" dirty="0"/>
-          </a:p>
-        </p:txBody>
-      </p:sp>
-      <p:sp>
-        <p:nvSpPr>
-          <p:cNvPr id="27" name="Text 25"/>
-          <p:cNvSpPr/>
-          <p:nvPr/>
-        </p:nvSpPr>
-        <p:spPr>
-          <a:xfrm>
-            <a:off x="4599432" y="4754880"/>
-            <a:ext cx="3200400" cy="457200"/>
-          </a:xfrm>
-          <a:prstGeom prst="rect">
-            <a:avLst/>
-          </a:prstGeom>
-          <a:noFill/>
-          <a:ln/>
-        </p:spPr>
-        <p:txBody>
-          <a:bodyPr wrap="square" rtlCol="0" anchor="ctr"/>
-          <a:lstStyle/>
-          <a:p>
-            <a:pPr indent="0" marL="0">
-              <a:buNone/>
-            </a:pPr>
-            <a:r>
-              <a:rPr lang="en-US" sz="2200" dirty="0">
-                <a:solidFill>
-                  <a:srgbClr val="F5F1E8"/>
-                </a:solidFill>
-                <a:latin typeface="Georgia" pitchFamily="34" charset="0"/>
-                <a:ea typeface="Georgia" pitchFamily="34" charset="-122"/>
-                <a:cs typeface="Georgia" pitchFamily="34" charset="-120"/>
-              </a:rPr>
-              <a:t>$42M ARR</a:t>
-            </a:r>
-            <a:endParaRPr lang="en-US" sz="2200" dirty="0"/>
-          </a:p>
-        </p:txBody>
-      </p:sp>
-      <p:sp>
-        <p:nvSpPr>
-          <p:cNvPr id="28" name="Text 26"/>
-          <p:cNvSpPr/>
-          <p:nvPr/>
-        </p:nvSpPr>
-        <p:spPr>
-          <a:xfrm>
-            <a:off x="4599432" y="5212080"/>
-            <a:ext cx="3200400" cy="320040"/>
-          </a:xfrm>
-          <a:prstGeom prst="rect">
-            <a:avLst/>
-          </a:prstGeom>
-          <a:noFill/>
-          <a:ln/>
-        </p:spPr>
-        <p:txBody>
-          <a:bodyPr wrap="square" rtlCol="0" anchor="ctr"/>
-          <a:lstStyle/>
-          <a:p>
-            <a:pPr indent="0" marL="0">
-              <a:buNone/>
-            </a:pPr>
-            <a:r>
-              <a:rPr lang="en-US" sz="1100" dirty="0">
-                <a:solidFill>
-                  <a:srgbClr val="C8CFE0"/>
-                </a:solidFill>
-                <a:latin typeface="Calibri" pitchFamily="34" charset="0"/>
-                <a:ea typeface="Calibri" pitchFamily="34" charset="-122"/>
-                <a:cs typeface="Calibri" pitchFamily="34" charset="-120"/>
-              </a:rPr>
-              <a:t>~12,000 orgs</a:t>
-            </a:r>
-            <a:endParaRPr lang="en-US" sz="1100" dirty="0"/>
-          </a:p>
-        </p:txBody>
-      </p:sp>
-      <p:sp>
-        <p:nvSpPr>
-          <p:cNvPr id="29" name="Shape 27"/>
-          <p:cNvSpPr/>
-          <p:nvPr/>
-        </p:nvSpPr>
-        <p:spPr>
-          <a:xfrm>
-            <a:off x="8284464" y="4343400"/>
-            <a:ext cx="3657600" cy="1188720"/>
-          </a:xfrm>
-          <a:prstGeom prst="rect">
-            <a:avLst/>
-          </a:prstGeom>
-          <a:solidFill>
-            <a:srgbClr val="13204A"/>
-          </a:solidFill>
-          <a:ln w="6350">
-            <a:solidFill>
-              <a:srgbClr val="2A3562"/>
-            </a:solidFill>
-            <a:prstDash val="solid"/>
-          </a:ln>
-        </p:spPr>
-      </p:sp>
-      <p:sp>
-        <p:nvSpPr>
-          <p:cNvPr id="30" name="Text 28"/>
-          <p:cNvSpPr/>
-          <p:nvPr/>
-        </p:nvSpPr>
-        <p:spPr>
-          <a:xfrm>
-            <a:off x="8513064" y="4434840"/>
-            <a:ext cx="3200400" cy="320040"/>
-          </a:xfrm>
-          <a:prstGeom prst="rect">
-            <a:avLst/>
-          </a:prstGeom>
-          <a:noFill/>
-          <a:ln/>
-        </p:spPr>
-        <p:txBody>
-          <a:bodyPr wrap="square" rtlCol="0" anchor="ctr"/>
-          <a:lstStyle/>
-          <a:p>
-            <a:pPr indent="0" marL="0">
-              <a:buNone/>
-            </a:pPr>
-            <a:r>
-              <a:rPr lang="en-US" sz="1100" b="1" dirty="0">
-                <a:solidFill>
-                  <a:srgbClr val="C9A24C"/>
-                </a:solidFill>
-                <a:latin typeface="Calibri" pitchFamily="34" charset="0"/>
-                <a:ea typeface="Calibri" pitchFamily="34" charset="-122"/>
-                <a:cs typeface="Calibri" pitchFamily="34" charset="-120"/>
-              </a:rPr>
-              <a:t>Upside</a:t>
-            </a:r>
-            <a:endParaRPr lang="en-US" sz="1100" dirty="0"/>
-          </a:p>
-        </p:txBody>
-      </p:sp>
-      <p:sp>
-        <p:nvSpPr>
-          <p:cNvPr id="31" name="Text 29"/>
-          <p:cNvSpPr/>
-          <p:nvPr/>
-        </p:nvSpPr>
-        <p:spPr>
-          <a:xfrm>
-            <a:off x="8513064" y="4754880"/>
-            <a:ext cx="3200400" cy="457200"/>
-          </a:xfrm>
-          <a:prstGeom prst="rect">
-            <a:avLst/>
-          </a:prstGeom>
-          <a:noFill/>
-          <a:ln/>
-        </p:spPr>
-        <p:txBody>
-          <a:bodyPr wrap="square" rtlCol="0" anchor="ctr"/>
-          <a:lstStyle/>
-          <a:p>
-            <a:pPr indent="0" marL="0">
-              <a:buNone/>
-            </a:pPr>
-            <a:r>
-              <a:rPr lang="en-US" sz="2200" dirty="0">
-                <a:solidFill>
-                  <a:srgbClr val="F5F1E8"/>
-                </a:solidFill>
-                <a:latin typeface="Georgia" pitchFamily="34" charset="0"/>
-                <a:ea typeface="Georgia" pitchFamily="34" charset="-122"/>
-                <a:cs typeface="Georgia" pitchFamily="34" charset="-120"/>
-              </a:rPr>
-              <a:t>$95M ARR</a:t>
-            </a:r>
-            <a:endParaRPr lang="en-US" sz="2200" dirty="0"/>
-          </a:p>
-        </p:txBody>
-      </p:sp>
-      <p:sp>
-        <p:nvSpPr>
-          <p:cNvPr id="32" name="Text 30"/>
-          <p:cNvSpPr/>
-          <p:nvPr/>
-        </p:nvSpPr>
-        <p:spPr>
-          <a:xfrm>
-            <a:off x="8513064" y="5212080"/>
-            <a:ext cx="3200400" cy="320040"/>
-          </a:xfrm>
-          <a:prstGeom prst="rect">
-            <a:avLst/>
-          </a:prstGeom>
-          <a:noFill/>
-          <a:ln/>
-        </p:spPr>
-        <p:txBody>
-          <a:bodyPr wrap="square" rtlCol="0" anchor="ctr"/>
-          <a:lstStyle/>
-          <a:p>
-            <a:pPr indent="0" marL="0">
-              <a:buNone/>
-            </a:pPr>
-            <a:r>
-              <a:rPr lang="en-US" sz="1100" dirty="0">
-                <a:solidFill>
-                  <a:srgbClr val="C8CFE0"/>
-                </a:solidFill>
-                <a:latin typeface="Calibri" pitchFamily="34" charset="0"/>
-                <a:ea typeface="Calibri" pitchFamily="34" charset="-122"/>
-                <a:cs typeface="Calibri" pitchFamily="34" charset="-120"/>
-              </a:rPr>
-              <a:t>~24,000 orgs</a:t>
-            </a:r>
-            <a:endParaRPr lang="en-US" sz="1100" dirty="0"/>
-          </a:p>
-        </p:txBody>
-      </p:sp>
-      <p:sp>
-        <p:nvSpPr>
-          <p:cNvPr id="33" name="Text 31"/>
-          <p:cNvSpPr/>
-          <p:nvPr/>
-        </p:nvSpPr>
-        <p:spPr>
-          <a:xfrm>
-            <a:off x="457200" y="6080760"/>
-            <a:ext cx="11277295" cy="320040"/>
-          </a:xfrm>
-          <a:prstGeom prst="rect">
-            <a:avLst/>
-          </a:prstGeom>
-          <a:noFill/>
-          <a:ln/>
-        </p:spPr>
-        <p:txBody>
-          <a:bodyPr wrap="square" rtlCol="0" anchor="ctr"/>
-          <a:lstStyle/>
-          <a:p>
-            <a:pPr indent="0" marL="0">
-              <a:buNone/>
-            </a:pPr>
-            <a:r>
-              <a:rPr lang="en-US" sz="850" i="1" dirty="0">
-                <a:solidFill>
-                  <a:srgbClr val="8892B0"/>
-                </a:solidFill>
-                <a:latin typeface="Calibri" pitchFamily="34" charset="0"/>
-                <a:ea typeface="Calibri" pitchFamily="34" charset="-122"/>
-                <a:cs typeface="Calibri" pitchFamily="34" charset="-120"/>
-              </a:rPr>
-              <a:t>All figures are strategic assumptions. Detailed 3-year model with sensitivity delivered separately (XLSX, Phase 3).</a:t>
-            </a:r>
-            <a:endParaRPr lang="en-US" sz="850" dirty="0"/>
-          </a:p>
-        </p:txBody>
-      </p:sp>
-      <p:sp>
-        <p:nvSpPr>
-          <p:cNvPr id="34" name="Shape 32"/>
-          <p:cNvSpPr/>
-          <p:nvPr/>
-        </p:nvSpPr>
-        <p:spPr>
-          <a:xfrm>
-            <a:off x="457200" y="6446520"/>
-            <a:ext cx="11277295" cy="0"/>
-          </a:xfrm>
-          <a:prstGeom prst="line">
-            <a:avLst/>
-          </a:prstGeom>
-          <a:noFill/>
-          <a:ln w="9525">
-            <a:solidFill>
-              <a:srgbClr val="2A3562"/>
-            </a:solidFill>
-            <a:prstDash val="solid"/>
-          </a:ln>
-        </p:spPr>
-      </p:sp>
-      <p:sp>
-        <p:nvSpPr>
-          <p:cNvPr id="35" name="Text 33"/>
-          <p:cNvSpPr/>
-          <p:nvPr/>
-        </p:nvSpPr>
-        <p:spPr>
-          <a:xfrm>
-            <a:off x="457200" y="6510528"/>
-            <a:ext cx="7315200" cy="274320"/>
-          </a:xfrm>
-          <a:prstGeom prst="rect">
-            <a:avLst/>
-          </a:prstGeom>
-          <a:noFill/>
-          <a:ln/>
-        </p:spPr>
-        <p:txBody>
-          <a:bodyPr wrap="square" rtlCol="0" anchor="ctr"/>
-          <a:lstStyle/>
-          <a:p>
-            <a:pPr indent="0" marL="0">
-              <a:buNone/>
-            </a:pPr>
-            <a:r>
-              <a:rPr lang="en-US" sz="900" spc="300" kern="0" dirty="0">
-                <a:solidFill>
-                  <a:srgbClr val="8892B0"/>
-                </a:solidFill>
-                <a:latin typeface="Calibri" pitchFamily="34" charset="0"/>
-                <a:ea typeface="Calibri" pitchFamily="34" charset="-122"/>
-                <a:cs typeface="Calibri" pitchFamily="34" charset="-120"/>
-              </a:rPr>
-              <a:t>GLOBAL OFFICE  /  CONFIDENTIAL INVESTOR MATERIALS</a:t>
-            </a:r>
-            <a:endParaRPr lang="en-US" sz="900" dirty="0"/>
-          </a:p>
-        </p:txBody>
-      </p:sp>
-      <p:sp>
-        <p:nvSpPr>
-          <p:cNvPr id="36" name="Text 34"/>
-          <p:cNvSpPr/>
-          <p:nvPr/>
-        </p:nvSpPr>
-        <p:spPr>
-          <a:xfrm>
-            <a:off x="9905695" y="6510528"/>
-            <a:ext cx="1828800" cy="274320"/>
-          </a:xfrm>
-          <a:prstGeom prst="rect">
-            <a:avLst/>
-          </a:prstGeom>
-          <a:noFill/>
-          <a:ln/>
-        </p:spPr>
-        <p:txBody>
-          <a:bodyPr wrap="square" rtlCol="0" anchor="ctr"/>
-          <a:lstStyle/>
-          <a:p>
-            <a:pPr algn="r" indent="0" marL="0">
-              <a:buNone/>
-            </a:pPr>
-            <a:r>
-              <a:rPr lang="en-US" sz="900" dirty="0">
-                <a:solidFill>
-                  <a:srgbClr val="C9A24C"/>
-                </a:solidFill>
-                <a:latin typeface="Consolas" pitchFamily="34" charset="0"/>
-                <a:ea typeface="Consolas" pitchFamily="34" charset="-122"/>
-                <a:cs typeface="Consolas" pitchFamily="34" charset="-120"/>
-              </a:rPr>
-              <a:t>14 / 22</a:t>
             </a:r>
             <a:endParaRPr lang="en-US" sz="900" dirty="0"/>
           </a:p>
@@ -9448,6 +7592,2068 @@
 
 <file path=ppt/slides/slide20.xml><?xml version="1.0" encoding="utf-8"?>
 <p:sld xmlns:a="http://schemas.openxmlformats.org/drawingml/2006/main" xmlns:r="http://schemas.openxmlformats.org/officeDocument/2006/relationships" xmlns:p="http://schemas.openxmlformats.org/presentationml/2006/main">
+  <p:cSld name="Slide 13">
+    <p:bg>
+      <p:bgPr>
+        <a:solidFill>
+          <a:srgbClr val="0B1533"/>
+        </a:solidFill>
+      </p:bgPr>
+    </p:bg>
+    <p:spTree>
+      <p:nvGrpSpPr>
+        <p:cNvPr id="1" name=""/>
+        <p:cNvGrpSpPr/>
+        <p:nvPr/>
+      </p:nvGrpSpPr>
+      <p:grpSpPr>
+        <a:xfrm>
+          <a:off x="0" y="0"/>
+          <a:ext cx="0" cy="0"/>
+          <a:chOff x="0" y="0"/>
+          <a:chExt cx="0" cy="0"/>
+        </a:xfrm>
+      </p:grpSpPr>
+      <p:sp>
+        <p:nvSpPr>
+          <p:cNvPr id="2" name="Text 0"/>
+          <p:cNvSpPr/>
+          <p:nvPr/>
+        </p:nvSpPr>
+        <p:spPr>
+          <a:xfrm>
+            <a:off x="457200" y="502920"/>
+            <a:ext cx="10972800" cy="274320"/>
+          </a:xfrm>
+          <a:prstGeom prst="rect">
+            <a:avLst/>
+          </a:prstGeom>
+          <a:noFill/>
+          <a:ln/>
+        </p:spPr>
+        <p:txBody>
+          <a:bodyPr wrap="square" rtlCol="0" anchor="ctr"/>
+          <a:lstStyle/>
+          <a:p>
+            <a:pPr indent="0" marL="0">
+              <a:buNone/>
+            </a:pPr>
+            <a:r>
+              <a:rPr lang="en-US" sz="1000" b="1" spc="600" kern="0" dirty="0">
+                <a:solidFill>
+                  <a:srgbClr val="C9A24C"/>
+                </a:solidFill>
+                <a:latin typeface="Calibri" pitchFamily="34" charset="0"/>
+                <a:ea typeface="Calibri" pitchFamily="34" charset="-122"/>
+                <a:cs typeface="Calibri" pitchFamily="34" charset="-120"/>
+              </a:rPr>
+              <a:t>DEFENSIBILITY</a:t>
+            </a:r>
+            <a:endParaRPr lang="en-US" sz="1000" dirty="0"/>
+          </a:p>
+        </p:txBody>
+      </p:sp>
+      <p:sp>
+        <p:nvSpPr>
+          <p:cNvPr id="3" name="Text 1"/>
+          <p:cNvSpPr/>
+          <p:nvPr/>
+        </p:nvSpPr>
+        <p:spPr>
+          <a:xfrm>
+            <a:off x="457200" y="868680"/>
+            <a:ext cx="10972800" cy="1005840"/>
+          </a:xfrm>
+          <a:prstGeom prst="rect">
+            <a:avLst/>
+          </a:prstGeom>
+          <a:noFill/>
+          <a:ln/>
+        </p:spPr>
+        <p:txBody>
+          <a:bodyPr wrap="square" rtlCol="0" anchor="t"/>
+          <a:lstStyle/>
+          <a:p>
+            <a:pPr indent="0" marL="0">
+              <a:buNone/>
+            </a:pPr>
+            <a:r>
+              <a:rPr lang="en-US" sz="4000" dirty="0">
+                <a:solidFill>
+                  <a:srgbClr val="F5F1E8"/>
+                </a:solidFill>
+                <a:latin typeface="Georgia" pitchFamily="34" charset="0"/>
+                <a:ea typeface="Georgia" pitchFamily="34" charset="-122"/>
+                <a:cs typeface="Georgia" pitchFamily="34" charset="-120"/>
+              </a:rPr>
+              <a:t>Four moats that compound over time.</a:t>
+            </a:r>
+            <a:endParaRPr lang="en-US" sz="4000" dirty="0"/>
+          </a:p>
+        </p:txBody>
+      </p:sp>
+      <p:sp>
+        <p:nvSpPr>
+          <p:cNvPr id="4" name="Shape 2"/>
+          <p:cNvSpPr/>
+          <p:nvPr/>
+        </p:nvSpPr>
+        <p:spPr>
+          <a:xfrm>
+            <a:off x="457200" y="2194560"/>
+            <a:ext cx="5394960" cy="1691640"/>
+          </a:xfrm>
+          <a:prstGeom prst="rect">
+            <a:avLst/>
+          </a:prstGeom>
+          <a:solidFill>
+            <a:srgbClr val="13204A"/>
+          </a:solidFill>
+          <a:ln w="6350">
+            <a:solidFill>
+              <a:srgbClr val="2A3562"/>
+            </a:solidFill>
+            <a:prstDash val="solid"/>
+          </a:ln>
+        </p:spPr>
+      </p:sp>
+      <p:sp>
+        <p:nvSpPr>
+          <p:cNvPr id="5" name="Text 3"/>
+          <p:cNvSpPr/>
+          <p:nvPr/>
+        </p:nvSpPr>
+        <p:spPr>
+          <a:xfrm>
+            <a:off x="731520" y="2377440"/>
+            <a:ext cx="4937760" cy="274320"/>
+          </a:xfrm>
+          <a:prstGeom prst="rect">
+            <a:avLst/>
+          </a:prstGeom>
+          <a:noFill/>
+          <a:ln/>
+        </p:spPr>
+        <p:txBody>
+          <a:bodyPr wrap="square" rtlCol="0" anchor="ctr"/>
+          <a:lstStyle/>
+          <a:p>
+            <a:pPr indent="0" marL="0">
+              <a:buNone/>
+            </a:pPr>
+            <a:r>
+              <a:rPr lang="en-US" sz="1000" b="1" spc="400" kern="0" dirty="0">
+                <a:solidFill>
+                  <a:srgbClr val="C9A24C"/>
+                </a:solidFill>
+                <a:latin typeface="Calibri" pitchFamily="34" charset="0"/>
+                <a:ea typeface="Calibri" pitchFamily="34" charset="-122"/>
+                <a:cs typeface="Calibri" pitchFamily="34" charset="-120"/>
+              </a:rPr>
+              <a:t>DATA</a:t>
+            </a:r>
+            <a:endParaRPr lang="en-US" sz="1000" dirty="0"/>
+          </a:p>
+        </p:txBody>
+      </p:sp>
+      <p:sp>
+        <p:nvSpPr>
+          <p:cNvPr id="6" name="Text 4"/>
+          <p:cNvSpPr/>
+          <p:nvPr/>
+        </p:nvSpPr>
+        <p:spPr>
+          <a:xfrm>
+            <a:off x="731520" y="2651760"/>
+            <a:ext cx="4937760" cy="411480"/>
+          </a:xfrm>
+          <a:prstGeom prst="rect">
+            <a:avLst/>
+          </a:prstGeom>
+          <a:noFill/>
+          <a:ln/>
+        </p:spPr>
+        <p:txBody>
+          <a:bodyPr wrap="square" rtlCol="0" anchor="ctr"/>
+          <a:lstStyle/>
+          <a:p>
+            <a:pPr indent="0" marL="0">
+              <a:buNone/>
+            </a:pPr>
+            <a:r>
+              <a:rPr lang="en-US" sz="2000" dirty="0">
+                <a:solidFill>
+                  <a:srgbClr val="F5F1E8"/>
+                </a:solidFill>
+                <a:latin typeface="Georgia" pitchFamily="34" charset="0"/>
+                <a:ea typeface="Georgia" pitchFamily="34" charset="-122"/>
+                <a:cs typeface="Georgia" pitchFamily="34" charset="-120"/>
+              </a:rPr>
+              <a:t>Intelligence flywheel</a:t>
+            </a:r>
+            <a:endParaRPr lang="en-US" sz="2000" dirty="0"/>
+          </a:p>
+        </p:txBody>
+      </p:sp>
+      <p:sp>
+        <p:nvSpPr>
+          <p:cNvPr id="7" name="Text 5"/>
+          <p:cNvSpPr/>
+          <p:nvPr/>
+        </p:nvSpPr>
+        <p:spPr>
+          <a:xfrm>
+            <a:off x="731520" y="3108960"/>
+            <a:ext cx="4937760" cy="777240"/>
+          </a:xfrm>
+          <a:prstGeom prst="rect">
+            <a:avLst/>
+          </a:prstGeom>
+          <a:noFill/>
+          <a:ln/>
+        </p:spPr>
+        <p:txBody>
+          <a:bodyPr wrap="square" rtlCol="0" anchor="ctr"/>
+          <a:lstStyle/>
+          <a:p>
+            <a:pPr indent="0" marL="0">
+              <a:buNone/>
+            </a:pPr>
+            <a:r>
+              <a:rPr lang="en-US" sz="1200" dirty="0">
+                <a:solidFill>
+                  <a:srgbClr val="C8CFE0"/>
+                </a:solidFill>
+                <a:latin typeface="Calibri" pitchFamily="34" charset="0"/>
+                <a:ea typeface="Calibri" pitchFamily="34" charset="-122"/>
+                <a:cs typeface="Calibri" pitchFamily="34" charset="-120"/>
+              </a:rPr>
+              <a:t>Every org strengthens the AI layer for every other org (patterns, anomalies, benchmarks) — anonymized and consented.</a:t>
+            </a:r>
+            <a:endParaRPr lang="en-US" sz="1200" dirty="0"/>
+          </a:p>
+        </p:txBody>
+      </p:sp>
+      <p:sp>
+        <p:nvSpPr>
+          <p:cNvPr id="8" name="Shape 6"/>
+          <p:cNvSpPr/>
+          <p:nvPr/>
+        </p:nvSpPr>
+        <p:spPr>
+          <a:xfrm>
+            <a:off x="6172200" y="2194560"/>
+            <a:ext cx="5394960" cy="1691640"/>
+          </a:xfrm>
+          <a:prstGeom prst="rect">
+            <a:avLst/>
+          </a:prstGeom>
+          <a:solidFill>
+            <a:srgbClr val="13204A"/>
+          </a:solidFill>
+          <a:ln w="6350">
+            <a:solidFill>
+              <a:srgbClr val="2A3562"/>
+            </a:solidFill>
+            <a:prstDash val="solid"/>
+          </a:ln>
+        </p:spPr>
+      </p:sp>
+      <p:sp>
+        <p:nvSpPr>
+          <p:cNvPr id="9" name="Text 7"/>
+          <p:cNvSpPr/>
+          <p:nvPr/>
+        </p:nvSpPr>
+        <p:spPr>
+          <a:xfrm>
+            <a:off x="6446520" y="2377440"/>
+            <a:ext cx="4937760" cy="274320"/>
+          </a:xfrm>
+          <a:prstGeom prst="rect">
+            <a:avLst/>
+          </a:prstGeom>
+          <a:noFill/>
+          <a:ln/>
+        </p:spPr>
+        <p:txBody>
+          <a:bodyPr wrap="square" rtlCol="0" anchor="ctr"/>
+          <a:lstStyle/>
+          <a:p>
+            <a:pPr indent="0" marL="0">
+              <a:buNone/>
+            </a:pPr>
+            <a:r>
+              <a:rPr lang="en-US" sz="1000" b="1" spc="400" kern="0" dirty="0">
+                <a:solidFill>
+                  <a:srgbClr val="C9A24C"/>
+                </a:solidFill>
+                <a:latin typeface="Calibri" pitchFamily="34" charset="0"/>
+                <a:ea typeface="Calibri" pitchFamily="34" charset="-122"/>
+                <a:cs typeface="Calibri" pitchFamily="34" charset="-120"/>
+              </a:rPr>
+              <a:t>WORKFLOW</a:t>
+            </a:r>
+            <a:endParaRPr lang="en-US" sz="1000" dirty="0"/>
+          </a:p>
+        </p:txBody>
+      </p:sp>
+      <p:sp>
+        <p:nvSpPr>
+          <p:cNvPr id="10" name="Text 8"/>
+          <p:cNvSpPr/>
+          <p:nvPr/>
+        </p:nvSpPr>
+        <p:spPr>
+          <a:xfrm>
+            <a:off x="6446520" y="2651760"/>
+            <a:ext cx="4937760" cy="411480"/>
+          </a:xfrm>
+          <a:prstGeom prst="rect">
+            <a:avLst/>
+          </a:prstGeom>
+          <a:noFill/>
+          <a:ln/>
+        </p:spPr>
+        <p:txBody>
+          <a:bodyPr wrap="square" rtlCol="0" anchor="ctr"/>
+          <a:lstStyle/>
+          <a:p>
+            <a:pPr indent="0" marL="0">
+              <a:buNone/>
+            </a:pPr>
+            <a:r>
+              <a:rPr lang="en-US" sz="2000" dirty="0">
+                <a:solidFill>
+                  <a:srgbClr val="F5F1E8"/>
+                </a:solidFill>
+                <a:latin typeface="Georgia" pitchFamily="34" charset="0"/>
+                <a:ea typeface="Georgia" pitchFamily="34" charset="-122"/>
+                <a:cs typeface="Georgia" pitchFamily="34" charset="-120"/>
+              </a:rPr>
+              <a:t>Operational lock-in</a:t>
+            </a:r>
+            <a:endParaRPr lang="en-US" sz="2000" dirty="0"/>
+          </a:p>
+        </p:txBody>
+      </p:sp>
+      <p:sp>
+        <p:nvSpPr>
+          <p:cNvPr id="11" name="Text 9"/>
+          <p:cNvSpPr/>
+          <p:nvPr/>
+        </p:nvSpPr>
+        <p:spPr>
+          <a:xfrm>
+            <a:off x="6446520" y="3108960"/>
+            <a:ext cx="4937760" cy="777240"/>
+          </a:xfrm>
+          <a:prstGeom prst="rect">
+            <a:avLst/>
+          </a:prstGeom>
+          <a:noFill/>
+          <a:ln/>
+        </p:spPr>
+        <p:txBody>
+          <a:bodyPr wrap="square" rtlCol="0" anchor="ctr"/>
+          <a:lstStyle/>
+          <a:p>
+            <a:pPr indent="0" marL="0">
+              <a:buNone/>
+            </a:pPr>
+            <a:r>
+              <a:rPr lang="en-US" sz="1200" dirty="0">
+                <a:solidFill>
+                  <a:srgbClr val="C8CFE0"/>
+                </a:solidFill>
+                <a:latin typeface="Calibri" pitchFamily="34" charset="0"/>
+                <a:ea typeface="Calibri" pitchFamily="34" charset="-122"/>
+                <a:cs typeface="Calibri" pitchFamily="34" charset="-120"/>
+              </a:rPr>
+              <a:t>The OS is where the work happens — attendance, tasks, approvals, payroll. Switching cost grows linearly with adoption.</a:t>
+            </a:r>
+            <a:endParaRPr lang="en-US" sz="1200" dirty="0"/>
+          </a:p>
+        </p:txBody>
+      </p:sp>
+      <p:sp>
+        <p:nvSpPr>
+          <p:cNvPr id="12" name="Shape 10"/>
+          <p:cNvSpPr/>
+          <p:nvPr/>
+        </p:nvSpPr>
+        <p:spPr>
+          <a:xfrm>
+            <a:off x="457200" y="4069080"/>
+            <a:ext cx="5394960" cy="1691640"/>
+          </a:xfrm>
+          <a:prstGeom prst="rect">
+            <a:avLst/>
+          </a:prstGeom>
+          <a:solidFill>
+            <a:srgbClr val="13204A"/>
+          </a:solidFill>
+          <a:ln w="6350">
+            <a:solidFill>
+              <a:srgbClr val="2A3562"/>
+            </a:solidFill>
+            <a:prstDash val="solid"/>
+          </a:ln>
+        </p:spPr>
+      </p:sp>
+      <p:sp>
+        <p:nvSpPr>
+          <p:cNvPr id="13" name="Text 11"/>
+          <p:cNvSpPr/>
+          <p:nvPr/>
+        </p:nvSpPr>
+        <p:spPr>
+          <a:xfrm>
+            <a:off x="731520" y="4251960"/>
+            <a:ext cx="4937760" cy="274320"/>
+          </a:xfrm>
+          <a:prstGeom prst="rect">
+            <a:avLst/>
+          </a:prstGeom>
+          <a:noFill/>
+          <a:ln/>
+        </p:spPr>
+        <p:txBody>
+          <a:bodyPr wrap="square" rtlCol="0" anchor="ctr"/>
+          <a:lstStyle/>
+          <a:p>
+            <a:pPr indent="0" marL="0">
+              <a:buNone/>
+            </a:pPr>
+            <a:r>
+              <a:rPr lang="en-US" sz="1000" b="1" spc="400" kern="0" dirty="0">
+                <a:solidFill>
+                  <a:srgbClr val="C9A24C"/>
+                </a:solidFill>
+                <a:latin typeface="Calibri" pitchFamily="34" charset="0"/>
+                <a:ea typeface="Calibri" pitchFamily="34" charset="-122"/>
+                <a:cs typeface="Calibri" pitchFamily="34" charset="-120"/>
+              </a:rPr>
+              <a:t>DISTRIBUTION</a:t>
+            </a:r>
+            <a:endParaRPr lang="en-US" sz="1000" dirty="0"/>
+          </a:p>
+        </p:txBody>
+      </p:sp>
+      <p:sp>
+        <p:nvSpPr>
+          <p:cNvPr id="14" name="Text 12"/>
+          <p:cNvSpPr/>
+          <p:nvPr/>
+        </p:nvSpPr>
+        <p:spPr>
+          <a:xfrm>
+            <a:off x="731520" y="4526280"/>
+            <a:ext cx="4937760" cy="411480"/>
+          </a:xfrm>
+          <a:prstGeom prst="rect">
+            <a:avLst/>
+          </a:prstGeom>
+          <a:noFill/>
+          <a:ln/>
+        </p:spPr>
+        <p:txBody>
+          <a:bodyPr wrap="square" rtlCol="0" anchor="ctr"/>
+          <a:lstStyle/>
+          <a:p>
+            <a:pPr indent="0" marL="0">
+              <a:buNone/>
+            </a:pPr>
+            <a:r>
+              <a:rPr lang="en-US" sz="2000" dirty="0">
+                <a:solidFill>
+                  <a:srgbClr val="F5F1E8"/>
+                </a:solidFill>
+                <a:latin typeface="Georgia" pitchFamily="34" charset="0"/>
+                <a:ea typeface="Georgia" pitchFamily="34" charset="-122"/>
+                <a:cs typeface="Georgia" pitchFamily="34" charset="-120"/>
+              </a:rPr>
+              <a:t>Local partner channel</a:t>
+            </a:r>
+            <a:endParaRPr lang="en-US" sz="2000" dirty="0"/>
+          </a:p>
+        </p:txBody>
+      </p:sp>
+      <p:sp>
+        <p:nvSpPr>
+          <p:cNvPr id="15" name="Text 13"/>
+          <p:cNvSpPr/>
+          <p:nvPr/>
+        </p:nvSpPr>
+        <p:spPr>
+          <a:xfrm>
+            <a:off x="731520" y="4983480"/>
+            <a:ext cx="4937760" cy="777240"/>
+          </a:xfrm>
+          <a:prstGeom prst="rect">
+            <a:avLst/>
+          </a:prstGeom>
+          <a:noFill/>
+          <a:ln/>
+        </p:spPr>
+        <p:txBody>
+          <a:bodyPr wrap="square" rtlCol="0" anchor="ctr"/>
+          <a:lstStyle/>
+          <a:p>
+            <a:pPr indent="0" marL="0">
+              <a:buNone/>
+            </a:pPr>
+            <a:r>
+              <a:rPr lang="en-US" sz="1200" dirty="0">
+                <a:solidFill>
+                  <a:srgbClr val="C8CFE0"/>
+                </a:solidFill>
+                <a:latin typeface="Calibri" pitchFamily="34" charset="0"/>
+                <a:ea typeface="Calibri" pitchFamily="34" charset="-122"/>
+                <a:cs typeface="Calibri" pitchFamily="34" charset="-120"/>
+              </a:rPr>
+              <a:t>Accounting firms, HR consultancies, business associations. A network global incumbents cannot economically replicate.</a:t>
+            </a:r>
+            <a:endParaRPr lang="en-US" sz="1200" dirty="0"/>
+          </a:p>
+        </p:txBody>
+      </p:sp>
+      <p:sp>
+        <p:nvSpPr>
+          <p:cNvPr id="16" name="Shape 14"/>
+          <p:cNvSpPr/>
+          <p:nvPr/>
+        </p:nvSpPr>
+        <p:spPr>
+          <a:xfrm>
+            <a:off x="6172200" y="4069080"/>
+            <a:ext cx="5394960" cy="1691640"/>
+          </a:xfrm>
+          <a:prstGeom prst="rect">
+            <a:avLst/>
+          </a:prstGeom>
+          <a:solidFill>
+            <a:srgbClr val="13204A"/>
+          </a:solidFill>
+          <a:ln w="6350">
+            <a:solidFill>
+              <a:srgbClr val="2A3562"/>
+            </a:solidFill>
+            <a:prstDash val="solid"/>
+          </a:ln>
+        </p:spPr>
+      </p:sp>
+      <p:sp>
+        <p:nvSpPr>
+          <p:cNvPr id="17" name="Text 15"/>
+          <p:cNvSpPr/>
+          <p:nvPr/>
+        </p:nvSpPr>
+        <p:spPr>
+          <a:xfrm>
+            <a:off x="6446520" y="4251960"/>
+            <a:ext cx="4937760" cy="274320"/>
+          </a:xfrm>
+          <a:prstGeom prst="rect">
+            <a:avLst/>
+          </a:prstGeom>
+          <a:noFill/>
+          <a:ln/>
+        </p:spPr>
+        <p:txBody>
+          <a:bodyPr wrap="square" rtlCol="0" anchor="ctr"/>
+          <a:lstStyle/>
+          <a:p>
+            <a:pPr indent="0" marL="0">
+              <a:buNone/>
+            </a:pPr>
+            <a:r>
+              <a:rPr lang="en-US" sz="1000" b="1" spc="400" kern="0" dirty="0">
+                <a:solidFill>
+                  <a:srgbClr val="C9A24C"/>
+                </a:solidFill>
+                <a:latin typeface="Calibri" pitchFamily="34" charset="0"/>
+                <a:ea typeface="Calibri" pitchFamily="34" charset="-122"/>
+                <a:cs typeface="Calibri" pitchFamily="34" charset="-120"/>
+              </a:rPr>
+              <a:t>COMPLIANCE</a:t>
+            </a:r>
+            <a:endParaRPr lang="en-US" sz="1000" dirty="0"/>
+          </a:p>
+        </p:txBody>
+      </p:sp>
+      <p:sp>
+        <p:nvSpPr>
+          <p:cNvPr id="18" name="Text 16"/>
+          <p:cNvSpPr/>
+          <p:nvPr/>
+        </p:nvSpPr>
+        <p:spPr>
+          <a:xfrm>
+            <a:off x="6446520" y="4526280"/>
+            <a:ext cx="4937760" cy="411480"/>
+          </a:xfrm>
+          <a:prstGeom prst="rect">
+            <a:avLst/>
+          </a:prstGeom>
+          <a:noFill/>
+          <a:ln/>
+        </p:spPr>
+        <p:txBody>
+          <a:bodyPr wrap="square" rtlCol="0" anchor="ctr"/>
+          <a:lstStyle/>
+          <a:p>
+            <a:pPr indent="0" marL="0">
+              <a:buNone/>
+            </a:pPr>
+            <a:r>
+              <a:rPr lang="en-US" sz="2000" dirty="0">
+                <a:solidFill>
+                  <a:srgbClr val="F5F1E8"/>
+                </a:solidFill>
+                <a:latin typeface="Georgia" pitchFamily="34" charset="0"/>
+                <a:ea typeface="Georgia" pitchFamily="34" charset="-122"/>
+                <a:cs typeface="Georgia" pitchFamily="34" charset="-120"/>
+              </a:rPr>
+              <a:t>Regulatory capital</a:t>
+            </a:r>
+            <a:endParaRPr lang="en-US" sz="2000" dirty="0"/>
+          </a:p>
+        </p:txBody>
+      </p:sp>
+      <p:sp>
+        <p:nvSpPr>
+          <p:cNvPr id="19" name="Text 17"/>
+          <p:cNvSpPr/>
+          <p:nvPr/>
+        </p:nvSpPr>
+        <p:spPr>
+          <a:xfrm>
+            <a:off x="6446520" y="4983480"/>
+            <a:ext cx="4937760" cy="777240"/>
+          </a:xfrm>
+          <a:prstGeom prst="rect">
+            <a:avLst/>
+          </a:prstGeom>
+          <a:noFill/>
+          <a:ln/>
+        </p:spPr>
+        <p:txBody>
+          <a:bodyPr wrap="square" rtlCol="0" anchor="ctr"/>
+          <a:lstStyle/>
+          <a:p>
+            <a:pPr indent="0" marL="0">
+              <a:buNone/>
+            </a:pPr>
+            <a:r>
+              <a:rPr lang="en-US" sz="1200" dirty="0">
+                <a:solidFill>
+                  <a:srgbClr val="C8CFE0"/>
+                </a:solidFill>
+                <a:latin typeface="Calibri" pitchFamily="34" charset="0"/>
+                <a:ea typeface="Calibri" pitchFamily="34" charset="-122"/>
+                <a:cs typeface="Calibri" pitchFamily="34" charset="-120"/>
+              </a:rPr>
+              <a:t>NDPR/GDPR-ready, MFA, audit trail, encryption. Table-stakes for HR/finance/health — a barrier to latecomers.</a:t>
+            </a:r>
+            <a:endParaRPr lang="en-US" sz="1200" dirty="0"/>
+          </a:p>
+        </p:txBody>
+      </p:sp>
+      <p:sp>
+        <p:nvSpPr>
+          <p:cNvPr id="20" name="Shape 18"/>
+          <p:cNvSpPr/>
+          <p:nvPr/>
+        </p:nvSpPr>
+        <p:spPr>
+          <a:xfrm>
+            <a:off x="457200" y="6446520"/>
+            <a:ext cx="11277295" cy="0"/>
+          </a:xfrm>
+          <a:prstGeom prst="line">
+            <a:avLst/>
+          </a:prstGeom>
+          <a:noFill/>
+          <a:ln w="9525">
+            <a:solidFill>
+              <a:srgbClr val="2A3562"/>
+            </a:solidFill>
+            <a:prstDash val="solid"/>
+          </a:ln>
+        </p:spPr>
+      </p:sp>
+      <p:sp>
+        <p:nvSpPr>
+          <p:cNvPr id="21" name="Text 19"/>
+          <p:cNvSpPr/>
+          <p:nvPr/>
+        </p:nvSpPr>
+        <p:spPr>
+          <a:xfrm>
+            <a:off x="457200" y="6510528"/>
+            <a:ext cx="7315200" cy="274320"/>
+          </a:xfrm>
+          <a:prstGeom prst="rect">
+            <a:avLst/>
+          </a:prstGeom>
+          <a:noFill/>
+          <a:ln/>
+        </p:spPr>
+        <p:txBody>
+          <a:bodyPr wrap="square" rtlCol="0" anchor="ctr"/>
+          <a:lstStyle/>
+          <a:p>
+            <a:pPr indent="0" marL="0">
+              <a:buNone/>
+            </a:pPr>
+            <a:r>
+              <a:rPr lang="en-US" sz="900" spc="300" kern="0" dirty="0">
+                <a:solidFill>
+                  <a:srgbClr val="8892B0"/>
+                </a:solidFill>
+                <a:latin typeface="Calibri" pitchFamily="34" charset="0"/>
+                <a:ea typeface="Calibri" pitchFamily="34" charset="-122"/>
+                <a:cs typeface="Calibri" pitchFamily="34" charset="-120"/>
+              </a:rPr>
+              <a:t>GLOBAL OFFICE  /  CONFIDENTIAL INVESTOR MATERIALS</a:t>
+            </a:r>
+            <a:endParaRPr lang="en-US" sz="900" dirty="0"/>
+          </a:p>
+        </p:txBody>
+      </p:sp>
+      <p:sp>
+        <p:nvSpPr>
+          <p:cNvPr id="22" name="Text 20"/>
+          <p:cNvSpPr/>
+          <p:nvPr/>
+        </p:nvSpPr>
+        <p:spPr>
+          <a:xfrm>
+            <a:off x="9905695" y="6510528"/>
+            <a:ext cx="1828800" cy="274320"/>
+          </a:xfrm>
+          <a:prstGeom prst="rect">
+            <a:avLst/>
+          </a:prstGeom>
+          <a:noFill/>
+          <a:ln/>
+        </p:spPr>
+        <p:txBody>
+          <a:bodyPr wrap="square" rtlCol="0" anchor="ctr"/>
+          <a:lstStyle/>
+          <a:p>
+            <a:pPr algn="r" indent="0" marL="0">
+              <a:buNone/>
+            </a:pPr>
+            <a:r>
+              <a:rPr lang="en-US" sz="900" dirty="0">
+                <a:solidFill>
+                  <a:srgbClr val="C9A24C"/>
+                </a:solidFill>
+                <a:latin typeface="Consolas" pitchFamily="34" charset="0"/>
+                <a:ea typeface="Consolas" pitchFamily="34" charset="-122"/>
+                <a:cs typeface="Consolas" pitchFamily="34" charset="-120"/>
+              </a:rPr>
+              <a:t>13 / 22</a:t>
+            </a:r>
+            <a:endParaRPr lang="en-US" sz="900" dirty="0"/>
+          </a:p>
+        </p:txBody>
+      </p:sp>
+    </p:spTree>
+  </p:cSld>
+  <p:clrMapOvr>
+    <a:masterClrMapping/>
+  </p:clrMapOvr>
+</p:sld>
+</file>
+
+<file path=ppt/slides/slide21.xml><?xml version="1.0" encoding="utf-8"?>
+<p:sld xmlns:a="http://schemas.openxmlformats.org/drawingml/2006/main" xmlns:r="http://schemas.openxmlformats.org/officeDocument/2006/relationships" xmlns:p="http://schemas.openxmlformats.org/presentationml/2006/main">
+  <p:cSld name="Slide 14">
+    <p:bg>
+      <p:bgPr>
+        <a:solidFill>
+          <a:srgbClr val="0B1533"/>
+        </a:solidFill>
+      </p:bgPr>
+    </p:bg>
+    <p:spTree>
+      <p:nvGrpSpPr>
+        <p:cNvPr id="1" name=""/>
+        <p:cNvGrpSpPr/>
+        <p:nvPr/>
+      </p:nvGrpSpPr>
+      <p:grpSpPr>
+        <a:xfrm>
+          <a:off x="0" y="0"/>
+          <a:ext cx="0" cy="0"/>
+          <a:chOff x="0" y="0"/>
+          <a:chExt cx="0" cy="0"/>
+        </a:xfrm>
+      </p:grpSpPr>
+      <p:sp>
+        <p:nvSpPr>
+          <p:cNvPr id="2" name="Text 0"/>
+          <p:cNvSpPr/>
+          <p:nvPr/>
+        </p:nvSpPr>
+        <p:spPr>
+          <a:xfrm>
+            <a:off x="457200" y="502920"/>
+            <a:ext cx="10972800" cy="274320"/>
+          </a:xfrm>
+          <a:prstGeom prst="rect">
+            <a:avLst/>
+          </a:prstGeom>
+          <a:noFill/>
+          <a:ln/>
+        </p:spPr>
+        <p:txBody>
+          <a:bodyPr wrap="square" rtlCol="0" anchor="ctr"/>
+          <a:lstStyle/>
+          <a:p>
+            <a:pPr indent="0" marL="0">
+              <a:buNone/>
+            </a:pPr>
+            <a:r>
+              <a:rPr lang="en-US" sz="1000" b="1" spc="600" kern="0" dirty="0">
+                <a:solidFill>
+                  <a:srgbClr val="C9A24C"/>
+                </a:solidFill>
+                <a:latin typeface="Calibri" pitchFamily="34" charset="0"/>
+                <a:ea typeface="Calibri" pitchFamily="34" charset="-122"/>
+                <a:cs typeface="Calibri" pitchFamily="34" charset="-120"/>
+              </a:rPr>
+              <a:t>FINANCIAL FRAMEWORK</a:t>
+            </a:r>
+            <a:endParaRPr lang="en-US" sz="1000" dirty="0"/>
+          </a:p>
+        </p:txBody>
+      </p:sp>
+      <p:sp>
+        <p:nvSpPr>
+          <p:cNvPr id="3" name="Text 1"/>
+          <p:cNvSpPr/>
+          <p:nvPr/>
+        </p:nvSpPr>
+        <p:spPr>
+          <a:xfrm>
+            <a:off x="457200" y="868680"/>
+            <a:ext cx="10972800" cy="1005840"/>
+          </a:xfrm>
+          <a:prstGeom prst="rect">
+            <a:avLst/>
+          </a:prstGeom>
+          <a:noFill/>
+          <a:ln/>
+        </p:spPr>
+        <p:txBody>
+          <a:bodyPr wrap="square" rtlCol="0" anchor="t"/>
+          <a:lstStyle/>
+          <a:p>
+            <a:pPr indent="0" marL="0">
+              <a:buNone/>
+            </a:pPr>
+            <a:r>
+              <a:rPr lang="en-US" sz="4000" dirty="0">
+                <a:solidFill>
+                  <a:srgbClr val="F5F1E8"/>
+                </a:solidFill>
+                <a:latin typeface="Georgia" pitchFamily="34" charset="0"/>
+                <a:ea typeface="Georgia" pitchFamily="34" charset="-122"/>
+                <a:cs typeface="Georgia" pitchFamily="34" charset="-120"/>
+              </a:rPr>
+              <a:t>Ranges, not fiction. Every assumption will be re-baselined against pilot data.</a:t>
+            </a:r>
+            <a:endParaRPr lang="en-US" sz="4000" dirty="0"/>
+          </a:p>
+        </p:txBody>
+      </p:sp>
+      <p:sp>
+        <p:nvSpPr>
+          <p:cNvPr id="4" name="Shape 2"/>
+          <p:cNvSpPr/>
+          <p:nvPr/>
+        </p:nvSpPr>
+        <p:spPr>
+          <a:xfrm>
+            <a:off x="457200" y="2194560"/>
+            <a:ext cx="2743200" cy="1463040"/>
+          </a:xfrm>
+          <a:prstGeom prst="rect">
+            <a:avLst/>
+          </a:prstGeom>
+          <a:solidFill>
+            <a:srgbClr val="13204A"/>
+          </a:solidFill>
+          <a:ln w="6350">
+            <a:solidFill>
+              <a:srgbClr val="2A3562"/>
+            </a:solidFill>
+            <a:prstDash val="solid"/>
+          </a:ln>
+        </p:spPr>
+      </p:sp>
+      <p:sp>
+        <p:nvSpPr>
+          <p:cNvPr id="5" name="Text 3"/>
+          <p:cNvSpPr/>
+          <p:nvPr/>
+        </p:nvSpPr>
+        <p:spPr>
+          <a:xfrm>
+            <a:off x="640080" y="2331720"/>
+            <a:ext cx="2468880" cy="320040"/>
+          </a:xfrm>
+          <a:prstGeom prst="rect">
+            <a:avLst/>
+          </a:prstGeom>
+          <a:noFill/>
+          <a:ln/>
+        </p:spPr>
+        <p:txBody>
+          <a:bodyPr wrap="square" rtlCol="0" anchor="ctr"/>
+          <a:lstStyle/>
+          <a:p>
+            <a:pPr indent="0" marL="0">
+              <a:buNone/>
+            </a:pPr>
+            <a:r>
+              <a:rPr lang="en-US" sz="1000" b="1" spc="300" kern="0" dirty="0">
+                <a:solidFill>
+                  <a:srgbClr val="C9A24C"/>
+                </a:solidFill>
+                <a:latin typeface="Calibri" pitchFamily="34" charset="0"/>
+                <a:ea typeface="Calibri" pitchFamily="34" charset="-122"/>
+                <a:cs typeface="Calibri" pitchFamily="34" charset="-120"/>
+              </a:rPr>
+              <a:t>Blended ARPO</a:t>
+            </a:r>
+            <a:endParaRPr lang="en-US" sz="1000" dirty="0"/>
+          </a:p>
+        </p:txBody>
+      </p:sp>
+      <p:sp>
+        <p:nvSpPr>
+          <p:cNvPr id="6" name="Text 4"/>
+          <p:cNvSpPr/>
+          <p:nvPr/>
+        </p:nvSpPr>
+        <p:spPr>
+          <a:xfrm>
+            <a:off x="640080" y="2651760"/>
+            <a:ext cx="2468880" cy="548640"/>
+          </a:xfrm>
+          <a:prstGeom prst="rect">
+            <a:avLst/>
+          </a:prstGeom>
+          <a:noFill/>
+          <a:ln/>
+        </p:spPr>
+        <p:txBody>
+          <a:bodyPr wrap="square" rtlCol="0" anchor="ctr"/>
+          <a:lstStyle/>
+          <a:p>
+            <a:pPr indent="0" marL="0">
+              <a:buNone/>
+            </a:pPr>
+            <a:r>
+              <a:rPr lang="en-US" sz="2600" dirty="0">
+                <a:solidFill>
+                  <a:srgbClr val="F5F1E8"/>
+                </a:solidFill>
+                <a:latin typeface="Georgia" pitchFamily="34" charset="0"/>
+                <a:ea typeface="Georgia" pitchFamily="34" charset="-122"/>
+                <a:cs typeface="Georgia" pitchFamily="34" charset="-120"/>
+              </a:rPr>
+              <a:t>$2.4–4.2K</a:t>
+            </a:r>
+            <a:endParaRPr lang="en-US" sz="2600" dirty="0"/>
+          </a:p>
+        </p:txBody>
+      </p:sp>
+      <p:sp>
+        <p:nvSpPr>
+          <p:cNvPr id="7" name="Text 5"/>
+          <p:cNvSpPr/>
+          <p:nvPr/>
+        </p:nvSpPr>
+        <p:spPr>
+          <a:xfrm>
+            <a:off x="640080" y="3246120"/>
+            <a:ext cx="2468880" cy="365760"/>
+          </a:xfrm>
+          <a:prstGeom prst="rect">
+            <a:avLst/>
+          </a:prstGeom>
+          <a:noFill/>
+          <a:ln/>
+        </p:spPr>
+        <p:txBody>
+          <a:bodyPr wrap="square" rtlCol="0" anchor="ctr"/>
+          <a:lstStyle/>
+          <a:p>
+            <a:pPr indent="0" marL="0">
+              <a:buNone/>
+            </a:pPr>
+            <a:r>
+              <a:rPr lang="en-US" sz="1000" dirty="0">
+                <a:solidFill>
+                  <a:srgbClr val="8892B0"/>
+                </a:solidFill>
+                <a:latin typeface="Calibri" pitchFamily="34" charset="0"/>
+                <a:ea typeface="Calibri" pitchFamily="34" charset="-122"/>
+                <a:cs typeface="Calibri" pitchFamily="34" charset="-120"/>
+              </a:rPr>
+              <a:t>per organization per year</a:t>
+            </a:r>
+            <a:endParaRPr lang="en-US" sz="1000" dirty="0"/>
+          </a:p>
+        </p:txBody>
+      </p:sp>
+      <p:sp>
+        <p:nvSpPr>
+          <p:cNvPr id="8" name="Shape 6"/>
+          <p:cNvSpPr/>
+          <p:nvPr/>
+        </p:nvSpPr>
+        <p:spPr>
+          <a:xfrm>
+            <a:off x="3383280" y="2194560"/>
+            <a:ext cx="2743200" cy="1463040"/>
+          </a:xfrm>
+          <a:prstGeom prst="rect">
+            <a:avLst/>
+          </a:prstGeom>
+          <a:solidFill>
+            <a:srgbClr val="13204A"/>
+          </a:solidFill>
+          <a:ln w="6350">
+            <a:solidFill>
+              <a:srgbClr val="2A3562"/>
+            </a:solidFill>
+            <a:prstDash val="solid"/>
+          </a:ln>
+        </p:spPr>
+      </p:sp>
+      <p:sp>
+        <p:nvSpPr>
+          <p:cNvPr id="9" name="Text 7"/>
+          <p:cNvSpPr/>
+          <p:nvPr/>
+        </p:nvSpPr>
+        <p:spPr>
+          <a:xfrm>
+            <a:off x="3566160" y="2331720"/>
+            <a:ext cx="2468880" cy="320040"/>
+          </a:xfrm>
+          <a:prstGeom prst="rect">
+            <a:avLst/>
+          </a:prstGeom>
+          <a:noFill/>
+          <a:ln/>
+        </p:spPr>
+        <p:txBody>
+          <a:bodyPr wrap="square" rtlCol="0" anchor="ctr"/>
+          <a:lstStyle/>
+          <a:p>
+            <a:pPr indent="0" marL="0">
+              <a:buNone/>
+            </a:pPr>
+            <a:r>
+              <a:rPr lang="en-US" sz="1000" b="1" spc="300" kern="0" dirty="0">
+                <a:solidFill>
+                  <a:srgbClr val="C9A24C"/>
+                </a:solidFill>
+                <a:latin typeface="Calibri" pitchFamily="34" charset="0"/>
+                <a:ea typeface="Calibri" pitchFamily="34" charset="-122"/>
+                <a:cs typeface="Calibri" pitchFamily="34" charset="-120"/>
+              </a:rPr>
+              <a:t>Gross Margin</a:t>
+            </a:r>
+            <a:endParaRPr lang="en-US" sz="1000" dirty="0"/>
+          </a:p>
+        </p:txBody>
+      </p:sp>
+      <p:sp>
+        <p:nvSpPr>
+          <p:cNvPr id="10" name="Text 8"/>
+          <p:cNvSpPr/>
+          <p:nvPr/>
+        </p:nvSpPr>
+        <p:spPr>
+          <a:xfrm>
+            <a:off x="3566160" y="2651760"/>
+            <a:ext cx="2468880" cy="548640"/>
+          </a:xfrm>
+          <a:prstGeom prst="rect">
+            <a:avLst/>
+          </a:prstGeom>
+          <a:noFill/>
+          <a:ln/>
+        </p:spPr>
+        <p:txBody>
+          <a:bodyPr wrap="square" rtlCol="0" anchor="ctr"/>
+          <a:lstStyle/>
+          <a:p>
+            <a:pPr indent="0" marL="0">
+              <a:buNone/>
+            </a:pPr>
+            <a:r>
+              <a:rPr lang="en-US" sz="2600" dirty="0">
+                <a:solidFill>
+                  <a:srgbClr val="F5F1E8"/>
+                </a:solidFill>
+                <a:latin typeface="Georgia" pitchFamily="34" charset="0"/>
+                <a:ea typeface="Georgia" pitchFamily="34" charset="-122"/>
+                <a:cs typeface="Georgia" pitchFamily="34" charset="-120"/>
+              </a:rPr>
+              <a:t>75–82%</a:t>
+            </a:r>
+            <a:endParaRPr lang="en-US" sz="2600" dirty="0"/>
+          </a:p>
+        </p:txBody>
+      </p:sp>
+      <p:sp>
+        <p:nvSpPr>
+          <p:cNvPr id="11" name="Text 9"/>
+          <p:cNvSpPr/>
+          <p:nvPr/>
+        </p:nvSpPr>
+        <p:spPr>
+          <a:xfrm>
+            <a:off x="3566160" y="3246120"/>
+            <a:ext cx="2468880" cy="365760"/>
+          </a:xfrm>
+          <a:prstGeom prst="rect">
+            <a:avLst/>
+          </a:prstGeom>
+          <a:noFill/>
+          <a:ln/>
+        </p:spPr>
+        <p:txBody>
+          <a:bodyPr wrap="square" rtlCol="0" anchor="ctr"/>
+          <a:lstStyle/>
+          <a:p>
+            <a:pPr indent="0" marL="0">
+              <a:buNone/>
+            </a:pPr>
+            <a:r>
+              <a:rPr lang="en-US" sz="1000" dirty="0">
+                <a:solidFill>
+                  <a:srgbClr val="8892B0"/>
+                </a:solidFill>
+                <a:latin typeface="Calibri" pitchFamily="34" charset="0"/>
+                <a:ea typeface="Calibri" pitchFamily="34" charset="-122"/>
+                <a:cs typeface="Calibri" pitchFamily="34" charset="-120"/>
+              </a:rPr>
+              <a:t>vertical SaaS benchmark</a:t>
+            </a:r>
+            <a:endParaRPr lang="en-US" sz="1000" dirty="0"/>
+          </a:p>
+        </p:txBody>
+      </p:sp>
+      <p:sp>
+        <p:nvSpPr>
+          <p:cNvPr id="12" name="Shape 10"/>
+          <p:cNvSpPr/>
+          <p:nvPr/>
+        </p:nvSpPr>
+        <p:spPr>
+          <a:xfrm>
+            <a:off x="6309360" y="2194560"/>
+            <a:ext cx="2743200" cy="1463040"/>
+          </a:xfrm>
+          <a:prstGeom prst="rect">
+            <a:avLst/>
+          </a:prstGeom>
+          <a:solidFill>
+            <a:srgbClr val="13204A"/>
+          </a:solidFill>
+          <a:ln w="6350">
+            <a:solidFill>
+              <a:srgbClr val="2A3562"/>
+            </a:solidFill>
+            <a:prstDash val="solid"/>
+          </a:ln>
+        </p:spPr>
+      </p:sp>
+      <p:sp>
+        <p:nvSpPr>
+          <p:cNvPr id="13" name="Text 11"/>
+          <p:cNvSpPr/>
+          <p:nvPr/>
+        </p:nvSpPr>
+        <p:spPr>
+          <a:xfrm>
+            <a:off x="6492240" y="2331720"/>
+            <a:ext cx="2468880" cy="320040"/>
+          </a:xfrm>
+          <a:prstGeom prst="rect">
+            <a:avLst/>
+          </a:prstGeom>
+          <a:noFill/>
+          <a:ln/>
+        </p:spPr>
+        <p:txBody>
+          <a:bodyPr wrap="square" rtlCol="0" anchor="ctr"/>
+          <a:lstStyle/>
+          <a:p>
+            <a:pPr indent="0" marL="0">
+              <a:buNone/>
+            </a:pPr>
+            <a:r>
+              <a:rPr lang="en-US" sz="1000" b="1" spc="300" kern="0" dirty="0">
+                <a:solidFill>
+                  <a:srgbClr val="C9A24C"/>
+                </a:solidFill>
+                <a:latin typeface="Calibri" pitchFamily="34" charset="0"/>
+                <a:ea typeface="Calibri" pitchFamily="34" charset="-122"/>
+                <a:cs typeface="Calibri" pitchFamily="34" charset="-120"/>
+              </a:rPr>
+              <a:t>CAC Payback</a:t>
+            </a:r>
+            <a:endParaRPr lang="en-US" sz="1000" dirty="0"/>
+          </a:p>
+        </p:txBody>
+      </p:sp>
+      <p:sp>
+        <p:nvSpPr>
+          <p:cNvPr id="14" name="Text 12"/>
+          <p:cNvSpPr/>
+          <p:nvPr/>
+        </p:nvSpPr>
+        <p:spPr>
+          <a:xfrm>
+            <a:off x="6492240" y="2651760"/>
+            <a:ext cx="2468880" cy="548640"/>
+          </a:xfrm>
+          <a:prstGeom prst="rect">
+            <a:avLst/>
+          </a:prstGeom>
+          <a:noFill/>
+          <a:ln/>
+        </p:spPr>
+        <p:txBody>
+          <a:bodyPr wrap="square" rtlCol="0" anchor="ctr"/>
+          <a:lstStyle/>
+          <a:p>
+            <a:pPr indent="0" marL="0">
+              <a:buNone/>
+            </a:pPr>
+            <a:r>
+              <a:rPr lang="en-US" sz="2600" dirty="0">
+                <a:solidFill>
+                  <a:srgbClr val="F5F1E8"/>
+                </a:solidFill>
+                <a:latin typeface="Georgia" pitchFamily="34" charset="0"/>
+                <a:ea typeface="Georgia" pitchFamily="34" charset="-122"/>
+                <a:cs typeface="Georgia" pitchFamily="34" charset="-120"/>
+              </a:rPr>
+              <a:t>10–14 mo</a:t>
+            </a:r>
+            <a:endParaRPr lang="en-US" sz="2600" dirty="0"/>
+          </a:p>
+        </p:txBody>
+      </p:sp>
+      <p:sp>
+        <p:nvSpPr>
+          <p:cNvPr id="15" name="Text 13"/>
+          <p:cNvSpPr/>
+          <p:nvPr/>
+        </p:nvSpPr>
+        <p:spPr>
+          <a:xfrm>
+            <a:off x="6492240" y="3246120"/>
+            <a:ext cx="2468880" cy="365760"/>
+          </a:xfrm>
+          <a:prstGeom prst="rect">
+            <a:avLst/>
+          </a:prstGeom>
+          <a:noFill/>
+          <a:ln/>
+        </p:spPr>
+        <p:txBody>
+          <a:bodyPr wrap="square" rtlCol="0" anchor="ctr"/>
+          <a:lstStyle/>
+          <a:p>
+            <a:pPr indent="0" marL="0">
+              <a:buNone/>
+            </a:pPr>
+            <a:r>
+              <a:rPr lang="en-US" sz="1000" dirty="0">
+                <a:solidFill>
+                  <a:srgbClr val="8892B0"/>
+                </a:solidFill>
+                <a:latin typeface="Calibri" pitchFamily="34" charset="0"/>
+                <a:ea typeface="Calibri" pitchFamily="34" charset="-122"/>
+                <a:cs typeface="Calibri" pitchFamily="34" charset="-120"/>
+              </a:rPr>
+              <a:t>Growth-tier assumption</a:t>
+            </a:r>
+            <a:endParaRPr lang="en-US" sz="1000" dirty="0"/>
+          </a:p>
+        </p:txBody>
+      </p:sp>
+      <p:sp>
+        <p:nvSpPr>
+          <p:cNvPr id="16" name="Shape 14"/>
+          <p:cNvSpPr/>
+          <p:nvPr/>
+        </p:nvSpPr>
+        <p:spPr>
+          <a:xfrm>
+            <a:off x="9235440" y="2194560"/>
+            <a:ext cx="2743200" cy="1463040"/>
+          </a:xfrm>
+          <a:prstGeom prst="rect">
+            <a:avLst/>
+          </a:prstGeom>
+          <a:solidFill>
+            <a:srgbClr val="13204A"/>
+          </a:solidFill>
+          <a:ln w="6350">
+            <a:solidFill>
+              <a:srgbClr val="2A3562"/>
+            </a:solidFill>
+            <a:prstDash val="solid"/>
+          </a:ln>
+        </p:spPr>
+      </p:sp>
+      <p:sp>
+        <p:nvSpPr>
+          <p:cNvPr id="17" name="Text 15"/>
+          <p:cNvSpPr/>
+          <p:nvPr/>
+        </p:nvSpPr>
+        <p:spPr>
+          <a:xfrm>
+            <a:off x="9418320" y="2331720"/>
+            <a:ext cx="2468880" cy="320040"/>
+          </a:xfrm>
+          <a:prstGeom prst="rect">
+            <a:avLst/>
+          </a:prstGeom>
+          <a:noFill/>
+          <a:ln/>
+        </p:spPr>
+        <p:txBody>
+          <a:bodyPr wrap="square" rtlCol="0" anchor="ctr"/>
+          <a:lstStyle/>
+          <a:p>
+            <a:pPr indent="0" marL="0">
+              <a:buNone/>
+            </a:pPr>
+            <a:r>
+              <a:rPr lang="en-US" sz="1000" b="1" spc="300" kern="0" dirty="0">
+                <a:solidFill>
+                  <a:srgbClr val="C9A24C"/>
+                </a:solidFill>
+                <a:latin typeface="Calibri" pitchFamily="34" charset="0"/>
+                <a:ea typeface="Calibri" pitchFamily="34" charset="-122"/>
+                <a:cs typeface="Calibri" pitchFamily="34" charset="-120"/>
+              </a:rPr>
+              <a:t>Net Revenue Retention</a:t>
+            </a:r>
+            <a:endParaRPr lang="en-US" sz="1000" dirty="0"/>
+          </a:p>
+        </p:txBody>
+      </p:sp>
+      <p:sp>
+        <p:nvSpPr>
+          <p:cNvPr id="18" name="Text 16"/>
+          <p:cNvSpPr/>
+          <p:nvPr/>
+        </p:nvSpPr>
+        <p:spPr>
+          <a:xfrm>
+            <a:off x="9418320" y="2651760"/>
+            <a:ext cx="2468880" cy="548640"/>
+          </a:xfrm>
+          <a:prstGeom prst="rect">
+            <a:avLst/>
+          </a:prstGeom>
+          <a:noFill/>
+          <a:ln/>
+        </p:spPr>
+        <p:txBody>
+          <a:bodyPr wrap="square" rtlCol="0" anchor="ctr"/>
+          <a:lstStyle/>
+          <a:p>
+            <a:pPr indent="0" marL="0">
+              <a:buNone/>
+            </a:pPr>
+            <a:r>
+              <a:rPr lang="en-US" sz="2600" dirty="0">
+                <a:solidFill>
+                  <a:srgbClr val="F5F1E8"/>
+                </a:solidFill>
+                <a:latin typeface="Georgia" pitchFamily="34" charset="0"/>
+                <a:ea typeface="Georgia" pitchFamily="34" charset="-122"/>
+                <a:cs typeface="Georgia" pitchFamily="34" charset="-120"/>
+              </a:rPr>
+              <a:t>108–120%</a:t>
+            </a:r>
+            <a:endParaRPr lang="en-US" sz="2600" dirty="0"/>
+          </a:p>
+        </p:txBody>
+      </p:sp>
+      <p:sp>
+        <p:nvSpPr>
+          <p:cNvPr id="19" name="Text 17"/>
+          <p:cNvSpPr/>
+          <p:nvPr/>
+        </p:nvSpPr>
+        <p:spPr>
+          <a:xfrm>
+            <a:off x="9418320" y="3246120"/>
+            <a:ext cx="2468880" cy="365760"/>
+          </a:xfrm>
+          <a:prstGeom prst="rect">
+            <a:avLst/>
+          </a:prstGeom>
+          <a:noFill/>
+          <a:ln/>
+        </p:spPr>
+        <p:txBody>
+          <a:bodyPr wrap="square" rtlCol="0" anchor="ctr"/>
+          <a:lstStyle/>
+          <a:p>
+            <a:pPr indent="0" marL="0">
+              <a:buNone/>
+            </a:pPr>
+            <a:r>
+              <a:rPr lang="en-US" sz="1000" dirty="0">
+                <a:solidFill>
+                  <a:srgbClr val="8892B0"/>
+                </a:solidFill>
+                <a:latin typeface="Calibri" pitchFamily="34" charset="0"/>
+                <a:ea typeface="Calibri" pitchFamily="34" charset="-122"/>
+                <a:cs typeface="Calibri" pitchFamily="34" charset="-120"/>
+              </a:rPr>
+              <a:t>target once Scale tier lands</a:t>
+            </a:r>
+            <a:endParaRPr lang="en-US" sz="1000" dirty="0"/>
+          </a:p>
+        </p:txBody>
+      </p:sp>
+      <p:sp>
+        <p:nvSpPr>
+          <p:cNvPr id="20" name="Text 18"/>
+          <p:cNvSpPr/>
+          <p:nvPr/>
+        </p:nvSpPr>
+        <p:spPr>
+          <a:xfrm>
+            <a:off x="457200" y="4023360"/>
+            <a:ext cx="5486400" cy="274320"/>
+          </a:xfrm>
+          <a:prstGeom prst="rect">
+            <a:avLst/>
+          </a:prstGeom>
+          <a:noFill/>
+          <a:ln/>
+        </p:spPr>
+        <p:txBody>
+          <a:bodyPr wrap="square" rtlCol="0" anchor="ctr"/>
+          <a:lstStyle/>
+          <a:p>
+            <a:pPr indent="0" marL="0">
+              <a:buNone/>
+            </a:pPr>
+            <a:r>
+              <a:rPr lang="en-US" sz="1000" b="1" spc="400" kern="0" dirty="0">
+                <a:solidFill>
+                  <a:srgbClr val="C9A24C"/>
+                </a:solidFill>
+                <a:latin typeface="Calibri" pitchFamily="34" charset="0"/>
+                <a:ea typeface="Calibri" pitchFamily="34" charset="-122"/>
+                <a:cs typeface="Calibri" pitchFamily="34" charset="-120"/>
+              </a:rPr>
+              <a:t>YEAR 5 SCENARIO ARR</a:t>
+            </a:r>
+            <a:endParaRPr lang="en-US" sz="1000" dirty="0"/>
+          </a:p>
+        </p:txBody>
+      </p:sp>
+      <p:sp>
+        <p:nvSpPr>
+          <p:cNvPr id="21" name="Shape 19"/>
+          <p:cNvSpPr/>
+          <p:nvPr/>
+        </p:nvSpPr>
+        <p:spPr>
+          <a:xfrm>
+            <a:off x="457200" y="4343400"/>
+            <a:ext cx="3657600" cy="1188720"/>
+          </a:xfrm>
+          <a:prstGeom prst="rect">
+            <a:avLst/>
+          </a:prstGeom>
+          <a:solidFill>
+            <a:srgbClr val="13204A"/>
+          </a:solidFill>
+          <a:ln w="6350">
+            <a:solidFill>
+              <a:srgbClr val="2A3562"/>
+            </a:solidFill>
+            <a:prstDash val="solid"/>
+          </a:ln>
+        </p:spPr>
+      </p:sp>
+      <p:sp>
+        <p:nvSpPr>
+          <p:cNvPr id="22" name="Text 20"/>
+          <p:cNvSpPr/>
+          <p:nvPr/>
+        </p:nvSpPr>
+        <p:spPr>
+          <a:xfrm>
+            <a:off x="685800" y="4434840"/>
+            <a:ext cx="3200400" cy="320040"/>
+          </a:xfrm>
+          <a:prstGeom prst="rect">
+            <a:avLst/>
+          </a:prstGeom>
+          <a:noFill/>
+          <a:ln/>
+        </p:spPr>
+        <p:txBody>
+          <a:bodyPr wrap="square" rtlCol="0" anchor="ctr"/>
+          <a:lstStyle/>
+          <a:p>
+            <a:pPr indent="0" marL="0">
+              <a:buNone/>
+            </a:pPr>
+            <a:r>
+              <a:rPr lang="en-US" sz="1100" b="1" dirty="0">
+                <a:solidFill>
+                  <a:srgbClr val="C9A24C"/>
+                </a:solidFill>
+                <a:latin typeface="Calibri" pitchFamily="34" charset="0"/>
+                <a:ea typeface="Calibri" pitchFamily="34" charset="-122"/>
+                <a:cs typeface="Calibri" pitchFamily="34" charset="-120"/>
+              </a:rPr>
+              <a:t>Conservative</a:t>
+            </a:r>
+            <a:endParaRPr lang="en-US" sz="1100" dirty="0"/>
+          </a:p>
+        </p:txBody>
+      </p:sp>
+      <p:sp>
+        <p:nvSpPr>
+          <p:cNvPr id="23" name="Text 21"/>
+          <p:cNvSpPr/>
+          <p:nvPr/>
+        </p:nvSpPr>
+        <p:spPr>
+          <a:xfrm>
+            <a:off x="685800" y="4754880"/>
+            <a:ext cx="3200400" cy="457200"/>
+          </a:xfrm>
+          <a:prstGeom prst="rect">
+            <a:avLst/>
+          </a:prstGeom>
+          <a:noFill/>
+          <a:ln/>
+        </p:spPr>
+        <p:txBody>
+          <a:bodyPr wrap="square" rtlCol="0" anchor="ctr"/>
+          <a:lstStyle/>
+          <a:p>
+            <a:pPr indent="0" marL="0">
+              <a:buNone/>
+            </a:pPr>
+            <a:r>
+              <a:rPr lang="en-US" sz="2200" dirty="0">
+                <a:solidFill>
+                  <a:srgbClr val="F5F1E8"/>
+                </a:solidFill>
+                <a:latin typeface="Georgia" pitchFamily="34" charset="0"/>
+                <a:ea typeface="Georgia" pitchFamily="34" charset="-122"/>
+                <a:cs typeface="Georgia" pitchFamily="34" charset="-120"/>
+              </a:rPr>
+              <a:t>$18M ARR</a:t>
+            </a:r>
+            <a:endParaRPr lang="en-US" sz="2200" dirty="0"/>
+          </a:p>
+        </p:txBody>
+      </p:sp>
+      <p:sp>
+        <p:nvSpPr>
+          <p:cNvPr id="24" name="Text 22"/>
+          <p:cNvSpPr/>
+          <p:nvPr/>
+        </p:nvSpPr>
+        <p:spPr>
+          <a:xfrm>
+            <a:off x="685800" y="5212080"/>
+            <a:ext cx="3200400" cy="320040"/>
+          </a:xfrm>
+          <a:prstGeom prst="rect">
+            <a:avLst/>
+          </a:prstGeom>
+          <a:noFill/>
+          <a:ln/>
+        </p:spPr>
+        <p:txBody>
+          <a:bodyPr wrap="square" rtlCol="0" anchor="ctr"/>
+          <a:lstStyle/>
+          <a:p>
+            <a:pPr indent="0" marL="0">
+              <a:buNone/>
+            </a:pPr>
+            <a:r>
+              <a:rPr lang="en-US" sz="1100" dirty="0">
+                <a:solidFill>
+                  <a:srgbClr val="C8CFE0"/>
+                </a:solidFill>
+                <a:latin typeface="Calibri" pitchFamily="34" charset="0"/>
+                <a:ea typeface="Calibri" pitchFamily="34" charset="-122"/>
+                <a:cs typeface="Calibri" pitchFamily="34" charset="-120"/>
+              </a:rPr>
+              <a:t>~5,000 orgs</a:t>
+            </a:r>
+            <a:endParaRPr lang="en-US" sz="1100" dirty="0"/>
+          </a:p>
+        </p:txBody>
+      </p:sp>
+      <p:sp>
+        <p:nvSpPr>
+          <p:cNvPr id="25" name="Shape 23"/>
+          <p:cNvSpPr/>
+          <p:nvPr/>
+        </p:nvSpPr>
+        <p:spPr>
+          <a:xfrm>
+            <a:off x="4370832" y="4343400"/>
+            <a:ext cx="3657600" cy="1188720"/>
+          </a:xfrm>
+          <a:prstGeom prst="rect">
+            <a:avLst/>
+          </a:prstGeom>
+          <a:solidFill>
+            <a:srgbClr val="13204A"/>
+          </a:solidFill>
+          <a:ln w="6350">
+            <a:solidFill>
+              <a:srgbClr val="2A3562"/>
+            </a:solidFill>
+            <a:prstDash val="solid"/>
+          </a:ln>
+        </p:spPr>
+      </p:sp>
+      <p:sp>
+        <p:nvSpPr>
+          <p:cNvPr id="26" name="Text 24"/>
+          <p:cNvSpPr/>
+          <p:nvPr/>
+        </p:nvSpPr>
+        <p:spPr>
+          <a:xfrm>
+            <a:off x="4599432" y="4434840"/>
+            <a:ext cx="3200400" cy="320040"/>
+          </a:xfrm>
+          <a:prstGeom prst="rect">
+            <a:avLst/>
+          </a:prstGeom>
+          <a:noFill/>
+          <a:ln/>
+        </p:spPr>
+        <p:txBody>
+          <a:bodyPr wrap="square" rtlCol="0" anchor="ctr"/>
+          <a:lstStyle/>
+          <a:p>
+            <a:pPr indent="0" marL="0">
+              <a:buNone/>
+            </a:pPr>
+            <a:r>
+              <a:rPr lang="en-US" sz="1100" b="1" dirty="0">
+                <a:solidFill>
+                  <a:srgbClr val="C9A24C"/>
+                </a:solidFill>
+                <a:latin typeface="Calibri" pitchFamily="34" charset="0"/>
+                <a:ea typeface="Calibri" pitchFamily="34" charset="-122"/>
+                <a:cs typeface="Calibri" pitchFamily="34" charset="-120"/>
+              </a:rPr>
+              <a:t>Base</a:t>
+            </a:r>
+            <a:endParaRPr lang="en-US" sz="1100" dirty="0"/>
+          </a:p>
+        </p:txBody>
+      </p:sp>
+      <p:sp>
+        <p:nvSpPr>
+          <p:cNvPr id="27" name="Text 25"/>
+          <p:cNvSpPr/>
+          <p:nvPr/>
+        </p:nvSpPr>
+        <p:spPr>
+          <a:xfrm>
+            <a:off x="4599432" y="4754880"/>
+            <a:ext cx="3200400" cy="457200"/>
+          </a:xfrm>
+          <a:prstGeom prst="rect">
+            <a:avLst/>
+          </a:prstGeom>
+          <a:noFill/>
+          <a:ln/>
+        </p:spPr>
+        <p:txBody>
+          <a:bodyPr wrap="square" rtlCol="0" anchor="ctr"/>
+          <a:lstStyle/>
+          <a:p>
+            <a:pPr indent="0" marL="0">
+              <a:buNone/>
+            </a:pPr>
+            <a:r>
+              <a:rPr lang="en-US" sz="2200" dirty="0">
+                <a:solidFill>
+                  <a:srgbClr val="F5F1E8"/>
+                </a:solidFill>
+                <a:latin typeface="Georgia" pitchFamily="34" charset="0"/>
+                <a:ea typeface="Georgia" pitchFamily="34" charset="-122"/>
+                <a:cs typeface="Georgia" pitchFamily="34" charset="-120"/>
+              </a:rPr>
+              <a:t>$42M ARR</a:t>
+            </a:r>
+            <a:endParaRPr lang="en-US" sz="2200" dirty="0"/>
+          </a:p>
+        </p:txBody>
+      </p:sp>
+      <p:sp>
+        <p:nvSpPr>
+          <p:cNvPr id="28" name="Text 26"/>
+          <p:cNvSpPr/>
+          <p:nvPr/>
+        </p:nvSpPr>
+        <p:spPr>
+          <a:xfrm>
+            <a:off x="4599432" y="5212080"/>
+            <a:ext cx="3200400" cy="320040"/>
+          </a:xfrm>
+          <a:prstGeom prst="rect">
+            <a:avLst/>
+          </a:prstGeom>
+          <a:noFill/>
+          <a:ln/>
+        </p:spPr>
+        <p:txBody>
+          <a:bodyPr wrap="square" rtlCol="0" anchor="ctr"/>
+          <a:lstStyle/>
+          <a:p>
+            <a:pPr indent="0" marL="0">
+              <a:buNone/>
+            </a:pPr>
+            <a:r>
+              <a:rPr lang="en-US" sz="1100" dirty="0">
+                <a:solidFill>
+                  <a:srgbClr val="C8CFE0"/>
+                </a:solidFill>
+                <a:latin typeface="Calibri" pitchFamily="34" charset="0"/>
+                <a:ea typeface="Calibri" pitchFamily="34" charset="-122"/>
+                <a:cs typeface="Calibri" pitchFamily="34" charset="-120"/>
+              </a:rPr>
+              <a:t>~12,000 orgs</a:t>
+            </a:r>
+            <a:endParaRPr lang="en-US" sz="1100" dirty="0"/>
+          </a:p>
+        </p:txBody>
+      </p:sp>
+      <p:sp>
+        <p:nvSpPr>
+          <p:cNvPr id="29" name="Shape 27"/>
+          <p:cNvSpPr/>
+          <p:nvPr/>
+        </p:nvSpPr>
+        <p:spPr>
+          <a:xfrm>
+            <a:off x="8284464" y="4343400"/>
+            <a:ext cx="3657600" cy="1188720"/>
+          </a:xfrm>
+          <a:prstGeom prst="rect">
+            <a:avLst/>
+          </a:prstGeom>
+          <a:solidFill>
+            <a:srgbClr val="13204A"/>
+          </a:solidFill>
+          <a:ln w="6350">
+            <a:solidFill>
+              <a:srgbClr val="2A3562"/>
+            </a:solidFill>
+            <a:prstDash val="solid"/>
+          </a:ln>
+        </p:spPr>
+      </p:sp>
+      <p:sp>
+        <p:nvSpPr>
+          <p:cNvPr id="30" name="Text 28"/>
+          <p:cNvSpPr/>
+          <p:nvPr/>
+        </p:nvSpPr>
+        <p:spPr>
+          <a:xfrm>
+            <a:off x="8513064" y="4434840"/>
+            <a:ext cx="3200400" cy="320040"/>
+          </a:xfrm>
+          <a:prstGeom prst="rect">
+            <a:avLst/>
+          </a:prstGeom>
+          <a:noFill/>
+          <a:ln/>
+        </p:spPr>
+        <p:txBody>
+          <a:bodyPr wrap="square" rtlCol="0" anchor="ctr"/>
+          <a:lstStyle/>
+          <a:p>
+            <a:pPr indent="0" marL="0">
+              <a:buNone/>
+            </a:pPr>
+            <a:r>
+              <a:rPr lang="en-US" sz="1100" b="1" dirty="0">
+                <a:solidFill>
+                  <a:srgbClr val="C9A24C"/>
+                </a:solidFill>
+                <a:latin typeface="Calibri" pitchFamily="34" charset="0"/>
+                <a:ea typeface="Calibri" pitchFamily="34" charset="-122"/>
+                <a:cs typeface="Calibri" pitchFamily="34" charset="-120"/>
+              </a:rPr>
+              <a:t>Upside</a:t>
+            </a:r>
+            <a:endParaRPr lang="en-US" sz="1100" dirty="0"/>
+          </a:p>
+        </p:txBody>
+      </p:sp>
+      <p:sp>
+        <p:nvSpPr>
+          <p:cNvPr id="31" name="Text 29"/>
+          <p:cNvSpPr/>
+          <p:nvPr/>
+        </p:nvSpPr>
+        <p:spPr>
+          <a:xfrm>
+            <a:off x="8513064" y="4754880"/>
+            <a:ext cx="3200400" cy="457200"/>
+          </a:xfrm>
+          <a:prstGeom prst="rect">
+            <a:avLst/>
+          </a:prstGeom>
+          <a:noFill/>
+          <a:ln/>
+        </p:spPr>
+        <p:txBody>
+          <a:bodyPr wrap="square" rtlCol="0" anchor="ctr"/>
+          <a:lstStyle/>
+          <a:p>
+            <a:pPr indent="0" marL="0">
+              <a:buNone/>
+            </a:pPr>
+            <a:r>
+              <a:rPr lang="en-US" sz="2200" dirty="0">
+                <a:solidFill>
+                  <a:srgbClr val="F5F1E8"/>
+                </a:solidFill>
+                <a:latin typeface="Georgia" pitchFamily="34" charset="0"/>
+                <a:ea typeface="Georgia" pitchFamily="34" charset="-122"/>
+                <a:cs typeface="Georgia" pitchFamily="34" charset="-120"/>
+              </a:rPr>
+              <a:t>$95M ARR</a:t>
+            </a:r>
+            <a:endParaRPr lang="en-US" sz="2200" dirty="0"/>
+          </a:p>
+        </p:txBody>
+      </p:sp>
+      <p:sp>
+        <p:nvSpPr>
+          <p:cNvPr id="32" name="Text 30"/>
+          <p:cNvSpPr/>
+          <p:nvPr/>
+        </p:nvSpPr>
+        <p:spPr>
+          <a:xfrm>
+            <a:off x="8513064" y="5212080"/>
+            <a:ext cx="3200400" cy="320040"/>
+          </a:xfrm>
+          <a:prstGeom prst="rect">
+            <a:avLst/>
+          </a:prstGeom>
+          <a:noFill/>
+          <a:ln/>
+        </p:spPr>
+        <p:txBody>
+          <a:bodyPr wrap="square" rtlCol="0" anchor="ctr"/>
+          <a:lstStyle/>
+          <a:p>
+            <a:pPr indent="0" marL="0">
+              <a:buNone/>
+            </a:pPr>
+            <a:r>
+              <a:rPr lang="en-US" sz="1100" dirty="0">
+                <a:solidFill>
+                  <a:srgbClr val="C8CFE0"/>
+                </a:solidFill>
+                <a:latin typeface="Calibri" pitchFamily="34" charset="0"/>
+                <a:ea typeface="Calibri" pitchFamily="34" charset="-122"/>
+                <a:cs typeface="Calibri" pitchFamily="34" charset="-120"/>
+              </a:rPr>
+              <a:t>~24,000 orgs</a:t>
+            </a:r>
+            <a:endParaRPr lang="en-US" sz="1100" dirty="0"/>
+          </a:p>
+        </p:txBody>
+      </p:sp>
+      <p:sp>
+        <p:nvSpPr>
+          <p:cNvPr id="33" name="Text 31"/>
+          <p:cNvSpPr/>
+          <p:nvPr/>
+        </p:nvSpPr>
+        <p:spPr>
+          <a:xfrm>
+            <a:off x="457200" y="6080760"/>
+            <a:ext cx="11277295" cy="320040"/>
+          </a:xfrm>
+          <a:prstGeom prst="rect">
+            <a:avLst/>
+          </a:prstGeom>
+          <a:noFill/>
+          <a:ln/>
+        </p:spPr>
+        <p:txBody>
+          <a:bodyPr wrap="square" rtlCol="0" anchor="ctr"/>
+          <a:lstStyle/>
+          <a:p>
+            <a:pPr indent="0" marL="0">
+              <a:buNone/>
+            </a:pPr>
+            <a:r>
+              <a:rPr lang="en-US" sz="850" i="1" dirty="0">
+                <a:solidFill>
+                  <a:srgbClr val="8892B0"/>
+                </a:solidFill>
+                <a:latin typeface="Calibri" pitchFamily="34" charset="0"/>
+                <a:ea typeface="Calibri" pitchFamily="34" charset="-122"/>
+                <a:cs typeface="Calibri" pitchFamily="34" charset="-120"/>
+              </a:rPr>
+              <a:t>All figures are strategic assumptions. Detailed 3-year model with sensitivity delivered separately (XLSX, Phase 3).</a:t>
+            </a:r>
+            <a:endParaRPr lang="en-US" sz="850" dirty="0"/>
+          </a:p>
+        </p:txBody>
+      </p:sp>
+      <p:sp>
+        <p:nvSpPr>
+          <p:cNvPr id="34" name="Shape 32"/>
+          <p:cNvSpPr/>
+          <p:nvPr/>
+        </p:nvSpPr>
+        <p:spPr>
+          <a:xfrm>
+            <a:off x="457200" y="6446520"/>
+            <a:ext cx="11277295" cy="0"/>
+          </a:xfrm>
+          <a:prstGeom prst="line">
+            <a:avLst/>
+          </a:prstGeom>
+          <a:noFill/>
+          <a:ln w="9525">
+            <a:solidFill>
+              <a:srgbClr val="2A3562"/>
+            </a:solidFill>
+            <a:prstDash val="solid"/>
+          </a:ln>
+        </p:spPr>
+      </p:sp>
+      <p:sp>
+        <p:nvSpPr>
+          <p:cNvPr id="35" name="Text 33"/>
+          <p:cNvSpPr/>
+          <p:nvPr/>
+        </p:nvSpPr>
+        <p:spPr>
+          <a:xfrm>
+            <a:off x="457200" y="6510528"/>
+            <a:ext cx="7315200" cy="274320"/>
+          </a:xfrm>
+          <a:prstGeom prst="rect">
+            <a:avLst/>
+          </a:prstGeom>
+          <a:noFill/>
+          <a:ln/>
+        </p:spPr>
+        <p:txBody>
+          <a:bodyPr wrap="square" rtlCol="0" anchor="ctr"/>
+          <a:lstStyle/>
+          <a:p>
+            <a:pPr indent="0" marL="0">
+              <a:buNone/>
+            </a:pPr>
+            <a:r>
+              <a:rPr lang="en-US" sz="900" spc="300" kern="0" dirty="0">
+                <a:solidFill>
+                  <a:srgbClr val="8892B0"/>
+                </a:solidFill>
+                <a:latin typeface="Calibri" pitchFamily="34" charset="0"/>
+                <a:ea typeface="Calibri" pitchFamily="34" charset="-122"/>
+                <a:cs typeface="Calibri" pitchFamily="34" charset="-120"/>
+              </a:rPr>
+              <a:t>GLOBAL OFFICE  /  CONFIDENTIAL INVESTOR MATERIALS</a:t>
+            </a:r>
+            <a:endParaRPr lang="en-US" sz="900" dirty="0"/>
+          </a:p>
+        </p:txBody>
+      </p:sp>
+      <p:sp>
+        <p:nvSpPr>
+          <p:cNvPr id="36" name="Text 34"/>
+          <p:cNvSpPr/>
+          <p:nvPr/>
+        </p:nvSpPr>
+        <p:spPr>
+          <a:xfrm>
+            <a:off x="9905695" y="6510528"/>
+            <a:ext cx="1828800" cy="274320"/>
+          </a:xfrm>
+          <a:prstGeom prst="rect">
+            <a:avLst/>
+          </a:prstGeom>
+          <a:noFill/>
+          <a:ln/>
+        </p:spPr>
+        <p:txBody>
+          <a:bodyPr wrap="square" rtlCol="0" anchor="ctr"/>
+          <a:lstStyle/>
+          <a:p>
+            <a:pPr algn="r" indent="0" marL="0">
+              <a:buNone/>
+            </a:pPr>
+            <a:r>
+              <a:rPr lang="en-US" sz="900" dirty="0">
+                <a:solidFill>
+                  <a:srgbClr val="C9A24C"/>
+                </a:solidFill>
+                <a:latin typeface="Consolas" pitchFamily="34" charset="0"/>
+                <a:ea typeface="Consolas" pitchFamily="34" charset="-122"/>
+                <a:cs typeface="Consolas" pitchFamily="34" charset="-120"/>
+              </a:rPr>
+              <a:t>14 / 22</a:t>
+            </a:r>
+            <a:endParaRPr lang="en-US" sz="900" dirty="0"/>
+          </a:p>
+        </p:txBody>
+      </p:sp>
+    </p:spTree>
+  </p:cSld>
+  <p:clrMapOvr>
+    <a:masterClrMapping/>
+  </p:clrMapOvr>
+</p:sld>
+</file>
+
+<file path=ppt/slides/slide22.xml><?xml version="1.0" encoding="utf-8"?>
+<p:sld xmlns:a="http://schemas.openxmlformats.org/drawingml/2006/main" xmlns:r="http://schemas.openxmlformats.org/officeDocument/2006/relationships" xmlns:p="http://schemas.openxmlformats.org/presentationml/2006/main">
   <p:cSld name="Slide 15">
     <p:bg>
       <p:bgPr>
@@ -10172,7 +10378,7 @@
 </p:sld>
 </file>
 
-<file path=ppt/slides/slide21.xml><?xml version="1.0" encoding="utf-8"?>
+<file path=ppt/slides/slide23.xml><?xml version="1.0" encoding="utf-8"?>
 <p:sld xmlns:a="http://schemas.openxmlformats.org/drawingml/2006/main" xmlns:r="http://schemas.openxmlformats.org/officeDocument/2006/relationships" xmlns:p="http://schemas.openxmlformats.org/presentationml/2006/main">
   <p:cSld name="Slide 16">
     <p:bg>
@@ -10929,7 +11135,7 @@
 </p:sld>
 </file>
 
-<file path=ppt/slides/slide22.xml><?xml version="1.0" encoding="utf-8"?>
+<file path=ppt/slides/slide24.xml><?xml version="1.0" encoding="utf-8"?>
 <p:sld xmlns:a="http://schemas.openxmlformats.org/drawingml/2006/main" xmlns:r="http://schemas.openxmlformats.org/officeDocument/2006/relationships" xmlns:p="http://schemas.openxmlformats.org/presentationml/2006/main">
   <p:cSld name="Slide 17">
     <p:bg>
@@ -11621,7 +11827,7 @@
 </p:sld>
 </file>
 
-<file path=ppt/slides/slide23.xml><?xml version="1.0" encoding="utf-8"?>
+<file path=ppt/slides/slide25.xml><?xml version="1.0" encoding="utf-8"?>
 <p:sld xmlns:a="http://schemas.openxmlformats.org/drawingml/2006/main" xmlns:r="http://schemas.openxmlformats.org/officeDocument/2006/relationships" xmlns:p="http://schemas.openxmlformats.org/presentationml/2006/main">
   <p:cSld name="Slide 18">
     <p:bg>
@@ -12532,7 +12738,7 @@
 </p:sld>
 </file>
 
-<file path=ppt/slides/slide24.xml><?xml version="1.0" encoding="utf-8"?>
+<file path=ppt/slides/slide26.xml><?xml version="1.0" encoding="utf-8"?>
 <p:sld xmlns:a="http://schemas.openxmlformats.org/drawingml/2006/main" xmlns:r="http://schemas.openxmlformats.org/officeDocument/2006/relationships" xmlns:p="http://schemas.openxmlformats.org/presentationml/2006/main">
   <p:cSld name="Slide 19">
     <p:bg>
@@ -13202,7 +13408,7 @@
 </p:sld>
 </file>
 
-<file path=ppt/slides/slide25.xml><?xml version="1.0" encoding="utf-8"?>
+<file path=ppt/slides/slide27.xml><?xml version="1.0" encoding="utf-8"?>
 <p:sld xmlns:a="http://schemas.openxmlformats.org/drawingml/2006/main" xmlns:r="http://schemas.openxmlformats.org/officeDocument/2006/relationships" xmlns:p="http://schemas.openxmlformats.org/presentationml/2006/main">
   <p:cSld name="Slide 20">
     <p:bg>
@@ -13918,7 +14124,7 @@
 </p:sld>
 </file>
 
-<file path=ppt/slides/slide26.xml><?xml version="1.0" encoding="utf-8"?>
+<file path=ppt/slides/slide28.xml><?xml version="1.0" encoding="utf-8"?>
 <p:sld xmlns:a="http://schemas.openxmlformats.org/drawingml/2006/main" xmlns:r="http://schemas.openxmlformats.org/officeDocument/2006/relationships" xmlns:p="http://schemas.openxmlformats.org/presentationml/2006/main">
   <p:cSld name="Slide 21">
     <p:bg>
@@ -14196,7 +14402,7 @@
 </p:sld>
 </file>
 
-<file path=ppt/slides/slide27.xml><?xml version="1.0" encoding="utf-8"?>
+<file path=ppt/slides/slide29.xml><?xml version="1.0" encoding="utf-8"?>
 <p:sld xmlns:a="http://schemas.openxmlformats.org/drawingml/2006/main" xmlns:r="http://schemas.openxmlformats.org/officeDocument/2006/relationships" xmlns:p="http://schemas.openxmlformats.org/presentationml/2006/main">
   <p:cSld name="Slide 22">
     <p:bg>
@@ -14603,196 +14809,6 @@
           </a:p>
         </p:txBody>
       </p:sp>
-    </p:spTree>
-  </p:cSld>
-  <p:clrMapOvr>
-    <a:masterClrMapping/>
-  </p:clrMapOvr>
-</p:sld>
-</file>
-
-<file path=ppt/slides/slide28.xml><?xml version="1.0" encoding="utf-8"?>
-<p:sld xmlns:a="http://schemas.openxmlformats.org/drawingml/2006/main" xmlns:p="http://schemas.openxmlformats.org/presentationml/2006/main" xmlns:r="http://schemas.openxmlformats.org/officeDocument/2006/relationships">
-  <p:cSld>
-    <p:spTree>
-      <p:nvGrpSpPr>
-        <p:cNvPr id="1" name=""/>
-        <p:cNvGrpSpPr/>
-        <p:nvPr/>
-      </p:nvGrpSpPr>
-      <p:grpSpPr/>
-      <p:sp>
-        <p:nvSpPr>
-          <p:cNvPr id="2" name="TextBox 1"/>
-          <p:cNvSpPr txBox="1"/>
-          <p:nvPr/>
-        </p:nvSpPr>
-        <p:spPr>
-          <a:xfrm>
-            <a:off x="700000" y="380000"/>
-            <a:ext cx="10792000" cy="900000"/>
-          </a:xfrm>
-          <a:prstGeom prst="rect">
-            <a:avLst/>
-          </a:prstGeom>
-          <a:noFill/>
-        </p:spPr>
-        <p:txBody>
-          <a:bodyPr wrap="square">
-            <a:spAutoFit/>
-          </a:bodyPr>
-          <a:lstStyle/>
-          <a:p>
-            <a:r>
-              <a:rPr sz="1100" b="1">
-                <a:solidFill>
-                  <a:srgbClr val="C9A22E"/>
-                </a:solidFill>
-              </a:rPr>
-              <a:t>PRODUCT</a:t>
-            </a:r>
-          </a:p>
-          <a:p>
-            <a:r>
-              <a:rPr sz="2800">
-                <a:solidFill>
-                  <a:srgbClr val="FFFFFF"/>
-                </a:solidFill>
-              </a:rPr>
-              <a:t>Execution Engine</a:t>
-            </a:r>
-          </a:p>
-          <a:p>
-            <a:r>
-              <a:rPr sz="1300">
-                <a:solidFill>
-                  <a:srgbClr val="C8CEDC"/>
-                </a:solidFill>
-              </a:rPr>
-              <a:t>Kanban delivery with AI priority scoring, workload balancing and slip prediction.</a:t>
-            </a:r>
-          </a:p>
-        </p:txBody>
-      </p:sp>
-      <p:pic>
-        <p:nvPicPr>
-          <p:cNvPr id="3" name="Picture 2" descr="meetings.png"/>
-          <p:cNvPicPr>
-            <a:picLocks noChangeAspect="1"/>
-          </p:cNvPicPr>
-          <p:nvPr/>
-        </p:nvPicPr>
-        <p:blipFill>
-          <a:blip r:embed="rId2"/>
-          <a:stretch>
-            <a:fillRect/>
-          </a:stretch>
-        </p:blipFill>
-        <p:spPr>
-          <a:xfrm>
-            <a:off x="2217501" y="2000000"/>
-            <a:ext cx="7756997" cy="4358000"/>
-          </a:xfrm>
-          <a:prstGeom prst="rect">
-            <a:avLst/>
-          </a:prstGeom>
-        </p:spPr>
-      </p:pic>
-    </p:spTree>
-  </p:cSld>
-  <p:clrMapOvr>
-    <a:masterClrMapping/>
-  </p:clrMapOvr>
-</p:sld>
-</file>
-
-<file path=ppt/slides/slide29.xml><?xml version="1.0" encoding="utf-8"?>
-<p:sld xmlns:a="http://schemas.openxmlformats.org/drawingml/2006/main" xmlns:p="http://schemas.openxmlformats.org/presentationml/2006/main" xmlns:r="http://schemas.openxmlformats.org/officeDocument/2006/relationships">
-  <p:cSld>
-    <p:spTree>
-      <p:nvGrpSpPr>
-        <p:cNvPr id="1" name=""/>
-        <p:cNvGrpSpPr/>
-        <p:nvPr/>
-      </p:nvGrpSpPr>
-      <p:grpSpPr/>
-      <p:sp>
-        <p:nvSpPr>
-          <p:cNvPr id="2" name="TextBox 1"/>
-          <p:cNvSpPr txBox="1"/>
-          <p:nvPr/>
-        </p:nvSpPr>
-        <p:spPr>
-          <a:xfrm>
-            <a:off x="700000" y="380000"/>
-            <a:ext cx="10792000" cy="900000"/>
-          </a:xfrm>
-          <a:prstGeom prst="rect">
-            <a:avLst/>
-          </a:prstGeom>
-          <a:noFill/>
-        </p:spPr>
-        <p:txBody>
-          <a:bodyPr wrap="square">
-            <a:spAutoFit/>
-          </a:bodyPr>
-          <a:lstStyle/>
-          <a:p>
-            <a:r>
-              <a:rPr sz="1100" b="1">
-                <a:solidFill>
-                  <a:srgbClr val="C9A22E"/>
-                </a:solidFill>
-              </a:rPr>
-              <a:t>PRODUCT</a:t>
-            </a:r>
-          </a:p>
-          <a:p>
-            <a:r>
-              <a:rPr sz="2800">
-                <a:solidFill>
-                  <a:srgbClr val="FFFFFF"/>
-                </a:solidFill>
-              </a:rPr>
-              <a:t>Predictive AI Insights</a:t>
-            </a:r>
-          </a:p>
-          <a:p>
-            <a:r>
-              <a:rPr sz="1300">
-                <a:solidFill>
-                  <a:srgbClr val="C8CEDC"/>
-                </a:solidFill>
-              </a:rPr>
-              <a:t>Proactive alerts on slipping work, burnout risk and revenue exposure — before they cost money.</a:t>
-            </a:r>
-          </a:p>
-        </p:txBody>
-      </p:sp>
-      <p:pic>
-        <p:nvPicPr>
-          <p:cNvPr id="3" name="Picture 2" descr="meetings.png"/>
-          <p:cNvPicPr>
-            <a:picLocks noChangeAspect="1"/>
-          </p:cNvPicPr>
-          <p:nvPr/>
-        </p:nvPicPr>
-        <p:blipFill>
-          <a:blip r:embed="rId2"/>
-          <a:stretch>
-            <a:fillRect/>
-          </a:stretch>
-        </p:blipFill>
-        <p:spPr>
-          <a:xfrm>
-            <a:off x="2217501" y="2000000"/>
-            <a:ext cx="7756997" cy="4358000"/>
-          </a:xfrm>
-          <a:prstGeom prst="rect">
-            <a:avLst/>
-          </a:prstGeom>
-        </p:spPr>
-      </p:pic>
     </p:spTree>
   </p:cSld>
   <p:clrMapOvr>

--- a/public/investor-pack/Global-Office-Investor-Deck.pptx
+++ b/public/investor-pack/Global-Office-Investor-Deck.pptx
@@ -1586,7 +1586,7 @@
           <a:p>
             <a:r>
               <a:rPr lang="en-US" dirty="0"/>
-              <a:t>Governance signals for a $10M+ check. Clean cap table. Delaware/UK holdco under evaluation. IP fully owned by Soteria AI Technologies Limited. NDPR/GDPR by design. SOC 2 Type I on the roadmap. No undisclosed liabilities. Data room ready.</a:t>
+              <a:t>Governance signals for a $10M+ check. Clean cap table. Delaware/UK holdco under evaluation. IP fully owned by Soteria AI Technologies Inc.. NDPR/GDPR by design. SOC 2 Type I on the roadmap. No undisclosed liabilities. Data room ready.</a:t>
             </a:r>
             <a:endParaRPr lang="en-US" dirty="0"/>
           </a:p>
@@ -9876,7 +9876,7 @@
                 <a:ea typeface="Georgia" pitchFamily="34" charset="-122"/>
                 <a:cs typeface="Georgia" pitchFamily="34" charset="-120"/>
               </a:rPr>
-              <a:t>Founder &amp; CEO — Soteria AI Technologies Limited</a:t>
+              <a:t>Founder &amp; CEO — Soteria AI Technologies Inc.</a:t>
             </a:r>
             <a:endParaRPr lang="en-US" sz="2400" dirty="0"/>
           </a:p>
@@ -9915,7 +9915,7 @@
                 <a:ea typeface="Calibri" pitchFamily="34" charset="-122"/>
                 <a:cs typeface="Calibri" pitchFamily="34" charset="-120"/>
               </a:rPr>
-              <a:t>Nigerian entrepreneur, AI systems strategist, and technology founder. Builds intelligent platforms for large-scale operational and societal challenges. Founder &amp; CEO of Soteria AI Technologies Limited, leading AI-powered products for business operations, decision-making, and workflow orchestration in emerging markets.</a:t>
+              <a:t>Nigerian entrepreneur, AI systems strategist, and technology founder. Builds intelligent platforms for large-scale operational and societal challenges. Founder &amp; CEO of Soteria AI Technologies Inc., leading AI-powered products for business operations, decision-making, and workflow orchestration in emerging markets.</a:t>
             </a:r>
             <a:endParaRPr lang="en-US" sz="1200" dirty="0"/>
           </a:p>
@@ -13582,7 +13582,7 @@
                 <a:ea typeface="Calibri" pitchFamily="34" charset="-122"/>
                 <a:cs typeface="Calibri" pitchFamily="34" charset="-120"/>
               </a:rPr>
-              <a:t>Soteria AI Technologies Limited · Clean cap table · Holdco structure under evaluation</a:t>
+              <a:t>Soteria AI Technologies Inc. · Clean cap table · Holdco structure under evaluation</a:t>
             </a:r>
             <a:endParaRPr lang="en-US" sz="1300" dirty="0"/>
           </a:p>
@@ -14686,7 +14686,7 @@
                 <a:ea typeface="Calibri" pitchFamily="34" charset="-122"/>
                 <a:cs typeface="Calibri" pitchFamily="34" charset="-120"/>
               </a:rPr>
-              <a:t>Founder &amp; CEO — Soteria AI Technologies Limited</a:t>
+              <a:t>Founder &amp; CEO — Soteria AI Technologies Inc.</a:t>
             </a:r>
             <a:endParaRPr lang="en-US" sz="1300" dirty="0"/>
           </a:p>

--- a/public/investor-pack/Global-Office-Investor-Deck.pptx
+++ b/public/investor-pack/Global-Office-Investor-Deck.pptx
@@ -26,6 +26,7 @@
     <p:sldId id="267" r:id="rId13"/>
     <p:sldId id="268" r:id="rId14"/>
     <p:sldId id="269" r:id="rId15"/>
+    <p:sldId id="285" r:id="rId36"/>
     <p:sldId id="270" r:id="rId16"/>
     <p:sldId id="271" r:id="rId17"/>
     <p:sldId id="272" r:id="rId18"/>
@@ -2775,6 +2776,10 @@
             <a:prstDash val="solid"/>
           </a:ln>
         </p:spPr>
+        <p:txBody>
+          <a:bodyPr/>
+          <a:p/>
+        </p:txBody>
       </p:sp>
       <p:sp>
         <p:nvSpPr>
@@ -2809,7 +2814,7 @@
                 <a:ea typeface="Calibri" pitchFamily="34" charset="-122"/>
                 <a:cs typeface="Calibri" pitchFamily="34" charset="-120"/>
               </a:rPr>
-              <a:t>SOTERIA AI TECHNOLOGIES LIMITED</a:t>
+              <a:t>SOTERIA AI TECHNOLOGIES INC.  ·  DELAWARE C-CORPORATION</a:t>
             </a:r>
             <a:endParaRPr lang="en-US" sz="1000" dirty="0"/>
           </a:p>
@@ -2932,6 +2937,10 @@
             <a:prstDash val="solid"/>
           </a:ln>
         </p:spPr>
+        <p:txBody>
+          <a:bodyPr/>
+          <a:p/>
+        </p:txBody>
       </p:sp>
       <p:sp>
         <p:nvSpPr>
@@ -3699,6 +3708,10 @@
             <a:prstDash val="solid"/>
           </a:ln>
         </p:spPr>
+        <p:txBody>
+          <a:bodyPr/>
+          <a:p/>
+        </p:txBody>
       </p:sp>
       <p:sp>
         <p:nvSpPr>
@@ -3724,6 +3737,10 @@
             <a:prstDash val="solid"/>
           </a:ln>
         </p:spPr>
+        <p:txBody>
+          <a:bodyPr/>
+          <a:p/>
+        </p:txBody>
       </p:sp>
       <p:sp>
         <p:nvSpPr>
@@ -3905,6 +3922,10 @@
             <a:prstDash val="solid"/>
           </a:ln>
         </p:spPr>
+        <p:txBody>
+          <a:bodyPr/>
+          <a:p/>
+        </p:txBody>
       </p:sp>
       <p:sp>
         <p:nvSpPr>
@@ -3930,6 +3951,10 @@
             <a:prstDash val="solid"/>
           </a:ln>
         </p:spPr>
+        <p:txBody>
+          <a:bodyPr/>
+          <a:p/>
+        </p:txBody>
       </p:sp>
       <p:sp>
         <p:nvSpPr>
@@ -4111,6 +4136,10 @@
             <a:prstDash val="solid"/>
           </a:ln>
         </p:spPr>
+        <p:txBody>
+          <a:bodyPr/>
+          <a:p/>
+        </p:txBody>
       </p:sp>
       <p:sp>
         <p:nvSpPr>
@@ -4136,6 +4165,10 @@
             <a:prstDash val="solid"/>
           </a:ln>
         </p:spPr>
+        <p:txBody>
+          <a:bodyPr/>
+          <a:p/>
+        </p:txBody>
       </p:sp>
       <p:sp>
         <p:nvSpPr>
@@ -4354,6 +4387,10 @@
             <a:prstDash val="solid"/>
           </a:ln>
         </p:spPr>
+        <p:txBody>
+          <a:bodyPr/>
+          <a:p/>
+        </p:txBody>
       </p:sp>
       <p:sp>
         <p:nvSpPr>
@@ -4567,6 +4604,10 @@
             <a:prstDash val="solid"/>
           </a:ln>
         </p:spPr>
+        <p:txBody>
+          <a:bodyPr/>
+          <a:p/>
+        </p:txBody>
       </p:sp>
       <p:sp>
         <p:nvSpPr>
@@ -4590,6 +4631,10 @@
             <a:prstDash val="solid"/>
           </a:ln>
         </p:spPr>
+        <p:txBody>
+          <a:bodyPr/>
+          <a:p/>
+        </p:txBody>
       </p:sp>
       <p:sp>
         <p:nvSpPr>
@@ -4613,6 +4658,10 @@
             <a:prstDash val="solid"/>
           </a:ln>
         </p:spPr>
+        <p:txBody>
+          <a:bodyPr/>
+          <a:p/>
+        </p:txBody>
       </p:sp>
       <p:sp>
         <p:nvSpPr>
@@ -4716,6 +4765,10 @@
             <a:prstDash val="solid"/>
           </a:ln>
         </p:spPr>
+        <p:txBody>
+          <a:bodyPr/>
+          <a:p/>
+        </p:txBody>
       </p:sp>
       <p:sp>
         <p:nvSpPr>
@@ -4780,6 +4833,10 @@
             <a:prstDash val="solid"/>
           </a:ln>
         </p:spPr>
+        <p:txBody>
+          <a:bodyPr/>
+          <a:p/>
+        </p:txBody>
       </p:sp>
       <p:sp>
         <p:nvSpPr>
@@ -4844,6 +4901,10 @@
             <a:prstDash val="solid"/>
           </a:ln>
         </p:spPr>
+        <p:txBody>
+          <a:bodyPr/>
+          <a:p/>
+        </p:txBody>
       </p:sp>
       <p:sp>
         <p:nvSpPr>
@@ -4908,6 +4969,10 @@
             <a:prstDash val="solid"/>
           </a:ln>
         </p:spPr>
+        <p:txBody>
+          <a:bodyPr/>
+          <a:p/>
+        </p:txBody>
       </p:sp>
       <p:sp>
         <p:nvSpPr>
@@ -4972,6 +5037,10 @@
             <a:prstDash val="solid"/>
           </a:ln>
         </p:spPr>
+        <p:txBody>
+          <a:bodyPr/>
+          <a:p/>
+        </p:txBody>
       </p:sp>
       <p:sp>
         <p:nvSpPr>
@@ -5036,6 +5105,10 @@
             <a:prstDash val="solid"/>
           </a:ln>
         </p:spPr>
+        <p:txBody>
+          <a:bodyPr/>
+          <a:p/>
+        </p:txBody>
       </p:sp>
       <p:sp>
         <p:nvSpPr>
@@ -5100,6 +5173,10 @@
             <a:prstDash val="solid"/>
           </a:ln>
         </p:spPr>
+        <p:txBody>
+          <a:bodyPr/>
+          <a:p/>
+        </p:txBody>
       </p:sp>
       <p:sp>
         <p:nvSpPr>
@@ -5201,6 +5278,10 @@
             <a:prstDash val="solid"/>
           </a:ln>
         </p:spPr>
+        <p:txBody>
+          <a:bodyPr/>
+          <a:p/>
+        </p:txBody>
       </p:sp>
       <p:sp>
         <p:nvSpPr>
@@ -5414,6 +5495,10 @@
             <a:prstDash val="solid"/>
           </a:ln>
         </p:spPr>
+        <p:txBody>
+          <a:bodyPr/>
+          <a:p/>
+        </p:txBody>
       </p:sp>
       <p:sp>
         <p:nvSpPr>
@@ -5595,6 +5680,10 @@
             <a:prstDash val="solid"/>
           </a:ln>
         </p:spPr>
+        <p:txBody>
+          <a:bodyPr/>
+          <a:p/>
+        </p:txBody>
       </p:sp>
       <p:sp>
         <p:nvSpPr>
@@ -5776,6 +5865,10 @@
             <a:prstDash val="solid"/>
           </a:ln>
         </p:spPr>
+        <p:txBody>
+          <a:bodyPr/>
+          <a:p/>
+        </p:txBody>
       </p:sp>
       <p:sp>
         <p:nvSpPr>
@@ -6033,6 +6126,10 @@
             <a:prstDash val="solid"/>
           </a:ln>
         </p:spPr>
+        <p:txBody>
+          <a:bodyPr/>
+          <a:p/>
+        </p:txBody>
       </p:sp>
       <p:sp>
         <p:nvSpPr>
@@ -6361,6 +6458,10 @@
             <a:prstDash val="solid"/>
           </a:ln>
         </p:spPr>
+        <p:txBody>
+          <a:bodyPr/>
+          <a:p/>
+        </p:txBody>
       </p:sp>
       <p:sp>
         <p:nvSpPr>
@@ -6501,6 +6602,10 @@
             <a:prstDash val="solid"/>
           </a:ln>
         </p:spPr>
+        <p:txBody>
+          <a:bodyPr/>
+          <a:p/>
+        </p:txBody>
       </p:sp>
       <p:sp>
         <p:nvSpPr>
@@ -6641,6 +6746,10 @@
             <a:prstDash val="solid"/>
           </a:ln>
         </p:spPr>
+        <p:txBody>
+          <a:bodyPr/>
+          <a:p/>
+        </p:txBody>
       </p:sp>
       <p:sp>
         <p:nvSpPr>
@@ -6664,6 +6773,10 @@
             <a:prstDash val="solid"/>
           </a:ln>
         </p:spPr>
+        <p:txBody>
+          <a:bodyPr/>
+          <a:p/>
+        </p:txBody>
       </p:sp>
       <p:sp>
         <p:nvSpPr>
@@ -7225,6 +7338,10 @@
             <a:prstDash val="solid"/>
           </a:ln>
         </p:spPr>
+        <p:txBody>
+          <a:bodyPr/>
+          <a:p/>
+        </p:txBody>
       </p:sp>
       <p:sp>
         <p:nvSpPr>
@@ -7441,6 +7558,10 @@
             <a:prstDash val="solid"/>
           </a:ln>
         </p:spPr>
+        <p:txBody>
+          <a:bodyPr/>
+          <a:p/>
+        </p:txBody>
       </p:sp>
       <p:sp>
         <p:nvSpPr>
@@ -7503,6 +7624,10 @@
             <a:prstDash val="solid"/>
           </a:ln>
         </p:spPr>
+        <p:txBody>
+          <a:bodyPr/>
+          <a:p/>
+        </p:txBody>
       </p:sp>
       <p:sp>
         <p:nvSpPr>
@@ -7716,6 +7841,10 @@
             <a:prstDash val="solid"/>
           </a:ln>
         </p:spPr>
+        <p:txBody>
+          <a:bodyPr/>
+          <a:p/>
+        </p:txBody>
       </p:sp>
       <p:sp>
         <p:nvSpPr>
@@ -7858,6 +7987,10 @@
             <a:prstDash val="solid"/>
           </a:ln>
         </p:spPr>
+        <p:txBody>
+          <a:bodyPr/>
+          <a:p/>
+        </p:txBody>
       </p:sp>
       <p:sp>
         <p:nvSpPr>
@@ -8000,6 +8133,10 @@
             <a:prstDash val="solid"/>
           </a:ln>
         </p:spPr>
+        <p:txBody>
+          <a:bodyPr/>
+          <a:p/>
+        </p:txBody>
       </p:sp>
       <p:sp>
         <p:nvSpPr>
@@ -8142,6 +8279,10 @@
             <a:prstDash val="solid"/>
           </a:ln>
         </p:spPr>
+        <p:txBody>
+          <a:bodyPr/>
+          <a:p/>
+        </p:txBody>
       </p:sp>
       <p:sp>
         <p:nvSpPr>
@@ -8282,6 +8423,10 @@
             <a:prstDash val="solid"/>
           </a:ln>
         </p:spPr>
+        <p:txBody>
+          <a:bodyPr/>
+          <a:p/>
+        </p:txBody>
       </p:sp>
       <p:sp>
         <p:nvSpPr>
@@ -8495,6 +8640,10 @@
             <a:prstDash val="solid"/>
           </a:ln>
         </p:spPr>
+        <p:txBody>
+          <a:bodyPr/>
+          <a:p/>
+        </p:txBody>
       </p:sp>
       <p:sp>
         <p:nvSpPr>
@@ -8637,6 +8786,10 @@
             <a:prstDash val="solid"/>
           </a:ln>
         </p:spPr>
+        <p:txBody>
+          <a:bodyPr/>
+          <a:p/>
+        </p:txBody>
       </p:sp>
       <p:sp>
         <p:nvSpPr>
@@ -8779,6 +8932,10 @@
             <a:prstDash val="solid"/>
           </a:ln>
         </p:spPr>
+        <p:txBody>
+          <a:bodyPr/>
+          <a:p/>
+        </p:txBody>
       </p:sp>
       <p:sp>
         <p:nvSpPr>
@@ -8921,6 +9078,10 @@
             <a:prstDash val="solid"/>
           </a:ln>
         </p:spPr>
+        <p:txBody>
+          <a:bodyPr/>
+          <a:p/>
+        </p:txBody>
       </p:sp>
       <p:sp>
         <p:nvSpPr>
@@ -9102,6 +9263,10 @@
             <a:prstDash val="solid"/>
           </a:ln>
         </p:spPr>
+        <p:txBody>
+          <a:bodyPr/>
+          <a:p/>
+        </p:txBody>
       </p:sp>
       <p:sp>
         <p:nvSpPr>
@@ -9244,6 +9409,10 @@
             <a:prstDash val="solid"/>
           </a:ln>
         </p:spPr>
+        <p:txBody>
+          <a:bodyPr/>
+          <a:p/>
+        </p:txBody>
       </p:sp>
       <p:sp>
         <p:nvSpPr>
@@ -9386,6 +9555,10 @@
             <a:prstDash val="solid"/>
           </a:ln>
         </p:spPr>
+        <p:txBody>
+          <a:bodyPr/>
+          <a:p/>
+        </p:txBody>
       </p:sp>
       <p:sp>
         <p:nvSpPr>
@@ -9565,6 +9738,10 @@
             <a:prstDash val="solid"/>
           </a:ln>
         </p:spPr>
+        <p:txBody>
+          <a:bodyPr/>
+          <a:p/>
+        </p:txBody>
       </p:sp>
       <p:sp>
         <p:nvSpPr>
@@ -9778,6 +9955,10 @@
             <a:prstDash val="solid"/>
           </a:ln>
         </p:spPr>
+        <p:txBody>
+          <a:bodyPr/>
+          <a:p/>
+        </p:txBody>
       </p:sp>
       <p:sp>
         <p:nvSpPr>
@@ -9803,6 +9984,10 @@
             <a:prstDash val="solid"/>
           </a:ln>
         </p:spPr>
+        <p:txBody>
+          <a:bodyPr/>
+          <a:p/>
+        </p:txBody>
       </p:sp>
       <p:sp>
         <p:nvSpPr>
@@ -9984,6 +10169,10 @@
             <a:prstDash val="solid"/>
           </a:ln>
         </p:spPr>
+        <p:txBody>
+          <a:bodyPr/>
+          <a:p/>
+        </p:txBody>
       </p:sp>
       <p:sp>
         <p:nvSpPr>
@@ -10087,6 +10276,10 @@
             <a:prstDash val="solid"/>
           </a:ln>
         </p:spPr>
+        <p:txBody>
+          <a:bodyPr/>
+          <a:p/>
+        </p:txBody>
       </p:sp>
       <p:sp>
         <p:nvSpPr>
@@ -10190,6 +10383,10 @@
             <a:prstDash val="solid"/>
           </a:ln>
         </p:spPr>
+        <p:txBody>
+          <a:bodyPr/>
+          <a:p/>
+        </p:txBody>
       </p:sp>
       <p:sp>
         <p:nvSpPr>
@@ -10291,6 +10488,10 @@
             <a:prstDash val="solid"/>
           </a:ln>
         </p:spPr>
+        <p:txBody>
+          <a:bodyPr/>
+          <a:p/>
+        </p:txBody>
       </p:sp>
       <p:sp>
         <p:nvSpPr>
@@ -11048,6 +11249,10 @@
             <a:prstDash val="solid"/>
           </a:ln>
         </p:spPr>
+        <p:txBody>
+          <a:bodyPr/>
+          <a:p/>
+        </p:txBody>
       </p:sp>
       <p:sp>
         <p:nvSpPr>
@@ -11261,6 +11466,10 @@
             <a:prstDash val="solid"/>
           </a:ln>
         </p:spPr>
+        <p:txBody>
+          <a:bodyPr/>
+          <a:p/>
+        </p:txBody>
       </p:sp>
       <p:sp>
         <p:nvSpPr>
@@ -11284,6 +11493,10 @@
             <a:prstDash val="solid"/>
           </a:ln>
         </p:spPr>
+        <p:txBody>
+          <a:bodyPr/>
+          <a:p/>
+        </p:txBody>
       </p:sp>
       <p:sp>
         <p:nvSpPr>
@@ -11387,6 +11600,10 @@
             <a:prstDash val="solid"/>
           </a:ln>
         </p:spPr>
+        <p:txBody>
+          <a:bodyPr/>
+          <a:p/>
+        </p:txBody>
       </p:sp>
       <p:sp>
         <p:nvSpPr>
@@ -11410,6 +11627,10 @@
             <a:prstDash val="solid"/>
           </a:ln>
         </p:spPr>
+        <p:txBody>
+          <a:bodyPr/>
+          <a:p/>
+        </p:txBody>
       </p:sp>
       <p:sp>
         <p:nvSpPr>
@@ -11513,6 +11734,10 @@
             <a:prstDash val="solid"/>
           </a:ln>
         </p:spPr>
+        <p:txBody>
+          <a:bodyPr/>
+          <a:p/>
+        </p:txBody>
       </p:sp>
       <p:sp>
         <p:nvSpPr>
@@ -11536,6 +11761,10 @@
             <a:prstDash val="solid"/>
           </a:ln>
         </p:spPr>
+        <p:txBody>
+          <a:bodyPr/>
+          <a:p/>
+        </p:txBody>
       </p:sp>
       <p:sp>
         <p:nvSpPr>
@@ -11639,6 +11868,10 @@
             <a:prstDash val="solid"/>
           </a:ln>
         </p:spPr>
+        <p:txBody>
+          <a:bodyPr/>
+          <a:p/>
+        </p:txBody>
       </p:sp>
       <p:sp>
         <p:nvSpPr>
@@ -11740,6 +11973,10 @@
             <a:prstDash val="solid"/>
           </a:ln>
         </p:spPr>
+        <p:txBody>
+          <a:bodyPr/>
+          <a:p/>
+        </p:txBody>
       </p:sp>
       <p:sp>
         <p:nvSpPr>
@@ -12068,6 +12305,10 @@
             <a:prstDash val="solid"/>
           </a:ln>
         </p:spPr>
+        <p:txBody>
+          <a:bodyPr/>
+          <a:p/>
+        </p:txBody>
       </p:sp>
       <p:sp>
         <p:nvSpPr>
@@ -12208,6 +12449,10 @@
             <a:prstDash val="solid"/>
           </a:ln>
         </p:spPr>
+        <p:txBody>
+          <a:bodyPr/>
+          <a:p/>
+        </p:txBody>
       </p:sp>
       <p:sp>
         <p:nvSpPr>
@@ -12348,6 +12593,10 @@
             <a:prstDash val="solid"/>
           </a:ln>
         </p:spPr>
+        <p:txBody>
+          <a:bodyPr/>
+          <a:p/>
+        </p:txBody>
       </p:sp>
       <p:sp>
         <p:nvSpPr>
@@ -12488,6 +12737,10 @@
             <a:prstDash val="solid"/>
           </a:ln>
         </p:spPr>
+        <p:txBody>
+          <a:bodyPr/>
+          <a:p/>
+        </p:txBody>
       </p:sp>
       <p:sp>
         <p:nvSpPr>
@@ -12628,6 +12881,10 @@
             <a:prstDash val="solid"/>
           </a:ln>
         </p:spPr>
+        <p:txBody>
+          <a:bodyPr/>
+          <a:p/>
+        </p:txBody>
       </p:sp>
       <p:sp>
         <p:nvSpPr>
@@ -12651,6 +12908,10 @@
             <a:prstDash val="solid"/>
           </a:ln>
         </p:spPr>
+        <p:txBody>
+          <a:bodyPr/>
+          <a:p/>
+        </p:txBody>
       </p:sp>
       <p:sp>
         <p:nvSpPr>
@@ -12979,6 +13240,10 @@
             <a:prstDash val="solid"/>
           </a:ln>
         </p:spPr>
+        <p:txBody>
+          <a:bodyPr/>
+          <a:p/>
+        </p:txBody>
       </p:sp>
       <p:sp>
         <p:nvSpPr>
@@ -13119,6 +13384,10 @@
             <a:prstDash val="solid"/>
           </a:ln>
         </p:spPr>
+        <p:txBody>
+          <a:bodyPr/>
+          <a:p/>
+        </p:txBody>
       </p:sp>
       <p:sp>
         <p:nvSpPr>
@@ -13259,6 +13528,10 @@
             <a:prstDash val="solid"/>
           </a:ln>
         </p:spPr>
+        <p:txBody>
+          <a:bodyPr/>
+          <a:p/>
+        </p:txBody>
       </p:sp>
       <p:sp>
         <p:nvSpPr>
@@ -13321,6 +13594,10 @@
             <a:prstDash val="solid"/>
           </a:ln>
         </p:spPr>
+        <p:txBody>
+          <a:bodyPr/>
+          <a:p/>
+        </p:txBody>
       </p:sp>
       <p:sp>
         <p:nvSpPr>
@@ -13582,7 +13859,7 @@
                 <a:ea typeface="Calibri" pitchFamily="34" charset="-122"/>
                 <a:cs typeface="Calibri" pitchFamily="34" charset="-120"/>
               </a:rPr>
-              <a:t>Soteria AI Technologies Inc. · Clean cap table · Holdco structure under evaluation</a:t>
+              <a:t>Soteria AI Technologies Inc. — Delaware C-Corporation · Clean single-entity cap table · IP held by the parent</a:t>
             </a:r>
             <a:endParaRPr lang="en-US" sz="1300" dirty="0"/>
           </a:p>
@@ -13610,6 +13887,10 @@
             <a:prstDash val="solid"/>
           </a:ln>
         </p:spPr>
+        <p:txBody>
+          <a:bodyPr/>
+          <a:p/>
+        </p:txBody>
       </p:sp>
       <p:sp>
         <p:nvSpPr>
@@ -13711,6 +13992,10 @@
             <a:prstDash val="solid"/>
           </a:ln>
         </p:spPr>
+        <p:txBody>
+          <a:bodyPr/>
+          <a:p/>
+        </p:txBody>
       </p:sp>
       <p:sp>
         <p:nvSpPr>
@@ -13812,6 +14097,10 @@
             <a:prstDash val="solid"/>
           </a:ln>
         </p:spPr>
+        <p:txBody>
+          <a:bodyPr/>
+          <a:p/>
+        </p:txBody>
       </p:sp>
       <p:sp>
         <p:nvSpPr>
@@ -13913,6 +14202,10 @@
             <a:prstDash val="solid"/>
           </a:ln>
         </p:spPr>
+        <p:txBody>
+          <a:bodyPr/>
+          <a:p/>
+        </p:txBody>
       </p:sp>
       <p:sp>
         <p:nvSpPr>
@@ -14014,6 +14307,10 @@
             <a:prstDash val="solid"/>
           </a:ln>
         </p:spPr>
+        <p:txBody>
+          <a:bodyPr/>
+          <a:p/>
+        </p:txBody>
       </p:sp>
       <p:sp>
         <p:nvSpPr>
@@ -14037,6 +14334,10 @@
             <a:prstDash val="solid"/>
           </a:ln>
         </p:spPr>
+        <p:txBody>
+          <a:bodyPr/>
+          <a:p/>
+        </p:txBody>
       </p:sp>
       <p:sp>
         <p:nvSpPr>
@@ -14253,6 +14554,10 @@
             <a:prstDash val="solid"/>
           </a:ln>
         </p:spPr>
+        <p:txBody>
+          <a:bodyPr/>
+          <a:p/>
+        </p:txBody>
       </p:sp>
       <p:sp>
         <p:nvSpPr>
@@ -14315,6 +14620,10 @@
             <a:prstDash val="solid"/>
           </a:ln>
         </p:spPr>
+        <p:txBody>
+          <a:bodyPr/>
+          <a:p/>
+        </p:txBody>
       </p:sp>
       <p:sp>
         <p:nvSpPr>
@@ -14450,6 +14759,10 @@
             <a:prstDash val="solid"/>
           </a:ln>
         </p:spPr>
+        <p:txBody>
+          <a:bodyPr/>
+          <a:p/>
+        </p:txBody>
       </p:sp>
       <p:sp>
         <p:nvSpPr>
@@ -14613,6 +14926,10 @@
             <a:prstDash val="solid"/>
           </a:ln>
         </p:spPr>
+        <p:txBody>
+          <a:bodyPr/>
+          <a:p/>
+        </p:txBody>
       </p:sp>
       <p:sp>
         <p:nvSpPr>
@@ -15331,6 +15648,10 @@
             <a:prstDash val="solid"/>
           </a:ln>
         </p:spPr>
+        <p:txBody>
+          <a:bodyPr/>
+          <a:p/>
+        </p:txBody>
       </p:sp>
       <p:sp>
         <p:nvSpPr>
@@ -15405,6 +15726,1307 @@
                 <a:cs typeface="Consolas" pitchFamily="34" charset="-120"/>
               </a:rPr>
               <a:t>03 / 22</a:t>
+            </a:r>
+            <a:endParaRPr lang="en-US" sz="900" dirty="0"/>
+          </a:p>
+        </p:txBody>
+      </p:sp>
+    </p:spTree>
+  </p:cSld>
+  <p:clrMapOvr>
+    <a:masterClrMapping/>
+  </p:clrMapOvr>
+</p:sld>
+</file>
+
+<file path=ppt/slides/slide30.xml><?xml version="1.0" encoding="utf-8"?>
+<p:sld xmlns:a="http://schemas.openxmlformats.org/drawingml/2006/main" xmlns:p="http://schemas.openxmlformats.org/presentationml/2006/main" xmlns:r="http://schemas.openxmlformats.org/officeDocument/2006/relationships">
+  <p:cSld>
+    <p:spTree>
+      <p:nvGrpSpPr>
+        <p:cNvPr id="1" name=""/>
+        <p:cNvGrpSpPr/>
+        <p:nvPr/>
+      </p:nvGrpSpPr>
+      <p:grpSpPr/>
+      <p:sp>
+        <p:nvSpPr>
+          <p:cNvPr id="2" name="Text 0"/>
+          <p:cNvSpPr/>
+          <p:nvPr/>
+        </p:nvSpPr>
+        <p:spPr>
+          <a:xfrm>
+            <a:off x="457200" y="502920"/>
+            <a:ext cx="10972800" cy="274320"/>
+          </a:xfrm>
+          <a:prstGeom prst="rect">
+            <a:avLst/>
+          </a:prstGeom>
+          <a:noFill/>
+          <a:ln/>
+        </p:spPr>
+        <p:txBody>
+          <a:bodyPr wrap="square" rtlCol="0" anchor="ctr"/>
+          <a:lstStyle/>
+          <a:p>
+            <a:pPr indent="0" marL="0">
+              <a:buNone/>
+            </a:pPr>
+            <a:r>
+              <a:rPr lang="en-US" sz="1000" b="1" spc="600" kern="0" dirty="0">
+                <a:solidFill>
+                  <a:srgbClr val="C9A24C"/>
+                </a:solidFill>
+                <a:latin typeface="Calibri" pitchFamily="34" charset="0"/>
+                <a:ea typeface="Calibri" pitchFamily="34" charset="-122"/>
+                <a:cs typeface="Calibri" pitchFamily="34" charset="-120"/>
+              </a:rPr>
+              <a:t>UNIT ECONOMICS &amp; CAPITAL EFFICIENCY</a:t>
+            </a:r>
+            <a:endParaRPr lang="en-US" sz="1000" dirty="0"/>
+          </a:p>
+        </p:txBody>
+      </p:sp>
+      <p:sp>
+        <p:nvSpPr>
+          <p:cNvPr id="3" name="Text 1"/>
+          <p:cNvSpPr/>
+          <p:nvPr/>
+        </p:nvSpPr>
+        <p:spPr>
+          <a:xfrm>
+            <a:off x="457200" y="868680"/>
+            <a:ext cx="10972800" cy="1005840"/>
+          </a:xfrm>
+          <a:prstGeom prst="rect">
+            <a:avLst/>
+          </a:prstGeom>
+          <a:noFill/>
+          <a:ln/>
+        </p:spPr>
+        <p:txBody>
+          <a:bodyPr wrap="square" rtlCol="0" anchor="t"/>
+          <a:lstStyle/>
+          <a:p>
+            <a:pPr indent="0" marL="0">
+              <a:buNone/>
+            </a:pPr>
+            <a:r>
+              <a:rPr lang="en-US" sz="4000" dirty="0">
+                <a:solidFill>
+                  <a:srgbClr val="F5F1E8"/>
+                </a:solidFill>
+                <a:latin typeface="Georgia" pitchFamily="34" charset="0"/>
+                <a:ea typeface="Georgia" pitchFamily="34" charset="-122"/>
+                <a:cs typeface="Georgia" pitchFamily="34" charset="-120"/>
+              </a:rPr>
+              <a:t>Software margins, metered AI cost, and capital that buys evidence — not construction.</a:t>
+            </a:r>
+            <a:endParaRPr lang="en-US" sz="4000" dirty="0"/>
+          </a:p>
+        </p:txBody>
+      </p:sp>
+      <p:sp>
+        <p:nvSpPr>
+          <p:cNvPr id="4" name="Shape 2"/>
+          <p:cNvSpPr/>
+          <p:nvPr/>
+        </p:nvSpPr>
+        <p:spPr>
+          <a:xfrm>
+            <a:off x="457200" y="2194560"/>
+            <a:ext cx="2743200" cy="1463040"/>
+          </a:xfrm>
+          <a:prstGeom prst="rect">
+            <a:avLst/>
+          </a:prstGeom>
+          <a:solidFill>
+            <a:srgbClr val="13204A"/>
+          </a:solidFill>
+          <a:ln w="6350">
+            <a:solidFill>
+              <a:srgbClr val="2A3562"/>
+            </a:solidFill>
+            <a:prstDash val="solid"/>
+          </a:ln>
+        </p:spPr>
+        <p:txBody>
+          <a:bodyPr/>
+          <a:p/>
+        </p:txBody>
+      </p:sp>
+      <p:sp>
+        <p:nvSpPr>
+          <p:cNvPr id="5" name="Text 3"/>
+          <p:cNvSpPr/>
+          <p:nvPr/>
+        </p:nvSpPr>
+        <p:spPr>
+          <a:xfrm>
+            <a:off x="640080" y="2331720"/>
+            <a:ext cx="2468880" cy="320040"/>
+          </a:xfrm>
+          <a:prstGeom prst="rect">
+            <a:avLst/>
+          </a:prstGeom>
+          <a:noFill/>
+          <a:ln/>
+        </p:spPr>
+        <p:txBody>
+          <a:bodyPr wrap="square" rtlCol="0" anchor="ctr"/>
+          <a:lstStyle/>
+          <a:p>
+            <a:pPr indent="0" marL="0">
+              <a:buNone/>
+            </a:pPr>
+            <a:r>
+              <a:rPr lang="en-US" sz="1000" b="1" spc="300" kern="0" dirty="0">
+                <a:solidFill>
+                  <a:srgbClr val="C9A24C"/>
+                </a:solidFill>
+                <a:latin typeface="Calibri" pitchFamily="34" charset="0"/>
+                <a:ea typeface="Calibri" pitchFamily="34" charset="-122"/>
+                <a:cs typeface="Calibri" pitchFamily="34" charset="-120"/>
+              </a:rPr>
+              <a:t>Gross Margin at Scale</a:t>
+            </a:r>
+            <a:endParaRPr lang="en-US" sz="1000" dirty="0"/>
+          </a:p>
+        </p:txBody>
+      </p:sp>
+      <p:sp>
+        <p:nvSpPr>
+          <p:cNvPr id="6" name="Text 4"/>
+          <p:cNvSpPr/>
+          <p:nvPr/>
+        </p:nvSpPr>
+        <p:spPr>
+          <a:xfrm>
+            <a:off x="640080" y="2651760"/>
+            <a:ext cx="2468880" cy="548640"/>
+          </a:xfrm>
+          <a:prstGeom prst="rect">
+            <a:avLst/>
+          </a:prstGeom>
+          <a:noFill/>
+          <a:ln/>
+        </p:spPr>
+        <p:txBody>
+          <a:bodyPr wrap="square" rtlCol="0" anchor="ctr"/>
+          <a:lstStyle/>
+          <a:p>
+            <a:pPr indent="0" marL="0">
+              <a:buNone/>
+            </a:pPr>
+            <a:r>
+              <a:rPr lang="en-US" sz="2600" dirty="0">
+                <a:solidFill>
+                  <a:srgbClr val="F5F1E8"/>
+                </a:solidFill>
+                <a:latin typeface="Georgia" pitchFamily="34" charset="0"/>
+                <a:ea typeface="Georgia" pitchFamily="34" charset="-122"/>
+                <a:cs typeface="Georgia" pitchFamily="34" charset="-120"/>
+              </a:rPr>
+              <a:t>78–84%</a:t>
+            </a:r>
+            <a:endParaRPr lang="en-US" sz="2600" dirty="0"/>
+          </a:p>
+        </p:txBody>
+      </p:sp>
+      <p:sp>
+        <p:nvSpPr>
+          <p:cNvPr id="7" name="Text 5"/>
+          <p:cNvSpPr/>
+          <p:nvPr/>
+        </p:nvSpPr>
+        <p:spPr>
+          <a:xfrm>
+            <a:off x="640080" y="3246120"/>
+            <a:ext cx="2468880" cy="365760"/>
+          </a:xfrm>
+          <a:prstGeom prst="rect">
+            <a:avLst/>
+          </a:prstGeom>
+          <a:noFill/>
+          <a:ln/>
+        </p:spPr>
+        <p:txBody>
+          <a:bodyPr wrap="square" rtlCol="0" anchor="ctr"/>
+          <a:lstStyle/>
+          <a:p>
+            <a:pPr indent="0" marL="0">
+              <a:buNone/>
+            </a:pPr>
+            <a:r>
+              <a:rPr lang="en-US" sz="1000" dirty="0">
+                <a:solidFill>
+                  <a:srgbClr val="8892B0"/>
+                </a:solidFill>
+                <a:latin typeface="Calibri" pitchFamily="34" charset="0"/>
+                <a:ea typeface="Calibri" pitchFamily="34" charset="-122"/>
+                <a:cs typeface="Calibri" pitchFamily="34" charset="-120"/>
+              </a:rPr>
+              <a:t>62–68% in year one</a:t>
+            </a:r>
+            <a:endParaRPr lang="en-US" sz="1000" dirty="0"/>
+          </a:p>
+        </p:txBody>
+      </p:sp>
+      <p:sp>
+        <p:nvSpPr>
+          <p:cNvPr id="8" name="Shape 6"/>
+          <p:cNvSpPr/>
+          <p:nvPr/>
+        </p:nvSpPr>
+        <p:spPr>
+          <a:xfrm>
+            <a:off x="3383280" y="2194560"/>
+            <a:ext cx="2743200" cy="1463040"/>
+          </a:xfrm>
+          <a:prstGeom prst="rect">
+            <a:avLst/>
+          </a:prstGeom>
+          <a:solidFill>
+            <a:srgbClr val="13204A"/>
+          </a:solidFill>
+          <a:ln w="6350">
+            <a:solidFill>
+              <a:srgbClr val="2A3562"/>
+            </a:solidFill>
+            <a:prstDash val="solid"/>
+          </a:ln>
+        </p:spPr>
+        <p:txBody>
+          <a:bodyPr/>
+          <a:p/>
+        </p:txBody>
+      </p:sp>
+      <p:sp>
+        <p:nvSpPr>
+          <p:cNvPr id="9" name="Text 7"/>
+          <p:cNvSpPr/>
+          <p:nvPr/>
+        </p:nvSpPr>
+        <p:spPr>
+          <a:xfrm>
+            <a:off x="3566160" y="2331720"/>
+            <a:ext cx="2468880" cy="320040"/>
+          </a:xfrm>
+          <a:prstGeom prst="rect">
+            <a:avLst/>
+          </a:prstGeom>
+          <a:noFill/>
+          <a:ln/>
+        </p:spPr>
+        <p:txBody>
+          <a:bodyPr wrap="square" rtlCol="0" anchor="ctr"/>
+          <a:lstStyle/>
+          <a:p>
+            <a:pPr indent="0" marL="0">
+              <a:buNone/>
+            </a:pPr>
+            <a:r>
+              <a:rPr lang="en-US" sz="1000" b="1" spc="300" kern="0" dirty="0">
+                <a:solidFill>
+                  <a:srgbClr val="C9A24C"/>
+                </a:solidFill>
+                <a:latin typeface="Calibri" pitchFamily="34" charset="0"/>
+                <a:ea typeface="Calibri" pitchFamily="34" charset="-122"/>
+                <a:cs typeface="Calibri" pitchFamily="34" charset="-120"/>
+              </a:rPr>
+              <a:t>Cost to Serve / Org</a:t>
+            </a:r>
+            <a:endParaRPr lang="en-US" sz="1000" dirty="0"/>
+          </a:p>
+        </p:txBody>
+      </p:sp>
+      <p:sp>
+        <p:nvSpPr>
+          <p:cNvPr id="10" name="Text 8"/>
+          <p:cNvSpPr/>
+          <p:nvPr/>
+        </p:nvSpPr>
+        <p:spPr>
+          <a:xfrm>
+            <a:off x="3566160" y="2651760"/>
+            <a:ext cx="2468880" cy="548640"/>
+          </a:xfrm>
+          <a:prstGeom prst="rect">
+            <a:avLst/>
+          </a:prstGeom>
+          <a:noFill/>
+          <a:ln/>
+        </p:spPr>
+        <p:txBody>
+          <a:bodyPr wrap="square" rtlCol="0" anchor="ctr"/>
+          <a:lstStyle/>
+          <a:p>
+            <a:pPr indent="0" marL="0">
+              <a:buNone/>
+            </a:pPr>
+            <a:r>
+              <a:rPr lang="en-US" sz="2600" dirty="0">
+                <a:solidFill>
+                  <a:srgbClr val="F5F1E8"/>
+                </a:solidFill>
+                <a:latin typeface="Georgia" pitchFamily="34" charset="0"/>
+                <a:ea typeface="Georgia" pitchFamily="34" charset="-122"/>
+                <a:cs typeface="Georgia" pitchFamily="34" charset="-120"/>
+              </a:rPr>
+              <a:t>$34–58 mo</a:t>
+            </a:r>
+            <a:endParaRPr lang="en-US" sz="2600" dirty="0"/>
+          </a:p>
+        </p:txBody>
+      </p:sp>
+      <p:sp>
+        <p:nvSpPr>
+          <p:cNvPr id="11" name="Text 9"/>
+          <p:cNvSpPr/>
+          <p:nvPr/>
+        </p:nvSpPr>
+        <p:spPr>
+          <a:xfrm>
+            <a:off x="3566160" y="3246120"/>
+            <a:ext cx="2468880" cy="365760"/>
+          </a:xfrm>
+          <a:prstGeom prst="rect">
+            <a:avLst/>
+          </a:prstGeom>
+          <a:noFill/>
+          <a:ln/>
+        </p:spPr>
+        <p:txBody>
+          <a:bodyPr wrap="square" rtlCol="0" anchor="ctr"/>
+          <a:lstStyle/>
+          <a:p>
+            <a:pPr indent="0" marL="0">
+              <a:buNone/>
+            </a:pPr>
+            <a:r>
+              <a:rPr lang="en-US" sz="1000" dirty="0">
+                <a:solidFill>
+                  <a:srgbClr val="8892B0"/>
+                </a:solidFill>
+                <a:latin typeface="Calibri" pitchFamily="34" charset="0"/>
+                <a:ea typeface="Calibri" pitchFamily="34" charset="-122"/>
+                <a:cs typeface="Calibri" pitchFamily="34" charset="-120"/>
+              </a:rPr>
+              <a:t>trending to $18–26 by year three</a:t>
+            </a:r>
+            <a:endParaRPr lang="en-US" sz="1000" dirty="0"/>
+          </a:p>
+        </p:txBody>
+      </p:sp>
+      <p:sp>
+        <p:nvSpPr>
+          <p:cNvPr id="12" name="Shape 10"/>
+          <p:cNvSpPr/>
+          <p:nvPr/>
+        </p:nvSpPr>
+        <p:spPr>
+          <a:xfrm>
+            <a:off x="6309360" y="2194560"/>
+            <a:ext cx="2743200" cy="1463040"/>
+          </a:xfrm>
+          <a:prstGeom prst="rect">
+            <a:avLst/>
+          </a:prstGeom>
+          <a:solidFill>
+            <a:srgbClr val="13204A"/>
+          </a:solidFill>
+          <a:ln w="6350">
+            <a:solidFill>
+              <a:srgbClr val="2A3562"/>
+            </a:solidFill>
+            <a:prstDash val="solid"/>
+          </a:ln>
+        </p:spPr>
+        <p:txBody>
+          <a:bodyPr/>
+          <a:p/>
+        </p:txBody>
+      </p:sp>
+      <p:sp>
+        <p:nvSpPr>
+          <p:cNvPr id="13" name="Text 11"/>
+          <p:cNvSpPr/>
+          <p:nvPr/>
+        </p:nvSpPr>
+        <p:spPr>
+          <a:xfrm>
+            <a:off x="6492240" y="2331720"/>
+            <a:ext cx="2468880" cy="320040"/>
+          </a:xfrm>
+          <a:prstGeom prst="rect">
+            <a:avLst/>
+          </a:prstGeom>
+          <a:noFill/>
+          <a:ln/>
+        </p:spPr>
+        <p:txBody>
+          <a:bodyPr wrap="square" rtlCol="0" anchor="ctr"/>
+          <a:lstStyle/>
+          <a:p>
+            <a:pPr indent="0" marL="0">
+              <a:buNone/>
+            </a:pPr>
+            <a:r>
+              <a:rPr lang="en-US" sz="1000" b="1" spc="300" kern="0" dirty="0">
+                <a:solidFill>
+                  <a:srgbClr val="C9A24C"/>
+                </a:solidFill>
+                <a:latin typeface="Calibri" pitchFamily="34" charset="0"/>
+                <a:ea typeface="Calibri" pitchFamily="34" charset="-122"/>
+                <a:cs typeface="Calibri" pitchFamily="34" charset="-120"/>
+              </a:rPr>
+              <a:t>CAC Payback</a:t>
+            </a:r>
+            <a:endParaRPr lang="en-US" sz="1000" dirty="0"/>
+          </a:p>
+        </p:txBody>
+      </p:sp>
+      <p:sp>
+        <p:nvSpPr>
+          <p:cNvPr id="14" name="Text 12"/>
+          <p:cNvSpPr/>
+          <p:nvPr/>
+        </p:nvSpPr>
+        <p:spPr>
+          <a:xfrm>
+            <a:off x="6492240" y="2651760"/>
+            <a:ext cx="2468880" cy="548640"/>
+          </a:xfrm>
+          <a:prstGeom prst="rect">
+            <a:avLst/>
+          </a:prstGeom>
+          <a:noFill/>
+          <a:ln/>
+        </p:spPr>
+        <p:txBody>
+          <a:bodyPr wrap="square" rtlCol="0" anchor="ctr"/>
+          <a:lstStyle/>
+          <a:p>
+            <a:pPr indent="0" marL="0">
+              <a:buNone/>
+            </a:pPr>
+            <a:r>
+              <a:rPr lang="en-US" sz="2600" dirty="0">
+                <a:solidFill>
+                  <a:srgbClr val="F5F1E8"/>
+                </a:solidFill>
+                <a:latin typeface="Georgia" pitchFamily="34" charset="0"/>
+                <a:ea typeface="Georgia" pitchFamily="34" charset="-122"/>
+                <a:cs typeface="Georgia" pitchFamily="34" charset="-120"/>
+              </a:rPr>
+              <a:t>12–18 mo</a:t>
+            </a:r>
+            <a:endParaRPr lang="en-US" sz="2600" dirty="0"/>
+          </a:p>
+        </p:txBody>
+      </p:sp>
+      <p:sp>
+        <p:nvSpPr>
+          <p:cNvPr id="15" name="Text 13"/>
+          <p:cNvSpPr/>
+          <p:nvPr/>
+        </p:nvSpPr>
+        <p:spPr>
+          <a:xfrm>
+            <a:off x="6492240" y="3246120"/>
+            <a:ext cx="2468880" cy="365760"/>
+          </a:xfrm>
+          <a:prstGeom prst="rect">
+            <a:avLst/>
+          </a:prstGeom>
+          <a:noFill/>
+          <a:ln/>
+        </p:spPr>
+        <p:txBody>
+          <a:bodyPr wrap="square" rtlCol="0" anchor="ctr"/>
+          <a:lstStyle/>
+          <a:p>
+            <a:pPr indent="0" marL="0">
+              <a:buNone/>
+            </a:pPr>
+            <a:r>
+              <a:rPr lang="en-US" sz="1000" dirty="0">
+                <a:solidFill>
+                  <a:srgbClr val="8892B0"/>
+                </a:solidFill>
+                <a:latin typeface="Calibri" pitchFamily="34" charset="0"/>
+                <a:ea typeface="Calibri" pitchFamily="34" charset="-122"/>
+                <a:cs typeface="Calibri" pitchFamily="34" charset="-120"/>
+              </a:rPr>
+              <a:t>&lt;10 mo as channel matures</a:t>
+            </a:r>
+            <a:endParaRPr lang="en-US" sz="1000" dirty="0"/>
+          </a:p>
+        </p:txBody>
+      </p:sp>
+      <p:sp>
+        <p:nvSpPr>
+          <p:cNvPr id="16" name="Shape 14"/>
+          <p:cNvSpPr/>
+          <p:nvPr/>
+        </p:nvSpPr>
+        <p:spPr>
+          <a:xfrm>
+            <a:off x="9235440" y="2194560"/>
+            <a:ext cx="2743200" cy="1463040"/>
+          </a:xfrm>
+          <a:prstGeom prst="rect">
+            <a:avLst/>
+          </a:prstGeom>
+          <a:solidFill>
+            <a:srgbClr val="13204A"/>
+          </a:solidFill>
+          <a:ln w="6350">
+            <a:solidFill>
+              <a:srgbClr val="2A3562"/>
+            </a:solidFill>
+            <a:prstDash val="solid"/>
+          </a:ln>
+        </p:spPr>
+        <p:txBody>
+          <a:bodyPr/>
+          <a:p/>
+        </p:txBody>
+      </p:sp>
+      <p:sp>
+        <p:nvSpPr>
+          <p:cNvPr id="17" name="Text 15"/>
+          <p:cNvSpPr/>
+          <p:nvPr/>
+        </p:nvSpPr>
+        <p:spPr>
+          <a:xfrm>
+            <a:off x="9418320" y="2331720"/>
+            <a:ext cx="2468880" cy="320040"/>
+          </a:xfrm>
+          <a:prstGeom prst="rect">
+            <a:avLst/>
+          </a:prstGeom>
+          <a:noFill/>
+          <a:ln/>
+        </p:spPr>
+        <p:txBody>
+          <a:bodyPr wrap="square" rtlCol="0" anchor="ctr"/>
+          <a:lstStyle/>
+          <a:p>
+            <a:pPr indent="0" marL="0">
+              <a:buNone/>
+            </a:pPr>
+            <a:r>
+              <a:rPr lang="en-US" sz="1000" b="1" spc="300" kern="0" dirty="0">
+                <a:solidFill>
+                  <a:srgbClr val="C9A24C"/>
+                </a:solidFill>
+                <a:latin typeface="Calibri" pitchFamily="34" charset="0"/>
+                <a:ea typeface="Calibri" pitchFamily="34" charset="-122"/>
+                <a:cs typeface="Calibri" pitchFamily="34" charset="-120"/>
+              </a:rPr>
+              <a:t>LTV : CAC (Year 3)</a:t>
+            </a:r>
+            <a:endParaRPr lang="en-US" sz="1000" dirty="0"/>
+          </a:p>
+        </p:txBody>
+      </p:sp>
+      <p:sp>
+        <p:nvSpPr>
+          <p:cNvPr id="18" name="Text 16"/>
+          <p:cNvSpPr/>
+          <p:nvPr/>
+        </p:nvSpPr>
+        <p:spPr>
+          <a:xfrm>
+            <a:off x="9418320" y="2651760"/>
+            <a:ext cx="2468880" cy="548640"/>
+          </a:xfrm>
+          <a:prstGeom prst="rect">
+            <a:avLst/>
+          </a:prstGeom>
+          <a:noFill/>
+          <a:ln/>
+        </p:spPr>
+        <p:txBody>
+          <a:bodyPr wrap="square" rtlCol="0" anchor="ctr"/>
+          <a:lstStyle/>
+          <a:p>
+            <a:pPr indent="0" marL="0">
+              <a:buNone/>
+            </a:pPr>
+            <a:r>
+              <a:rPr lang="en-US" sz="2600" dirty="0">
+                <a:solidFill>
+                  <a:srgbClr val="F5F1E8"/>
+                </a:solidFill>
+                <a:latin typeface="Georgia" pitchFamily="34" charset="0"/>
+                <a:ea typeface="Georgia" pitchFamily="34" charset="-122"/>
+                <a:cs typeface="Georgia" pitchFamily="34" charset="-120"/>
+              </a:rPr>
+              <a:t>≥ 3.5x</a:t>
+            </a:r>
+            <a:endParaRPr lang="en-US" sz="2600" dirty="0"/>
+          </a:p>
+        </p:txBody>
+      </p:sp>
+      <p:sp>
+        <p:nvSpPr>
+          <p:cNvPr id="19" name="Text 17"/>
+          <p:cNvSpPr/>
+          <p:nvPr/>
+        </p:nvSpPr>
+        <p:spPr>
+          <a:xfrm>
+            <a:off x="9418320" y="3246120"/>
+            <a:ext cx="2468880" cy="365760"/>
+          </a:xfrm>
+          <a:prstGeom prst="rect">
+            <a:avLst/>
+          </a:prstGeom>
+          <a:noFill/>
+          <a:ln/>
+        </p:spPr>
+        <p:txBody>
+          <a:bodyPr wrap="square" rtlCol="0" anchor="ctr"/>
+          <a:lstStyle/>
+          <a:p>
+            <a:pPr indent="0" marL="0">
+              <a:buNone/>
+            </a:pPr>
+            <a:r>
+              <a:rPr lang="en-US" sz="1000" dirty="0">
+                <a:solidFill>
+                  <a:srgbClr val="8892B0"/>
+                </a:solidFill>
+                <a:latin typeface="Calibri" pitchFamily="34" charset="0"/>
+                <a:ea typeface="Calibri" pitchFamily="34" charset="-122"/>
+                <a:cs typeface="Calibri" pitchFamily="34" charset="-120"/>
+              </a:rPr>
+              <a:t>NRR 108–125% on expansion</a:t>
+            </a:r>
+            <a:endParaRPr lang="en-US" sz="1000" dirty="0"/>
+          </a:p>
+        </p:txBody>
+      </p:sp>
+      <p:sp>
+        <p:nvSpPr>
+          <p:cNvPr id="20" name="Text 18"/>
+          <p:cNvSpPr/>
+          <p:nvPr/>
+        </p:nvSpPr>
+        <p:spPr>
+          <a:xfrm>
+            <a:off x="457200" y="4023360"/>
+            <a:ext cx="5486400" cy="274320"/>
+          </a:xfrm>
+          <a:prstGeom prst="rect">
+            <a:avLst/>
+          </a:prstGeom>
+          <a:noFill/>
+          <a:ln/>
+        </p:spPr>
+        <p:txBody>
+          <a:bodyPr wrap="square" rtlCol="0" anchor="ctr"/>
+          <a:lstStyle/>
+          <a:p>
+            <a:pPr indent="0" marL="0">
+              <a:buNone/>
+            </a:pPr>
+            <a:r>
+              <a:rPr lang="en-US" sz="1000" b="1" spc="400" kern="0" dirty="0">
+                <a:solidFill>
+                  <a:srgbClr val="C9A24C"/>
+                </a:solidFill>
+                <a:latin typeface="Calibri" pitchFamily="34" charset="0"/>
+                <a:ea typeface="Calibri" pitchFamily="34" charset="-122"/>
+                <a:cs typeface="Calibri" pitchFamily="34" charset="-120"/>
+              </a:rPr>
+              <a:t>WHAT $1.5M CONVERTS INTO</a:t>
+            </a:r>
+            <a:endParaRPr lang="en-US" sz="1000" dirty="0"/>
+          </a:p>
+        </p:txBody>
+      </p:sp>
+      <p:sp>
+        <p:nvSpPr>
+          <p:cNvPr id="21" name="Shape 19"/>
+          <p:cNvSpPr/>
+          <p:nvPr/>
+        </p:nvSpPr>
+        <p:spPr>
+          <a:xfrm>
+            <a:off x="457200" y="4343400"/>
+            <a:ext cx="3657600" cy="1188720"/>
+          </a:xfrm>
+          <a:prstGeom prst="rect">
+            <a:avLst/>
+          </a:prstGeom>
+          <a:solidFill>
+            <a:srgbClr val="13204A"/>
+          </a:solidFill>
+          <a:ln w="6350">
+            <a:solidFill>
+              <a:srgbClr val="2A3562"/>
+            </a:solidFill>
+            <a:prstDash val="solid"/>
+          </a:ln>
+        </p:spPr>
+        <p:txBody>
+          <a:bodyPr/>
+          <a:p/>
+        </p:txBody>
+      </p:sp>
+      <p:sp>
+        <p:nvSpPr>
+          <p:cNvPr id="22" name="Text 20"/>
+          <p:cNvSpPr/>
+          <p:nvPr/>
+        </p:nvSpPr>
+        <p:spPr>
+          <a:xfrm>
+            <a:off x="685800" y="4434840"/>
+            <a:ext cx="3200400" cy="320040"/>
+          </a:xfrm>
+          <a:prstGeom prst="rect">
+            <a:avLst/>
+          </a:prstGeom>
+          <a:noFill/>
+          <a:ln/>
+        </p:spPr>
+        <p:txBody>
+          <a:bodyPr wrap="square" rtlCol="0" anchor="ctr"/>
+          <a:lstStyle/>
+          <a:p>
+            <a:pPr indent="0" marL="0">
+              <a:buNone/>
+            </a:pPr>
+            <a:r>
+              <a:rPr lang="en-US" sz="1100" b="1" dirty="0">
+                <a:solidFill>
+                  <a:srgbClr val="C9A24C"/>
+                </a:solidFill>
+                <a:latin typeface="Calibri" pitchFamily="34" charset="0"/>
+                <a:ea typeface="Calibri" pitchFamily="34" charset="-122"/>
+                <a:cs typeface="Calibri" pitchFamily="34" charset="-120"/>
+              </a:rPr>
+              <a:t>Product &amp; Infrastructure</a:t>
+            </a:r>
+            <a:endParaRPr lang="en-US" sz="1100" dirty="0"/>
+          </a:p>
+        </p:txBody>
+      </p:sp>
+      <p:sp>
+        <p:nvSpPr>
+          <p:cNvPr id="23" name="Text 21"/>
+          <p:cNvSpPr/>
+          <p:nvPr/>
+        </p:nvSpPr>
+        <p:spPr>
+          <a:xfrm>
+            <a:off x="685800" y="4754880"/>
+            <a:ext cx="3200400" cy="457200"/>
+          </a:xfrm>
+          <a:prstGeom prst="rect">
+            <a:avLst/>
+          </a:prstGeom>
+          <a:noFill/>
+          <a:ln/>
+        </p:spPr>
+        <p:txBody>
+          <a:bodyPr wrap="square" rtlCol="0" anchor="ctr"/>
+          <a:lstStyle/>
+          <a:p>
+            <a:pPr indent="0" marL="0">
+              <a:buNone/>
+            </a:pPr>
+            <a:r>
+              <a:rPr lang="en-US" sz="2200" dirty="0">
+                <a:solidFill>
+                  <a:srgbClr val="F5F1E8"/>
+                </a:solidFill>
+                <a:latin typeface="Georgia" pitchFamily="34" charset="0"/>
+                <a:ea typeface="Georgia" pitchFamily="34" charset="-122"/>
+                <a:cs typeface="Georgia" pitchFamily="34" charset="-120"/>
+              </a:rPr>
+              <a:t>42%</a:t>
+            </a:r>
+            <a:endParaRPr lang="en-US" sz="2200" dirty="0"/>
+          </a:p>
+        </p:txBody>
+      </p:sp>
+      <p:sp>
+        <p:nvSpPr>
+          <p:cNvPr id="24" name="Text 22"/>
+          <p:cNvSpPr/>
+          <p:nvPr/>
+        </p:nvSpPr>
+        <p:spPr>
+          <a:xfrm>
+            <a:off x="685800" y="5212080"/>
+            <a:ext cx="3200400" cy="320040"/>
+          </a:xfrm>
+          <a:prstGeom prst="rect">
+            <a:avLst/>
+          </a:prstGeom>
+          <a:noFill/>
+          <a:ln/>
+        </p:spPr>
+        <p:txBody>
+          <a:bodyPr wrap="square" rtlCol="0" anchor="ctr"/>
+          <a:lstStyle/>
+          <a:p>
+            <a:pPr indent="0" marL="0">
+              <a:buNone/>
+            </a:pPr>
+            <a:r>
+              <a:rPr lang="en-US" sz="1100" dirty="0">
+                <a:solidFill>
+                  <a:srgbClr val="C8CFE0"/>
+                </a:solidFill>
+                <a:latin typeface="Calibri" pitchFamily="34" charset="0"/>
+                <a:ea typeface="Calibri" pitchFamily="34" charset="-122"/>
+                <a:cs typeface="Calibri" pitchFamily="34" charset="-120"/>
+              </a:rPr>
+              <a:t>Enterprise-ready platform, capacity to scale</a:t>
+            </a:r>
+            <a:endParaRPr lang="en-US" sz="1100" dirty="0"/>
+          </a:p>
+        </p:txBody>
+      </p:sp>
+      <p:sp>
+        <p:nvSpPr>
+          <p:cNvPr id="25" name="Shape 23"/>
+          <p:cNvSpPr/>
+          <p:nvPr/>
+        </p:nvSpPr>
+        <p:spPr>
+          <a:xfrm>
+            <a:off x="4370832" y="4343400"/>
+            <a:ext cx="3657600" cy="1188720"/>
+          </a:xfrm>
+          <a:prstGeom prst="rect">
+            <a:avLst/>
+          </a:prstGeom>
+          <a:solidFill>
+            <a:srgbClr val="13204A"/>
+          </a:solidFill>
+          <a:ln w="6350">
+            <a:solidFill>
+              <a:srgbClr val="2A3562"/>
+            </a:solidFill>
+            <a:prstDash val="solid"/>
+          </a:ln>
+        </p:spPr>
+        <p:txBody>
+          <a:bodyPr/>
+          <a:p/>
+        </p:txBody>
+      </p:sp>
+      <p:sp>
+        <p:nvSpPr>
+          <p:cNvPr id="26" name="Text 24"/>
+          <p:cNvSpPr/>
+          <p:nvPr/>
+        </p:nvSpPr>
+        <p:spPr>
+          <a:xfrm>
+            <a:off x="4599432" y="4434840"/>
+            <a:ext cx="3200400" cy="320040"/>
+          </a:xfrm>
+          <a:prstGeom prst="rect">
+            <a:avLst/>
+          </a:prstGeom>
+          <a:noFill/>
+          <a:ln/>
+        </p:spPr>
+        <p:txBody>
+          <a:bodyPr wrap="square" rtlCol="0" anchor="ctr"/>
+          <a:lstStyle/>
+          <a:p>
+            <a:pPr indent="0" marL="0">
+              <a:buNone/>
+            </a:pPr>
+            <a:r>
+              <a:rPr lang="en-US" sz="1100" b="1" dirty="0">
+                <a:solidFill>
+                  <a:srgbClr val="C9A24C"/>
+                </a:solidFill>
+                <a:latin typeface="Calibri" pitchFamily="34" charset="0"/>
+                <a:ea typeface="Calibri" pitchFamily="34" charset="-122"/>
+                <a:cs typeface="Calibri" pitchFamily="34" charset="-120"/>
+              </a:rPr>
+              <a:t>Go-to-Market</a:t>
+            </a:r>
+            <a:endParaRPr lang="en-US" sz="1100" dirty="0"/>
+          </a:p>
+        </p:txBody>
+      </p:sp>
+      <p:sp>
+        <p:nvSpPr>
+          <p:cNvPr id="27" name="Text 25"/>
+          <p:cNvSpPr/>
+          <p:nvPr/>
+        </p:nvSpPr>
+        <p:spPr>
+          <a:xfrm>
+            <a:off x="4599432" y="4754880"/>
+            <a:ext cx="3200400" cy="457200"/>
+          </a:xfrm>
+          <a:prstGeom prst="rect">
+            <a:avLst/>
+          </a:prstGeom>
+          <a:noFill/>
+          <a:ln/>
+        </p:spPr>
+        <p:txBody>
+          <a:bodyPr wrap="square" rtlCol="0" anchor="ctr"/>
+          <a:lstStyle/>
+          <a:p>
+            <a:pPr indent="0" marL="0">
+              <a:buNone/>
+            </a:pPr>
+            <a:r>
+              <a:rPr lang="en-US" sz="2200" dirty="0">
+                <a:solidFill>
+                  <a:srgbClr val="F5F1E8"/>
+                </a:solidFill>
+                <a:latin typeface="Georgia" pitchFamily="34" charset="0"/>
+                <a:ea typeface="Georgia" pitchFamily="34" charset="-122"/>
+                <a:cs typeface="Georgia" pitchFamily="34" charset="-120"/>
+              </a:rPr>
+              <a:t>35%</a:t>
+            </a:r>
+            <a:endParaRPr lang="en-US" sz="2200" dirty="0"/>
+          </a:p>
+        </p:txBody>
+      </p:sp>
+      <p:sp>
+        <p:nvSpPr>
+          <p:cNvPr id="28" name="Text 26"/>
+          <p:cNvSpPr/>
+          <p:nvPr/>
+        </p:nvSpPr>
+        <p:spPr>
+          <a:xfrm>
+            <a:off x="4599432" y="5212080"/>
+            <a:ext cx="3200400" cy="320040"/>
+          </a:xfrm>
+          <a:prstGeom prst="rect">
+            <a:avLst/>
+          </a:prstGeom>
+          <a:noFill/>
+          <a:ln/>
+        </p:spPr>
+        <p:txBody>
+          <a:bodyPr wrap="square" rtlCol="0" anchor="ctr"/>
+          <a:lstStyle/>
+          <a:p>
+            <a:pPr indent="0" marL="0">
+              <a:buNone/>
+            </a:pPr>
+            <a:r>
+              <a:rPr lang="en-US" sz="1100" dirty="0">
+                <a:solidFill>
+                  <a:srgbClr val="C8CFE0"/>
+                </a:solidFill>
+                <a:latin typeface="Calibri" pitchFamily="34" charset="0"/>
+                <a:ea typeface="Calibri" pitchFamily="34" charset="-122"/>
+                <a:cs typeface="Calibri" pitchFamily="34" charset="-120"/>
+              </a:rPr>
+              <a:t>First paying cohort, measured CAC</a:t>
+            </a:r>
+            <a:endParaRPr lang="en-US" sz="1100" dirty="0"/>
+          </a:p>
+        </p:txBody>
+      </p:sp>
+      <p:sp>
+        <p:nvSpPr>
+          <p:cNvPr id="29" name="Shape 27"/>
+          <p:cNvSpPr/>
+          <p:nvPr/>
+        </p:nvSpPr>
+        <p:spPr>
+          <a:xfrm>
+            <a:off x="8284464" y="4343400"/>
+            <a:ext cx="3657600" cy="1188720"/>
+          </a:xfrm>
+          <a:prstGeom prst="rect">
+            <a:avLst/>
+          </a:prstGeom>
+          <a:solidFill>
+            <a:srgbClr val="13204A"/>
+          </a:solidFill>
+          <a:ln w="6350">
+            <a:solidFill>
+              <a:srgbClr val="2A3562"/>
+            </a:solidFill>
+            <a:prstDash val="solid"/>
+          </a:ln>
+        </p:spPr>
+        <p:txBody>
+          <a:bodyPr/>
+          <a:p/>
+        </p:txBody>
+      </p:sp>
+      <p:sp>
+        <p:nvSpPr>
+          <p:cNvPr id="30" name="Text 28"/>
+          <p:cNvSpPr/>
+          <p:nvPr/>
+        </p:nvSpPr>
+        <p:spPr>
+          <a:xfrm>
+            <a:off x="8513064" y="4434840"/>
+            <a:ext cx="3200400" cy="320040"/>
+          </a:xfrm>
+          <a:prstGeom prst="rect">
+            <a:avLst/>
+          </a:prstGeom>
+          <a:noFill/>
+          <a:ln/>
+        </p:spPr>
+        <p:txBody>
+          <a:bodyPr wrap="square" rtlCol="0" anchor="ctr"/>
+          <a:lstStyle/>
+          <a:p>
+            <a:pPr indent="0" marL="0">
+              <a:buNone/>
+            </a:pPr>
+            <a:r>
+              <a:rPr lang="en-US" sz="1100" b="1" dirty="0">
+                <a:solidFill>
+                  <a:srgbClr val="C9A24C"/>
+                </a:solidFill>
+                <a:latin typeface="Calibri" pitchFamily="34" charset="0"/>
+                <a:ea typeface="Calibri" pitchFamily="34" charset="-122"/>
+                <a:cs typeface="Calibri" pitchFamily="34" charset="-120"/>
+              </a:rPr>
+              <a:t>Sales, Success &amp; AI</a:t>
+            </a:r>
+            <a:endParaRPr lang="en-US" sz="1100" dirty="0"/>
+          </a:p>
+        </p:txBody>
+      </p:sp>
+      <p:sp>
+        <p:nvSpPr>
+          <p:cNvPr id="31" name="Text 29"/>
+          <p:cNvSpPr/>
+          <p:nvPr/>
+        </p:nvSpPr>
+        <p:spPr>
+          <a:xfrm>
+            <a:off x="8513064" y="4754880"/>
+            <a:ext cx="3200400" cy="457200"/>
+          </a:xfrm>
+          <a:prstGeom prst="rect">
+            <a:avLst/>
+          </a:prstGeom>
+          <a:noFill/>
+          <a:ln/>
+        </p:spPr>
+        <p:txBody>
+          <a:bodyPr wrap="square" rtlCol="0" anchor="ctr"/>
+          <a:lstStyle/>
+          <a:p>
+            <a:pPr indent="0" marL="0">
+              <a:buNone/>
+            </a:pPr>
+            <a:r>
+              <a:rPr lang="en-US" sz="2200" dirty="0">
+                <a:solidFill>
+                  <a:srgbClr val="F5F1E8"/>
+                </a:solidFill>
+                <a:latin typeface="Georgia" pitchFamily="34" charset="0"/>
+                <a:ea typeface="Georgia" pitchFamily="34" charset="-122"/>
+                <a:cs typeface="Georgia" pitchFamily="34" charset="-120"/>
+              </a:rPr>
+              <a:t>23%</a:t>
+            </a:r>
+            <a:endParaRPr lang="en-US" sz="2200" dirty="0"/>
+          </a:p>
+        </p:txBody>
+      </p:sp>
+      <p:sp>
+        <p:nvSpPr>
+          <p:cNvPr id="32" name="Text 30"/>
+          <p:cNvSpPr/>
+          <p:nvPr/>
+        </p:nvSpPr>
+        <p:spPr>
+          <a:xfrm>
+            <a:off x="8513064" y="5212080"/>
+            <a:ext cx="3200400" cy="320040"/>
+          </a:xfrm>
+          <a:prstGeom prst="rect">
+            <a:avLst/>
+          </a:prstGeom>
+          <a:noFill/>
+          <a:ln/>
+        </p:spPr>
+        <p:txBody>
+          <a:bodyPr wrap="square" rtlCol="0" anchor="ctr"/>
+          <a:lstStyle/>
+          <a:p>
+            <a:pPr indent="0" marL="0">
+              <a:buNone/>
+            </a:pPr>
+            <a:r>
+              <a:rPr lang="en-US" sz="1100" dirty="0">
+                <a:solidFill>
+                  <a:srgbClr val="C8CFE0"/>
+                </a:solidFill>
+                <a:latin typeface="Calibri" pitchFamily="34" charset="0"/>
+                <a:ea typeface="Calibri" pitchFamily="34" charset="-122"/>
+                <a:cs typeface="Calibri" pitchFamily="34" charset="-120"/>
+              </a:rPr>
+              <a:t>Repeatable engine, higher customer value</a:t>
+            </a:r>
+            <a:endParaRPr lang="en-US" sz="1100" dirty="0"/>
+          </a:p>
+        </p:txBody>
+      </p:sp>
+      <p:sp>
+        <p:nvSpPr>
+          <p:cNvPr id="33" name="Text 31"/>
+          <p:cNvSpPr/>
+          <p:nvPr/>
+        </p:nvSpPr>
+        <p:spPr>
+          <a:xfrm>
+            <a:off x="457200" y="6080760"/>
+            <a:ext cx="11277295" cy="320040"/>
+          </a:xfrm>
+          <a:prstGeom prst="rect">
+            <a:avLst/>
+          </a:prstGeom>
+          <a:noFill/>
+          <a:ln/>
+        </p:spPr>
+        <p:txBody>
+          <a:bodyPr wrap="square" rtlCol="0" anchor="ctr"/>
+          <a:lstStyle/>
+          <a:p>
+            <a:pPr indent="0" marL="0">
+              <a:buNone/>
+            </a:pPr>
+            <a:r>
+              <a:rPr lang="en-US" sz="850" i="1" dirty="0">
+                <a:solidFill>
+                  <a:srgbClr val="8892B0"/>
+                </a:solidFill>
+                <a:latin typeface="Calibri" pitchFamily="34" charset="0"/>
+                <a:ea typeface="Calibri" pitchFamily="34" charset="-122"/>
+                <a:cs typeface="Calibri" pitchFamily="34" charset="-120"/>
+              </a:rPr>
+              <a:t>The platform is already built. This round funds commercialization, so incremental revenue lands on a largely fixed cost base. Full derivation in the Capital Efficiency &amp; Unit Economics Memo.</a:t>
+            </a:r>
+            <a:endParaRPr lang="en-US" sz="850" dirty="0"/>
+          </a:p>
+        </p:txBody>
+      </p:sp>
+      <p:sp>
+        <p:nvSpPr>
+          <p:cNvPr id="34" name="Shape 32"/>
+          <p:cNvSpPr/>
+          <p:nvPr/>
+        </p:nvSpPr>
+        <p:spPr>
+          <a:xfrm>
+            <a:off x="457200" y="6446520"/>
+            <a:ext cx="11277295" cy="0"/>
+          </a:xfrm>
+          <a:prstGeom prst="line">
+            <a:avLst/>
+          </a:prstGeom>
+          <a:noFill/>
+          <a:ln w="9525">
+            <a:solidFill>
+              <a:srgbClr val="2A3562"/>
+            </a:solidFill>
+            <a:prstDash val="solid"/>
+          </a:ln>
+        </p:spPr>
+        <p:txBody>
+          <a:bodyPr/>
+          <a:p/>
+        </p:txBody>
+      </p:sp>
+      <p:sp>
+        <p:nvSpPr>
+          <p:cNvPr id="35" name="Text 33"/>
+          <p:cNvSpPr/>
+          <p:nvPr/>
+        </p:nvSpPr>
+        <p:spPr>
+          <a:xfrm>
+            <a:off x="457200" y="6510528"/>
+            <a:ext cx="7315200" cy="274320"/>
+          </a:xfrm>
+          <a:prstGeom prst="rect">
+            <a:avLst/>
+          </a:prstGeom>
+          <a:noFill/>
+          <a:ln/>
+        </p:spPr>
+        <p:txBody>
+          <a:bodyPr wrap="square" rtlCol="0" anchor="ctr"/>
+          <a:lstStyle/>
+          <a:p>
+            <a:pPr indent="0" marL="0">
+              <a:buNone/>
+            </a:pPr>
+            <a:r>
+              <a:rPr lang="en-US" sz="900" spc="300" kern="0" dirty="0">
+                <a:solidFill>
+                  <a:srgbClr val="8892B0"/>
+                </a:solidFill>
+                <a:latin typeface="Calibri" pitchFamily="34" charset="0"/>
+                <a:ea typeface="Calibri" pitchFamily="34" charset="-122"/>
+                <a:cs typeface="Calibri" pitchFamily="34" charset="-120"/>
+              </a:rPr>
+              <a:t>GLOBAL OFFICE  /  CONFIDENTIAL INVESTOR MATERIALS</a:t>
+            </a:r>
+            <a:endParaRPr lang="en-US" sz="900" dirty="0"/>
+          </a:p>
+        </p:txBody>
+      </p:sp>
+      <p:sp>
+        <p:nvSpPr>
+          <p:cNvPr id="36" name="Text 34"/>
+          <p:cNvSpPr/>
+          <p:nvPr/>
+        </p:nvSpPr>
+        <p:spPr>
+          <a:xfrm>
+            <a:off x="9905695" y="6510528"/>
+            <a:ext cx="1828800" cy="274320"/>
+          </a:xfrm>
+          <a:prstGeom prst="rect">
+            <a:avLst/>
+          </a:prstGeom>
+          <a:noFill/>
+          <a:ln/>
+        </p:spPr>
+        <p:txBody>
+          <a:bodyPr wrap="square" rtlCol="0" anchor="ctr"/>
+          <a:lstStyle/>
+          <a:p>
+            <a:pPr algn="r" indent="0" marL="0">
+              <a:buNone/>
+            </a:pPr>
+            <a:r>
+              <a:rPr lang="en-US" sz="900" dirty="0">
+                <a:solidFill>
+                  <a:srgbClr val="C9A24C"/>
+                </a:solidFill>
+                <a:latin typeface="Consolas" pitchFamily="34" charset="0"/>
+                <a:ea typeface="Consolas" pitchFamily="34" charset="-122"/>
+                <a:cs typeface="Consolas" pitchFamily="34" charset="-120"/>
+              </a:rPr>
+              <a:t>15 / 23</a:t>
             </a:r>
             <a:endParaRPr lang="en-US" sz="900" dirty="0"/>
           </a:p>
@@ -15544,6 +17166,10 @@
             <a:prstDash val="solid"/>
           </a:ln>
         </p:spPr>
+        <p:txBody>
+          <a:bodyPr/>
+          <a:p/>
+        </p:txBody>
       </p:sp>
       <p:sp>
         <p:nvSpPr>
@@ -15569,6 +17195,10 @@
             <a:prstDash val="solid"/>
           </a:ln>
         </p:spPr>
+        <p:txBody>
+          <a:bodyPr/>
+          <a:p/>
+        </p:txBody>
       </p:sp>
       <p:sp>
         <p:nvSpPr>
@@ -15672,6 +17302,10 @@
             <a:prstDash val="solid"/>
           </a:ln>
         </p:spPr>
+        <p:txBody>
+          <a:bodyPr/>
+          <a:p/>
+        </p:txBody>
       </p:sp>
       <p:sp>
         <p:nvSpPr>
@@ -15697,6 +17331,10 @@
             <a:prstDash val="solid"/>
           </a:ln>
         </p:spPr>
+        <p:txBody>
+          <a:bodyPr/>
+          <a:p/>
+        </p:txBody>
       </p:sp>
       <p:sp>
         <p:nvSpPr>
@@ -15800,6 +17438,10 @@
             <a:prstDash val="solid"/>
           </a:ln>
         </p:spPr>
+        <p:txBody>
+          <a:bodyPr/>
+          <a:p/>
+        </p:txBody>
       </p:sp>
       <p:sp>
         <p:nvSpPr>
@@ -15825,6 +17467,10 @@
             <a:prstDash val="solid"/>
           </a:ln>
         </p:spPr>
+        <p:txBody>
+          <a:bodyPr/>
+          <a:p/>
+        </p:txBody>
       </p:sp>
       <p:sp>
         <p:nvSpPr>
@@ -15928,6 +17574,10 @@
             <a:prstDash val="solid"/>
           </a:ln>
         </p:spPr>
+        <p:txBody>
+          <a:bodyPr/>
+          <a:p/>
+        </p:txBody>
       </p:sp>
       <p:sp>
         <p:nvSpPr>
@@ -15953,6 +17603,10 @@
             <a:prstDash val="solid"/>
           </a:ln>
         </p:spPr>
+        <p:txBody>
+          <a:bodyPr/>
+          <a:p/>
+        </p:txBody>
       </p:sp>
       <p:sp>
         <p:nvSpPr>
@@ -16054,6 +17708,10 @@
             <a:prstDash val="solid"/>
           </a:ln>
         </p:spPr>
+        <p:txBody>
+          <a:bodyPr/>
+          <a:p/>
+        </p:txBody>
       </p:sp>
       <p:sp>
         <p:nvSpPr>
@@ -16267,6 +17925,10 @@
             <a:prstDash val="solid"/>
           </a:ln>
         </p:spPr>
+        <p:txBody>
+          <a:bodyPr/>
+          <a:p/>
+        </p:txBody>
       </p:sp>
       <p:sp>
         <p:nvSpPr>
@@ -16370,6 +18032,10 @@
             <a:prstDash val="solid"/>
           </a:ln>
         </p:spPr>
+        <p:txBody>
+          <a:bodyPr/>
+          <a:p/>
+        </p:txBody>
       </p:sp>
       <p:sp>
         <p:nvSpPr>
@@ -16473,6 +18139,10 @@
             <a:prstDash val="solid"/>
           </a:ln>
         </p:spPr>
+        <p:txBody>
+          <a:bodyPr/>
+          <a:p/>
+        </p:txBody>
       </p:sp>
       <p:sp>
         <p:nvSpPr>
@@ -16576,6 +18246,10 @@
             <a:prstDash val="solid"/>
           </a:ln>
         </p:spPr>
+        <p:txBody>
+          <a:bodyPr/>
+          <a:p/>
+        </p:txBody>
       </p:sp>
       <p:sp>
         <p:nvSpPr>
@@ -16679,6 +18353,10 @@
             <a:prstDash val="solid"/>
           </a:ln>
         </p:spPr>
+        <p:txBody>
+          <a:bodyPr/>
+          <a:p/>
+        </p:txBody>
       </p:sp>
       <p:sp>
         <p:nvSpPr>
@@ -16782,6 +18460,10 @@
             <a:prstDash val="solid"/>
           </a:ln>
         </p:spPr>
+        <p:txBody>
+          <a:bodyPr/>
+          <a:p/>
+        </p:txBody>
       </p:sp>
       <p:sp>
         <p:nvSpPr>
@@ -16885,6 +18567,10 @@
             <a:prstDash val="solid"/>
           </a:ln>
         </p:spPr>
+        <p:txBody>
+          <a:bodyPr/>
+          <a:p/>
+        </p:txBody>
       </p:sp>
       <p:sp>
         <p:nvSpPr>
@@ -16988,6 +18674,10 @@
             <a:prstDash val="solid"/>
           </a:ln>
         </p:spPr>
+        <p:txBody>
+          <a:bodyPr/>
+          <a:p/>
+        </p:txBody>
       </p:sp>
       <p:sp>
         <p:nvSpPr>
@@ -17091,6 +18781,10 @@
             <a:prstDash val="solid"/>
           </a:ln>
         </p:spPr>
+        <p:txBody>
+          <a:bodyPr/>
+          <a:p/>
+        </p:txBody>
       </p:sp>
       <p:sp>
         <p:nvSpPr>
@@ -17231,6 +18925,10 @@
             <a:prstDash val="solid"/>
           </a:ln>
         </p:spPr>
+        <p:txBody>
+          <a:bodyPr/>
+          <a:p/>
+        </p:txBody>
       </p:sp>
       <p:sp>
         <p:nvSpPr>
@@ -17598,6 +19296,10 @@
             <a:prstDash val="solid"/>
           </a:ln>
         </p:spPr>
+        <p:txBody>
+          <a:bodyPr/>
+          <a:p/>
+        </p:txBody>
       </p:sp>
       <p:sp>
         <p:nvSpPr>
@@ -18091,6 +19793,10 @@
             <a:prstDash val="solid"/>
           </a:ln>
         </p:spPr>
+        <p:txBody>
+          <a:bodyPr/>
+          <a:p/>
+        </p:txBody>
       </p:sp>
       <p:sp>
         <p:nvSpPr>
@@ -18309,6 +20015,10 @@
             <a:prstDash val="solid"/>
           </a:ln>
         </p:spPr>
+        <p:txBody>
+          <a:bodyPr/>
+          <a:p/>
+        </p:txBody>
       </p:sp>
       <p:sp>
         <p:nvSpPr>
@@ -18522,6 +20232,10 @@
             <a:prstDash val="solid"/>
           </a:ln>
         </p:spPr>
+        <p:txBody>
+          <a:bodyPr/>
+          <a:p/>
+        </p:txBody>
       </p:sp>
       <p:sp>
         <p:nvSpPr>
@@ -18625,6 +20339,10 @@
             <a:prstDash val="solid"/>
           </a:ln>
         </p:spPr>
+        <p:txBody>
+          <a:bodyPr/>
+          <a:p/>
+        </p:txBody>
       </p:sp>
       <p:sp>
         <p:nvSpPr>
@@ -18728,6 +20446,10 @@
             <a:prstDash val="solid"/>
           </a:ln>
         </p:spPr>
+        <p:txBody>
+          <a:bodyPr/>
+          <a:p/>
+        </p:txBody>
       </p:sp>
       <p:sp>
         <p:nvSpPr>
@@ -18831,6 +20553,10 @@
             <a:prstDash val="solid"/>
           </a:ln>
         </p:spPr>
+        <p:txBody>
+          <a:bodyPr/>
+          <a:p/>
+        </p:txBody>
       </p:sp>
       <p:sp>
         <p:nvSpPr>
@@ -18932,6 +20658,10 @@
             <a:prstDash val="solid"/>
           </a:ln>
         </p:spPr>
+        <p:txBody>
+          <a:bodyPr/>
+          <a:p/>
+        </p:txBody>
       </p:sp>
       <p:sp>
         <p:nvSpPr>

--- a/public/investor-pack/Global-Office-Investor-Deck.pptx
+++ b/public/investor-pack/Global-Office-Investor-Deck.pptx
@@ -9830,6 +9830,1314 @@
 </file>
 
 <file path=ppt/slides/slide22.xml><?xml version="1.0" encoding="utf-8"?>
+<p:sld xmlns:a="http://schemas.openxmlformats.org/drawingml/2006/main" xmlns:p="http://schemas.openxmlformats.org/presentationml/2006/main" xmlns:r="http://schemas.openxmlformats.org/officeDocument/2006/relationships">
+  <p:cSld>
+    <p:bg>
+      <p:bgPr>
+        <a:solidFill>
+          <a:srgbClr val="0B1533"/>
+        </a:solidFill>
+      </p:bgPr>
+    </p:bg>
+    <p:spTree>
+      <p:nvGrpSpPr>
+        <p:cNvPr id="1" name=""/>
+        <p:cNvGrpSpPr/>
+        <p:nvPr/>
+      </p:nvGrpSpPr>
+      <p:grpSpPr/>
+      <p:sp>
+        <p:nvSpPr>
+          <p:cNvPr id="2" name="Text 0"/>
+          <p:cNvSpPr/>
+          <p:nvPr/>
+        </p:nvSpPr>
+        <p:spPr>
+          <a:xfrm>
+            <a:off x="457200" y="502920"/>
+            <a:ext cx="10972800" cy="274320"/>
+          </a:xfrm>
+          <a:prstGeom prst="rect">
+            <a:avLst/>
+          </a:prstGeom>
+          <a:noFill/>
+          <a:ln/>
+        </p:spPr>
+        <p:txBody>
+          <a:bodyPr wrap="square" rtlCol="0" anchor="ctr"/>
+          <a:lstStyle/>
+          <a:p>
+            <a:pPr indent="0" marL="0">
+              <a:buNone/>
+            </a:pPr>
+            <a:r>
+              <a:rPr lang="en-US" sz="1000" b="1" spc="600" kern="0" dirty="0">
+                <a:solidFill>
+                  <a:srgbClr val="C9A24C"/>
+                </a:solidFill>
+                <a:latin typeface="Calibri" pitchFamily="34" charset="0"/>
+                <a:ea typeface="Calibri" pitchFamily="34" charset="-122"/>
+                <a:cs typeface="Calibri" pitchFamily="34" charset="-120"/>
+              </a:rPr>
+              <a:t>UNIT ECONOMICS &amp; CAPITAL EFFICIENCY</a:t>
+            </a:r>
+            <a:endParaRPr lang="en-US" sz="1000" dirty="0"/>
+          </a:p>
+        </p:txBody>
+      </p:sp>
+      <p:sp>
+        <p:nvSpPr>
+          <p:cNvPr id="3" name="Text 1"/>
+          <p:cNvSpPr/>
+          <p:nvPr/>
+        </p:nvSpPr>
+        <p:spPr>
+          <a:xfrm>
+            <a:off x="457200" y="868680"/>
+            <a:ext cx="10972800" cy="1005840"/>
+          </a:xfrm>
+          <a:prstGeom prst="rect">
+            <a:avLst/>
+          </a:prstGeom>
+          <a:noFill/>
+          <a:ln/>
+        </p:spPr>
+        <p:txBody>
+          <a:bodyPr wrap="square" rtlCol="0" anchor="t"/>
+          <a:lstStyle/>
+          <a:p>
+            <a:pPr indent="0" marL="0">
+              <a:buNone/>
+            </a:pPr>
+            <a:r>
+              <a:rPr lang="en-US" sz="4000" dirty="0">
+                <a:solidFill>
+                  <a:srgbClr val="F5F1E8"/>
+                </a:solidFill>
+                <a:latin typeface="Georgia" pitchFamily="34" charset="0"/>
+                <a:ea typeface="Georgia" pitchFamily="34" charset="-122"/>
+                <a:cs typeface="Georgia" pitchFamily="34" charset="-120"/>
+              </a:rPr>
+              <a:t>Software margins, metered AI cost, and capital that buys evidence.</a:t>
+            </a:r>
+            <a:endParaRPr lang="en-US" sz="4000" dirty="0"/>
+          </a:p>
+        </p:txBody>
+      </p:sp>
+      <p:sp>
+        <p:nvSpPr>
+          <p:cNvPr id="4" name="Shape 2"/>
+          <p:cNvSpPr/>
+          <p:nvPr/>
+        </p:nvSpPr>
+        <p:spPr>
+          <a:xfrm>
+            <a:off x="457200" y="2194560"/>
+            <a:ext cx="2743200" cy="1463040"/>
+          </a:xfrm>
+          <a:prstGeom prst="rect">
+            <a:avLst/>
+          </a:prstGeom>
+          <a:solidFill>
+            <a:srgbClr val="13204A"/>
+          </a:solidFill>
+          <a:ln w="6350">
+            <a:solidFill>
+              <a:srgbClr val="2A3562"/>
+            </a:solidFill>
+            <a:prstDash val="solid"/>
+          </a:ln>
+        </p:spPr>
+        <p:txBody>
+          <a:bodyPr/>
+          <a:p/>
+        </p:txBody>
+      </p:sp>
+      <p:sp>
+        <p:nvSpPr>
+          <p:cNvPr id="5" name="Text 3"/>
+          <p:cNvSpPr/>
+          <p:nvPr/>
+        </p:nvSpPr>
+        <p:spPr>
+          <a:xfrm>
+            <a:off x="640080" y="2331720"/>
+            <a:ext cx="2468880" cy="320040"/>
+          </a:xfrm>
+          <a:prstGeom prst="rect">
+            <a:avLst/>
+          </a:prstGeom>
+          <a:noFill/>
+          <a:ln/>
+        </p:spPr>
+        <p:txBody>
+          <a:bodyPr wrap="square" rtlCol="0" anchor="ctr"/>
+          <a:lstStyle/>
+          <a:p>
+            <a:pPr indent="0" marL="0">
+              <a:buNone/>
+            </a:pPr>
+            <a:r>
+              <a:rPr lang="en-US" sz="1000" b="1" spc="300" kern="0" dirty="0">
+                <a:solidFill>
+                  <a:srgbClr val="C9A24C"/>
+                </a:solidFill>
+                <a:latin typeface="Calibri" pitchFamily="34" charset="0"/>
+                <a:ea typeface="Calibri" pitchFamily="34" charset="-122"/>
+                <a:cs typeface="Calibri" pitchFamily="34" charset="-120"/>
+              </a:rPr>
+              <a:t>Gross Margin at Scale</a:t>
+            </a:r>
+            <a:endParaRPr lang="en-US" sz="1000" dirty="0"/>
+          </a:p>
+        </p:txBody>
+      </p:sp>
+      <p:sp>
+        <p:nvSpPr>
+          <p:cNvPr id="6" name="Text 4"/>
+          <p:cNvSpPr/>
+          <p:nvPr/>
+        </p:nvSpPr>
+        <p:spPr>
+          <a:xfrm>
+            <a:off x="640080" y="2651760"/>
+            <a:ext cx="2468880" cy="548640"/>
+          </a:xfrm>
+          <a:prstGeom prst="rect">
+            <a:avLst/>
+          </a:prstGeom>
+          <a:noFill/>
+          <a:ln/>
+        </p:spPr>
+        <p:txBody>
+          <a:bodyPr wrap="square" rtlCol="0" anchor="ctr"/>
+          <a:lstStyle/>
+          <a:p>
+            <a:pPr indent="0" marL="0">
+              <a:buNone/>
+            </a:pPr>
+            <a:r>
+              <a:rPr lang="en-US" sz="2600" dirty="0">
+                <a:solidFill>
+                  <a:srgbClr val="F5F1E8"/>
+                </a:solidFill>
+                <a:latin typeface="Georgia" pitchFamily="34" charset="0"/>
+                <a:ea typeface="Georgia" pitchFamily="34" charset="-122"/>
+                <a:cs typeface="Georgia" pitchFamily="34" charset="-120"/>
+              </a:rPr>
+              <a:t>78–84%</a:t>
+            </a:r>
+            <a:endParaRPr lang="en-US" sz="2600" dirty="0"/>
+          </a:p>
+        </p:txBody>
+      </p:sp>
+      <p:sp>
+        <p:nvSpPr>
+          <p:cNvPr id="7" name="Text 5"/>
+          <p:cNvSpPr/>
+          <p:nvPr/>
+        </p:nvSpPr>
+        <p:spPr>
+          <a:xfrm>
+            <a:off x="640080" y="3246120"/>
+            <a:ext cx="2468880" cy="365760"/>
+          </a:xfrm>
+          <a:prstGeom prst="rect">
+            <a:avLst/>
+          </a:prstGeom>
+          <a:noFill/>
+          <a:ln/>
+        </p:spPr>
+        <p:txBody>
+          <a:bodyPr wrap="square" rtlCol="0" anchor="ctr"/>
+          <a:lstStyle/>
+          <a:p>
+            <a:pPr indent="0" marL="0">
+              <a:buNone/>
+            </a:pPr>
+            <a:r>
+              <a:rPr lang="en-US" sz="1000" dirty="0">
+                <a:solidFill>
+                  <a:srgbClr val="8892B0"/>
+                </a:solidFill>
+                <a:latin typeface="Calibri" pitchFamily="34" charset="0"/>
+                <a:ea typeface="Calibri" pitchFamily="34" charset="-122"/>
+                <a:cs typeface="Calibri" pitchFamily="34" charset="-120"/>
+              </a:rPr>
+              <a:t>62–68% in year one</a:t>
+            </a:r>
+            <a:endParaRPr lang="en-US" sz="1000" dirty="0"/>
+          </a:p>
+        </p:txBody>
+      </p:sp>
+      <p:sp>
+        <p:nvSpPr>
+          <p:cNvPr id="8" name="Shape 6"/>
+          <p:cNvSpPr/>
+          <p:nvPr/>
+        </p:nvSpPr>
+        <p:spPr>
+          <a:xfrm>
+            <a:off x="3383280" y="2194560"/>
+            <a:ext cx="2743200" cy="1463040"/>
+          </a:xfrm>
+          <a:prstGeom prst="rect">
+            <a:avLst/>
+          </a:prstGeom>
+          <a:solidFill>
+            <a:srgbClr val="13204A"/>
+          </a:solidFill>
+          <a:ln w="6350">
+            <a:solidFill>
+              <a:srgbClr val="2A3562"/>
+            </a:solidFill>
+            <a:prstDash val="solid"/>
+          </a:ln>
+        </p:spPr>
+        <p:txBody>
+          <a:bodyPr/>
+          <a:p/>
+        </p:txBody>
+      </p:sp>
+      <p:sp>
+        <p:nvSpPr>
+          <p:cNvPr id="9" name="Text 7"/>
+          <p:cNvSpPr/>
+          <p:nvPr/>
+        </p:nvSpPr>
+        <p:spPr>
+          <a:xfrm>
+            <a:off x="3566160" y="2331720"/>
+            <a:ext cx="2468880" cy="320040"/>
+          </a:xfrm>
+          <a:prstGeom prst="rect">
+            <a:avLst/>
+          </a:prstGeom>
+          <a:noFill/>
+          <a:ln/>
+        </p:spPr>
+        <p:txBody>
+          <a:bodyPr wrap="square" rtlCol="0" anchor="ctr"/>
+          <a:lstStyle/>
+          <a:p>
+            <a:pPr indent="0" marL="0">
+              <a:buNone/>
+            </a:pPr>
+            <a:r>
+              <a:rPr lang="en-US" sz="1000" b="1" spc="300" kern="0" dirty="0">
+                <a:solidFill>
+                  <a:srgbClr val="C9A24C"/>
+                </a:solidFill>
+                <a:latin typeface="Calibri" pitchFamily="34" charset="0"/>
+                <a:ea typeface="Calibri" pitchFamily="34" charset="-122"/>
+                <a:cs typeface="Calibri" pitchFamily="34" charset="-120"/>
+              </a:rPr>
+              <a:t>Cost to Serve / Org</a:t>
+            </a:r>
+            <a:endParaRPr lang="en-US" sz="1000" dirty="0"/>
+          </a:p>
+        </p:txBody>
+      </p:sp>
+      <p:sp>
+        <p:nvSpPr>
+          <p:cNvPr id="10" name="Text 8"/>
+          <p:cNvSpPr/>
+          <p:nvPr/>
+        </p:nvSpPr>
+        <p:spPr>
+          <a:xfrm>
+            <a:off x="3566160" y="2651760"/>
+            <a:ext cx="2468880" cy="548640"/>
+          </a:xfrm>
+          <a:prstGeom prst="rect">
+            <a:avLst/>
+          </a:prstGeom>
+          <a:noFill/>
+          <a:ln/>
+        </p:spPr>
+        <p:txBody>
+          <a:bodyPr wrap="square" rtlCol="0" anchor="ctr"/>
+          <a:lstStyle/>
+          <a:p>
+            <a:pPr indent="0" marL="0">
+              <a:buNone/>
+            </a:pPr>
+            <a:r>
+              <a:rPr lang="en-US" sz="2600" dirty="0">
+                <a:solidFill>
+                  <a:srgbClr val="F5F1E8"/>
+                </a:solidFill>
+                <a:latin typeface="Georgia" pitchFamily="34" charset="0"/>
+                <a:ea typeface="Georgia" pitchFamily="34" charset="-122"/>
+                <a:cs typeface="Georgia" pitchFamily="34" charset="-120"/>
+              </a:rPr>
+              <a:t>$34–58 mo</a:t>
+            </a:r>
+            <a:endParaRPr lang="en-US" sz="2600" dirty="0"/>
+          </a:p>
+        </p:txBody>
+      </p:sp>
+      <p:sp>
+        <p:nvSpPr>
+          <p:cNvPr id="11" name="Text 9"/>
+          <p:cNvSpPr/>
+          <p:nvPr/>
+        </p:nvSpPr>
+        <p:spPr>
+          <a:xfrm>
+            <a:off x="3566160" y="3246120"/>
+            <a:ext cx="2468880" cy="365760"/>
+          </a:xfrm>
+          <a:prstGeom prst="rect">
+            <a:avLst/>
+          </a:prstGeom>
+          <a:noFill/>
+          <a:ln/>
+        </p:spPr>
+        <p:txBody>
+          <a:bodyPr wrap="square" rtlCol="0" anchor="ctr"/>
+          <a:lstStyle/>
+          <a:p>
+            <a:pPr indent="0" marL="0">
+              <a:buNone/>
+            </a:pPr>
+            <a:r>
+              <a:rPr lang="en-US" sz="1000" dirty="0">
+                <a:solidFill>
+                  <a:srgbClr val="8892B0"/>
+                </a:solidFill>
+                <a:latin typeface="Calibri" pitchFamily="34" charset="0"/>
+                <a:ea typeface="Calibri" pitchFamily="34" charset="-122"/>
+                <a:cs typeface="Calibri" pitchFamily="34" charset="-120"/>
+              </a:rPr>
+              <a:t>trending to $18–26 by year three</a:t>
+            </a:r>
+            <a:endParaRPr lang="en-US" sz="1000" dirty="0"/>
+          </a:p>
+        </p:txBody>
+      </p:sp>
+      <p:sp>
+        <p:nvSpPr>
+          <p:cNvPr id="12" name="Shape 10"/>
+          <p:cNvSpPr/>
+          <p:nvPr/>
+        </p:nvSpPr>
+        <p:spPr>
+          <a:xfrm>
+            <a:off x="6309360" y="2194560"/>
+            <a:ext cx="2743200" cy="1463040"/>
+          </a:xfrm>
+          <a:prstGeom prst="rect">
+            <a:avLst/>
+          </a:prstGeom>
+          <a:solidFill>
+            <a:srgbClr val="13204A"/>
+          </a:solidFill>
+          <a:ln w="6350">
+            <a:solidFill>
+              <a:srgbClr val="2A3562"/>
+            </a:solidFill>
+            <a:prstDash val="solid"/>
+          </a:ln>
+        </p:spPr>
+        <p:txBody>
+          <a:bodyPr/>
+          <a:p/>
+        </p:txBody>
+      </p:sp>
+      <p:sp>
+        <p:nvSpPr>
+          <p:cNvPr id="13" name="Text 11"/>
+          <p:cNvSpPr/>
+          <p:nvPr/>
+        </p:nvSpPr>
+        <p:spPr>
+          <a:xfrm>
+            <a:off x="6492240" y="2331720"/>
+            <a:ext cx="2468880" cy="320040"/>
+          </a:xfrm>
+          <a:prstGeom prst="rect">
+            <a:avLst/>
+          </a:prstGeom>
+          <a:noFill/>
+          <a:ln/>
+        </p:spPr>
+        <p:txBody>
+          <a:bodyPr wrap="square" rtlCol="0" anchor="ctr"/>
+          <a:lstStyle/>
+          <a:p>
+            <a:pPr indent="0" marL="0">
+              <a:buNone/>
+            </a:pPr>
+            <a:r>
+              <a:rPr lang="en-US" sz="1000" b="1" spc="300" kern="0" dirty="0">
+                <a:solidFill>
+                  <a:srgbClr val="C9A24C"/>
+                </a:solidFill>
+                <a:latin typeface="Calibri" pitchFamily="34" charset="0"/>
+                <a:ea typeface="Calibri" pitchFamily="34" charset="-122"/>
+                <a:cs typeface="Calibri" pitchFamily="34" charset="-120"/>
+              </a:rPr>
+              <a:t>CAC Payback</a:t>
+            </a:r>
+            <a:endParaRPr lang="en-US" sz="1000" dirty="0"/>
+          </a:p>
+        </p:txBody>
+      </p:sp>
+      <p:sp>
+        <p:nvSpPr>
+          <p:cNvPr id="14" name="Text 12"/>
+          <p:cNvSpPr/>
+          <p:nvPr/>
+        </p:nvSpPr>
+        <p:spPr>
+          <a:xfrm>
+            <a:off x="6492240" y="2651760"/>
+            <a:ext cx="2468880" cy="548640"/>
+          </a:xfrm>
+          <a:prstGeom prst="rect">
+            <a:avLst/>
+          </a:prstGeom>
+          <a:noFill/>
+          <a:ln/>
+        </p:spPr>
+        <p:txBody>
+          <a:bodyPr wrap="square" rtlCol="0" anchor="ctr"/>
+          <a:lstStyle/>
+          <a:p>
+            <a:pPr indent="0" marL="0">
+              <a:buNone/>
+            </a:pPr>
+            <a:r>
+              <a:rPr lang="en-US" sz="2600" dirty="0">
+                <a:solidFill>
+                  <a:srgbClr val="F5F1E8"/>
+                </a:solidFill>
+                <a:latin typeface="Georgia" pitchFamily="34" charset="0"/>
+                <a:ea typeface="Georgia" pitchFamily="34" charset="-122"/>
+                <a:cs typeface="Georgia" pitchFamily="34" charset="-120"/>
+              </a:rPr>
+              <a:t>12–18 mo</a:t>
+            </a:r>
+            <a:endParaRPr lang="en-US" sz="2600" dirty="0"/>
+          </a:p>
+        </p:txBody>
+      </p:sp>
+      <p:sp>
+        <p:nvSpPr>
+          <p:cNvPr id="15" name="Text 13"/>
+          <p:cNvSpPr/>
+          <p:nvPr/>
+        </p:nvSpPr>
+        <p:spPr>
+          <a:xfrm>
+            <a:off x="6492240" y="3246120"/>
+            <a:ext cx="2468880" cy="365760"/>
+          </a:xfrm>
+          <a:prstGeom prst="rect">
+            <a:avLst/>
+          </a:prstGeom>
+          <a:noFill/>
+          <a:ln/>
+        </p:spPr>
+        <p:txBody>
+          <a:bodyPr wrap="square" rtlCol="0" anchor="ctr"/>
+          <a:lstStyle/>
+          <a:p>
+            <a:pPr indent="0" marL="0">
+              <a:buNone/>
+            </a:pPr>
+            <a:r>
+              <a:rPr lang="en-US" sz="1000" dirty="0">
+                <a:solidFill>
+                  <a:srgbClr val="8892B0"/>
+                </a:solidFill>
+                <a:latin typeface="Calibri" pitchFamily="34" charset="0"/>
+                <a:ea typeface="Calibri" pitchFamily="34" charset="-122"/>
+                <a:cs typeface="Calibri" pitchFamily="34" charset="-120"/>
+              </a:rPr>
+              <a:t>&lt;10 mo as channel matures</a:t>
+            </a:r>
+            <a:endParaRPr lang="en-US" sz="1000" dirty="0"/>
+          </a:p>
+        </p:txBody>
+      </p:sp>
+      <p:sp>
+        <p:nvSpPr>
+          <p:cNvPr id="16" name="Shape 14"/>
+          <p:cNvSpPr/>
+          <p:nvPr/>
+        </p:nvSpPr>
+        <p:spPr>
+          <a:xfrm>
+            <a:off x="9235440" y="2194560"/>
+            <a:ext cx="2743200" cy="1463040"/>
+          </a:xfrm>
+          <a:prstGeom prst="rect">
+            <a:avLst/>
+          </a:prstGeom>
+          <a:solidFill>
+            <a:srgbClr val="13204A"/>
+          </a:solidFill>
+          <a:ln w="6350">
+            <a:solidFill>
+              <a:srgbClr val="2A3562"/>
+            </a:solidFill>
+            <a:prstDash val="solid"/>
+          </a:ln>
+        </p:spPr>
+        <p:txBody>
+          <a:bodyPr/>
+          <a:p/>
+        </p:txBody>
+      </p:sp>
+      <p:sp>
+        <p:nvSpPr>
+          <p:cNvPr id="17" name="Text 15"/>
+          <p:cNvSpPr/>
+          <p:nvPr/>
+        </p:nvSpPr>
+        <p:spPr>
+          <a:xfrm>
+            <a:off x="9418320" y="2331720"/>
+            <a:ext cx="2468880" cy="320040"/>
+          </a:xfrm>
+          <a:prstGeom prst="rect">
+            <a:avLst/>
+          </a:prstGeom>
+          <a:noFill/>
+          <a:ln/>
+        </p:spPr>
+        <p:txBody>
+          <a:bodyPr wrap="square" rtlCol="0" anchor="ctr"/>
+          <a:lstStyle/>
+          <a:p>
+            <a:pPr indent="0" marL="0">
+              <a:buNone/>
+            </a:pPr>
+            <a:r>
+              <a:rPr lang="en-US" sz="1000" b="1" spc="300" kern="0" dirty="0">
+                <a:solidFill>
+                  <a:srgbClr val="C9A24C"/>
+                </a:solidFill>
+                <a:latin typeface="Calibri" pitchFamily="34" charset="0"/>
+                <a:ea typeface="Calibri" pitchFamily="34" charset="-122"/>
+                <a:cs typeface="Calibri" pitchFamily="34" charset="-120"/>
+              </a:rPr>
+              <a:t>LTV : CAC (Year 3)</a:t>
+            </a:r>
+            <a:endParaRPr lang="en-US" sz="1000" dirty="0"/>
+          </a:p>
+        </p:txBody>
+      </p:sp>
+      <p:sp>
+        <p:nvSpPr>
+          <p:cNvPr id="18" name="Text 16"/>
+          <p:cNvSpPr/>
+          <p:nvPr/>
+        </p:nvSpPr>
+        <p:spPr>
+          <a:xfrm>
+            <a:off x="9418320" y="2651760"/>
+            <a:ext cx="2468880" cy="548640"/>
+          </a:xfrm>
+          <a:prstGeom prst="rect">
+            <a:avLst/>
+          </a:prstGeom>
+          <a:noFill/>
+          <a:ln/>
+        </p:spPr>
+        <p:txBody>
+          <a:bodyPr wrap="square" rtlCol="0" anchor="ctr"/>
+          <a:lstStyle/>
+          <a:p>
+            <a:pPr indent="0" marL="0">
+              <a:buNone/>
+            </a:pPr>
+            <a:r>
+              <a:rPr lang="en-US" sz="2600" dirty="0">
+                <a:solidFill>
+                  <a:srgbClr val="F5F1E8"/>
+                </a:solidFill>
+                <a:latin typeface="Georgia" pitchFamily="34" charset="0"/>
+                <a:ea typeface="Georgia" pitchFamily="34" charset="-122"/>
+                <a:cs typeface="Georgia" pitchFamily="34" charset="-120"/>
+              </a:rPr>
+              <a:t>≥ 3.5x</a:t>
+            </a:r>
+            <a:endParaRPr lang="en-US" sz="2600" dirty="0"/>
+          </a:p>
+        </p:txBody>
+      </p:sp>
+      <p:sp>
+        <p:nvSpPr>
+          <p:cNvPr id="19" name="Text 17"/>
+          <p:cNvSpPr/>
+          <p:nvPr/>
+        </p:nvSpPr>
+        <p:spPr>
+          <a:xfrm>
+            <a:off x="9418320" y="3246120"/>
+            <a:ext cx="2468880" cy="365760"/>
+          </a:xfrm>
+          <a:prstGeom prst="rect">
+            <a:avLst/>
+          </a:prstGeom>
+          <a:noFill/>
+          <a:ln/>
+        </p:spPr>
+        <p:txBody>
+          <a:bodyPr wrap="square" rtlCol="0" anchor="ctr"/>
+          <a:lstStyle/>
+          <a:p>
+            <a:pPr indent="0" marL="0">
+              <a:buNone/>
+            </a:pPr>
+            <a:r>
+              <a:rPr lang="en-US" sz="1000" dirty="0">
+                <a:solidFill>
+                  <a:srgbClr val="8892B0"/>
+                </a:solidFill>
+                <a:latin typeface="Calibri" pitchFamily="34" charset="0"/>
+                <a:ea typeface="Calibri" pitchFamily="34" charset="-122"/>
+                <a:cs typeface="Calibri" pitchFamily="34" charset="-120"/>
+              </a:rPr>
+              <a:t>NRR 108–125% on expansion</a:t>
+            </a:r>
+            <a:endParaRPr lang="en-US" sz="1000" dirty="0"/>
+          </a:p>
+        </p:txBody>
+      </p:sp>
+      <p:sp>
+        <p:nvSpPr>
+          <p:cNvPr id="20" name="Text 18"/>
+          <p:cNvSpPr/>
+          <p:nvPr/>
+        </p:nvSpPr>
+        <p:spPr>
+          <a:xfrm>
+            <a:off x="457200" y="4023360"/>
+            <a:ext cx="5486400" cy="274320"/>
+          </a:xfrm>
+          <a:prstGeom prst="rect">
+            <a:avLst/>
+          </a:prstGeom>
+          <a:noFill/>
+          <a:ln/>
+        </p:spPr>
+        <p:txBody>
+          <a:bodyPr wrap="square" rtlCol="0" anchor="ctr"/>
+          <a:lstStyle/>
+          <a:p>
+            <a:pPr indent="0" marL="0">
+              <a:buNone/>
+            </a:pPr>
+            <a:r>
+              <a:rPr lang="en-US" sz="1000" b="1" spc="400" kern="0" dirty="0">
+                <a:solidFill>
+                  <a:srgbClr val="C9A24C"/>
+                </a:solidFill>
+                <a:latin typeface="Calibri" pitchFamily="34" charset="0"/>
+                <a:ea typeface="Calibri" pitchFamily="34" charset="-122"/>
+                <a:cs typeface="Calibri" pitchFamily="34" charset="-120"/>
+              </a:rPr>
+              <a:t>WHAT $1.5M CONVERTS INTO</a:t>
+            </a:r>
+            <a:endParaRPr lang="en-US" sz="1000" dirty="0"/>
+          </a:p>
+        </p:txBody>
+      </p:sp>
+      <p:sp>
+        <p:nvSpPr>
+          <p:cNvPr id="21" name="Shape 19"/>
+          <p:cNvSpPr/>
+          <p:nvPr/>
+        </p:nvSpPr>
+        <p:spPr>
+          <a:xfrm>
+            <a:off x="457200" y="4343400"/>
+            <a:ext cx="3657600" cy="1188720"/>
+          </a:xfrm>
+          <a:prstGeom prst="rect">
+            <a:avLst/>
+          </a:prstGeom>
+          <a:solidFill>
+            <a:srgbClr val="13204A"/>
+          </a:solidFill>
+          <a:ln w="6350">
+            <a:solidFill>
+              <a:srgbClr val="2A3562"/>
+            </a:solidFill>
+            <a:prstDash val="solid"/>
+          </a:ln>
+        </p:spPr>
+        <p:txBody>
+          <a:bodyPr/>
+          <a:p/>
+        </p:txBody>
+      </p:sp>
+      <p:sp>
+        <p:nvSpPr>
+          <p:cNvPr id="22" name="Text 20"/>
+          <p:cNvSpPr/>
+          <p:nvPr/>
+        </p:nvSpPr>
+        <p:spPr>
+          <a:xfrm>
+            <a:off x="685800" y="4434840"/>
+            <a:ext cx="3200400" cy="320040"/>
+          </a:xfrm>
+          <a:prstGeom prst="rect">
+            <a:avLst/>
+          </a:prstGeom>
+          <a:noFill/>
+          <a:ln/>
+        </p:spPr>
+        <p:txBody>
+          <a:bodyPr wrap="square" rtlCol="0" anchor="ctr"/>
+          <a:lstStyle/>
+          <a:p>
+            <a:pPr indent="0" marL="0">
+              <a:buNone/>
+            </a:pPr>
+            <a:r>
+              <a:rPr lang="en-US" sz="1100" b="1" dirty="0">
+                <a:solidFill>
+                  <a:srgbClr val="C9A24C"/>
+                </a:solidFill>
+                <a:latin typeface="Calibri" pitchFamily="34" charset="0"/>
+                <a:ea typeface="Calibri" pitchFamily="34" charset="-122"/>
+                <a:cs typeface="Calibri" pitchFamily="34" charset="-120"/>
+              </a:rPr>
+              <a:t>Product &amp; Infrastructure</a:t>
+            </a:r>
+            <a:endParaRPr lang="en-US" sz="1100" dirty="0"/>
+          </a:p>
+        </p:txBody>
+      </p:sp>
+      <p:sp>
+        <p:nvSpPr>
+          <p:cNvPr id="23" name="Text 21"/>
+          <p:cNvSpPr/>
+          <p:nvPr/>
+        </p:nvSpPr>
+        <p:spPr>
+          <a:xfrm>
+            <a:off x="685800" y="4754880"/>
+            <a:ext cx="3200400" cy="457200"/>
+          </a:xfrm>
+          <a:prstGeom prst="rect">
+            <a:avLst/>
+          </a:prstGeom>
+          <a:noFill/>
+          <a:ln/>
+        </p:spPr>
+        <p:txBody>
+          <a:bodyPr wrap="square" rtlCol="0" anchor="ctr"/>
+          <a:lstStyle/>
+          <a:p>
+            <a:pPr indent="0" marL="0">
+              <a:buNone/>
+            </a:pPr>
+            <a:r>
+              <a:rPr lang="en-US" sz="2200" dirty="0">
+                <a:solidFill>
+                  <a:srgbClr val="F5F1E8"/>
+                </a:solidFill>
+                <a:latin typeface="Georgia" pitchFamily="34" charset="0"/>
+                <a:ea typeface="Georgia" pitchFamily="34" charset="-122"/>
+                <a:cs typeface="Georgia" pitchFamily="34" charset="-120"/>
+              </a:rPr>
+              <a:t>42%</a:t>
+            </a:r>
+            <a:endParaRPr lang="en-US" sz="2200" dirty="0"/>
+          </a:p>
+        </p:txBody>
+      </p:sp>
+      <p:sp>
+        <p:nvSpPr>
+          <p:cNvPr id="24" name="Text 22"/>
+          <p:cNvSpPr/>
+          <p:nvPr/>
+        </p:nvSpPr>
+        <p:spPr>
+          <a:xfrm>
+            <a:off x="685800" y="5212080"/>
+            <a:ext cx="3200400" cy="320040"/>
+          </a:xfrm>
+          <a:prstGeom prst="rect">
+            <a:avLst/>
+          </a:prstGeom>
+          <a:noFill/>
+          <a:ln/>
+        </p:spPr>
+        <p:txBody>
+          <a:bodyPr wrap="square" rtlCol="0" anchor="ctr"/>
+          <a:lstStyle/>
+          <a:p>
+            <a:pPr indent="0" marL="0">
+              <a:buNone/>
+            </a:pPr>
+            <a:r>
+              <a:rPr lang="en-US" sz="1100" dirty="0">
+                <a:solidFill>
+                  <a:srgbClr val="C8CFE0"/>
+                </a:solidFill>
+                <a:latin typeface="Calibri" pitchFamily="34" charset="0"/>
+                <a:ea typeface="Calibri" pitchFamily="34" charset="-122"/>
+                <a:cs typeface="Calibri" pitchFamily="34" charset="-120"/>
+              </a:rPr>
+              <a:t>Enterprise-ready platform, capacity to scale</a:t>
+            </a:r>
+            <a:endParaRPr lang="en-US" sz="1100" dirty="0"/>
+          </a:p>
+        </p:txBody>
+      </p:sp>
+      <p:sp>
+        <p:nvSpPr>
+          <p:cNvPr id="25" name="Shape 23"/>
+          <p:cNvSpPr/>
+          <p:nvPr/>
+        </p:nvSpPr>
+        <p:spPr>
+          <a:xfrm>
+            <a:off x="4370832" y="4343400"/>
+            <a:ext cx="3657600" cy="1188720"/>
+          </a:xfrm>
+          <a:prstGeom prst="rect">
+            <a:avLst/>
+          </a:prstGeom>
+          <a:solidFill>
+            <a:srgbClr val="13204A"/>
+          </a:solidFill>
+          <a:ln w="6350">
+            <a:solidFill>
+              <a:srgbClr val="2A3562"/>
+            </a:solidFill>
+            <a:prstDash val="solid"/>
+          </a:ln>
+        </p:spPr>
+        <p:txBody>
+          <a:bodyPr/>
+          <a:p/>
+        </p:txBody>
+      </p:sp>
+      <p:sp>
+        <p:nvSpPr>
+          <p:cNvPr id="26" name="Text 24"/>
+          <p:cNvSpPr/>
+          <p:nvPr/>
+        </p:nvSpPr>
+        <p:spPr>
+          <a:xfrm>
+            <a:off x="4599432" y="4434840"/>
+            <a:ext cx="3200400" cy="320040"/>
+          </a:xfrm>
+          <a:prstGeom prst="rect">
+            <a:avLst/>
+          </a:prstGeom>
+          <a:noFill/>
+          <a:ln/>
+        </p:spPr>
+        <p:txBody>
+          <a:bodyPr wrap="square" rtlCol="0" anchor="ctr"/>
+          <a:lstStyle/>
+          <a:p>
+            <a:pPr indent="0" marL="0">
+              <a:buNone/>
+            </a:pPr>
+            <a:r>
+              <a:rPr lang="en-US" sz="1100" b="1" dirty="0">
+                <a:solidFill>
+                  <a:srgbClr val="C9A24C"/>
+                </a:solidFill>
+                <a:latin typeface="Calibri" pitchFamily="34" charset="0"/>
+                <a:ea typeface="Calibri" pitchFamily="34" charset="-122"/>
+                <a:cs typeface="Calibri" pitchFamily="34" charset="-120"/>
+              </a:rPr>
+              <a:t>Go-to-Market</a:t>
+            </a:r>
+            <a:endParaRPr lang="en-US" sz="1100" dirty="0"/>
+          </a:p>
+        </p:txBody>
+      </p:sp>
+      <p:sp>
+        <p:nvSpPr>
+          <p:cNvPr id="27" name="Text 25"/>
+          <p:cNvSpPr/>
+          <p:nvPr/>
+        </p:nvSpPr>
+        <p:spPr>
+          <a:xfrm>
+            <a:off x="4599432" y="4754880"/>
+            <a:ext cx="3200400" cy="457200"/>
+          </a:xfrm>
+          <a:prstGeom prst="rect">
+            <a:avLst/>
+          </a:prstGeom>
+          <a:noFill/>
+          <a:ln/>
+        </p:spPr>
+        <p:txBody>
+          <a:bodyPr wrap="square" rtlCol="0" anchor="ctr"/>
+          <a:lstStyle/>
+          <a:p>
+            <a:pPr indent="0" marL="0">
+              <a:buNone/>
+            </a:pPr>
+            <a:r>
+              <a:rPr lang="en-US" sz="2200" dirty="0">
+                <a:solidFill>
+                  <a:srgbClr val="F5F1E8"/>
+                </a:solidFill>
+                <a:latin typeface="Georgia" pitchFamily="34" charset="0"/>
+                <a:ea typeface="Georgia" pitchFamily="34" charset="-122"/>
+                <a:cs typeface="Georgia" pitchFamily="34" charset="-120"/>
+              </a:rPr>
+              <a:t>35%</a:t>
+            </a:r>
+            <a:endParaRPr lang="en-US" sz="2200" dirty="0"/>
+          </a:p>
+        </p:txBody>
+      </p:sp>
+      <p:sp>
+        <p:nvSpPr>
+          <p:cNvPr id="28" name="Text 26"/>
+          <p:cNvSpPr/>
+          <p:nvPr/>
+        </p:nvSpPr>
+        <p:spPr>
+          <a:xfrm>
+            <a:off x="4599432" y="5212080"/>
+            <a:ext cx="3200400" cy="320040"/>
+          </a:xfrm>
+          <a:prstGeom prst="rect">
+            <a:avLst/>
+          </a:prstGeom>
+          <a:noFill/>
+          <a:ln/>
+        </p:spPr>
+        <p:txBody>
+          <a:bodyPr wrap="square" rtlCol="0" anchor="ctr"/>
+          <a:lstStyle/>
+          <a:p>
+            <a:pPr indent="0" marL="0">
+              <a:buNone/>
+            </a:pPr>
+            <a:r>
+              <a:rPr lang="en-US" sz="1100" dirty="0">
+                <a:solidFill>
+                  <a:srgbClr val="C8CFE0"/>
+                </a:solidFill>
+                <a:latin typeface="Calibri" pitchFamily="34" charset="0"/>
+                <a:ea typeface="Calibri" pitchFamily="34" charset="-122"/>
+                <a:cs typeface="Calibri" pitchFamily="34" charset="-120"/>
+              </a:rPr>
+              <a:t>First paying cohort, measured CAC</a:t>
+            </a:r>
+            <a:endParaRPr lang="en-US" sz="1100" dirty="0"/>
+          </a:p>
+        </p:txBody>
+      </p:sp>
+      <p:sp>
+        <p:nvSpPr>
+          <p:cNvPr id="29" name="Shape 27"/>
+          <p:cNvSpPr/>
+          <p:nvPr/>
+        </p:nvSpPr>
+        <p:spPr>
+          <a:xfrm>
+            <a:off x="8284464" y="4343400"/>
+            <a:ext cx="3657600" cy="1188720"/>
+          </a:xfrm>
+          <a:prstGeom prst="rect">
+            <a:avLst/>
+          </a:prstGeom>
+          <a:solidFill>
+            <a:srgbClr val="13204A"/>
+          </a:solidFill>
+          <a:ln w="6350">
+            <a:solidFill>
+              <a:srgbClr val="2A3562"/>
+            </a:solidFill>
+            <a:prstDash val="solid"/>
+          </a:ln>
+        </p:spPr>
+        <p:txBody>
+          <a:bodyPr/>
+          <a:p/>
+        </p:txBody>
+      </p:sp>
+      <p:sp>
+        <p:nvSpPr>
+          <p:cNvPr id="30" name="Text 28"/>
+          <p:cNvSpPr/>
+          <p:nvPr/>
+        </p:nvSpPr>
+        <p:spPr>
+          <a:xfrm>
+            <a:off x="8513064" y="4434840"/>
+            <a:ext cx="3200400" cy="320040"/>
+          </a:xfrm>
+          <a:prstGeom prst="rect">
+            <a:avLst/>
+          </a:prstGeom>
+          <a:noFill/>
+          <a:ln/>
+        </p:spPr>
+        <p:txBody>
+          <a:bodyPr wrap="square" rtlCol="0" anchor="ctr"/>
+          <a:lstStyle/>
+          <a:p>
+            <a:pPr indent="0" marL="0">
+              <a:buNone/>
+            </a:pPr>
+            <a:r>
+              <a:rPr lang="en-US" sz="1100" b="1" dirty="0">
+                <a:solidFill>
+                  <a:srgbClr val="C9A24C"/>
+                </a:solidFill>
+                <a:latin typeface="Calibri" pitchFamily="34" charset="0"/>
+                <a:ea typeface="Calibri" pitchFamily="34" charset="-122"/>
+                <a:cs typeface="Calibri" pitchFamily="34" charset="-120"/>
+              </a:rPr>
+              <a:t>Sales, Success &amp; AI</a:t>
+            </a:r>
+            <a:endParaRPr lang="en-US" sz="1100" dirty="0"/>
+          </a:p>
+        </p:txBody>
+      </p:sp>
+      <p:sp>
+        <p:nvSpPr>
+          <p:cNvPr id="31" name="Text 29"/>
+          <p:cNvSpPr/>
+          <p:nvPr/>
+        </p:nvSpPr>
+        <p:spPr>
+          <a:xfrm>
+            <a:off x="8513064" y="4754880"/>
+            <a:ext cx="3200400" cy="457200"/>
+          </a:xfrm>
+          <a:prstGeom prst="rect">
+            <a:avLst/>
+          </a:prstGeom>
+          <a:noFill/>
+          <a:ln/>
+        </p:spPr>
+        <p:txBody>
+          <a:bodyPr wrap="square" rtlCol="0" anchor="ctr"/>
+          <a:lstStyle/>
+          <a:p>
+            <a:pPr indent="0" marL="0">
+              <a:buNone/>
+            </a:pPr>
+            <a:r>
+              <a:rPr lang="en-US" sz="2200" dirty="0">
+                <a:solidFill>
+                  <a:srgbClr val="F5F1E8"/>
+                </a:solidFill>
+                <a:latin typeface="Georgia" pitchFamily="34" charset="0"/>
+                <a:ea typeface="Georgia" pitchFamily="34" charset="-122"/>
+                <a:cs typeface="Georgia" pitchFamily="34" charset="-120"/>
+              </a:rPr>
+              <a:t>23%</a:t>
+            </a:r>
+            <a:endParaRPr lang="en-US" sz="2200" dirty="0"/>
+          </a:p>
+        </p:txBody>
+      </p:sp>
+      <p:sp>
+        <p:nvSpPr>
+          <p:cNvPr id="32" name="Text 30"/>
+          <p:cNvSpPr/>
+          <p:nvPr/>
+        </p:nvSpPr>
+        <p:spPr>
+          <a:xfrm>
+            <a:off x="8513064" y="5212080"/>
+            <a:ext cx="3200400" cy="320040"/>
+          </a:xfrm>
+          <a:prstGeom prst="rect">
+            <a:avLst/>
+          </a:prstGeom>
+          <a:noFill/>
+          <a:ln/>
+        </p:spPr>
+        <p:txBody>
+          <a:bodyPr wrap="square" rtlCol="0" anchor="ctr"/>
+          <a:lstStyle/>
+          <a:p>
+            <a:pPr indent="0" marL="0">
+              <a:buNone/>
+            </a:pPr>
+            <a:r>
+              <a:rPr lang="en-US" sz="1100" dirty="0">
+                <a:solidFill>
+                  <a:srgbClr val="C8CFE0"/>
+                </a:solidFill>
+                <a:latin typeface="Calibri" pitchFamily="34" charset="0"/>
+                <a:ea typeface="Calibri" pitchFamily="34" charset="-122"/>
+                <a:cs typeface="Calibri" pitchFamily="34" charset="-120"/>
+              </a:rPr>
+              <a:t>Repeatable engine, higher customer value</a:t>
+            </a:r>
+            <a:endParaRPr lang="en-US" sz="1100" dirty="0"/>
+          </a:p>
+        </p:txBody>
+      </p:sp>
+      <p:sp>
+        <p:nvSpPr>
+          <p:cNvPr id="33" name="Text 31"/>
+          <p:cNvSpPr/>
+          <p:nvPr/>
+        </p:nvSpPr>
+        <p:spPr>
+          <a:xfrm>
+            <a:off x="457200" y="6080760"/>
+            <a:ext cx="11277295" cy="320040"/>
+          </a:xfrm>
+          <a:prstGeom prst="rect">
+            <a:avLst/>
+          </a:prstGeom>
+          <a:noFill/>
+          <a:ln/>
+        </p:spPr>
+        <p:txBody>
+          <a:bodyPr wrap="square" rtlCol="0" anchor="ctr"/>
+          <a:lstStyle/>
+          <a:p>
+            <a:pPr indent="0" marL="0">
+              <a:buNone/>
+            </a:pPr>
+            <a:r>
+              <a:rPr lang="en-US" sz="850" i="1" dirty="0">
+                <a:solidFill>
+                  <a:srgbClr val="8892B0"/>
+                </a:solidFill>
+                <a:latin typeface="Calibri" pitchFamily="34" charset="0"/>
+                <a:ea typeface="Calibri" pitchFamily="34" charset="-122"/>
+                <a:cs typeface="Calibri" pitchFamily="34" charset="-120"/>
+              </a:rPr>
+              <a:t>The platform is already built. This round funds commercialization, so incremental revenue lands on a largely fixed cost base. Full derivation in the Capital Efficiency &amp; Unit Economics Memo.</a:t>
+            </a:r>
+            <a:endParaRPr lang="en-US" sz="850" dirty="0"/>
+          </a:p>
+        </p:txBody>
+      </p:sp>
+      <p:sp>
+        <p:nvSpPr>
+          <p:cNvPr id="34" name="Shape 32"/>
+          <p:cNvSpPr/>
+          <p:nvPr/>
+        </p:nvSpPr>
+        <p:spPr>
+          <a:xfrm>
+            <a:off x="457200" y="6446520"/>
+            <a:ext cx="11277295" cy="0"/>
+          </a:xfrm>
+          <a:prstGeom prst="line">
+            <a:avLst/>
+          </a:prstGeom>
+          <a:noFill/>
+          <a:ln w="9525">
+            <a:solidFill>
+              <a:srgbClr val="2A3562"/>
+            </a:solidFill>
+            <a:prstDash val="solid"/>
+          </a:ln>
+        </p:spPr>
+        <p:txBody>
+          <a:bodyPr/>
+          <a:p/>
+        </p:txBody>
+      </p:sp>
+      <p:sp>
+        <p:nvSpPr>
+          <p:cNvPr id="35" name="Text 33"/>
+          <p:cNvSpPr/>
+          <p:nvPr/>
+        </p:nvSpPr>
+        <p:spPr>
+          <a:xfrm>
+            <a:off x="457200" y="6510528"/>
+            <a:ext cx="7315200" cy="274320"/>
+          </a:xfrm>
+          <a:prstGeom prst="rect">
+            <a:avLst/>
+          </a:prstGeom>
+          <a:noFill/>
+          <a:ln/>
+        </p:spPr>
+        <p:txBody>
+          <a:bodyPr wrap="square" rtlCol="0" anchor="ctr"/>
+          <a:lstStyle/>
+          <a:p>
+            <a:pPr indent="0" marL="0">
+              <a:buNone/>
+            </a:pPr>
+            <a:r>
+              <a:rPr lang="en-US" sz="900" spc="300" kern="0" dirty="0">
+                <a:solidFill>
+                  <a:srgbClr val="8892B0"/>
+                </a:solidFill>
+                <a:latin typeface="Calibri" pitchFamily="34" charset="0"/>
+                <a:ea typeface="Calibri" pitchFamily="34" charset="-122"/>
+                <a:cs typeface="Calibri" pitchFamily="34" charset="-120"/>
+              </a:rPr>
+              <a:t>GLOBAL OFFICE  /  CONFIDENTIAL INVESTOR MATERIALS</a:t>
+            </a:r>
+            <a:endParaRPr lang="en-US" sz="900" dirty="0"/>
+          </a:p>
+        </p:txBody>
+      </p:sp>
+      <p:sp>
+        <p:nvSpPr>
+          <p:cNvPr id="36" name="Text 34"/>
+          <p:cNvSpPr/>
+          <p:nvPr/>
+        </p:nvSpPr>
+        <p:spPr>
+          <a:xfrm>
+            <a:off x="9905695" y="6510528"/>
+            <a:ext cx="1828800" cy="274320"/>
+          </a:xfrm>
+          <a:prstGeom prst="rect">
+            <a:avLst/>
+          </a:prstGeom>
+          <a:noFill/>
+          <a:ln/>
+        </p:spPr>
+        <p:txBody>
+          <a:bodyPr wrap="square" rtlCol="0" anchor="ctr"/>
+          <a:lstStyle/>
+          <a:p>
+            <a:pPr algn="r" indent="0" marL="0">
+              <a:buNone/>
+            </a:pPr>
+            <a:r>
+              <a:rPr lang="en-US" sz="900" dirty="0">
+                <a:solidFill>
+                  <a:srgbClr val="C9A24C"/>
+                </a:solidFill>
+                <a:latin typeface="Consolas" pitchFamily="34" charset="0"/>
+                <a:ea typeface="Consolas" pitchFamily="34" charset="-122"/>
+                <a:cs typeface="Consolas" pitchFamily="34" charset="-120"/>
+              </a:rPr>
+              <a:t>15 / 23</a:t>
+            </a:r>
+            <a:endParaRPr lang="en-US" sz="900" dirty="0"/>
+          </a:p>
+        </p:txBody>
+      </p:sp>
+    </p:spTree>
+  </p:cSld>
+  <p:clrMapOvr>
+    <a:masterClrMapping/>
+  </p:clrMapOvr>
+</p:sld>
+</file>
+
+<file path=ppt/slides/slide23.xml><?xml version="1.0" encoding="utf-8"?>
 <p:sld xmlns:a="http://schemas.openxmlformats.org/drawingml/2006/main" xmlns:r="http://schemas.openxmlformats.org/officeDocument/2006/relationships" xmlns:p="http://schemas.openxmlformats.org/presentationml/2006/main">
   <p:cSld name="Slide 15">
     <p:bg>
@@ -10579,7 +11887,7 @@
 </p:sld>
 </file>
 
-<file path=ppt/slides/slide23.xml><?xml version="1.0" encoding="utf-8"?>
+<file path=ppt/slides/slide24.xml><?xml version="1.0" encoding="utf-8"?>
 <p:sld xmlns:a="http://schemas.openxmlformats.org/drawingml/2006/main" xmlns:r="http://schemas.openxmlformats.org/officeDocument/2006/relationships" xmlns:p="http://schemas.openxmlformats.org/presentationml/2006/main">
   <p:cSld name="Slide 16">
     <p:bg>
@@ -11340,7 +12648,7 @@
 </p:sld>
 </file>
 
-<file path=ppt/slides/slide24.xml><?xml version="1.0" encoding="utf-8"?>
+<file path=ppt/slides/slide25.xml><?xml version="1.0" encoding="utf-8"?>
 <p:sld xmlns:a="http://schemas.openxmlformats.org/drawingml/2006/main" xmlns:r="http://schemas.openxmlformats.org/officeDocument/2006/relationships" xmlns:p="http://schemas.openxmlformats.org/presentationml/2006/main">
   <p:cSld name="Slide 17">
     <p:bg>
@@ -12064,7 +13372,7 @@
 </p:sld>
 </file>
 
-<file path=ppt/slides/slide25.xml><?xml version="1.0" encoding="utf-8"?>
+<file path=ppt/slides/slide26.xml><?xml version="1.0" encoding="utf-8"?>
 <p:sld xmlns:a="http://schemas.openxmlformats.org/drawingml/2006/main" xmlns:r="http://schemas.openxmlformats.org/officeDocument/2006/relationships" xmlns:p="http://schemas.openxmlformats.org/presentationml/2006/main">
   <p:cSld name="Slide 18">
     <p:bg>
@@ -12999,7 +14307,7 @@
 </p:sld>
 </file>
 
-<file path=ppt/slides/slide26.xml><?xml version="1.0" encoding="utf-8"?>
+<file path=ppt/slides/slide27.xml><?xml version="1.0" encoding="utf-8"?>
 <p:sld xmlns:a="http://schemas.openxmlformats.org/drawingml/2006/main" xmlns:r="http://schemas.openxmlformats.org/officeDocument/2006/relationships" xmlns:p="http://schemas.openxmlformats.org/presentationml/2006/main">
   <p:cSld name="Slide 19">
     <p:bg>
@@ -13685,7 +14993,7 @@
 </p:sld>
 </file>
 
-<file path=ppt/slides/slide27.xml><?xml version="1.0" encoding="utf-8"?>
+<file path=ppt/slides/slide28.xml><?xml version="1.0" encoding="utf-8"?>
 <p:sld xmlns:a="http://schemas.openxmlformats.org/drawingml/2006/main" xmlns:r="http://schemas.openxmlformats.org/officeDocument/2006/relationships" xmlns:p="http://schemas.openxmlformats.org/presentationml/2006/main">
   <p:cSld name="Slide 20">
     <p:bg>
@@ -14425,7 +15733,7 @@
 </p:sld>
 </file>
 
-<file path=ppt/slides/slide28.xml><?xml version="1.0" encoding="utf-8"?>
+<file path=ppt/slides/slide29.xml><?xml version="1.0" encoding="utf-8"?>
 <p:sld xmlns:a="http://schemas.openxmlformats.org/drawingml/2006/main" xmlns:r="http://schemas.openxmlformats.org/officeDocument/2006/relationships" xmlns:p="http://schemas.openxmlformats.org/presentationml/2006/main">
   <p:cSld name="Slide 21">
     <p:bg>
@@ -14698,429 +16006,6 @@
                 <a:cs typeface="Consolas" pitchFamily="34" charset="-120"/>
               </a:rPr>
               <a:t>21 / 22</a:t>
-            </a:r>
-            <a:endParaRPr lang="en-US" sz="900" dirty="0"/>
-          </a:p>
-        </p:txBody>
-      </p:sp>
-    </p:spTree>
-  </p:cSld>
-  <p:clrMapOvr>
-    <a:masterClrMapping/>
-  </p:clrMapOvr>
-</p:sld>
-</file>
-
-<file path=ppt/slides/slide29.xml><?xml version="1.0" encoding="utf-8"?>
-<p:sld xmlns:a="http://schemas.openxmlformats.org/drawingml/2006/main" xmlns:r="http://schemas.openxmlformats.org/officeDocument/2006/relationships" xmlns:p="http://schemas.openxmlformats.org/presentationml/2006/main">
-  <p:cSld name="Slide 22">
-    <p:bg>
-      <p:bgPr>
-        <a:solidFill>
-          <a:srgbClr val="0B1533"/>
-        </a:solidFill>
-      </p:bgPr>
-    </p:bg>
-    <p:spTree>
-      <p:nvGrpSpPr>
-        <p:cNvPr id="1" name=""/>
-        <p:cNvGrpSpPr/>
-        <p:nvPr/>
-      </p:nvGrpSpPr>
-      <p:grpSpPr>
-        <a:xfrm>
-          <a:off x="0" y="0"/>
-          <a:ext cx="0" cy="0"/>
-          <a:chOff x="0" y="0"/>
-          <a:chExt cx="0" cy="0"/>
-        </a:xfrm>
-      </p:grpSpPr>
-      <p:sp>
-        <p:nvSpPr>
-          <p:cNvPr id="2" name="Shape 0"/>
-          <p:cNvSpPr/>
-          <p:nvPr/>
-        </p:nvSpPr>
-        <p:spPr>
-          <a:xfrm>
-            <a:off x="457200" y="457200"/>
-            <a:ext cx="36576" cy="5943600"/>
-          </a:xfrm>
-          <a:prstGeom prst="rect">
-            <a:avLst/>
-          </a:prstGeom>
-          <a:solidFill>
-            <a:srgbClr val="C9A24C"/>
-          </a:solidFill>
-          <a:ln w="12700">
-            <a:solidFill>
-              <a:srgbClr val="C9A24C"/>
-            </a:solidFill>
-            <a:prstDash val="solid"/>
-          </a:ln>
-        </p:spPr>
-        <p:txBody>
-          <a:bodyPr/>
-          <a:p/>
-        </p:txBody>
-      </p:sp>
-      <p:sp>
-        <p:nvSpPr>
-          <p:cNvPr id="3" name="Text 1"/>
-          <p:cNvSpPr/>
-          <p:nvPr/>
-        </p:nvSpPr>
-        <p:spPr>
-          <a:xfrm>
-            <a:off x="822960" y="548640"/>
-            <a:ext cx="9144000" cy="320040"/>
-          </a:xfrm>
-          <a:prstGeom prst="rect">
-            <a:avLst/>
-          </a:prstGeom>
-          <a:noFill/>
-          <a:ln/>
-        </p:spPr>
-        <p:txBody>
-          <a:bodyPr wrap="square" rtlCol="0" anchor="ctr"/>
-          <a:lstStyle/>
-          <a:p>
-            <a:pPr indent="0" marL="0">
-              <a:buNone/>
-            </a:pPr>
-            <a:r>
-              <a:rPr lang="en-US" sz="1100" b="1" spc="600" kern="0" dirty="0">
-                <a:solidFill>
-                  <a:srgbClr val="C9A24C"/>
-                </a:solidFill>
-                <a:latin typeface="Calibri" pitchFamily="34" charset="0"/>
-                <a:ea typeface="Calibri" pitchFamily="34" charset="-122"/>
-                <a:cs typeface="Calibri" pitchFamily="34" charset="-120"/>
-              </a:rPr>
-              <a:t>LET US TALK</a:t>
-            </a:r>
-            <a:endParaRPr lang="en-US" sz="1100" dirty="0"/>
-          </a:p>
-        </p:txBody>
-      </p:sp>
-      <p:sp>
-        <p:nvSpPr>
-          <p:cNvPr id="4" name="Text 2"/>
-          <p:cNvSpPr/>
-          <p:nvPr/>
-        </p:nvSpPr>
-        <p:spPr>
-          <a:xfrm>
-            <a:off x="822960" y="1280160"/>
-            <a:ext cx="10972800" cy="1097280"/>
-          </a:xfrm>
-          <a:prstGeom prst="rect">
-            <a:avLst/>
-          </a:prstGeom>
-          <a:noFill/>
-          <a:ln/>
-        </p:spPr>
-        <p:txBody>
-          <a:bodyPr wrap="square" rtlCol="0" anchor="ctr"/>
-          <a:lstStyle/>
-          <a:p>
-            <a:pPr indent="0" marL="0">
-              <a:buNone/>
-            </a:pPr>
-            <a:r>
-              <a:rPr lang="en-US" sz="6800" dirty="0">
-                <a:solidFill>
-                  <a:srgbClr val="F5F1E8"/>
-                </a:solidFill>
-                <a:latin typeface="Georgia" pitchFamily="34" charset="0"/>
-                <a:ea typeface="Georgia" pitchFamily="34" charset="-122"/>
-                <a:cs typeface="Georgia" pitchFamily="34" charset="-120"/>
-              </a:rPr>
-              <a:t>Global Office</a:t>
-            </a:r>
-            <a:endParaRPr lang="en-US" sz="6800" dirty="0"/>
-          </a:p>
-        </p:txBody>
-      </p:sp>
-      <p:sp>
-        <p:nvSpPr>
-          <p:cNvPr id="5" name="Text 3"/>
-          <p:cNvSpPr/>
-          <p:nvPr/>
-        </p:nvSpPr>
-        <p:spPr>
-          <a:xfrm>
-            <a:off x="822960" y="2560320"/>
-            <a:ext cx="10058400" cy="1280160"/>
-          </a:xfrm>
-          <a:prstGeom prst="rect">
-            <a:avLst/>
-          </a:prstGeom>
-          <a:noFill/>
-          <a:ln/>
-        </p:spPr>
-        <p:txBody>
-          <a:bodyPr wrap="square" rtlCol="0" anchor="ctr"/>
-          <a:lstStyle/>
-          <a:p>
-            <a:pPr indent="0" marL="0">
-              <a:lnSpc>
-                <a:spcPct val="120000"/>
-              </a:lnSpc>
-              <a:buNone/>
-            </a:pPr>
-            <a:r>
-              <a:rPr lang="en-US" sz="2400" i="1" dirty="0">
-                <a:solidFill>
-                  <a:srgbClr val="F5F1E8"/>
-                </a:solidFill>
-                <a:latin typeface="Georgia" pitchFamily="34" charset="0"/>
-                <a:ea typeface="Georgia" pitchFamily="34" charset="-122"/>
-                <a:cs typeface="Georgia" pitchFamily="34" charset="-120"/>
-              </a:rPr>
-              <a:t>Building the AI-native operating layer</a:t>
-            </a:r>
-            <a:endParaRPr lang="en-US" sz="2400" dirty="0"/>
-          </a:p>
-          <a:p>
-            <a:pPr indent="0" marL="0">
-              <a:lnSpc>
-                <a:spcPct val="120000"/>
-              </a:lnSpc>
-              <a:buNone/>
-            </a:pPr>
-            <a:r>
-              <a:rPr lang="en-US" sz="2400" i="1" dirty="0">
-                <a:solidFill>
-                  <a:srgbClr val="F5F1E8"/>
-                </a:solidFill>
-                <a:latin typeface="Georgia" pitchFamily="34" charset="0"/>
-                <a:ea typeface="Georgia" pitchFamily="34" charset="-122"/>
-                <a:cs typeface="Georgia" pitchFamily="34" charset="-120"/>
-              </a:rPr>
-              <a:t>for emerging-market enterprises.</a:t>
-            </a:r>
-            <a:endParaRPr lang="en-US" sz="2400" dirty="0"/>
-          </a:p>
-        </p:txBody>
-      </p:sp>
-      <p:sp>
-        <p:nvSpPr>
-          <p:cNvPr id="6" name="Shape 4"/>
-          <p:cNvSpPr/>
-          <p:nvPr/>
-        </p:nvSpPr>
-        <p:spPr>
-          <a:xfrm>
-            <a:off x="822960" y="4206240"/>
-            <a:ext cx="2743200" cy="0"/>
-          </a:xfrm>
-          <a:prstGeom prst="line">
-            <a:avLst/>
-          </a:prstGeom>
-          <a:noFill/>
-          <a:ln w="12700">
-            <a:solidFill>
-              <a:srgbClr val="C9A24C"/>
-            </a:solidFill>
-            <a:prstDash val="solid"/>
-          </a:ln>
-        </p:spPr>
-        <p:txBody>
-          <a:bodyPr/>
-          <a:p/>
-        </p:txBody>
-      </p:sp>
-      <p:sp>
-        <p:nvSpPr>
-          <p:cNvPr id="7" name="Text 5"/>
-          <p:cNvSpPr/>
-          <p:nvPr/>
-        </p:nvSpPr>
-        <p:spPr>
-          <a:xfrm>
-            <a:off x="822960" y="4389120"/>
-            <a:ext cx="5486400" cy="457200"/>
-          </a:xfrm>
-          <a:prstGeom prst="rect">
-            <a:avLst/>
-          </a:prstGeom>
-          <a:noFill/>
-          <a:ln/>
-        </p:spPr>
-        <p:txBody>
-          <a:bodyPr wrap="square" rtlCol="0" anchor="ctr"/>
-          <a:lstStyle/>
-          <a:p>
-            <a:pPr indent="0" marL="0">
-              <a:buNone/>
-            </a:pPr>
-            <a:r>
-              <a:rPr lang="en-US" sz="2200" dirty="0">
-                <a:solidFill>
-                  <a:srgbClr val="F5F1E8"/>
-                </a:solidFill>
-                <a:latin typeface="Georgia" pitchFamily="34" charset="0"/>
-                <a:ea typeface="Georgia" pitchFamily="34" charset="-122"/>
-                <a:cs typeface="Georgia" pitchFamily="34" charset="-120"/>
-              </a:rPr>
-              <a:t>Wisdom Jonathans</a:t>
-            </a:r>
-            <a:endParaRPr lang="en-US" sz="2200" dirty="0"/>
-          </a:p>
-        </p:txBody>
-      </p:sp>
-      <p:sp>
-        <p:nvSpPr>
-          <p:cNvPr id="8" name="Text 6"/>
-          <p:cNvSpPr/>
-          <p:nvPr/>
-        </p:nvSpPr>
-        <p:spPr>
-          <a:xfrm>
-            <a:off x="822960" y="4846320"/>
-            <a:ext cx="7315200" cy="320040"/>
-          </a:xfrm>
-          <a:prstGeom prst="rect">
-            <a:avLst/>
-          </a:prstGeom>
-          <a:noFill/>
-          <a:ln/>
-        </p:spPr>
-        <p:txBody>
-          <a:bodyPr wrap="square" rtlCol="0" anchor="ctr"/>
-          <a:lstStyle/>
-          <a:p>
-            <a:pPr indent="0" marL="0">
-              <a:buNone/>
-            </a:pPr>
-            <a:r>
-              <a:rPr lang="en-US" sz="1300" dirty="0">
-                <a:solidFill>
-                  <a:srgbClr val="C8CFE0"/>
-                </a:solidFill>
-                <a:latin typeface="Calibri" pitchFamily="34" charset="0"/>
-                <a:ea typeface="Calibri" pitchFamily="34" charset="-122"/>
-                <a:cs typeface="Calibri" pitchFamily="34" charset="-120"/>
-              </a:rPr>
-              <a:t>Founder &amp; CEO — Soteria AI Technologies Inc.</a:t>
-            </a:r>
-            <a:endParaRPr lang="en-US" sz="1300" dirty="0"/>
-          </a:p>
-        </p:txBody>
-      </p:sp>
-      <p:sp>
-        <p:nvSpPr>
-          <p:cNvPr id="9" name="Text 7"/>
-          <p:cNvSpPr/>
-          <p:nvPr/>
-        </p:nvSpPr>
-        <p:spPr>
-          <a:xfrm>
-            <a:off x="822960" y="5394960"/>
-            <a:ext cx="5486400" cy="274320"/>
-          </a:xfrm>
-          <a:prstGeom prst="rect">
-            <a:avLst/>
-          </a:prstGeom>
-          <a:noFill/>
-          <a:ln/>
-        </p:spPr>
-        <p:txBody>
-          <a:bodyPr wrap="square" rtlCol="0" anchor="ctr"/>
-          <a:lstStyle/>
-          <a:p>
-            <a:pPr indent="0" marL="0">
-              <a:buNone/>
-            </a:pPr>
-            <a:r>
-              <a:rPr lang="en-US" sz="1000" b="1" spc="400" kern="0" dirty="0">
-                <a:solidFill>
-                  <a:srgbClr val="C9A24C"/>
-                </a:solidFill>
-                <a:latin typeface="Calibri" pitchFamily="34" charset="0"/>
-                <a:ea typeface="Calibri" pitchFamily="34" charset="-122"/>
-                <a:cs typeface="Calibri" pitchFamily="34" charset="-120"/>
-              </a:rPr>
-              <a:t>NEXT STEP</a:t>
-            </a:r>
-            <a:endParaRPr lang="en-US" sz="1000" dirty="0"/>
-          </a:p>
-        </p:txBody>
-      </p:sp>
-      <p:sp>
-        <p:nvSpPr>
-          <p:cNvPr id="10" name="Text 8"/>
-          <p:cNvSpPr/>
-          <p:nvPr/>
-        </p:nvSpPr>
-        <p:spPr>
-          <a:xfrm>
-            <a:off x="822960" y="5669280"/>
-            <a:ext cx="10972800" cy="320040"/>
-          </a:xfrm>
-          <a:prstGeom prst="rect">
-            <a:avLst/>
-          </a:prstGeom>
-          <a:noFill/>
-          <a:ln/>
-        </p:spPr>
-        <p:txBody>
-          <a:bodyPr wrap="square" rtlCol="0" anchor="ctr"/>
-          <a:lstStyle/>
-          <a:p>
-            <a:pPr indent="0" marL="0">
-              <a:buNone/>
-            </a:pPr>
-            <a:r>
-              <a:rPr lang="en-US" sz="1200" dirty="0">
-                <a:solidFill>
-                  <a:srgbClr val="F5F1E8"/>
-                </a:solidFill>
-                <a:latin typeface="Calibri" pitchFamily="34" charset="0"/>
-                <a:ea typeface="Calibri" pitchFamily="34" charset="-122"/>
-                <a:cs typeface="Calibri" pitchFamily="34" charset="-120"/>
-              </a:rPr>
-              <a:t>45-minute product walkthrough  ·  Data room access  ·  Design partner reference calls</a:t>
-            </a:r>
-            <a:endParaRPr lang="en-US" sz="1200" dirty="0"/>
-          </a:p>
-        </p:txBody>
-      </p:sp>
-      <p:sp>
-        <p:nvSpPr>
-          <p:cNvPr id="11" name="Text 9"/>
-          <p:cNvSpPr/>
-          <p:nvPr/>
-        </p:nvSpPr>
-        <p:spPr>
-          <a:xfrm>
-            <a:off x="822960" y="6172200"/>
-            <a:ext cx="9144000" cy="274320"/>
-          </a:xfrm>
-          <a:prstGeom prst="rect">
-            <a:avLst/>
-          </a:prstGeom>
-          <a:noFill/>
-          <a:ln/>
-        </p:spPr>
-        <p:txBody>
-          <a:bodyPr wrap="square" rtlCol="0" anchor="ctr"/>
-          <a:lstStyle/>
-          <a:p>
-            <a:pPr indent="0" marL="0">
-              <a:buNone/>
-            </a:pPr>
-            <a:r>
-              <a:rPr lang="en-US" sz="900" spc="400" kern="0" dirty="0">
-                <a:solidFill>
-                  <a:srgbClr val="8892B0"/>
-                </a:solidFill>
-                <a:latin typeface="Calibri" pitchFamily="34" charset="0"/>
-                <a:ea typeface="Calibri" pitchFamily="34" charset="-122"/>
-                <a:cs typeface="Calibri" pitchFamily="34" charset="-120"/>
-              </a:rPr>
-              <a:t>CONFIDENTIAL — 2026</a:t>
             </a:r>
             <a:endParaRPr lang="en-US" sz="900" dirty="0"/>
           </a:p>
@@ -15740,41 +16625,84 @@
 </file>
 
 <file path=ppt/slides/slide30.xml><?xml version="1.0" encoding="utf-8"?>
-<p:sld xmlns:a="http://schemas.openxmlformats.org/drawingml/2006/main" xmlns:p="http://schemas.openxmlformats.org/presentationml/2006/main" xmlns:r="http://schemas.openxmlformats.org/officeDocument/2006/relationships">
-  <p:cSld>
+<p:sld xmlns:a="http://schemas.openxmlformats.org/drawingml/2006/main" xmlns:r="http://schemas.openxmlformats.org/officeDocument/2006/relationships" xmlns:p="http://schemas.openxmlformats.org/presentationml/2006/main">
+  <p:cSld name="Slide 22">
+    <p:bg>
+      <p:bgPr>
+        <a:solidFill>
+          <a:srgbClr val="0B1533"/>
+        </a:solidFill>
+      </p:bgPr>
+    </p:bg>
     <p:spTree>
       <p:nvGrpSpPr>
         <p:cNvPr id="1" name=""/>
         <p:cNvGrpSpPr/>
         <p:nvPr/>
       </p:nvGrpSpPr>
-      <p:grpSpPr/>
-      <p:sp>
-        <p:nvSpPr>
-          <p:cNvPr id="2" name="Text 0"/>
-          <p:cNvSpPr/>
-          <p:nvPr/>
-        </p:nvSpPr>
-        <p:spPr>
-          <a:xfrm>
-            <a:off x="457200" y="502920"/>
-            <a:ext cx="10972800" cy="274320"/>
-          </a:xfrm>
-          <a:prstGeom prst="rect">
-            <a:avLst/>
-          </a:prstGeom>
-          <a:noFill/>
-          <a:ln/>
-        </p:spPr>
-        <p:txBody>
-          <a:bodyPr wrap="square" rtlCol="0" anchor="ctr"/>
-          <a:lstStyle/>
-          <a:p>
-            <a:pPr indent="0" marL="0">
-              <a:buNone/>
-            </a:pPr>
-            <a:r>
-              <a:rPr lang="en-US" sz="1000" b="1" spc="600" kern="0" dirty="0">
+      <p:grpSpPr>
+        <a:xfrm>
+          <a:off x="0" y="0"/>
+          <a:ext cx="0" cy="0"/>
+          <a:chOff x="0" y="0"/>
+          <a:chExt cx="0" cy="0"/>
+        </a:xfrm>
+      </p:grpSpPr>
+      <p:sp>
+        <p:nvSpPr>
+          <p:cNvPr id="2" name="Shape 0"/>
+          <p:cNvSpPr/>
+          <p:nvPr/>
+        </p:nvSpPr>
+        <p:spPr>
+          <a:xfrm>
+            <a:off x="457200" y="457200"/>
+            <a:ext cx="36576" cy="5943600"/>
+          </a:xfrm>
+          <a:prstGeom prst="rect">
+            <a:avLst/>
+          </a:prstGeom>
+          <a:solidFill>
+            <a:srgbClr val="C9A24C"/>
+          </a:solidFill>
+          <a:ln w="12700">
+            <a:solidFill>
+              <a:srgbClr val="C9A24C"/>
+            </a:solidFill>
+            <a:prstDash val="solid"/>
+          </a:ln>
+        </p:spPr>
+        <p:txBody>
+          <a:bodyPr/>
+          <a:p/>
+        </p:txBody>
+      </p:sp>
+      <p:sp>
+        <p:nvSpPr>
+          <p:cNvPr id="3" name="Text 1"/>
+          <p:cNvSpPr/>
+          <p:nvPr/>
+        </p:nvSpPr>
+        <p:spPr>
+          <a:xfrm>
+            <a:off x="822960" y="548640"/>
+            <a:ext cx="9144000" cy="320040"/>
+          </a:xfrm>
+          <a:prstGeom prst="rect">
+            <a:avLst/>
+          </a:prstGeom>
+          <a:noFill/>
+          <a:ln/>
+        </p:spPr>
+        <p:txBody>
+          <a:bodyPr wrap="square" rtlCol="0" anchor="ctr"/>
+          <a:lstStyle/>
+          <a:p>
+            <a:pPr indent="0" marL="0">
+              <a:buNone/>
+            </a:pPr>
+            <a:r>
+              <a:rPr lang="en-US" sz="1100" b="1" spc="600" kern="0" dirty="0">
                 <a:solidFill>
                   <a:srgbClr val="C9A24C"/>
                 </a:solidFill>
@@ -15782,38 +16710,38 @@
                 <a:ea typeface="Calibri" pitchFamily="34" charset="-122"/>
                 <a:cs typeface="Calibri" pitchFamily="34" charset="-120"/>
               </a:rPr>
-              <a:t>UNIT ECONOMICS &amp; CAPITAL EFFICIENCY</a:t>
-            </a:r>
-            <a:endParaRPr lang="en-US" sz="1000" dirty="0"/>
-          </a:p>
-        </p:txBody>
-      </p:sp>
-      <p:sp>
-        <p:nvSpPr>
-          <p:cNvPr id="3" name="Text 1"/>
-          <p:cNvSpPr/>
-          <p:nvPr/>
-        </p:nvSpPr>
-        <p:spPr>
-          <a:xfrm>
-            <a:off x="457200" y="868680"/>
-            <a:ext cx="10972800" cy="1005840"/>
-          </a:xfrm>
-          <a:prstGeom prst="rect">
-            <a:avLst/>
-          </a:prstGeom>
-          <a:noFill/>
-          <a:ln/>
-        </p:spPr>
-        <p:txBody>
-          <a:bodyPr wrap="square" rtlCol="0" anchor="t"/>
-          <a:lstStyle/>
-          <a:p>
-            <a:pPr indent="0" marL="0">
-              <a:buNone/>
-            </a:pPr>
-            <a:r>
-              <a:rPr lang="en-US" sz="4000" dirty="0">
+              <a:t>LET US TALK</a:t>
+            </a:r>
+            <a:endParaRPr lang="en-US" sz="1100" dirty="0"/>
+          </a:p>
+        </p:txBody>
+      </p:sp>
+      <p:sp>
+        <p:nvSpPr>
+          <p:cNvPr id="4" name="Text 2"/>
+          <p:cNvSpPr/>
+          <p:nvPr/>
+        </p:nvSpPr>
+        <p:spPr>
+          <a:xfrm>
+            <a:off x="822960" y="1280160"/>
+            <a:ext cx="10972800" cy="1097280"/>
+          </a:xfrm>
+          <a:prstGeom prst="rect">
+            <a:avLst/>
+          </a:prstGeom>
+          <a:noFill/>
+          <a:ln/>
+        </p:spPr>
+        <p:txBody>
+          <a:bodyPr wrap="square" rtlCol="0" anchor="ctr"/>
+          <a:lstStyle/>
+          <a:p>
+            <a:pPr indent="0" marL="0">
+              <a:buNone/>
+            </a:pPr>
+            <a:r>
+              <a:rPr lang="en-US" sz="6800" dirty="0">
                 <a:solidFill>
                   <a:srgbClr val="F5F1E8"/>
                 </a:solidFill>
@@ -15821,32 +16749,92 @@
                 <a:ea typeface="Georgia" pitchFamily="34" charset="-122"/>
                 <a:cs typeface="Georgia" pitchFamily="34" charset="-120"/>
               </a:rPr>
-              <a:t>Software margins, metered AI cost, and capital that buys evidence — not construction.</a:t>
-            </a:r>
-            <a:endParaRPr lang="en-US" sz="4000" dirty="0"/>
-          </a:p>
-        </p:txBody>
-      </p:sp>
-      <p:sp>
-        <p:nvSpPr>
-          <p:cNvPr id="4" name="Shape 2"/>
-          <p:cNvSpPr/>
-          <p:nvPr/>
-        </p:nvSpPr>
-        <p:spPr>
-          <a:xfrm>
-            <a:off x="457200" y="2194560"/>
-            <a:ext cx="2743200" cy="1463040"/>
-          </a:xfrm>
-          <a:prstGeom prst="rect">
-            <a:avLst/>
-          </a:prstGeom>
-          <a:solidFill>
-            <a:srgbClr val="13204A"/>
-          </a:solidFill>
-          <a:ln w="6350">
+              <a:t>Global Office</a:t>
+            </a:r>
+            <a:endParaRPr lang="en-US" sz="6800" dirty="0"/>
+          </a:p>
+        </p:txBody>
+      </p:sp>
+      <p:sp>
+        <p:nvSpPr>
+          <p:cNvPr id="5" name="Text 3"/>
+          <p:cNvSpPr/>
+          <p:nvPr/>
+        </p:nvSpPr>
+        <p:spPr>
+          <a:xfrm>
+            <a:off x="822960" y="2560320"/>
+            <a:ext cx="10058400" cy="1280160"/>
+          </a:xfrm>
+          <a:prstGeom prst="rect">
+            <a:avLst/>
+          </a:prstGeom>
+          <a:noFill/>
+          <a:ln/>
+        </p:spPr>
+        <p:txBody>
+          <a:bodyPr wrap="square" rtlCol="0" anchor="ctr"/>
+          <a:lstStyle/>
+          <a:p>
+            <a:pPr indent="0" marL="0">
+              <a:lnSpc>
+                <a:spcPct val="120000"/>
+              </a:lnSpc>
+              <a:buNone/>
+            </a:pPr>
+            <a:r>
+              <a:rPr lang="en-US" sz="2400" i="1" dirty="0">
+                <a:solidFill>
+                  <a:srgbClr val="F5F1E8"/>
+                </a:solidFill>
+                <a:latin typeface="Georgia" pitchFamily="34" charset="0"/>
+                <a:ea typeface="Georgia" pitchFamily="34" charset="-122"/>
+                <a:cs typeface="Georgia" pitchFamily="34" charset="-120"/>
+              </a:rPr>
+              <a:t>Building the AI-native operating layer</a:t>
+            </a:r>
+            <a:endParaRPr lang="en-US" sz="2400" dirty="0"/>
+          </a:p>
+          <a:p>
+            <a:pPr indent="0" marL="0">
+              <a:lnSpc>
+                <a:spcPct val="120000"/>
+              </a:lnSpc>
+              <a:buNone/>
+            </a:pPr>
+            <a:r>
+              <a:rPr lang="en-US" sz="2400" i="1" dirty="0">
+                <a:solidFill>
+                  <a:srgbClr val="F5F1E8"/>
+                </a:solidFill>
+                <a:latin typeface="Georgia" pitchFamily="34" charset="0"/>
+                <a:ea typeface="Georgia" pitchFamily="34" charset="-122"/>
+                <a:cs typeface="Georgia" pitchFamily="34" charset="-120"/>
+              </a:rPr>
+              <a:t>for emerging-market enterprises.</a:t>
+            </a:r>
+            <a:endParaRPr lang="en-US" sz="2400" dirty="0"/>
+          </a:p>
+        </p:txBody>
+      </p:sp>
+      <p:sp>
+        <p:nvSpPr>
+          <p:cNvPr id="6" name="Shape 4"/>
+          <p:cNvSpPr/>
+          <p:nvPr/>
+        </p:nvSpPr>
+        <p:spPr>
+          <a:xfrm>
+            <a:off x="822960" y="4206240"/>
+            <a:ext cx="2743200" cy="0"/>
+          </a:xfrm>
+          <a:prstGeom prst="line">
+            <a:avLst/>
+          </a:prstGeom>
+          <a:noFill/>
+          <a:ln w="12700">
             <a:solidFill>
-              <a:srgbClr val="2A3562"/>
+              <a:srgbClr val="C9A24C"/>
             </a:solidFill>
             <a:prstDash val="solid"/>
           </a:ln>
@@ -15858,116 +16846,116 @@
       </p:sp>
       <p:sp>
         <p:nvSpPr>
-          <p:cNvPr id="5" name="Text 3"/>
-          <p:cNvSpPr/>
-          <p:nvPr/>
-        </p:nvSpPr>
-        <p:spPr>
-          <a:xfrm>
-            <a:off x="640080" y="2331720"/>
-            <a:ext cx="2468880" cy="320040"/>
-          </a:xfrm>
-          <a:prstGeom prst="rect">
-            <a:avLst/>
-          </a:prstGeom>
-          <a:noFill/>
-          <a:ln/>
-        </p:spPr>
-        <p:txBody>
-          <a:bodyPr wrap="square" rtlCol="0" anchor="ctr"/>
-          <a:lstStyle/>
-          <a:p>
-            <a:pPr indent="0" marL="0">
-              <a:buNone/>
-            </a:pPr>
-            <a:r>
-              <a:rPr lang="en-US" sz="1000" b="1" spc="300" kern="0" dirty="0">
-                <a:solidFill>
-                  <a:srgbClr val="C9A24C"/>
+          <p:cNvPr id="7" name="Text 5"/>
+          <p:cNvSpPr/>
+          <p:nvPr/>
+        </p:nvSpPr>
+        <p:spPr>
+          <a:xfrm>
+            <a:off x="822960" y="4389120"/>
+            <a:ext cx="5486400" cy="457200"/>
+          </a:xfrm>
+          <a:prstGeom prst="rect">
+            <a:avLst/>
+          </a:prstGeom>
+          <a:noFill/>
+          <a:ln/>
+        </p:spPr>
+        <p:txBody>
+          <a:bodyPr wrap="square" rtlCol="0" anchor="ctr"/>
+          <a:lstStyle/>
+          <a:p>
+            <a:pPr indent="0" marL="0">
+              <a:buNone/>
+            </a:pPr>
+            <a:r>
+              <a:rPr lang="en-US" sz="2200" dirty="0">
+                <a:solidFill>
+                  <a:srgbClr val="F5F1E8"/>
+                </a:solidFill>
+                <a:latin typeface="Georgia" pitchFamily="34" charset="0"/>
+                <a:ea typeface="Georgia" pitchFamily="34" charset="-122"/>
+                <a:cs typeface="Georgia" pitchFamily="34" charset="-120"/>
+              </a:rPr>
+              <a:t>Wisdom Jonathans</a:t>
+            </a:r>
+            <a:endParaRPr lang="en-US" sz="2200" dirty="0"/>
+          </a:p>
+        </p:txBody>
+      </p:sp>
+      <p:sp>
+        <p:nvSpPr>
+          <p:cNvPr id="8" name="Text 6"/>
+          <p:cNvSpPr/>
+          <p:nvPr/>
+        </p:nvSpPr>
+        <p:spPr>
+          <a:xfrm>
+            <a:off x="822960" y="4846320"/>
+            <a:ext cx="7315200" cy="320040"/>
+          </a:xfrm>
+          <a:prstGeom prst="rect">
+            <a:avLst/>
+          </a:prstGeom>
+          <a:noFill/>
+          <a:ln/>
+        </p:spPr>
+        <p:txBody>
+          <a:bodyPr wrap="square" rtlCol="0" anchor="ctr"/>
+          <a:lstStyle/>
+          <a:p>
+            <a:pPr indent="0" marL="0">
+              <a:buNone/>
+            </a:pPr>
+            <a:r>
+              <a:rPr lang="en-US" sz="1300" dirty="0">
+                <a:solidFill>
+                  <a:srgbClr val="C8CFE0"/>
                 </a:solidFill>
                 <a:latin typeface="Calibri" pitchFamily="34" charset="0"/>
                 <a:ea typeface="Calibri" pitchFamily="34" charset="-122"/>
                 <a:cs typeface="Calibri" pitchFamily="34" charset="-120"/>
               </a:rPr>
-              <a:t>Gross Margin at Scale</a:t>
-            </a:r>
-            <a:endParaRPr lang="en-US" sz="1000" dirty="0"/>
-          </a:p>
-        </p:txBody>
-      </p:sp>
-      <p:sp>
-        <p:nvSpPr>
-          <p:cNvPr id="6" name="Text 4"/>
-          <p:cNvSpPr/>
-          <p:nvPr/>
-        </p:nvSpPr>
-        <p:spPr>
-          <a:xfrm>
-            <a:off x="640080" y="2651760"/>
-            <a:ext cx="2468880" cy="548640"/>
-          </a:xfrm>
-          <a:prstGeom prst="rect">
-            <a:avLst/>
-          </a:prstGeom>
-          <a:noFill/>
-          <a:ln/>
-        </p:spPr>
-        <p:txBody>
-          <a:bodyPr wrap="square" rtlCol="0" anchor="ctr"/>
-          <a:lstStyle/>
-          <a:p>
-            <a:pPr indent="0" marL="0">
-              <a:buNone/>
-            </a:pPr>
-            <a:r>
-              <a:rPr lang="en-US" sz="2600" dirty="0">
-                <a:solidFill>
-                  <a:srgbClr val="F5F1E8"/>
-                </a:solidFill>
-                <a:latin typeface="Georgia" pitchFamily="34" charset="0"/>
-                <a:ea typeface="Georgia" pitchFamily="34" charset="-122"/>
-                <a:cs typeface="Georgia" pitchFamily="34" charset="-120"/>
-              </a:rPr>
-              <a:t>78–84%</a:t>
-            </a:r>
-            <a:endParaRPr lang="en-US" sz="2600" dirty="0"/>
-          </a:p>
-        </p:txBody>
-      </p:sp>
-      <p:sp>
-        <p:nvSpPr>
-          <p:cNvPr id="7" name="Text 5"/>
-          <p:cNvSpPr/>
-          <p:nvPr/>
-        </p:nvSpPr>
-        <p:spPr>
-          <a:xfrm>
-            <a:off x="640080" y="3246120"/>
-            <a:ext cx="2468880" cy="365760"/>
-          </a:xfrm>
-          <a:prstGeom prst="rect">
-            <a:avLst/>
-          </a:prstGeom>
-          <a:noFill/>
-          <a:ln/>
-        </p:spPr>
-        <p:txBody>
-          <a:bodyPr wrap="square" rtlCol="0" anchor="ctr"/>
-          <a:lstStyle/>
-          <a:p>
-            <a:pPr indent="0" marL="0">
-              <a:buNone/>
-            </a:pPr>
-            <a:r>
-              <a:rPr lang="en-US" sz="1000" dirty="0">
-                <a:solidFill>
-                  <a:srgbClr val="8892B0"/>
+              <a:t>Founder &amp; CEO — Soteria AI Technologies Inc.</a:t>
+            </a:r>
+            <a:endParaRPr lang="en-US" sz="1300" dirty="0"/>
+          </a:p>
+        </p:txBody>
+      </p:sp>
+      <p:sp>
+        <p:nvSpPr>
+          <p:cNvPr id="9" name="Text 7"/>
+          <p:cNvSpPr/>
+          <p:nvPr/>
+        </p:nvSpPr>
+        <p:spPr>
+          <a:xfrm>
+            <a:off x="822960" y="5394960"/>
+            <a:ext cx="5486400" cy="274320"/>
+          </a:xfrm>
+          <a:prstGeom prst="rect">
+            <a:avLst/>
+          </a:prstGeom>
+          <a:noFill/>
+          <a:ln/>
+        </p:spPr>
+        <p:txBody>
+          <a:bodyPr wrap="square" rtlCol="0" anchor="ctr"/>
+          <a:lstStyle/>
+          <a:p>
+            <a:pPr indent="0" marL="0">
+              <a:buNone/>
+            </a:pPr>
+            <a:r>
+              <a:rPr lang="en-US" sz="1000" b="1" spc="400" kern="0" dirty="0">
+                <a:solidFill>
+                  <a:srgbClr val="C9A24C"/>
                 </a:solidFill>
                 <a:latin typeface="Calibri" pitchFamily="34" charset="0"/>
                 <a:ea typeface="Calibri" pitchFamily="34" charset="-122"/>
                 <a:cs typeface="Calibri" pitchFamily="34" charset="-120"/>
               </a:rPr>
-              <a:t>62–68% in year one</a:t>
+              <a:t>NEXT STEP</a:t>
             </a:r>
             <a:endParaRPr lang="en-US" sz="1000" dirty="0"/>
           </a:p>
@@ -15975,108 +16963,40 @@
       </p:sp>
       <p:sp>
         <p:nvSpPr>
-          <p:cNvPr id="8" name="Shape 6"/>
-          <p:cNvSpPr/>
-          <p:nvPr/>
-        </p:nvSpPr>
-        <p:spPr>
-          <a:xfrm>
-            <a:off x="3383280" y="2194560"/>
-            <a:ext cx="2743200" cy="1463040"/>
-          </a:xfrm>
-          <a:prstGeom prst="rect">
-            <a:avLst/>
-          </a:prstGeom>
-          <a:solidFill>
-            <a:srgbClr val="13204A"/>
-          </a:solidFill>
-          <a:ln w="6350">
-            <a:solidFill>
-              <a:srgbClr val="2A3562"/>
-            </a:solidFill>
-            <a:prstDash val="solid"/>
-          </a:ln>
-        </p:spPr>
-        <p:txBody>
-          <a:bodyPr/>
-          <a:p/>
-        </p:txBody>
-      </p:sp>
-      <p:sp>
-        <p:nvSpPr>
-          <p:cNvPr id="9" name="Text 7"/>
-          <p:cNvSpPr/>
-          <p:nvPr/>
-        </p:nvSpPr>
-        <p:spPr>
-          <a:xfrm>
-            <a:off x="3566160" y="2331720"/>
-            <a:ext cx="2468880" cy="320040"/>
-          </a:xfrm>
-          <a:prstGeom prst="rect">
-            <a:avLst/>
-          </a:prstGeom>
-          <a:noFill/>
-          <a:ln/>
-        </p:spPr>
-        <p:txBody>
-          <a:bodyPr wrap="square" rtlCol="0" anchor="ctr"/>
-          <a:lstStyle/>
-          <a:p>
-            <a:pPr indent="0" marL="0">
-              <a:buNone/>
-            </a:pPr>
-            <a:r>
-              <a:rPr lang="en-US" sz="1000" b="1" spc="300" kern="0" dirty="0">
-                <a:solidFill>
-                  <a:srgbClr val="C9A24C"/>
+          <p:cNvPr id="10" name="Text 8"/>
+          <p:cNvSpPr/>
+          <p:nvPr/>
+        </p:nvSpPr>
+        <p:spPr>
+          <a:xfrm>
+            <a:off x="822960" y="5669280"/>
+            <a:ext cx="10972800" cy="320040"/>
+          </a:xfrm>
+          <a:prstGeom prst="rect">
+            <a:avLst/>
+          </a:prstGeom>
+          <a:noFill/>
+          <a:ln/>
+        </p:spPr>
+        <p:txBody>
+          <a:bodyPr wrap="square" rtlCol="0" anchor="ctr"/>
+          <a:lstStyle/>
+          <a:p>
+            <a:pPr indent="0" marL="0">
+              <a:buNone/>
+            </a:pPr>
+            <a:r>
+              <a:rPr lang="en-US" sz="1200" dirty="0">
+                <a:solidFill>
+                  <a:srgbClr val="F5F1E8"/>
                 </a:solidFill>
                 <a:latin typeface="Calibri" pitchFamily="34" charset="0"/>
                 <a:ea typeface="Calibri" pitchFamily="34" charset="-122"/>
                 <a:cs typeface="Calibri" pitchFamily="34" charset="-120"/>
               </a:rPr>
-              <a:t>Cost to Serve / Org</a:t>
-            </a:r>
-            <a:endParaRPr lang="en-US" sz="1000" dirty="0"/>
-          </a:p>
-        </p:txBody>
-      </p:sp>
-      <p:sp>
-        <p:nvSpPr>
-          <p:cNvPr id="10" name="Text 8"/>
-          <p:cNvSpPr/>
-          <p:nvPr/>
-        </p:nvSpPr>
-        <p:spPr>
-          <a:xfrm>
-            <a:off x="3566160" y="2651760"/>
-            <a:ext cx="2468880" cy="548640"/>
-          </a:xfrm>
-          <a:prstGeom prst="rect">
-            <a:avLst/>
-          </a:prstGeom>
-          <a:noFill/>
-          <a:ln/>
-        </p:spPr>
-        <p:txBody>
-          <a:bodyPr wrap="square" rtlCol="0" anchor="ctr"/>
-          <a:lstStyle/>
-          <a:p>
-            <a:pPr indent="0" marL="0">
-              <a:buNone/>
-            </a:pPr>
-            <a:r>
-              <a:rPr lang="en-US" sz="2600" dirty="0">
-                <a:solidFill>
-                  <a:srgbClr val="F5F1E8"/>
-                </a:solidFill>
-                <a:latin typeface="Georgia" pitchFamily="34" charset="0"/>
-                <a:ea typeface="Georgia" pitchFamily="34" charset="-122"/>
-                <a:cs typeface="Georgia" pitchFamily="34" charset="-120"/>
-              </a:rPr>
-              <a:t>$34–58 mo</a:t>
-            </a:r>
-            <a:endParaRPr lang="en-US" sz="2600" dirty="0"/>
+              <a:t>45-minute product walkthrough  ·  Data room access  ·  Design partner reference calls</a:t>
+            </a:r>
+            <a:endParaRPr lang="en-US" sz="1200" dirty="0"/>
           </a:p>
         </p:txBody>
       </p:sp>
@@ -16088,24 +17008,24 @@
         </p:nvSpPr>
         <p:spPr>
           <a:xfrm>
-            <a:off x="3566160" y="3246120"/>
-            <a:ext cx="2468880" cy="365760"/>
-          </a:xfrm>
-          <a:prstGeom prst="rect">
-            <a:avLst/>
-          </a:prstGeom>
-          <a:noFill/>
-          <a:ln/>
-        </p:spPr>
-        <p:txBody>
-          <a:bodyPr wrap="square" rtlCol="0" anchor="ctr"/>
-          <a:lstStyle/>
-          <a:p>
-            <a:pPr indent="0" marL="0">
-              <a:buNone/>
-            </a:pPr>
-            <a:r>
-              <a:rPr lang="en-US" sz="1000" dirty="0">
+            <a:off x="822960" y="6172200"/>
+            <a:ext cx="9144000" cy="274320"/>
+          </a:xfrm>
+          <a:prstGeom prst="rect">
+            <a:avLst/>
+          </a:prstGeom>
+          <a:noFill/>
+          <a:ln/>
+        </p:spPr>
+        <p:txBody>
+          <a:bodyPr wrap="square" rtlCol="0" anchor="ctr"/>
+          <a:lstStyle/>
+          <a:p>
+            <a:pPr indent="0" marL="0">
+              <a:buNone/>
+            </a:pPr>
+            <a:r>
+              <a:rPr lang="en-US" sz="900" spc="400" kern="0" dirty="0">
                 <a:solidFill>
                   <a:srgbClr val="8892B0"/>
                 </a:solidFill>
@@ -16113,920 +17033,7 @@
                 <a:ea typeface="Calibri" pitchFamily="34" charset="-122"/>
                 <a:cs typeface="Calibri" pitchFamily="34" charset="-120"/>
               </a:rPr>
-              <a:t>trending to $18–26 by year three</a:t>
-            </a:r>
-            <a:endParaRPr lang="en-US" sz="1000" dirty="0"/>
-          </a:p>
-        </p:txBody>
-      </p:sp>
-      <p:sp>
-        <p:nvSpPr>
-          <p:cNvPr id="12" name="Shape 10"/>
-          <p:cNvSpPr/>
-          <p:nvPr/>
-        </p:nvSpPr>
-        <p:spPr>
-          <a:xfrm>
-            <a:off x="6309360" y="2194560"/>
-            <a:ext cx="2743200" cy="1463040"/>
-          </a:xfrm>
-          <a:prstGeom prst="rect">
-            <a:avLst/>
-          </a:prstGeom>
-          <a:solidFill>
-            <a:srgbClr val="13204A"/>
-          </a:solidFill>
-          <a:ln w="6350">
-            <a:solidFill>
-              <a:srgbClr val="2A3562"/>
-            </a:solidFill>
-            <a:prstDash val="solid"/>
-          </a:ln>
-        </p:spPr>
-        <p:txBody>
-          <a:bodyPr/>
-          <a:p/>
-        </p:txBody>
-      </p:sp>
-      <p:sp>
-        <p:nvSpPr>
-          <p:cNvPr id="13" name="Text 11"/>
-          <p:cNvSpPr/>
-          <p:nvPr/>
-        </p:nvSpPr>
-        <p:spPr>
-          <a:xfrm>
-            <a:off x="6492240" y="2331720"/>
-            <a:ext cx="2468880" cy="320040"/>
-          </a:xfrm>
-          <a:prstGeom prst="rect">
-            <a:avLst/>
-          </a:prstGeom>
-          <a:noFill/>
-          <a:ln/>
-        </p:spPr>
-        <p:txBody>
-          <a:bodyPr wrap="square" rtlCol="0" anchor="ctr"/>
-          <a:lstStyle/>
-          <a:p>
-            <a:pPr indent="0" marL="0">
-              <a:buNone/>
-            </a:pPr>
-            <a:r>
-              <a:rPr lang="en-US" sz="1000" b="1" spc="300" kern="0" dirty="0">
-                <a:solidFill>
-                  <a:srgbClr val="C9A24C"/>
-                </a:solidFill>
-                <a:latin typeface="Calibri" pitchFamily="34" charset="0"/>
-                <a:ea typeface="Calibri" pitchFamily="34" charset="-122"/>
-                <a:cs typeface="Calibri" pitchFamily="34" charset="-120"/>
-              </a:rPr>
-              <a:t>CAC Payback</a:t>
-            </a:r>
-            <a:endParaRPr lang="en-US" sz="1000" dirty="0"/>
-          </a:p>
-        </p:txBody>
-      </p:sp>
-      <p:sp>
-        <p:nvSpPr>
-          <p:cNvPr id="14" name="Text 12"/>
-          <p:cNvSpPr/>
-          <p:nvPr/>
-        </p:nvSpPr>
-        <p:spPr>
-          <a:xfrm>
-            <a:off x="6492240" y="2651760"/>
-            <a:ext cx="2468880" cy="548640"/>
-          </a:xfrm>
-          <a:prstGeom prst="rect">
-            <a:avLst/>
-          </a:prstGeom>
-          <a:noFill/>
-          <a:ln/>
-        </p:spPr>
-        <p:txBody>
-          <a:bodyPr wrap="square" rtlCol="0" anchor="ctr"/>
-          <a:lstStyle/>
-          <a:p>
-            <a:pPr indent="0" marL="0">
-              <a:buNone/>
-            </a:pPr>
-            <a:r>
-              <a:rPr lang="en-US" sz="2600" dirty="0">
-                <a:solidFill>
-                  <a:srgbClr val="F5F1E8"/>
-                </a:solidFill>
-                <a:latin typeface="Georgia" pitchFamily="34" charset="0"/>
-                <a:ea typeface="Georgia" pitchFamily="34" charset="-122"/>
-                <a:cs typeface="Georgia" pitchFamily="34" charset="-120"/>
-              </a:rPr>
-              <a:t>12–18 mo</a:t>
-            </a:r>
-            <a:endParaRPr lang="en-US" sz="2600" dirty="0"/>
-          </a:p>
-        </p:txBody>
-      </p:sp>
-      <p:sp>
-        <p:nvSpPr>
-          <p:cNvPr id="15" name="Text 13"/>
-          <p:cNvSpPr/>
-          <p:nvPr/>
-        </p:nvSpPr>
-        <p:spPr>
-          <a:xfrm>
-            <a:off x="6492240" y="3246120"/>
-            <a:ext cx="2468880" cy="365760"/>
-          </a:xfrm>
-          <a:prstGeom prst="rect">
-            <a:avLst/>
-          </a:prstGeom>
-          <a:noFill/>
-          <a:ln/>
-        </p:spPr>
-        <p:txBody>
-          <a:bodyPr wrap="square" rtlCol="0" anchor="ctr"/>
-          <a:lstStyle/>
-          <a:p>
-            <a:pPr indent="0" marL="0">
-              <a:buNone/>
-            </a:pPr>
-            <a:r>
-              <a:rPr lang="en-US" sz="1000" dirty="0">
-                <a:solidFill>
-                  <a:srgbClr val="8892B0"/>
-                </a:solidFill>
-                <a:latin typeface="Calibri" pitchFamily="34" charset="0"/>
-                <a:ea typeface="Calibri" pitchFamily="34" charset="-122"/>
-                <a:cs typeface="Calibri" pitchFamily="34" charset="-120"/>
-              </a:rPr>
-              <a:t>&lt;10 mo as channel matures</a:t>
-            </a:r>
-            <a:endParaRPr lang="en-US" sz="1000" dirty="0"/>
-          </a:p>
-        </p:txBody>
-      </p:sp>
-      <p:sp>
-        <p:nvSpPr>
-          <p:cNvPr id="16" name="Shape 14"/>
-          <p:cNvSpPr/>
-          <p:nvPr/>
-        </p:nvSpPr>
-        <p:spPr>
-          <a:xfrm>
-            <a:off x="9235440" y="2194560"/>
-            <a:ext cx="2743200" cy="1463040"/>
-          </a:xfrm>
-          <a:prstGeom prst="rect">
-            <a:avLst/>
-          </a:prstGeom>
-          <a:solidFill>
-            <a:srgbClr val="13204A"/>
-          </a:solidFill>
-          <a:ln w="6350">
-            <a:solidFill>
-              <a:srgbClr val="2A3562"/>
-            </a:solidFill>
-            <a:prstDash val="solid"/>
-          </a:ln>
-        </p:spPr>
-        <p:txBody>
-          <a:bodyPr/>
-          <a:p/>
-        </p:txBody>
-      </p:sp>
-      <p:sp>
-        <p:nvSpPr>
-          <p:cNvPr id="17" name="Text 15"/>
-          <p:cNvSpPr/>
-          <p:nvPr/>
-        </p:nvSpPr>
-        <p:spPr>
-          <a:xfrm>
-            <a:off x="9418320" y="2331720"/>
-            <a:ext cx="2468880" cy="320040"/>
-          </a:xfrm>
-          <a:prstGeom prst="rect">
-            <a:avLst/>
-          </a:prstGeom>
-          <a:noFill/>
-          <a:ln/>
-        </p:spPr>
-        <p:txBody>
-          <a:bodyPr wrap="square" rtlCol="0" anchor="ctr"/>
-          <a:lstStyle/>
-          <a:p>
-            <a:pPr indent="0" marL="0">
-              <a:buNone/>
-            </a:pPr>
-            <a:r>
-              <a:rPr lang="en-US" sz="1000" b="1" spc="300" kern="0" dirty="0">
-                <a:solidFill>
-                  <a:srgbClr val="C9A24C"/>
-                </a:solidFill>
-                <a:latin typeface="Calibri" pitchFamily="34" charset="0"/>
-                <a:ea typeface="Calibri" pitchFamily="34" charset="-122"/>
-                <a:cs typeface="Calibri" pitchFamily="34" charset="-120"/>
-              </a:rPr>
-              <a:t>LTV : CAC (Year 3)</a:t>
-            </a:r>
-            <a:endParaRPr lang="en-US" sz="1000" dirty="0"/>
-          </a:p>
-        </p:txBody>
-      </p:sp>
-      <p:sp>
-        <p:nvSpPr>
-          <p:cNvPr id="18" name="Text 16"/>
-          <p:cNvSpPr/>
-          <p:nvPr/>
-        </p:nvSpPr>
-        <p:spPr>
-          <a:xfrm>
-            <a:off x="9418320" y="2651760"/>
-            <a:ext cx="2468880" cy="548640"/>
-          </a:xfrm>
-          <a:prstGeom prst="rect">
-            <a:avLst/>
-          </a:prstGeom>
-          <a:noFill/>
-          <a:ln/>
-        </p:spPr>
-        <p:txBody>
-          <a:bodyPr wrap="square" rtlCol="0" anchor="ctr"/>
-          <a:lstStyle/>
-          <a:p>
-            <a:pPr indent="0" marL="0">
-              <a:buNone/>
-            </a:pPr>
-            <a:r>
-              <a:rPr lang="en-US" sz="2600" dirty="0">
-                <a:solidFill>
-                  <a:srgbClr val="F5F1E8"/>
-                </a:solidFill>
-                <a:latin typeface="Georgia" pitchFamily="34" charset="0"/>
-                <a:ea typeface="Georgia" pitchFamily="34" charset="-122"/>
-                <a:cs typeface="Georgia" pitchFamily="34" charset="-120"/>
-              </a:rPr>
-              <a:t>≥ 3.5x</a:t>
-            </a:r>
-            <a:endParaRPr lang="en-US" sz="2600" dirty="0"/>
-          </a:p>
-        </p:txBody>
-      </p:sp>
-      <p:sp>
-        <p:nvSpPr>
-          <p:cNvPr id="19" name="Text 17"/>
-          <p:cNvSpPr/>
-          <p:nvPr/>
-        </p:nvSpPr>
-        <p:spPr>
-          <a:xfrm>
-            <a:off x="9418320" y="3246120"/>
-            <a:ext cx="2468880" cy="365760"/>
-          </a:xfrm>
-          <a:prstGeom prst="rect">
-            <a:avLst/>
-          </a:prstGeom>
-          <a:noFill/>
-          <a:ln/>
-        </p:spPr>
-        <p:txBody>
-          <a:bodyPr wrap="square" rtlCol="0" anchor="ctr"/>
-          <a:lstStyle/>
-          <a:p>
-            <a:pPr indent="0" marL="0">
-              <a:buNone/>
-            </a:pPr>
-            <a:r>
-              <a:rPr lang="en-US" sz="1000" dirty="0">
-                <a:solidFill>
-                  <a:srgbClr val="8892B0"/>
-                </a:solidFill>
-                <a:latin typeface="Calibri" pitchFamily="34" charset="0"/>
-                <a:ea typeface="Calibri" pitchFamily="34" charset="-122"/>
-                <a:cs typeface="Calibri" pitchFamily="34" charset="-120"/>
-              </a:rPr>
-              <a:t>NRR 108–125% on expansion</a:t>
-            </a:r>
-            <a:endParaRPr lang="en-US" sz="1000" dirty="0"/>
-          </a:p>
-        </p:txBody>
-      </p:sp>
-      <p:sp>
-        <p:nvSpPr>
-          <p:cNvPr id="20" name="Text 18"/>
-          <p:cNvSpPr/>
-          <p:nvPr/>
-        </p:nvSpPr>
-        <p:spPr>
-          <a:xfrm>
-            <a:off x="457200" y="4023360"/>
-            <a:ext cx="5486400" cy="274320"/>
-          </a:xfrm>
-          <a:prstGeom prst="rect">
-            <a:avLst/>
-          </a:prstGeom>
-          <a:noFill/>
-          <a:ln/>
-        </p:spPr>
-        <p:txBody>
-          <a:bodyPr wrap="square" rtlCol="0" anchor="ctr"/>
-          <a:lstStyle/>
-          <a:p>
-            <a:pPr indent="0" marL="0">
-              <a:buNone/>
-            </a:pPr>
-            <a:r>
-              <a:rPr lang="en-US" sz="1000" b="1" spc="400" kern="0" dirty="0">
-                <a:solidFill>
-                  <a:srgbClr val="C9A24C"/>
-                </a:solidFill>
-                <a:latin typeface="Calibri" pitchFamily="34" charset="0"/>
-                <a:ea typeface="Calibri" pitchFamily="34" charset="-122"/>
-                <a:cs typeface="Calibri" pitchFamily="34" charset="-120"/>
-              </a:rPr>
-              <a:t>WHAT $1.5M CONVERTS INTO</a:t>
-            </a:r>
-            <a:endParaRPr lang="en-US" sz="1000" dirty="0"/>
-          </a:p>
-        </p:txBody>
-      </p:sp>
-      <p:sp>
-        <p:nvSpPr>
-          <p:cNvPr id="21" name="Shape 19"/>
-          <p:cNvSpPr/>
-          <p:nvPr/>
-        </p:nvSpPr>
-        <p:spPr>
-          <a:xfrm>
-            <a:off x="457200" y="4343400"/>
-            <a:ext cx="3657600" cy="1188720"/>
-          </a:xfrm>
-          <a:prstGeom prst="rect">
-            <a:avLst/>
-          </a:prstGeom>
-          <a:solidFill>
-            <a:srgbClr val="13204A"/>
-          </a:solidFill>
-          <a:ln w="6350">
-            <a:solidFill>
-              <a:srgbClr val="2A3562"/>
-            </a:solidFill>
-            <a:prstDash val="solid"/>
-          </a:ln>
-        </p:spPr>
-        <p:txBody>
-          <a:bodyPr/>
-          <a:p/>
-        </p:txBody>
-      </p:sp>
-      <p:sp>
-        <p:nvSpPr>
-          <p:cNvPr id="22" name="Text 20"/>
-          <p:cNvSpPr/>
-          <p:nvPr/>
-        </p:nvSpPr>
-        <p:spPr>
-          <a:xfrm>
-            <a:off x="685800" y="4434840"/>
-            <a:ext cx="3200400" cy="320040"/>
-          </a:xfrm>
-          <a:prstGeom prst="rect">
-            <a:avLst/>
-          </a:prstGeom>
-          <a:noFill/>
-          <a:ln/>
-        </p:spPr>
-        <p:txBody>
-          <a:bodyPr wrap="square" rtlCol="0" anchor="ctr"/>
-          <a:lstStyle/>
-          <a:p>
-            <a:pPr indent="0" marL="0">
-              <a:buNone/>
-            </a:pPr>
-            <a:r>
-              <a:rPr lang="en-US" sz="1100" b="1" dirty="0">
-                <a:solidFill>
-                  <a:srgbClr val="C9A24C"/>
-                </a:solidFill>
-                <a:latin typeface="Calibri" pitchFamily="34" charset="0"/>
-                <a:ea typeface="Calibri" pitchFamily="34" charset="-122"/>
-                <a:cs typeface="Calibri" pitchFamily="34" charset="-120"/>
-              </a:rPr>
-              <a:t>Product &amp; Infrastructure</a:t>
-            </a:r>
-            <a:endParaRPr lang="en-US" sz="1100" dirty="0"/>
-          </a:p>
-        </p:txBody>
-      </p:sp>
-      <p:sp>
-        <p:nvSpPr>
-          <p:cNvPr id="23" name="Text 21"/>
-          <p:cNvSpPr/>
-          <p:nvPr/>
-        </p:nvSpPr>
-        <p:spPr>
-          <a:xfrm>
-            <a:off x="685800" y="4754880"/>
-            <a:ext cx="3200400" cy="457200"/>
-          </a:xfrm>
-          <a:prstGeom prst="rect">
-            <a:avLst/>
-          </a:prstGeom>
-          <a:noFill/>
-          <a:ln/>
-        </p:spPr>
-        <p:txBody>
-          <a:bodyPr wrap="square" rtlCol="0" anchor="ctr"/>
-          <a:lstStyle/>
-          <a:p>
-            <a:pPr indent="0" marL="0">
-              <a:buNone/>
-            </a:pPr>
-            <a:r>
-              <a:rPr lang="en-US" sz="2200" dirty="0">
-                <a:solidFill>
-                  <a:srgbClr val="F5F1E8"/>
-                </a:solidFill>
-                <a:latin typeface="Georgia" pitchFamily="34" charset="0"/>
-                <a:ea typeface="Georgia" pitchFamily="34" charset="-122"/>
-                <a:cs typeface="Georgia" pitchFamily="34" charset="-120"/>
-              </a:rPr>
-              <a:t>42%</a:t>
-            </a:r>
-            <a:endParaRPr lang="en-US" sz="2200" dirty="0"/>
-          </a:p>
-        </p:txBody>
-      </p:sp>
-      <p:sp>
-        <p:nvSpPr>
-          <p:cNvPr id="24" name="Text 22"/>
-          <p:cNvSpPr/>
-          <p:nvPr/>
-        </p:nvSpPr>
-        <p:spPr>
-          <a:xfrm>
-            <a:off x="685800" y="5212080"/>
-            <a:ext cx="3200400" cy="320040"/>
-          </a:xfrm>
-          <a:prstGeom prst="rect">
-            <a:avLst/>
-          </a:prstGeom>
-          <a:noFill/>
-          <a:ln/>
-        </p:spPr>
-        <p:txBody>
-          <a:bodyPr wrap="square" rtlCol="0" anchor="ctr"/>
-          <a:lstStyle/>
-          <a:p>
-            <a:pPr indent="0" marL="0">
-              <a:buNone/>
-            </a:pPr>
-            <a:r>
-              <a:rPr lang="en-US" sz="1100" dirty="0">
-                <a:solidFill>
-                  <a:srgbClr val="C8CFE0"/>
-                </a:solidFill>
-                <a:latin typeface="Calibri" pitchFamily="34" charset="0"/>
-                <a:ea typeface="Calibri" pitchFamily="34" charset="-122"/>
-                <a:cs typeface="Calibri" pitchFamily="34" charset="-120"/>
-              </a:rPr>
-              <a:t>Enterprise-ready platform, capacity to scale</a:t>
-            </a:r>
-            <a:endParaRPr lang="en-US" sz="1100" dirty="0"/>
-          </a:p>
-        </p:txBody>
-      </p:sp>
-      <p:sp>
-        <p:nvSpPr>
-          <p:cNvPr id="25" name="Shape 23"/>
-          <p:cNvSpPr/>
-          <p:nvPr/>
-        </p:nvSpPr>
-        <p:spPr>
-          <a:xfrm>
-            <a:off x="4370832" y="4343400"/>
-            <a:ext cx="3657600" cy="1188720"/>
-          </a:xfrm>
-          <a:prstGeom prst="rect">
-            <a:avLst/>
-          </a:prstGeom>
-          <a:solidFill>
-            <a:srgbClr val="13204A"/>
-          </a:solidFill>
-          <a:ln w="6350">
-            <a:solidFill>
-              <a:srgbClr val="2A3562"/>
-            </a:solidFill>
-            <a:prstDash val="solid"/>
-          </a:ln>
-        </p:spPr>
-        <p:txBody>
-          <a:bodyPr/>
-          <a:p/>
-        </p:txBody>
-      </p:sp>
-      <p:sp>
-        <p:nvSpPr>
-          <p:cNvPr id="26" name="Text 24"/>
-          <p:cNvSpPr/>
-          <p:nvPr/>
-        </p:nvSpPr>
-        <p:spPr>
-          <a:xfrm>
-            <a:off x="4599432" y="4434840"/>
-            <a:ext cx="3200400" cy="320040"/>
-          </a:xfrm>
-          <a:prstGeom prst="rect">
-            <a:avLst/>
-          </a:prstGeom>
-          <a:noFill/>
-          <a:ln/>
-        </p:spPr>
-        <p:txBody>
-          <a:bodyPr wrap="square" rtlCol="0" anchor="ctr"/>
-          <a:lstStyle/>
-          <a:p>
-            <a:pPr indent="0" marL="0">
-              <a:buNone/>
-            </a:pPr>
-            <a:r>
-              <a:rPr lang="en-US" sz="1100" b="1" dirty="0">
-                <a:solidFill>
-                  <a:srgbClr val="C9A24C"/>
-                </a:solidFill>
-                <a:latin typeface="Calibri" pitchFamily="34" charset="0"/>
-                <a:ea typeface="Calibri" pitchFamily="34" charset="-122"/>
-                <a:cs typeface="Calibri" pitchFamily="34" charset="-120"/>
-              </a:rPr>
-              <a:t>Go-to-Market</a:t>
-            </a:r>
-            <a:endParaRPr lang="en-US" sz="1100" dirty="0"/>
-          </a:p>
-        </p:txBody>
-      </p:sp>
-      <p:sp>
-        <p:nvSpPr>
-          <p:cNvPr id="27" name="Text 25"/>
-          <p:cNvSpPr/>
-          <p:nvPr/>
-        </p:nvSpPr>
-        <p:spPr>
-          <a:xfrm>
-            <a:off x="4599432" y="4754880"/>
-            <a:ext cx="3200400" cy="457200"/>
-          </a:xfrm>
-          <a:prstGeom prst="rect">
-            <a:avLst/>
-          </a:prstGeom>
-          <a:noFill/>
-          <a:ln/>
-        </p:spPr>
-        <p:txBody>
-          <a:bodyPr wrap="square" rtlCol="0" anchor="ctr"/>
-          <a:lstStyle/>
-          <a:p>
-            <a:pPr indent="0" marL="0">
-              <a:buNone/>
-            </a:pPr>
-            <a:r>
-              <a:rPr lang="en-US" sz="2200" dirty="0">
-                <a:solidFill>
-                  <a:srgbClr val="F5F1E8"/>
-                </a:solidFill>
-                <a:latin typeface="Georgia" pitchFamily="34" charset="0"/>
-                <a:ea typeface="Georgia" pitchFamily="34" charset="-122"/>
-                <a:cs typeface="Georgia" pitchFamily="34" charset="-120"/>
-              </a:rPr>
-              <a:t>35%</a:t>
-            </a:r>
-            <a:endParaRPr lang="en-US" sz="2200" dirty="0"/>
-          </a:p>
-        </p:txBody>
-      </p:sp>
-      <p:sp>
-        <p:nvSpPr>
-          <p:cNvPr id="28" name="Text 26"/>
-          <p:cNvSpPr/>
-          <p:nvPr/>
-        </p:nvSpPr>
-        <p:spPr>
-          <a:xfrm>
-            <a:off x="4599432" y="5212080"/>
-            <a:ext cx="3200400" cy="320040"/>
-          </a:xfrm>
-          <a:prstGeom prst="rect">
-            <a:avLst/>
-          </a:prstGeom>
-          <a:noFill/>
-          <a:ln/>
-        </p:spPr>
-        <p:txBody>
-          <a:bodyPr wrap="square" rtlCol="0" anchor="ctr"/>
-          <a:lstStyle/>
-          <a:p>
-            <a:pPr indent="0" marL="0">
-              <a:buNone/>
-            </a:pPr>
-            <a:r>
-              <a:rPr lang="en-US" sz="1100" dirty="0">
-                <a:solidFill>
-                  <a:srgbClr val="C8CFE0"/>
-                </a:solidFill>
-                <a:latin typeface="Calibri" pitchFamily="34" charset="0"/>
-                <a:ea typeface="Calibri" pitchFamily="34" charset="-122"/>
-                <a:cs typeface="Calibri" pitchFamily="34" charset="-120"/>
-              </a:rPr>
-              <a:t>First paying cohort, measured CAC</a:t>
-            </a:r>
-            <a:endParaRPr lang="en-US" sz="1100" dirty="0"/>
-          </a:p>
-        </p:txBody>
-      </p:sp>
-      <p:sp>
-        <p:nvSpPr>
-          <p:cNvPr id="29" name="Shape 27"/>
-          <p:cNvSpPr/>
-          <p:nvPr/>
-        </p:nvSpPr>
-        <p:spPr>
-          <a:xfrm>
-            <a:off x="8284464" y="4343400"/>
-            <a:ext cx="3657600" cy="1188720"/>
-          </a:xfrm>
-          <a:prstGeom prst="rect">
-            <a:avLst/>
-          </a:prstGeom>
-          <a:solidFill>
-            <a:srgbClr val="13204A"/>
-          </a:solidFill>
-          <a:ln w="6350">
-            <a:solidFill>
-              <a:srgbClr val="2A3562"/>
-            </a:solidFill>
-            <a:prstDash val="solid"/>
-          </a:ln>
-        </p:spPr>
-        <p:txBody>
-          <a:bodyPr/>
-          <a:p/>
-        </p:txBody>
-      </p:sp>
-      <p:sp>
-        <p:nvSpPr>
-          <p:cNvPr id="30" name="Text 28"/>
-          <p:cNvSpPr/>
-          <p:nvPr/>
-        </p:nvSpPr>
-        <p:spPr>
-          <a:xfrm>
-            <a:off x="8513064" y="4434840"/>
-            <a:ext cx="3200400" cy="320040"/>
-          </a:xfrm>
-          <a:prstGeom prst="rect">
-            <a:avLst/>
-          </a:prstGeom>
-          <a:noFill/>
-          <a:ln/>
-        </p:spPr>
-        <p:txBody>
-          <a:bodyPr wrap="square" rtlCol="0" anchor="ctr"/>
-          <a:lstStyle/>
-          <a:p>
-            <a:pPr indent="0" marL="0">
-              <a:buNone/>
-            </a:pPr>
-            <a:r>
-              <a:rPr lang="en-US" sz="1100" b="1" dirty="0">
-                <a:solidFill>
-                  <a:srgbClr val="C9A24C"/>
-                </a:solidFill>
-                <a:latin typeface="Calibri" pitchFamily="34" charset="0"/>
-                <a:ea typeface="Calibri" pitchFamily="34" charset="-122"/>
-                <a:cs typeface="Calibri" pitchFamily="34" charset="-120"/>
-              </a:rPr>
-              <a:t>Sales, Success &amp; AI</a:t>
-            </a:r>
-            <a:endParaRPr lang="en-US" sz="1100" dirty="0"/>
-          </a:p>
-        </p:txBody>
-      </p:sp>
-      <p:sp>
-        <p:nvSpPr>
-          <p:cNvPr id="31" name="Text 29"/>
-          <p:cNvSpPr/>
-          <p:nvPr/>
-        </p:nvSpPr>
-        <p:spPr>
-          <a:xfrm>
-            <a:off x="8513064" y="4754880"/>
-            <a:ext cx="3200400" cy="457200"/>
-          </a:xfrm>
-          <a:prstGeom prst="rect">
-            <a:avLst/>
-          </a:prstGeom>
-          <a:noFill/>
-          <a:ln/>
-        </p:spPr>
-        <p:txBody>
-          <a:bodyPr wrap="square" rtlCol="0" anchor="ctr"/>
-          <a:lstStyle/>
-          <a:p>
-            <a:pPr indent="0" marL="0">
-              <a:buNone/>
-            </a:pPr>
-            <a:r>
-              <a:rPr lang="en-US" sz="2200" dirty="0">
-                <a:solidFill>
-                  <a:srgbClr val="F5F1E8"/>
-                </a:solidFill>
-                <a:latin typeface="Georgia" pitchFamily="34" charset="0"/>
-                <a:ea typeface="Georgia" pitchFamily="34" charset="-122"/>
-                <a:cs typeface="Georgia" pitchFamily="34" charset="-120"/>
-              </a:rPr>
-              <a:t>23%</a:t>
-            </a:r>
-            <a:endParaRPr lang="en-US" sz="2200" dirty="0"/>
-          </a:p>
-        </p:txBody>
-      </p:sp>
-      <p:sp>
-        <p:nvSpPr>
-          <p:cNvPr id="32" name="Text 30"/>
-          <p:cNvSpPr/>
-          <p:nvPr/>
-        </p:nvSpPr>
-        <p:spPr>
-          <a:xfrm>
-            <a:off x="8513064" y="5212080"/>
-            <a:ext cx="3200400" cy="320040"/>
-          </a:xfrm>
-          <a:prstGeom prst="rect">
-            <a:avLst/>
-          </a:prstGeom>
-          <a:noFill/>
-          <a:ln/>
-        </p:spPr>
-        <p:txBody>
-          <a:bodyPr wrap="square" rtlCol="0" anchor="ctr"/>
-          <a:lstStyle/>
-          <a:p>
-            <a:pPr indent="0" marL="0">
-              <a:buNone/>
-            </a:pPr>
-            <a:r>
-              <a:rPr lang="en-US" sz="1100" dirty="0">
-                <a:solidFill>
-                  <a:srgbClr val="C8CFE0"/>
-                </a:solidFill>
-                <a:latin typeface="Calibri" pitchFamily="34" charset="0"/>
-                <a:ea typeface="Calibri" pitchFamily="34" charset="-122"/>
-                <a:cs typeface="Calibri" pitchFamily="34" charset="-120"/>
-              </a:rPr>
-              <a:t>Repeatable engine, higher customer value</a:t>
-            </a:r>
-            <a:endParaRPr lang="en-US" sz="1100" dirty="0"/>
-          </a:p>
-        </p:txBody>
-      </p:sp>
-      <p:sp>
-        <p:nvSpPr>
-          <p:cNvPr id="33" name="Text 31"/>
-          <p:cNvSpPr/>
-          <p:nvPr/>
-        </p:nvSpPr>
-        <p:spPr>
-          <a:xfrm>
-            <a:off x="457200" y="6080760"/>
-            <a:ext cx="11277295" cy="320040"/>
-          </a:xfrm>
-          <a:prstGeom prst="rect">
-            <a:avLst/>
-          </a:prstGeom>
-          <a:noFill/>
-          <a:ln/>
-        </p:spPr>
-        <p:txBody>
-          <a:bodyPr wrap="square" rtlCol="0" anchor="ctr"/>
-          <a:lstStyle/>
-          <a:p>
-            <a:pPr indent="0" marL="0">
-              <a:buNone/>
-            </a:pPr>
-            <a:r>
-              <a:rPr lang="en-US" sz="850" i="1" dirty="0">
-                <a:solidFill>
-                  <a:srgbClr val="8892B0"/>
-                </a:solidFill>
-                <a:latin typeface="Calibri" pitchFamily="34" charset="0"/>
-                <a:ea typeface="Calibri" pitchFamily="34" charset="-122"/>
-                <a:cs typeface="Calibri" pitchFamily="34" charset="-120"/>
-              </a:rPr>
-              <a:t>The platform is already built. This round funds commercialization, so incremental revenue lands on a largely fixed cost base. Full derivation in the Capital Efficiency &amp; Unit Economics Memo.</a:t>
-            </a:r>
-            <a:endParaRPr lang="en-US" sz="850" dirty="0"/>
-          </a:p>
-        </p:txBody>
-      </p:sp>
-      <p:sp>
-        <p:nvSpPr>
-          <p:cNvPr id="34" name="Shape 32"/>
-          <p:cNvSpPr/>
-          <p:nvPr/>
-        </p:nvSpPr>
-        <p:spPr>
-          <a:xfrm>
-            <a:off x="457200" y="6446520"/>
-            <a:ext cx="11277295" cy="0"/>
-          </a:xfrm>
-          <a:prstGeom prst="line">
-            <a:avLst/>
-          </a:prstGeom>
-          <a:noFill/>
-          <a:ln w="9525">
-            <a:solidFill>
-              <a:srgbClr val="2A3562"/>
-            </a:solidFill>
-            <a:prstDash val="solid"/>
-          </a:ln>
-        </p:spPr>
-        <p:txBody>
-          <a:bodyPr/>
-          <a:p/>
-        </p:txBody>
-      </p:sp>
-      <p:sp>
-        <p:nvSpPr>
-          <p:cNvPr id="35" name="Text 33"/>
-          <p:cNvSpPr/>
-          <p:nvPr/>
-        </p:nvSpPr>
-        <p:spPr>
-          <a:xfrm>
-            <a:off x="457200" y="6510528"/>
-            <a:ext cx="7315200" cy="274320"/>
-          </a:xfrm>
-          <a:prstGeom prst="rect">
-            <a:avLst/>
-          </a:prstGeom>
-          <a:noFill/>
-          <a:ln/>
-        </p:spPr>
-        <p:txBody>
-          <a:bodyPr wrap="square" rtlCol="0" anchor="ctr"/>
-          <a:lstStyle/>
-          <a:p>
-            <a:pPr indent="0" marL="0">
-              <a:buNone/>
-            </a:pPr>
-            <a:r>
-              <a:rPr lang="en-US" sz="900" spc="300" kern="0" dirty="0">
-                <a:solidFill>
-                  <a:srgbClr val="8892B0"/>
-                </a:solidFill>
-                <a:latin typeface="Calibri" pitchFamily="34" charset="0"/>
-                <a:ea typeface="Calibri" pitchFamily="34" charset="-122"/>
-                <a:cs typeface="Calibri" pitchFamily="34" charset="-120"/>
-              </a:rPr>
-              <a:t>GLOBAL OFFICE  /  CONFIDENTIAL INVESTOR MATERIALS</a:t>
-            </a:r>
-            <a:endParaRPr lang="en-US" sz="900" dirty="0"/>
-          </a:p>
-        </p:txBody>
-      </p:sp>
-      <p:sp>
-        <p:nvSpPr>
-          <p:cNvPr id="36" name="Text 34"/>
-          <p:cNvSpPr/>
-          <p:nvPr/>
-        </p:nvSpPr>
-        <p:spPr>
-          <a:xfrm>
-            <a:off x="9905695" y="6510528"/>
-            <a:ext cx="1828800" cy="274320"/>
-          </a:xfrm>
-          <a:prstGeom prst="rect">
-            <a:avLst/>
-          </a:prstGeom>
-          <a:noFill/>
-          <a:ln/>
-        </p:spPr>
-        <p:txBody>
-          <a:bodyPr wrap="square" rtlCol="0" anchor="ctr"/>
-          <a:lstStyle/>
-          <a:p>
-            <a:pPr algn="r" indent="0" marL="0">
-              <a:buNone/>
-            </a:pPr>
-            <a:r>
-              <a:rPr lang="en-US" sz="900" dirty="0">
-                <a:solidFill>
-                  <a:srgbClr val="C9A24C"/>
-                </a:solidFill>
-                <a:latin typeface="Consolas" pitchFamily="34" charset="0"/>
-                <a:ea typeface="Consolas" pitchFamily="34" charset="-122"/>
-                <a:cs typeface="Consolas" pitchFamily="34" charset="-120"/>
-              </a:rPr>
-              <a:t>15 / 23</a:t>
+              <a:t>CONFIDENTIAL — 2026</a:t>
             </a:r>
             <a:endParaRPr lang="en-US" sz="900" dirty="0"/>
           </a:p>

--- a/public/investor-pack/Global-Office-Investor-Deck.pptx
+++ b/public/investor-pack/Global-Office-Investor-Deck.pptx
@@ -619,7 +619,7 @@
           <a:p>
             <a:r>
               <a:rPr lang="en-US" dirty="0"/>
-              <a:t>Business model is per-organization SaaS with three tiers: Starter, Growth, Scale, priced in local currency to remove FX friction. AI credits meter compute-intensive features so cost scales with value. Expected gross margins in the 75–82% range consistent with vertical SaaS benchmarks — this is a range, not a claim. Enterprise editions and partner channels unlock the upper end of the market from year three onward.</a:t>
+              <a:t>Business model is per-organization SaaS with three tiers: Starter, Growth, Scale, priced in local currency to remove FX friction. AI credits meter compute-intensive features so cost scales with value. Expected gross margins in the 84–88% range consistent with vertical SaaS benchmarks — this is a range, not a claim. Enterprise editions and partner channels unlock the upper end of the market from year three onward.</a:t>
             </a:r>
             <a:endParaRPr lang="en-US" dirty="0"/>
           </a:p>
@@ -971,7 +971,7 @@
           <a:p>
             <a:r>
               <a:rPr lang="en-US" dirty="0"/>
-              <a:t>Financial framework, not fabricated forecast. Ranges are strategic assumptions to be validated in pilots. Blended ARPO $2.4K–$4.2K/yr. Gross margin 75–82%. CAC payback 10–14 months at Growth tier. Year 5 modeled scenarios: conservative $18M ARR, base $42M, upside $95M. All numbers will be re-baselined against pilot data before Series A. We show the math, not fiction.</a:t>
+              <a:t>Financial framework, not fabricated forecast. Ranges are strategic assumptions to be validated in pilots. Blended ARPO $2.4K–$4.2K/yr. Gross margin 84–88%. CAC payback 6–9 months at Growth tier. Year 5 modeled scenarios: conservative $18M ARR, base $42M, upside $95M. All numbers will be re-baselined against pilot data before Series A. We show the math, not fiction.</a:t>
             </a:r>
             <a:endParaRPr lang="en-US" dirty="0"/>
           </a:p>
@@ -1235,7 +1235,7 @@
           <a:p>
             <a:r>
               <a:rPr lang="en-US" dirty="0"/>
-              <a:t>Falsifiable milestones — the ones that unlock Series A. Month 6: 20 signed design partners across three cities. Month 12: first $500K–$1M ARR, cohort retention data, two verticals shipped. Month 18: $2M+ ARR, NRR above 110%, first enterprise reference, SOC 2 Type I. Month 24: Series A ready.</a:t>
+              <a:t>Falsifiable milestones — the ones that unlock Series A. Month 6: 20 signed design partners across three cities. Month 12: first $500K–$1M ARR, cohort retention data, two verticals shipped. Month 18: $2M+ ARR, NRR above 115%, first enterprise reference, SOC 2 Type I. Month 24: Series A ready.</a:t>
             </a:r>
             <a:endParaRPr lang="en-US" dirty="0"/>
           </a:p>
@@ -6098,7 +6098,7 @@
                 <a:ea typeface="Calibri" pitchFamily="34" charset="-122"/>
                 <a:cs typeface="Calibri" pitchFamily="34" charset="-120"/>
               </a:rPr>
-              <a:t>Gross margin target 75–82% consistent with vertical SaaS benchmarks (Meritech Public Comps 2024). All figures are strategic assumptions pending pilot data.</a:t>
+              <a:t>Gross margin target 84–88% consistent with vertical SaaS benchmarks (Meritech Public Comps 2024). All figures are strategic assumptions pending pilot data.</a:t>
             </a:r>
             <a:endParaRPr lang="en-US" sz="850" dirty="0"/>
           </a:p>
@@ -8863,7 +8863,7 @@
                 <a:ea typeface="Georgia" pitchFamily="34" charset="-122"/>
                 <a:cs typeface="Georgia" pitchFamily="34" charset="-120"/>
               </a:rPr>
-              <a:t>75–82%</a:t>
+              <a:t>84–88%</a:t>
             </a:r>
             <a:endParaRPr lang="en-US" sz="2600" dirty="0"/>
           </a:p>
@@ -9009,7 +9009,7 @@
                 <a:ea typeface="Georgia" pitchFamily="34" charset="-122"/>
                 <a:cs typeface="Georgia" pitchFamily="34" charset="-120"/>
               </a:rPr>
-              <a:t>10–14 mo</a:t>
+              <a:t>6–9 mo</a:t>
             </a:r>
             <a:endParaRPr lang="en-US" sz="2600" dirty="0"/>
           </a:p>
@@ -10025,7 +10025,7 @@
                 <a:ea typeface="Georgia" pitchFamily="34" charset="-122"/>
                 <a:cs typeface="Georgia" pitchFamily="34" charset="-120"/>
               </a:rPr>
-              <a:t>78–84%</a:t>
+              <a:t>84–88%</a:t>
             </a:r>
             <a:endParaRPr lang="en-US" sz="2600" dirty="0"/>
           </a:p>
@@ -10064,7 +10064,7 @@
                 <a:ea typeface="Calibri" pitchFamily="34" charset="-122"/>
                 <a:cs typeface="Calibri" pitchFamily="34" charset="-120"/>
               </a:rPr>
-              <a:t>62–68% in year one</a:t>
+              <a:t>76–81% in year one</a:t>
             </a:r>
             <a:endParaRPr lang="en-US" sz="1000" dirty="0"/>
           </a:p>
@@ -10317,7 +10317,7 @@
                 <a:ea typeface="Georgia" pitchFamily="34" charset="-122"/>
                 <a:cs typeface="Georgia" pitchFamily="34" charset="-120"/>
               </a:rPr>
-              <a:t>12–18 mo</a:t>
+              <a:t>6–9 mo</a:t>
             </a:r>
             <a:endParaRPr lang="en-US" sz="2600" dirty="0"/>
           </a:p>
@@ -10463,7 +10463,7 @@
                 <a:ea typeface="Georgia" pitchFamily="34" charset="-122"/>
                 <a:cs typeface="Georgia" pitchFamily="34" charset="-120"/>
               </a:rPr>
-              <a:t>≥ 3.5x</a:t>
+              <a:t>≥ 5x</a:t>
             </a:r>
             <a:endParaRPr lang="en-US" sz="2600" dirty="0"/>
           </a:p>
@@ -10502,7 +10502,7 @@
                 <a:ea typeface="Calibri" pitchFamily="34" charset="-122"/>
                 <a:cs typeface="Calibri" pitchFamily="34" charset="-120"/>
               </a:rPr>
-              <a:t>NRR 108–125% on expansion</a:t>
+              <a:t>NRR 115–135% on expansion</a:t>
             </a:r>
             <a:endParaRPr lang="en-US" sz="1000" dirty="0"/>
           </a:p>
@@ -13146,7 +13146,7 @@
                 <a:ea typeface="Calibri" pitchFamily="34" charset="-122"/>
                 <a:cs typeface="Calibri" pitchFamily="34" charset="-120"/>
               </a:rPr>
-              <a:t>$2M+ ARR · NRR &gt;110% · First enterprise reference customer · SOC 2 Type I complete</a:t>
+              <a:t>$2M+ ARR · NRR &gt;115% · First enterprise reference customer · SOC 2 Type I complete</a:t>
             </a:r>
             <a:endParaRPr lang="en-US" sz="1300" dirty="0"/>
           </a:p>
